--- a/samples/20260430-偏债混-M1.pptx
+++ b/samples/20260430-偏债混-M1.pptx
@@ -1,19 +1,19 @@
 
 <file path=ppt/presentation.xml><?xml version="1.0" encoding="utf-8"?>
-<p:presentation xmlns:a="http://schemas.openxmlformats.org/drawingml/2006/main" xmlns:r="http://schemas.openxmlformats.org/officeDocument/2006/relationships" xmlns:p="http://schemas.openxmlformats.org/presentationml/2006/main" saveSubsetFonts="1">
+<p:presentation xmlns:a="http://schemas.openxmlformats.org/drawingml/2006/main" xmlns:r="http://schemas.openxmlformats.org/officeDocument/2006/relationships" xmlns:p="http://schemas.openxmlformats.org/presentationml/2006/main" saveSubsetFonts="1" autoCompressPictures="0">
   <p:sldMasterIdLst>
     <p:sldMasterId id="2147483648" r:id="rId1"/>
   </p:sldMasterIdLst>
   <p:sldIdLst>
-    <p:sldId id="256" r:id="rId6"/>
+    <p:sldId id="256" r:id="rId7"/>
   </p:sldIdLst>
-  <p:sldSz cx="12192000" cy="6858000"/>
+  <p:sldSz cx="12191695" cy="6858000" type="screen4x3"/>
   <p:notesSz cx="6858000" cy="9144000"/>
   <p:defaultTextStyle>
     <a:defPPr>
       <a:defRPr lang="en-US"/>
     </a:defPPr>
-    <a:lvl1pPr marL="0" algn="l" defTabSz="914400" rtl="0" eaLnBrk="1" latinLnBrk="0" hangingPunct="1">
+    <a:lvl1pPr marL="0" algn="l" defTabSz="457200" rtl="0" eaLnBrk="1" latinLnBrk="0" hangingPunct="1">
       <a:defRPr sz="1800" kern="1200">
         <a:solidFill>
           <a:schemeClr val="tx1"/>
@@ -23,7 +23,7 @@
         <a:cs typeface="+mn-cs"/>
       </a:defRPr>
     </a:lvl1pPr>
-    <a:lvl2pPr marL="457200" algn="l" defTabSz="914400" rtl="0" eaLnBrk="1" latinLnBrk="0" hangingPunct="1">
+    <a:lvl2pPr marL="457200" algn="l" defTabSz="457200" rtl="0" eaLnBrk="1" latinLnBrk="0" hangingPunct="1">
       <a:defRPr sz="1800" kern="1200">
         <a:solidFill>
           <a:schemeClr val="tx1"/>
@@ -33,7 +33,7 @@
         <a:cs typeface="+mn-cs"/>
       </a:defRPr>
     </a:lvl2pPr>
-    <a:lvl3pPr marL="914400" algn="l" defTabSz="914400" rtl="0" eaLnBrk="1" latinLnBrk="0" hangingPunct="1">
+    <a:lvl3pPr marL="914400" algn="l" defTabSz="457200" rtl="0" eaLnBrk="1" latinLnBrk="0" hangingPunct="1">
       <a:defRPr sz="1800" kern="1200">
         <a:solidFill>
           <a:schemeClr val="tx1"/>
@@ -43,7 +43,7 @@
         <a:cs typeface="+mn-cs"/>
       </a:defRPr>
     </a:lvl3pPr>
-    <a:lvl4pPr marL="1371600" algn="l" defTabSz="914400" rtl="0" eaLnBrk="1" latinLnBrk="0" hangingPunct="1">
+    <a:lvl4pPr marL="1371600" algn="l" defTabSz="457200" rtl="0" eaLnBrk="1" latinLnBrk="0" hangingPunct="1">
       <a:defRPr sz="1800" kern="1200">
         <a:solidFill>
           <a:schemeClr val="tx1"/>
@@ -53,7 +53,7 @@
         <a:cs typeface="+mn-cs"/>
       </a:defRPr>
     </a:lvl4pPr>
-    <a:lvl5pPr marL="1828800" algn="l" defTabSz="914400" rtl="0" eaLnBrk="1" latinLnBrk="0" hangingPunct="1">
+    <a:lvl5pPr marL="1828800" algn="l" defTabSz="457200" rtl="0" eaLnBrk="1" latinLnBrk="0" hangingPunct="1">
       <a:defRPr sz="1800" kern="1200">
         <a:solidFill>
           <a:schemeClr val="tx1"/>
@@ -63,7 +63,7 @@
         <a:cs typeface="+mn-cs"/>
       </a:defRPr>
     </a:lvl5pPr>
-    <a:lvl6pPr marL="2286000" algn="l" defTabSz="914400" rtl="0" eaLnBrk="1" latinLnBrk="0" hangingPunct="1">
+    <a:lvl6pPr marL="2286000" algn="l" defTabSz="457200" rtl="0" eaLnBrk="1" latinLnBrk="0" hangingPunct="1">
       <a:defRPr sz="1800" kern="1200">
         <a:solidFill>
           <a:schemeClr val="tx1"/>
@@ -73,7 +73,7 @@
         <a:cs typeface="+mn-cs"/>
       </a:defRPr>
     </a:lvl6pPr>
-    <a:lvl7pPr marL="2743200" algn="l" defTabSz="914400" rtl="0" eaLnBrk="1" latinLnBrk="0" hangingPunct="1">
+    <a:lvl7pPr marL="2743200" algn="l" defTabSz="457200" rtl="0" eaLnBrk="1" latinLnBrk="0" hangingPunct="1">
       <a:defRPr sz="1800" kern="1200">
         <a:solidFill>
           <a:schemeClr val="tx1"/>
@@ -83,7 +83,7 @@
         <a:cs typeface="+mn-cs"/>
       </a:defRPr>
     </a:lvl7pPr>
-    <a:lvl8pPr marL="3200400" algn="l" defTabSz="914400" rtl="0" eaLnBrk="1" latinLnBrk="0" hangingPunct="1">
+    <a:lvl8pPr marL="3200400" algn="l" defTabSz="457200" rtl="0" eaLnBrk="1" latinLnBrk="0" hangingPunct="1">
       <a:defRPr sz="1800" kern="1200">
         <a:solidFill>
           <a:schemeClr val="tx1"/>
@@ -93,7 +93,7 @@
         <a:cs typeface="+mn-cs"/>
       </a:defRPr>
     </a:lvl8pPr>
-    <a:lvl9pPr marL="3657600" algn="l" defTabSz="914400" rtl="0" eaLnBrk="1" latinLnBrk="0" hangingPunct="1">
+    <a:lvl9pPr marL="3657600" algn="l" defTabSz="457200" rtl="0" eaLnBrk="1" latinLnBrk="0" hangingPunct="1">
       <a:defRPr sz="1800" kern="1200">
         <a:solidFill>
           <a:schemeClr val="tx1"/>
@@ -109,10 +109,9 @@
 
 <file path=ppt/charts/chart1.xml><?xml version="1.0" encoding="utf-8"?>
 <c:chartSpace xmlns:c="http://schemas.openxmlformats.org/drawingml/2006/chart" xmlns:a="http://schemas.openxmlformats.org/drawingml/2006/main" xmlns:r="http://schemas.openxmlformats.org/officeDocument/2006/relationships">
+  <c:date1904 val="0"/>
   <c:chart>
-    <c:title>
-      <c:overlay val="false"/>
-    </c:title>
+    <c:autoTitleDeleted val="0"/>
     <c:plotArea>
       <c:barChart>
         <c:barDir val="col"/>
@@ -121,401 +120,441 @@
           <c:idx val="0"/>
           <c:order val="0"/>
           <c:tx>
-            <c:v>2025Q2</c:v>
+            <c:strRef>
+              <c:f>Sheet1!$B$1</c:f>
+              <c:strCache>
+                <c:ptCount val="1"/>
+                <c:pt idx="0">
+                  <c:v>股票</c:v>
+                </c:pt>
+              </c:strCache>
+            </c:strRef>
           </c:tx>
           <c:cat>
-            <c:strLit>
-              <c:ptCount val="4"/>
-              <c:pt idx="0">
-                <c:v>股票</c:v>
-              </c:pt>
-              <c:pt idx="1">
-                <c:v>可转债</c:v>
-              </c:pt>
-              <c:pt idx="2">
-                <c:v>利率债</c:v>
-              </c:pt>
-              <c:pt idx="3">
-                <c:v>信用债</c:v>
-              </c:pt>
-            </c:strLit>
+            <c:strRef>
+              <c:f>Sheet1!$A$2:$A$5</c:f>
+              <c:strCache>
+                <c:ptCount val="4"/>
+                <c:pt idx="0">
+                  <c:v>2024Q2</c:v>
+                </c:pt>
+                <c:pt idx="1">
+                  <c:v>2024Q3</c:v>
+                </c:pt>
+                <c:pt idx="2">
+                  <c:v>2024Q4</c:v>
+                </c:pt>
+                <c:pt idx="3">
+                  <c:v>2025Q1</c:v>
+                </c:pt>
+              </c:strCache>
+            </c:strRef>
           </c:cat>
           <c:val>
-            <c:numLit>
-              <c:ptCount val="4"/>
-              <c:pt idx="0">
-                <c:v>29.0</c:v>
-              </c:pt>
-              <c:pt idx="1">
-                <c:v>7.0</c:v>
-              </c:pt>
-              <c:pt idx="2">
-                <c:v>23.0</c:v>
-              </c:pt>
-              <c:pt idx="3">
-                <c:v>24.0</c:v>
-              </c:pt>
-            </c:numLit>
+            <c:numRef>
+              <c:f>Sheet1!$B$2:$B$5</c:f>
+              <c:numCache>
+                <c:formatCode>General</c:formatCode>
+                <c:ptCount val="4"/>
+                <c:pt idx="0">
+                  <c:v>68.2</c:v>
+                </c:pt>
+                <c:pt idx="1">
+                  <c:v>71.5</c:v>
+                </c:pt>
+                <c:pt idx="2">
+                  <c:v>65.8</c:v>
+                </c:pt>
+                <c:pt idx="3">
+                  <c:v>72.4</c:v>
+                </c:pt>
+              </c:numCache>
+            </c:numRef>
           </c:val>
         </c:ser>
         <c:ser>
           <c:idx val="1"/>
           <c:order val="1"/>
           <c:tx>
-            <c:v>2025Q3</c:v>
+            <c:strRef>
+              <c:f>Sheet1!$C$1</c:f>
+              <c:strCache>
+                <c:ptCount val="1"/>
+                <c:pt idx="0">
+                  <c:v>债券</c:v>
+                </c:pt>
+              </c:strCache>
+            </c:strRef>
           </c:tx>
           <c:cat>
-            <c:strLit>
-              <c:ptCount val="4"/>
-              <c:pt idx="0">
-                <c:v>股票</c:v>
-              </c:pt>
-              <c:pt idx="1">
-                <c:v>可转债</c:v>
-              </c:pt>
-              <c:pt idx="2">
-                <c:v>利率债</c:v>
-              </c:pt>
-              <c:pt idx="3">
-                <c:v>信用债</c:v>
-              </c:pt>
-            </c:strLit>
+            <c:strRef>
+              <c:f>Sheet1!$A$2:$A$5</c:f>
+              <c:strCache>
+                <c:ptCount val="4"/>
+                <c:pt idx="0">
+                  <c:v>2024Q2</c:v>
+                </c:pt>
+                <c:pt idx="1">
+                  <c:v>2024Q3</c:v>
+                </c:pt>
+                <c:pt idx="2">
+                  <c:v>2024Q4</c:v>
+                </c:pt>
+                <c:pt idx="3">
+                  <c:v>2025Q1</c:v>
+                </c:pt>
+              </c:strCache>
+            </c:strRef>
           </c:cat>
           <c:val>
-            <c:numLit>
-              <c:ptCount val="4"/>
-              <c:pt idx="0">
-                <c:v>35.0</c:v>
-              </c:pt>
-              <c:pt idx="1">
-                <c:v>2.0</c:v>
-              </c:pt>
-              <c:pt idx="2">
-                <c:v>20.0</c:v>
-              </c:pt>
-              <c:pt idx="3">
-                <c:v>15.0</c:v>
-              </c:pt>
-            </c:numLit>
+            <c:numRef>
+              <c:f>Sheet1!$C$2:$C$5</c:f>
+              <c:numCache>
+                <c:formatCode>General</c:formatCode>
+                <c:ptCount val="4"/>
+                <c:pt idx="0">
+                  <c:v>22.5</c:v>
+                </c:pt>
+                <c:pt idx="1">
+                  <c:v>19.8</c:v>
+                </c:pt>
+                <c:pt idx="2">
+                  <c:v>24.1</c:v>
+                </c:pt>
+                <c:pt idx="3">
+                  <c:v>18.6</c:v>
+                </c:pt>
+              </c:numCache>
+            </c:numRef>
           </c:val>
         </c:ser>
         <c:ser>
           <c:idx val="2"/>
           <c:order val="2"/>
           <c:tx>
-            <c:v>2025Q4</c:v>
+            <c:strRef>
+              <c:f>Sheet1!$D$1</c:f>
+              <c:strCache>
+                <c:ptCount val="1"/>
+                <c:pt idx="0">
+                  <c:v>现金及其他</c:v>
+                </c:pt>
+              </c:strCache>
+            </c:strRef>
           </c:tx>
           <c:cat>
-            <c:strLit>
-              <c:ptCount val="4"/>
-              <c:pt idx="0">
-                <c:v>股票</c:v>
-              </c:pt>
-              <c:pt idx="1">
-                <c:v>可转债</c:v>
-              </c:pt>
-              <c:pt idx="2">
-                <c:v>利率债</c:v>
-              </c:pt>
-              <c:pt idx="3">
-                <c:v>信用债</c:v>
-              </c:pt>
-            </c:strLit>
+            <c:strRef>
+              <c:f>Sheet1!$A$2:$A$5</c:f>
+              <c:strCache>
+                <c:ptCount val="4"/>
+                <c:pt idx="0">
+                  <c:v>2024Q2</c:v>
+                </c:pt>
+                <c:pt idx="1">
+                  <c:v>2024Q3</c:v>
+                </c:pt>
+                <c:pt idx="2">
+                  <c:v>2024Q4</c:v>
+                </c:pt>
+                <c:pt idx="3">
+                  <c:v>2025Q1</c:v>
+                </c:pt>
+              </c:strCache>
+            </c:strRef>
           </c:cat>
           <c:val>
-            <c:numLit>
-              <c:ptCount val="4"/>
-              <c:pt idx="0">
-                <c:v>38.0</c:v>
-              </c:pt>
-              <c:pt idx="1">
-                <c:v>1.0</c:v>
-              </c:pt>
-              <c:pt idx="2">
-                <c:v>20.0</c:v>
-              </c:pt>
-              <c:pt idx="3">
-                <c:v>22.0</c:v>
-              </c:pt>
-            </c:numLit>
+            <c:numRef>
+              <c:f>Sheet1!$D$2:$D$5</c:f>
+              <c:numCache>
+                <c:formatCode>General</c:formatCode>
+                <c:ptCount val="4"/>
+                <c:pt idx="0">
+                  <c:v>9.3</c:v>
+                </c:pt>
+                <c:pt idx="1">
+                  <c:v>8.7</c:v>
+                </c:pt>
+                <c:pt idx="2">
+                  <c:v>10.1</c:v>
+                </c:pt>
+                <c:pt idx="3">
+                  <c:v>9.0</c:v>
+                </c:pt>
+              </c:numCache>
+            </c:numRef>
           </c:val>
         </c:ser>
-        <c:ser>
-          <c:idx val="3"/>
-          <c:order val="3"/>
-          <c:tx>
-            <c:v>2026Q1</c:v>
-          </c:tx>
-          <c:cat>
-            <c:strLit>
-              <c:ptCount val="4"/>
-              <c:pt idx="0">
-                <c:v>股票</c:v>
-              </c:pt>
-              <c:pt idx="1">
-                <c:v>可转债</c:v>
-              </c:pt>
-              <c:pt idx="2">
-                <c:v>利率债</c:v>
-              </c:pt>
-              <c:pt idx="3">
-                <c:v>信用债</c:v>
-              </c:pt>
-            </c:strLit>
-          </c:cat>
-          <c:val>
-            <c:numLit>
-              <c:ptCount val="4"/>
-              <c:pt idx="0">
-                <c:v>32.0</c:v>
-              </c:pt>
-              <c:pt idx="1">
-                <c:v>0.0</c:v>
-              </c:pt>
-              <c:pt idx="2">
-                <c:v>12.0</c:v>
-              </c:pt>
-              <c:pt idx="3">
-                <c:v>48.0</c:v>
-              </c:pt>
-            </c:numLit>
-          </c:val>
-        </c:ser>
-        <c:axId val="0"/>
-        <c:axId val="1"/>
+        <c:axId val="-2068027336"/>
+        <c:axId val="-2113994440"/>
       </c:barChart>
       <c:catAx>
-        <c:axId val="0"/>
+        <c:axId val="-2068027336"/>
         <c:scaling>
           <c:orientation val="minMax"/>
         </c:scaling>
-        <c:delete val="false"/>
+        <c:delete val="0"/>
         <c:axPos val="b"/>
-        <c:majorTickMark val="cross"/>
+        <c:majorTickMark val="out"/>
         <c:minorTickMark val="none"/>
         <c:tickLblPos val="nextTo"/>
-        <c:crossAx val="1"/>
+        <c:crossAx val="-2113994440"/>
         <c:crosses val="autoZero"/>
-        <c:auto val="false"/>
+        <c:auto val="1"/>
+        <c:lblAlgn val="ctr"/>
+        <c:lblOffset val="100"/>
+        <c:noMultiLvlLbl val="0"/>
       </c:catAx>
       <c:valAx>
-        <c:axId val="1"/>
-        <c:scaling>
-          <c:orientation val="minMax"/>
-        </c:scaling>
-        <c:delete val="false"/>
+        <c:axId val="-2113994440"/>
+        <c:scaling/>
+        <c:delete val="0"/>
         <c:axPos val="l"/>
-        <c:title>
-          <c:tx>
-            <c:rich>
-              <a:bodyPr anchor="t" rtlCol="false"/>
-              <a:lstStyle/>
-              <a:p>
-                <a:pPr algn="l">
-                  <a:defRPr/>
-                </a:pPr>
-                <a:r>
-                  <a:rPr lang="zh-CN"/>
-                  <a:t>%</a:t>
-                </a:r>
-                <a:endParaRPr lang="en-US" sz="1100"/>
-              </a:p>
-            </c:rich>
-          </c:tx>
-          <c:layout/>
-          <c:overlay val="false"/>
-        </c:title>
-        <c:majorTickMark val="cross"/>
+        <c:majorGridlines/>
+        <c:majorTickMark val="out"/>
         <c:minorTickMark val="none"/>
         <c:tickLblPos val="nextTo"/>
-        <c:crossAx val="0"/>
+        <c:crossAx val="-2068027336"/>
         <c:crosses val="autoZero"/>
-        <c:crossBetween val="midCat"/>
       </c:valAx>
     </c:plotArea>
     <c:legend>
-      <c:legendPos val="t"/>
-      <c:overlay val="false"/>
+      <c:legendPos val="b"/>
+      <c:overlay val="0"/>
     </c:legend>
+    <c:dispBlanksAs val="gap"/>
   </c:chart>
-  <c:externalData r:id="rId1"/>
+  <c:txPr>
+    <a:bodyPr/>
+    <a:lstStyle/>
+    <a:p>
+      <a:pPr>
+        <a:defRPr sz="1800"/>
+      </a:pPr>
+      <a:endParaRPr lang="en-US"/>
+    </a:p>
+  </c:txPr>
+  <c:externalData r:id="rId1">
+    <c:autoUpdate val="0"/>
+  </c:externalData>
 </c:chartSpace>
 </file>
 
 <file path=ppt/charts/chart2.xml><?xml version="1.0" encoding="utf-8"?>
 <c:chartSpace xmlns:c="http://schemas.openxmlformats.org/drawingml/2006/chart" xmlns:a="http://schemas.openxmlformats.org/drawingml/2006/main" xmlns:r="http://schemas.openxmlformats.org/officeDocument/2006/relationships">
+  <c:date1904 val="0"/>
   <c:chart>
-    <c:title>
-      <c:overlay val="false"/>
-    </c:title>
+    <c:autoTitleDeleted val="0"/>
     <c:plotArea>
       <c:lineChart>
+        <c:grouping val="standard"/>
+        <c:varyColors val="0"/>
         <c:ser>
           <c:idx val="0"/>
           <c:order val="0"/>
           <c:tx>
-            <c:v>中欧瑾添A</c:v>
+            <c:strRef>
+              <c:f>Sheet1!$B$1</c:f>
+              <c:strCache>
+                <c:ptCount val="1"/>
+                <c:pt idx="0">
+                  <c:v>本基金</c:v>
+                </c:pt>
+              </c:strCache>
+            </c:strRef>
           </c:tx>
           <c:cat>
-            <c:strLit>
-              <c:ptCount val="6"/>
-              <c:pt idx="0">
-                <c:v>2024-01</c:v>
-              </c:pt>
-              <c:pt idx="1">
-                <c:v>2024-07</c:v>
-              </c:pt>
-              <c:pt idx="2">
-                <c:v>2025-01</c:v>
-              </c:pt>
-              <c:pt idx="3">
-                <c:v>2025-07</c:v>
-              </c:pt>
-              <c:pt idx="4">
-                <c:v>2026-01</c:v>
-              </c:pt>
-              <c:pt idx="5">
-                <c:v>2026-04</c:v>
-              </c:pt>
-            </c:strLit>
+            <c:strRef>
+              <c:f>Sheet1!$A$2:$A$8</c:f>
+              <c:strCache>
+                <c:ptCount val="7"/>
+                <c:pt idx="0">
+                  <c:v>2024-05</c:v>
+                </c:pt>
+                <c:pt idx="1">
+                  <c:v>2024-07</c:v>
+                </c:pt>
+                <c:pt idx="2">
+                  <c:v>2024-09</c:v>
+                </c:pt>
+                <c:pt idx="3">
+                  <c:v>2024-11</c:v>
+                </c:pt>
+                <c:pt idx="4">
+                  <c:v>2025-01</c:v>
+                </c:pt>
+                <c:pt idx="5">
+                  <c:v>2025-03</c:v>
+                </c:pt>
+                <c:pt idx="6">
+                  <c:v>2025-05</c:v>
+                </c:pt>
+              </c:strCache>
+            </c:strRef>
           </c:cat>
           <c:val>
-            <c:numLit>
-              <c:ptCount val="6"/>
-              <c:pt idx="0">
-                <c:v>0.0</c:v>
-              </c:pt>
-              <c:pt idx="1">
-                <c:v>-2.0</c:v>
-              </c:pt>
-              <c:pt idx="2">
-                <c:v>2.0</c:v>
-              </c:pt>
-              <c:pt idx="3">
-                <c:v>8.0</c:v>
-              </c:pt>
-              <c:pt idx="4">
-                <c:v>10.0</c:v>
-              </c:pt>
-              <c:pt idx="5">
-                <c:v>12.5</c:v>
-              </c:pt>
-            </c:numLit>
+            <c:numRef>
+              <c:f>Sheet1!$B$2:$B$8</c:f>
+              <c:numCache>
+                <c:formatCode>General</c:formatCode>
+                <c:ptCount val="7"/>
+                <c:pt idx="0">
+                  <c:v>0.0</c:v>
+                </c:pt>
+                <c:pt idx="1">
+                  <c:v>3.2</c:v>
+                </c:pt>
+                <c:pt idx="2">
+                  <c:v>5.1</c:v>
+                </c:pt>
+                <c:pt idx="3">
+                  <c:v>7.8</c:v>
+                </c:pt>
+                <c:pt idx="4">
+                  <c:v>6.2</c:v>
+                </c:pt>
+                <c:pt idx="5">
+                  <c:v>9.5</c:v>
+                </c:pt>
+                <c:pt idx="6">
+                  <c:v>12.8</c:v>
+                </c:pt>
+              </c:numCache>
+            </c:numRef>
           </c:val>
-          <c:smooth val="false"/>
+          <c:smooth val="0"/>
         </c:ser>
         <c:ser>
           <c:idx val="1"/>
           <c:order val="1"/>
           <c:tx>
-            <c:v>万得混合债券型二级指数</c:v>
+            <c:strRef>
+              <c:f>Sheet1!$C$1</c:f>
+              <c:strCache>
+                <c:ptCount val="1"/>
+                <c:pt idx="0">
+                  <c:v>业绩基准</c:v>
+                </c:pt>
+              </c:strCache>
+            </c:strRef>
           </c:tx>
           <c:cat>
-            <c:strLit>
-              <c:ptCount val="6"/>
-              <c:pt idx="0">
-                <c:v>2024-01</c:v>
-              </c:pt>
-              <c:pt idx="1">
-                <c:v>2024-07</c:v>
-              </c:pt>
-              <c:pt idx="2">
-                <c:v>2025-01</c:v>
-              </c:pt>
-              <c:pt idx="3">
-                <c:v>2025-07</c:v>
-              </c:pt>
-              <c:pt idx="4">
-                <c:v>2026-01</c:v>
-              </c:pt>
-              <c:pt idx="5">
-                <c:v>2026-04</c:v>
-              </c:pt>
-            </c:strLit>
+            <c:strRef>
+              <c:f>Sheet1!$A$2:$A$8</c:f>
+              <c:strCache>
+                <c:ptCount val="7"/>
+                <c:pt idx="0">
+                  <c:v>2024-05</c:v>
+                </c:pt>
+                <c:pt idx="1">
+                  <c:v>2024-07</c:v>
+                </c:pt>
+                <c:pt idx="2">
+                  <c:v>2024-09</c:v>
+                </c:pt>
+                <c:pt idx="3">
+                  <c:v>2024-11</c:v>
+                </c:pt>
+                <c:pt idx="4">
+                  <c:v>2025-01</c:v>
+                </c:pt>
+                <c:pt idx="5">
+                  <c:v>2025-03</c:v>
+                </c:pt>
+                <c:pt idx="6">
+                  <c:v>2025-05</c:v>
+                </c:pt>
+              </c:strCache>
+            </c:strRef>
           </c:cat>
           <c:val>
-            <c:numLit>
-              <c:ptCount val="6"/>
-              <c:pt idx="0">
-                <c:v>2.0</c:v>
-              </c:pt>
-              <c:pt idx="1">
-                <c:v>4.0</c:v>
-              </c:pt>
-              <c:pt idx="2">
-                <c:v>6.0</c:v>
-              </c:pt>
-              <c:pt idx="3">
-                <c:v>10.0</c:v>
-              </c:pt>
-              <c:pt idx="4">
-                <c:v>14.0</c:v>
-              </c:pt>
-              <c:pt idx="5">
-                <c:v>16.0</c:v>
-              </c:pt>
-            </c:numLit>
+            <c:numRef>
+              <c:f>Sheet1!$C$2:$C$8</c:f>
+              <c:numCache>
+                <c:formatCode>General</c:formatCode>
+                <c:ptCount val="7"/>
+                <c:pt idx="0">
+                  <c:v>0.0</c:v>
+                </c:pt>
+                <c:pt idx="1">
+                  <c:v>2.1</c:v>
+                </c:pt>
+                <c:pt idx="2">
+                  <c:v>3.8</c:v>
+                </c:pt>
+                <c:pt idx="3">
+                  <c:v>5.5</c:v>
+                </c:pt>
+                <c:pt idx="4">
+                  <c:v>4.2</c:v>
+                </c:pt>
+                <c:pt idx="5">
+                  <c:v>6.1</c:v>
+                </c:pt>
+                <c:pt idx="6">
+                  <c:v>8.4</c:v>
+                </c:pt>
+              </c:numCache>
+            </c:numRef>
           </c:val>
-          <c:smooth val="false"/>
+          <c:smooth val="0"/>
         </c:ser>
-        <c:axId val="0"/>
-        <c:axId val="1"/>
+        <c:marker val="1"/>
+        <c:smooth val="0"/>
+        <c:axId val="2118791784"/>
+        <c:axId val="2140495176"/>
       </c:lineChart>
       <c:catAx>
-        <c:axId val="0"/>
+        <c:axId val="2118791784"/>
         <c:scaling>
           <c:orientation val="minMax"/>
         </c:scaling>
-        <c:delete val="false"/>
+        <c:delete val="0"/>
         <c:axPos val="b"/>
-        <c:majorTickMark val="cross"/>
+        <c:majorTickMark val="out"/>
         <c:minorTickMark val="none"/>
         <c:tickLblPos val="nextTo"/>
-        <c:crossAx val="1"/>
+        <c:crossAx val="2140495176"/>
         <c:crosses val="autoZero"/>
-        <c:auto val="false"/>
+        <c:auto val="1"/>
+        <c:lblAlgn val="ctr"/>
+        <c:lblOffset val="100"/>
+        <c:noMultiLvlLbl val="0"/>
       </c:catAx>
       <c:valAx>
-        <c:axId val="1"/>
-        <c:scaling>
-          <c:orientation val="minMax"/>
-        </c:scaling>
-        <c:delete val="false"/>
+        <c:axId val="2140495176"/>
+        <c:scaling/>
+        <c:delete val="0"/>
         <c:axPos val="l"/>
-        <c:title>
-          <c:tx>
-            <c:rich>
-              <a:bodyPr anchor="t" rtlCol="false"/>
-              <a:lstStyle/>
-              <a:p>
-                <a:pPr algn="l">
-                  <a:defRPr/>
-                </a:pPr>
-                <a:r>
-                  <a:rPr lang="zh-CN"/>
-                  <a:t>%</a:t>
-                </a:r>
-                <a:endParaRPr lang="en-US" sz="1100"/>
-              </a:p>
-            </c:rich>
-          </c:tx>
-          <c:layout/>
-          <c:overlay val="false"/>
-        </c:title>
-        <c:majorTickMark val="cross"/>
+        <c:majorGridlines/>
+        <c:majorTickMark val="out"/>
         <c:minorTickMark val="none"/>
         <c:tickLblPos val="nextTo"/>
-        <c:crossAx val="0"/>
+        <c:crossAx val="2118791784"/>
         <c:crosses val="autoZero"/>
-        <c:crossBetween val="between"/>
       </c:valAx>
     </c:plotArea>
     <c:legend>
       <c:legendPos val="b"/>
-      <c:overlay val="false"/>
+      <c:layout/>
+      <c:overlay val="0"/>
     </c:legend>
+    <c:plotVisOnly val="1"/>
+    <c:dispBlanksAs val="gap"/>
+    <c:showDLblsOverMax val="0"/>
   </c:chart>
-  <c:externalData r:id="rId1"/>
+  <c:txPr>
+    <a:bodyPr/>
+    <a:lstStyle/>
+    <a:p>
+      <a:pPr>
+        <a:defRPr sz="1800"/>
+      </a:pPr>
+      <a:endParaRPr lang="en-US"/>
+    </a:p>
+  </c:txPr>
+  <c:externalData r:id="rId1">
+    <c:autoUpdate val="0"/>
+  </c:externalData>
 </c:chartSpace>
 </file>
 
@@ -698,10 +737,9 @@
           <a:bodyPr/>
           <a:lstStyle/>
           <a:p>
-            <a:fld id="{1D8BD707-D9CF-40AE-B4C6-C98DA3205C09}" type="datetimeFigureOut">
-              <a:rPr lang="en-US" smtClean="0"/>
-              <a:pPr/>
-              <a:t>8/1/2011</a:t>
+            <a:fld id="{5BCAD085-E8A6-8845-BD4E-CB4CCA059FC4}" type="datetimeFigureOut">
+              <a:rPr lang="en-US" smtClean="0"/>
+              <a:t>1/27/13</a:t>
             </a:fld>
             <a:endParaRPr lang="en-US"/>
           </a:p>
@@ -741,9 +779,8 @@
           <a:bodyPr/>
           <a:lstStyle/>
           <a:p>
-            <a:fld id="{B6F15528-21DE-4FAA-801E-634DDDAF4B2B}" type="slidenum">
-              <a:rPr lang="en-US" smtClean="0"/>
-              <a:pPr/>
+            <a:fld id="{C1FF6DA9-008F-8B48-92A6-B652298478BF}" type="slidenum">
+              <a:rPr lang="en-US" smtClean="0"/>
               <a:t>‹#›</a:t>
             </a:fld>
             <a:endParaRPr lang="en-US"/>
@@ -751,6 +788,11 @@
         </p:txBody>
       </p:sp>
     </p:spTree>
+    <p:extLst>
+      <p:ext uri="{BB962C8B-B14F-4D97-AF65-F5344CB8AC3E}">
+        <p14:creationId xmlns:p14="http://schemas.microsoft.com/office/powerpoint/2010/main" val="3168075583"/>
+      </p:ext>
+    </p:extLst>
   </p:cSld>
   <p:clrMapOvr>
     <a:masterClrMapping/>
@@ -865,10 +907,9 @@
           <a:bodyPr/>
           <a:lstStyle/>
           <a:p>
-            <a:fld id="{1D8BD707-D9CF-40AE-B4C6-C98DA3205C09}" type="datetimeFigureOut">
-              <a:rPr lang="en-US" smtClean="0"/>
-              <a:pPr/>
-              <a:t>8/1/2011</a:t>
+            <a:fld id="{5BCAD085-E8A6-8845-BD4E-CB4CCA059FC4}" type="datetimeFigureOut">
+              <a:rPr lang="en-US" smtClean="0"/>
+              <a:t>1/27/13</a:t>
             </a:fld>
             <a:endParaRPr lang="en-US"/>
           </a:p>
@@ -908,9 +949,8 @@
           <a:bodyPr/>
           <a:lstStyle/>
           <a:p>
-            <a:fld id="{B6F15528-21DE-4FAA-801E-634DDDAF4B2B}" type="slidenum">
-              <a:rPr lang="en-US" smtClean="0"/>
-              <a:pPr/>
+            <a:fld id="{C1FF6DA9-008F-8B48-92A6-B652298478BF}" type="slidenum">
+              <a:rPr lang="en-US" smtClean="0"/>
               <a:t>‹#›</a:t>
             </a:fld>
             <a:endParaRPr lang="en-US"/>
@@ -918,6 +958,11 @@
         </p:txBody>
       </p:sp>
     </p:spTree>
+    <p:extLst>
+      <p:ext uri="{BB962C8B-B14F-4D97-AF65-F5344CB8AC3E}">
+        <p14:creationId xmlns:p14="http://schemas.microsoft.com/office/powerpoint/2010/main" val="2910927964"/>
+      </p:ext>
+    </p:extLst>
   </p:cSld>
   <p:clrMapOvr>
     <a:masterClrMapping/>
@@ -1042,10 +1087,9 @@
           <a:bodyPr/>
           <a:lstStyle/>
           <a:p>
-            <a:fld id="{1D8BD707-D9CF-40AE-B4C6-C98DA3205C09}" type="datetimeFigureOut">
-              <a:rPr lang="en-US" smtClean="0"/>
-              <a:pPr/>
-              <a:t>8/1/2011</a:t>
+            <a:fld id="{5BCAD085-E8A6-8845-BD4E-CB4CCA059FC4}" type="datetimeFigureOut">
+              <a:rPr lang="en-US" smtClean="0"/>
+              <a:t>1/27/13</a:t>
             </a:fld>
             <a:endParaRPr lang="en-US"/>
           </a:p>
@@ -1085,9 +1129,8 @@
           <a:bodyPr/>
           <a:lstStyle/>
           <a:p>
-            <a:fld id="{B6F15528-21DE-4FAA-801E-634DDDAF4B2B}" type="slidenum">
-              <a:rPr lang="en-US" smtClean="0"/>
-              <a:pPr/>
+            <a:fld id="{C1FF6DA9-008F-8B48-92A6-B652298478BF}" type="slidenum">
+              <a:rPr lang="en-US" smtClean="0"/>
               <a:t>‹#›</a:t>
             </a:fld>
             <a:endParaRPr lang="en-US"/>
@@ -1095,6 +1138,11 @@
         </p:txBody>
       </p:sp>
     </p:spTree>
+    <p:extLst>
+      <p:ext uri="{BB962C8B-B14F-4D97-AF65-F5344CB8AC3E}">
+        <p14:creationId xmlns:p14="http://schemas.microsoft.com/office/powerpoint/2010/main" val="3612223792"/>
+      </p:ext>
+    </p:extLst>
   </p:cSld>
   <p:clrMapOvr>
     <a:masterClrMapping/>
@@ -1209,10 +1257,9 @@
           <a:bodyPr/>
           <a:lstStyle/>
           <a:p>
-            <a:fld id="{1D8BD707-D9CF-40AE-B4C6-C98DA3205C09}" type="datetimeFigureOut">
-              <a:rPr lang="en-US" smtClean="0"/>
-              <a:pPr/>
-              <a:t>8/1/2011</a:t>
+            <a:fld id="{5BCAD085-E8A6-8845-BD4E-CB4CCA059FC4}" type="datetimeFigureOut">
+              <a:rPr lang="en-US" smtClean="0"/>
+              <a:t>1/27/13</a:t>
             </a:fld>
             <a:endParaRPr lang="en-US"/>
           </a:p>
@@ -1252,9 +1299,8 @@
           <a:bodyPr/>
           <a:lstStyle/>
           <a:p>
-            <a:fld id="{B6F15528-21DE-4FAA-801E-634DDDAF4B2B}" type="slidenum">
-              <a:rPr lang="en-US" smtClean="0"/>
-              <a:pPr/>
+            <a:fld id="{C1FF6DA9-008F-8B48-92A6-B652298478BF}" type="slidenum">
+              <a:rPr lang="en-US" smtClean="0"/>
               <a:t>‹#›</a:t>
             </a:fld>
             <a:endParaRPr lang="en-US"/>
@@ -1262,6 +1308,11 @@
         </p:txBody>
       </p:sp>
     </p:spTree>
+    <p:extLst>
+      <p:ext uri="{BB962C8B-B14F-4D97-AF65-F5344CB8AC3E}">
+        <p14:creationId xmlns:p14="http://schemas.microsoft.com/office/powerpoint/2010/main" val="2614314258"/>
+      </p:ext>
+    </p:extLst>
   </p:cSld>
   <p:clrMapOvr>
     <a:masterClrMapping/>
@@ -1452,10 +1503,9 @@
           <a:bodyPr/>
           <a:lstStyle/>
           <a:p>
-            <a:fld id="{1D8BD707-D9CF-40AE-B4C6-C98DA3205C09}" type="datetimeFigureOut">
-              <a:rPr lang="en-US" smtClean="0"/>
-              <a:pPr/>
-              <a:t>8/1/2011</a:t>
+            <a:fld id="{5BCAD085-E8A6-8845-BD4E-CB4CCA059FC4}" type="datetimeFigureOut">
+              <a:rPr lang="en-US" smtClean="0"/>
+              <a:t>1/27/13</a:t>
             </a:fld>
             <a:endParaRPr lang="en-US"/>
           </a:p>
@@ -1495,9 +1545,8 @@
           <a:bodyPr/>
           <a:lstStyle/>
           <a:p>
-            <a:fld id="{B6F15528-21DE-4FAA-801E-634DDDAF4B2B}" type="slidenum">
-              <a:rPr lang="en-US" smtClean="0"/>
-              <a:pPr/>
+            <a:fld id="{C1FF6DA9-008F-8B48-92A6-B652298478BF}" type="slidenum">
+              <a:rPr lang="en-US" smtClean="0"/>
               <a:t>‹#›</a:t>
             </a:fld>
             <a:endParaRPr lang="en-US"/>
@@ -1505,6 +1554,11 @@
         </p:txBody>
       </p:sp>
     </p:spTree>
+    <p:extLst>
+      <p:ext uri="{BB962C8B-B14F-4D97-AF65-F5344CB8AC3E}">
+        <p14:creationId xmlns:p14="http://schemas.microsoft.com/office/powerpoint/2010/main" val="960648375"/>
+      </p:ext>
+    </p:extLst>
   </p:cSld>
   <p:clrMapOvr>
     <a:masterClrMapping/>
@@ -1737,10 +1791,9 @@
           <a:bodyPr/>
           <a:lstStyle/>
           <a:p>
-            <a:fld id="{1D8BD707-D9CF-40AE-B4C6-C98DA3205C09}" type="datetimeFigureOut">
-              <a:rPr lang="en-US" smtClean="0"/>
-              <a:pPr/>
-              <a:t>8/1/2011</a:t>
+            <a:fld id="{5BCAD085-E8A6-8845-BD4E-CB4CCA059FC4}" type="datetimeFigureOut">
+              <a:rPr lang="en-US" smtClean="0"/>
+              <a:t>1/27/13</a:t>
             </a:fld>
             <a:endParaRPr lang="en-US"/>
           </a:p>
@@ -1780,9 +1833,8 @@
           <a:bodyPr/>
           <a:lstStyle/>
           <a:p>
-            <a:fld id="{B6F15528-21DE-4FAA-801E-634DDDAF4B2B}" type="slidenum">
-              <a:rPr lang="en-US" smtClean="0"/>
-              <a:pPr/>
+            <a:fld id="{C1FF6DA9-008F-8B48-92A6-B652298478BF}" type="slidenum">
+              <a:rPr lang="en-US" smtClean="0"/>
               <a:t>‹#›</a:t>
             </a:fld>
             <a:endParaRPr lang="en-US"/>
@@ -1790,6 +1842,11 @@
         </p:txBody>
       </p:sp>
     </p:spTree>
+    <p:extLst>
+      <p:ext uri="{BB962C8B-B14F-4D97-AF65-F5344CB8AC3E}">
+        <p14:creationId xmlns:p14="http://schemas.microsoft.com/office/powerpoint/2010/main" val="2782244947"/>
+      </p:ext>
+    </p:extLst>
   </p:cSld>
   <p:clrMapOvr>
     <a:masterClrMapping/>
@@ -2156,10 +2213,9 @@
           <a:bodyPr/>
           <a:lstStyle/>
           <a:p>
-            <a:fld id="{1D8BD707-D9CF-40AE-B4C6-C98DA3205C09}" type="datetimeFigureOut">
-              <a:rPr lang="en-US" smtClean="0"/>
-              <a:pPr/>
-              <a:t>8/1/2011</a:t>
+            <a:fld id="{5BCAD085-E8A6-8845-BD4E-CB4CCA059FC4}" type="datetimeFigureOut">
+              <a:rPr lang="en-US" smtClean="0"/>
+              <a:t>1/27/13</a:t>
             </a:fld>
             <a:endParaRPr lang="en-US"/>
           </a:p>
@@ -2199,9 +2255,8 @@
           <a:bodyPr/>
           <a:lstStyle/>
           <a:p>
-            <a:fld id="{B6F15528-21DE-4FAA-801E-634DDDAF4B2B}" type="slidenum">
-              <a:rPr lang="en-US" smtClean="0"/>
-              <a:pPr/>
+            <a:fld id="{C1FF6DA9-008F-8B48-92A6-B652298478BF}" type="slidenum">
+              <a:rPr lang="en-US" smtClean="0"/>
               <a:t>‹#›</a:t>
             </a:fld>
             <a:endParaRPr lang="en-US"/>
@@ -2209,6 +2264,11 @@
         </p:txBody>
       </p:sp>
     </p:spTree>
+    <p:extLst>
+      <p:ext uri="{BB962C8B-B14F-4D97-AF65-F5344CB8AC3E}">
+        <p14:creationId xmlns:p14="http://schemas.microsoft.com/office/powerpoint/2010/main" val="990158736"/>
+      </p:ext>
+    </p:extLst>
   </p:cSld>
   <p:clrMapOvr>
     <a:masterClrMapping/>
@@ -2271,10 +2331,9 @@
           <a:bodyPr/>
           <a:lstStyle/>
           <a:p>
-            <a:fld id="{1D8BD707-D9CF-40AE-B4C6-C98DA3205C09}" type="datetimeFigureOut">
-              <a:rPr lang="en-US" smtClean="0"/>
-              <a:pPr/>
-              <a:t>8/1/2011</a:t>
+            <a:fld id="{5BCAD085-E8A6-8845-BD4E-CB4CCA059FC4}" type="datetimeFigureOut">
+              <a:rPr lang="en-US" smtClean="0"/>
+              <a:t>1/27/13</a:t>
             </a:fld>
             <a:endParaRPr lang="en-US"/>
           </a:p>
@@ -2314,9 +2373,8 @@
           <a:bodyPr/>
           <a:lstStyle/>
           <a:p>
-            <a:fld id="{B6F15528-21DE-4FAA-801E-634DDDAF4B2B}" type="slidenum">
-              <a:rPr lang="en-US" smtClean="0"/>
-              <a:pPr/>
+            <a:fld id="{C1FF6DA9-008F-8B48-92A6-B652298478BF}" type="slidenum">
+              <a:rPr lang="en-US" smtClean="0"/>
               <a:t>‹#›</a:t>
             </a:fld>
             <a:endParaRPr lang="en-US"/>
@@ -2324,6 +2382,11 @@
         </p:txBody>
       </p:sp>
     </p:spTree>
+    <p:extLst>
+      <p:ext uri="{BB962C8B-B14F-4D97-AF65-F5344CB8AC3E}">
+        <p14:creationId xmlns:p14="http://schemas.microsoft.com/office/powerpoint/2010/main" val="727027711"/>
+      </p:ext>
+    </p:extLst>
   </p:cSld>
   <p:clrMapOvr>
     <a:masterClrMapping/>
@@ -2363,10 +2426,9 @@
           <a:bodyPr/>
           <a:lstStyle/>
           <a:p>
-            <a:fld id="{1D8BD707-D9CF-40AE-B4C6-C98DA3205C09}" type="datetimeFigureOut">
-              <a:rPr lang="en-US" smtClean="0"/>
-              <a:pPr/>
-              <a:t>8/1/2011</a:t>
+            <a:fld id="{5BCAD085-E8A6-8845-BD4E-CB4CCA059FC4}" type="datetimeFigureOut">
+              <a:rPr lang="en-US" smtClean="0"/>
+              <a:t>1/27/13</a:t>
             </a:fld>
             <a:endParaRPr lang="en-US"/>
           </a:p>
@@ -2406,9 +2468,8 @@
           <a:bodyPr/>
           <a:lstStyle/>
           <a:p>
-            <a:fld id="{B6F15528-21DE-4FAA-801E-634DDDAF4B2B}" type="slidenum">
-              <a:rPr lang="en-US" smtClean="0"/>
-              <a:pPr/>
+            <a:fld id="{C1FF6DA9-008F-8B48-92A6-B652298478BF}" type="slidenum">
+              <a:rPr lang="en-US" smtClean="0"/>
               <a:t>‹#›</a:t>
             </a:fld>
             <a:endParaRPr lang="en-US"/>
@@ -2416,6 +2477,11 @@
         </p:txBody>
       </p:sp>
     </p:spTree>
+    <p:extLst>
+      <p:ext uri="{BB962C8B-B14F-4D97-AF65-F5344CB8AC3E}">
+        <p14:creationId xmlns:p14="http://schemas.microsoft.com/office/powerpoint/2010/main" val="1212999818"/>
+      </p:ext>
+    </p:extLst>
   </p:cSld>
   <p:clrMapOvr>
     <a:masterClrMapping/>
@@ -2637,10 +2703,9 @@
           <a:bodyPr/>
           <a:lstStyle/>
           <a:p>
-            <a:fld id="{1D8BD707-D9CF-40AE-B4C6-C98DA3205C09}" type="datetimeFigureOut">
-              <a:rPr lang="en-US" smtClean="0"/>
-              <a:pPr/>
-              <a:t>8/1/2011</a:t>
+            <a:fld id="{5BCAD085-E8A6-8845-BD4E-CB4CCA059FC4}" type="datetimeFigureOut">
+              <a:rPr lang="en-US" smtClean="0"/>
+              <a:t>1/27/13</a:t>
             </a:fld>
             <a:endParaRPr lang="en-US"/>
           </a:p>
@@ -2680,9 +2745,8 @@
           <a:bodyPr/>
           <a:lstStyle/>
           <a:p>
-            <a:fld id="{B6F15528-21DE-4FAA-801E-634DDDAF4B2B}" type="slidenum">
-              <a:rPr lang="en-US" smtClean="0"/>
-              <a:pPr/>
+            <a:fld id="{C1FF6DA9-008F-8B48-92A6-B652298478BF}" type="slidenum">
+              <a:rPr lang="en-US" smtClean="0"/>
               <a:t>‹#›</a:t>
             </a:fld>
             <a:endParaRPr lang="en-US"/>
@@ -2690,6 +2754,11 @@
         </p:txBody>
       </p:sp>
     </p:spTree>
+    <p:extLst>
+      <p:ext uri="{BB962C8B-B14F-4D97-AF65-F5344CB8AC3E}">
+        <p14:creationId xmlns:p14="http://schemas.microsoft.com/office/powerpoint/2010/main" val="1840726560"/>
+      </p:ext>
+    </p:extLst>
   </p:cSld>
   <p:clrMapOvr>
     <a:masterClrMapping/>
@@ -2887,10 +2956,9 @@
           <a:bodyPr/>
           <a:lstStyle/>
           <a:p>
-            <a:fld id="{1D8BD707-D9CF-40AE-B4C6-C98DA3205C09}" type="datetimeFigureOut">
-              <a:rPr lang="en-US" smtClean="0"/>
-              <a:pPr/>
-              <a:t>8/1/2011</a:t>
+            <a:fld id="{5BCAD085-E8A6-8845-BD4E-CB4CCA059FC4}" type="datetimeFigureOut">
+              <a:rPr lang="en-US" smtClean="0"/>
+              <a:t>1/27/13</a:t>
             </a:fld>
             <a:endParaRPr lang="en-US"/>
           </a:p>
@@ -2930,9 +2998,8 @@
           <a:bodyPr/>
           <a:lstStyle/>
           <a:p>
-            <a:fld id="{B6F15528-21DE-4FAA-801E-634DDDAF4B2B}" type="slidenum">
-              <a:rPr lang="en-US" smtClean="0"/>
-              <a:pPr/>
+            <a:fld id="{C1FF6DA9-008F-8B48-92A6-B652298478BF}" type="slidenum">
+              <a:rPr lang="en-US" smtClean="0"/>
               <a:t>‹#›</a:t>
             </a:fld>
             <a:endParaRPr lang="en-US"/>
@@ -2940,6 +3007,11 @@
         </p:txBody>
       </p:sp>
     </p:spTree>
+    <p:extLst>
+      <p:ext uri="{BB962C8B-B14F-4D97-AF65-F5344CB8AC3E}">
+        <p14:creationId xmlns:p14="http://schemas.microsoft.com/office/powerpoint/2010/main" val="3889236939"/>
+      </p:ext>
+    </p:extLst>
   </p:cSld>
   <p:clrMapOvr>
     <a:masterClrMapping/>
@@ -3097,10 +3169,9 @@
             </a:lvl1pPr>
           </a:lstStyle>
           <a:p>
-            <a:fld id="{1D8BD707-D9CF-40AE-B4C6-C98DA3205C09}" type="datetimeFigureOut">
-              <a:rPr lang="en-US" smtClean="0"/>
-              <a:pPr/>
-              <a:t>8/1/2011</a:t>
+            <a:fld id="{5BCAD085-E8A6-8845-BD4E-CB4CCA059FC4}" type="datetimeFigureOut">
+              <a:rPr lang="en-US" smtClean="0"/>
+              <a:t>1/27/13</a:t>
             </a:fld>
             <a:endParaRPr lang="en-US"/>
           </a:p>
@@ -3176,9 +3247,8 @@
             </a:lvl1pPr>
           </a:lstStyle>
           <a:p>
-            <a:fld id="{B6F15528-21DE-4FAA-801E-634DDDAF4B2B}" type="slidenum">
-              <a:rPr lang="en-US" smtClean="0"/>
-              <a:pPr/>
+            <a:fld id="{C1FF6DA9-008F-8B48-92A6-B652298478BF}" type="slidenum">
+              <a:rPr lang="en-US" smtClean="0"/>
               <a:t>‹#›</a:t>
             </a:fld>
             <a:endParaRPr lang="en-US"/>
@@ -3186,6 +3256,11 @@
         </p:txBody>
       </p:sp>
     </p:spTree>
+    <p:extLst>
+      <p:ext uri="{BB962C8B-B14F-4D97-AF65-F5344CB8AC3E}">
+        <p14:creationId xmlns:p14="http://schemas.microsoft.com/office/powerpoint/2010/main" val="2209977519"/>
+      </p:ext>
+    </p:extLst>
   </p:cSld>
   <p:clrMap bg1="lt1" tx1="dk1" bg2="lt2" tx2="dk2" accent1="accent1" accent2="accent2" accent3="accent3" accent4="accent4" accent5="accent5" accent6="accent6" hlink="hlink" folHlink="folHlink"/>
   <p:sldLayoutIdLst>
@@ -3203,7 +3278,7 @@
   </p:sldLayoutIdLst>
   <p:txStyles>
     <p:titleStyle>
-      <a:lvl1pPr algn="ctr" defTabSz="914400" rtl="0" eaLnBrk="1" latinLnBrk="0" hangingPunct="1">
+      <a:lvl1pPr algn="ctr" defTabSz="457200" rtl="0" eaLnBrk="1" latinLnBrk="0" hangingPunct="1">
         <a:spcBef>
           <a:spcPct val="0"/>
         </a:spcBef>
@@ -3219,11 +3294,11 @@
       </a:lvl1pPr>
     </p:titleStyle>
     <p:bodyStyle>
-      <a:lvl1pPr marL="342900" indent="-342900" algn="l" defTabSz="914400" rtl="0" eaLnBrk="1" latinLnBrk="0" hangingPunct="1">
+      <a:lvl1pPr marL="342900" indent="-342900" algn="l" defTabSz="457200" rtl="0" eaLnBrk="1" latinLnBrk="0" hangingPunct="1">
         <a:spcBef>
           <a:spcPct val="20000"/>
         </a:spcBef>
-        <a:buFont typeface="Arial" pitchFamily="34" charset="0"/>
+        <a:buFont typeface="Arial"/>
         <a:buChar char="•"/>
         <a:defRPr sz="3200" kern="1200">
           <a:solidFill>
@@ -3234,11 +3309,11 @@
           <a:cs typeface="+mn-cs"/>
         </a:defRPr>
       </a:lvl1pPr>
-      <a:lvl2pPr marL="742950" indent="-285750" algn="l" defTabSz="914400" rtl="0" eaLnBrk="1" latinLnBrk="0" hangingPunct="1">
+      <a:lvl2pPr marL="742950" indent="-285750" algn="l" defTabSz="457200" rtl="0" eaLnBrk="1" latinLnBrk="0" hangingPunct="1">
         <a:spcBef>
           <a:spcPct val="20000"/>
         </a:spcBef>
-        <a:buFont typeface="Arial" pitchFamily="34" charset="0"/>
+        <a:buFont typeface="Arial"/>
         <a:buChar char="–"/>
         <a:defRPr sz="2800" kern="1200">
           <a:solidFill>
@@ -3249,11 +3324,11 @@
           <a:cs typeface="+mn-cs"/>
         </a:defRPr>
       </a:lvl2pPr>
-      <a:lvl3pPr marL="1143000" indent="-228600" algn="l" defTabSz="914400" rtl="0" eaLnBrk="1" latinLnBrk="0" hangingPunct="1">
+      <a:lvl3pPr marL="1143000" indent="-228600" algn="l" defTabSz="457200" rtl="0" eaLnBrk="1" latinLnBrk="0" hangingPunct="1">
         <a:spcBef>
           <a:spcPct val="20000"/>
         </a:spcBef>
-        <a:buFont typeface="Arial" pitchFamily="34" charset="0"/>
+        <a:buFont typeface="Arial"/>
         <a:buChar char="•"/>
         <a:defRPr sz="2400" kern="1200">
           <a:solidFill>
@@ -3264,11 +3339,11 @@
           <a:cs typeface="+mn-cs"/>
         </a:defRPr>
       </a:lvl3pPr>
-      <a:lvl4pPr marL="1600200" indent="-228600" algn="l" defTabSz="914400" rtl="0" eaLnBrk="1" latinLnBrk="0" hangingPunct="1">
+      <a:lvl4pPr marL="1600200" indent="-228600" algn="l" defTabSz="457200" rtl="0" eaLnBrk="1" latinLnBrk="0" hangingPunct="1">
         <a:spcBef>
           <a:spcPct val="20000"/>
         </a:spcBef>
-        <a:buFont typeface="Arial" pitchFamily="34" charset="0"/>
+        <a:buFont typeface="Arial"/>
         <a:buChar char="–"/>
         <a:defRPr sz="2000" kern="1200">
           <a:solidFill>
@@ -3279,11 +3354,11 @@
           <a:cs typeface="+mn-cs"/>
         </a:defRPr>
       </a:lvl4pPr>
-      <a:lvl5pPr marL="2057400" indent="-228600" algn="l" defTabSz="914400" rtl="0" eaLnBrk="1" latinLnBrk="0" hangingPunct="1">
+      <a:lvl5pPr marL="2057400" indent="-228600" algn="l" defTabSz="457200" rtl="0" eaLnBrk="1" latinLnBrk="0" hangingPunct="1">
         <a:spcBef>
           <a:spcPct val="20000"/>
         </a:spcBef>
-        <a:buFont typeface="Arial" pitchFamily="34" charset="0"/>
+        <a:buFont typeface="Arial"/>
         <a:buChar char="»"/>
         <a:defRPr sz="2000" kern="1200">
           <a:solidFill>
@@ -3294,11 +3369,11 @@
           <a:cs typeface="+mn-cs"/>
         </a:defRPr>
       </a:lvl5pPr>
-      <a:lvl6pPr marL="2514600" indent="-228600" algn="l" defTabSz="914400" rtl="0" eaLnBrk="1" latinLnBrk="0" hangingPunct="1">
+      <a:lvl6pPr marL="2514600" indent="-228600" algn="l" defTabSz="457200" rtl="0" eaLnBrk="1" latinLnBrk="0" hangingPunct="1">
         <a:spcBef>
           <a:spcPct val="20000"/>
         </a:spcBef>
-        <a:buFont typeface="Arial" pitchFamily="34" charset="0"/>
+        <a:buFont typeface="Arial"/>
         <a:buChar char="•"/>
         <a:defRPr sz="2000" kern="1200">
           <a:solidFill>
@@ -3309,11 +3384,11 @@
           <a:cs typeface="+mn-cs"/>
         </a:defRPr>
       </a:lvl6pPr>
-      <a:lvl7pPr marL="2971800" indent="-228600" algn="l" defTabSz="914400" rtl="0" eaLnBrk="1" latinLnBrk="0" hangingPunct="1">
+      <a:lvl7pPr marL="2971800" indent="-228600" algn="l" defTabSz="457200" rtl="0" eaLnBrk="1" latinLnBrk="0" hangingPunct="1">
         <a:spcBef>
           <a:spcPct val="20000"/>
         </a:spcBef>
-        <a:buFont typeface="Arial" pitchFamily="34" charset="0"/>
+        <a:buFont typeface="Arial"/>
         <a:buChar char="•"/>
         <a:defRPr sz="2000" kern="1200">
           <a:solidFill>
@@ -3324,11 +3399,11 @@
           <a:cs typeface="+mn-cs"/>
         </a:defRPr>
       </a:lvl7pPr>
-      <a:lvl8pPr marL="3429000" indent="-228600" algn="l" defTabSz="914400" rtl="0" eaLnBrk="1" latinLnBrk="0" hangingPunct="1">
+      <a:lvl8pPr marL="3429000" indent="-228600" algn="l" defTabSz="457200" rtl="0" eaLnBrk="1" latinLnBrk="0" hangingPunct="1">
         <a:spcBef>
           <a:spcPct val="20000"/>
         </a:spcBef>
-        <a:buFont typeface="Arial" pitchFamily="34" charset="0"/>
+        <a:buFont typeface="Arial"/>
         <a:buChar char="•"/>
         <a:defRPr sz="2000" kern="1200">
           <a:solidFill>
@@ -3339,11 +3414,11 @@
           <a:cs typeface="+mn-cs"/>
         </a:defRPr>
       </a:lvl8pPr>
-      <a:lvl9pPr marL="3886200" indent="-228600" algn="l" defTabSz="914400" rtl="0" eaLnBrk="1" latinLnBrk="0" hangingPunct="1">
+      <a:lvl9pPr marL="3886200" indent="-228600" algn="l" defTabSz="457200" rtl="0" eaLnBrk="1" latinLnBrk="0" hangingPunct="1">
         <a:spcBef>
           <a:spcPct val="20000"/>
         </a:spcBef>
-        <a:buFont typeface="Arial" pitchFamily="34" charset="0"/>
+        <a:buFont typeface="Arial"/>
         <a:buChar char="•"/>
         <a:defRPr sz="2000" kern="1200">
           <a:solidFill>
@@ -3359,7 +3434,7 @@
       <a:defPPr>
         <a:defRPr lang="en-US"/>
       </a:defPPr>
-      <a:lvl1pPr marL="0" algn="l" defTabSz="914400" rtl="0" eaLnBrk="1" latinLnBrk="0" hangingPunct="1">
+      <a:lvl1pPr marL="0" algn="l" defTabSz="457200" rtl="0" eaLnBrk="1" latinLnBrk="0" hangingPunct="1">
         <a:defRPr sz="1800" kern="1200">
           <a:solidFill>
             <a:schemeClr val="tx1"/>
@@ -3369,7 +3444,7 @@
           <a:cs typeface="+mn-cs"/>
         </a:defRPr>
       </a:lvl1pPr>
-      <a:lvl2pPr marL="457200" algn="l" defTabSz="914400" rtl="0" eaLnBrk="1" latinLnBrk="0" hangingPunct="1">
+      <a:lvl2pPr marL="457200" algn="l" defTabSz="457200" rtl="0" eaLnBrk="1" latinLnBrk="0" hangingPunct="1">
         <a:defRPr sz="1800" kern="1200">
           <a:solidFill>
             <a:schemeClr val="tx1"/>
@@ -3379,7 +3454,7 @@
           <a:cs typeface="+mn-cs"/>
         </a:defRPr>
       </a:lvl2pPr>
-      <a:lvl3pPr marL="914400" algn="l" defTabSz="914400" rtl="0" eaLnBrk="1" latinLnBrk="0" hangingPunct="1">
+      <a:lvl3pPr marL="914400" algn="l" defTabSz="457200" rtl="0" eaLnBrk="1" latinLnBrk="0" hangingPunct="1">
         <a:defRPr sz="1800" kern="1200">
           <a:solidFill>
             <a:schemeClr val="tx1"/>
@@ -3389,7 +3464,7 @@
           <a:cs typeface="+mn-cs"/>
         </a:defRPr>
       </a:lvl3pPr>
-      <a:lvl4pPr marL="1371600" algn="l" defTabSz="914400" rtl="0" eaLnBrk="1" latinLnBrk="0" hangingPunct="1">
+      <a:lvl4pPr marL="1371600" algn="l" defTabSz="457200" rtl="0" eaLnBrk="1" latinLnBrk="0" hangingPunct="1">
         <a:defRPr sz="1800" kern="1200">
           <a:solidFill>
             <a:schemeClr val="tx1"/>
@@ -3399,7 +3474,7 @@
           <a:cs typeface="+mn-cs"/>
         </a:defRPr>
       </a:lvl4pPr>
-      <a:lvl5pPr marL="1828800" algn="l" defTabSz="914400" rtl="0" eaLnBrk="1" latinLnBrk="0" hangingPunct="1">
+      <a:lvl5pPr marL="1828800" algn="l" defTabSz="457200" rtl="0" eaLnBrk="1" latinLnBrk="0" hangingPunct="1">
         <a:defRPr sz="1800" kern="1200">
           <a:solidFill>
             <a:schemeClr val="tx1"/>
@@ -3409,7 +3484,7 @@
           <a:cs typeface="+mn-cs"/>
         </a:defRPr>
       </a:lvl5pPr>
-      <a:lvl6pPr marL="2286000" algn="l" defTabSz="914400" rtl="0" eaLnBrk="1" latinLnBrk="0" hangingPunct="1">
+      <a:lvl6pPr marL="2286000" algn="l" defTabSz="457200" rtl="0" eaLnBrk="1" latinLnBrk="0" hangingPunct="1">
         <a:defRPr sz="1800" kern="1200">
           <a:solidFill>
             <a:schemeClr val="tx1"/>
@@ -3419,7 +3494,7 @@
           <a:cs typeface="+mn-cs"/>
         </a:defRPr>
       </a:lvl6pPr>
-      <a:lvl7pPr marL="2743200" algn="l" defTabSz="914400" rtl="0" eaLnBrk="1" latinLnBrk="0" hangingPunct="1">
+      <a:lvl7pPr marL="2743200" algn="l" defTabSz="457200" rtl="0" eaLnBrk="1" latinLnBrk="0" hangingPunct="1">
         <a:defRPr sz="1800" kern="1200">
           <a:solidFill>
             <a:schemeClr val="tx1"/>
@@ -3429,7 +3504,7 @@
           <a:cs typeface="+mn-cs"/>
         </a:defRPr>
       </a:lvl7pPr>
-      <a:lvl8pPr marL="3200400" algn="l" defTabSz="914400" rtl="0" eaLnBrk="1" latinLnBrk="0" hangingPunct="1">
+      <a:lvl8pPr marL="3200400" algn="l" defTabSz="457200" rtl="0" eaLnBrk="1" latinLnBrk="0" hangingPunct="1">
         <a:defRPr sz="1800" kern="1200">
           <a:solidFill>
             <a:schemeClr val="tx1"/>
@@ -3439,7 +3514,7 @@
           <a:cs typeface="+mn-cs"/>
         </a:defRPr>
       </a:lvl8pPr>
-      <a:lvl9pPr marL="3657600" algn="l" defTabSz="914400" rtl="0" eaLnBrk="1" latinLnBrk="0" hangingPunct="1">
+      <a:lvl9pPr marL="3657600" algn="l" defTabSz="457200" rtl="0" eaLnBrk="1" latinLnBrk="0" hangingPunct="1">
         <a:defRPr sz="1800" kern="1200">
           <a:solidFill>
             <a:schemeClr val="tx1"/>
@@ -3455,7 +3530,7 @@
 </file>
 
 <file path=ppt/slides/slide1.xml><?xml version="1.0" encoding="utf-8"?>
-<p:sld xmlns:p="http://schemas.openxmlformats.org/presentationml/2006/main" xmlns:a="http://schemas.openxmlformats.org/drawingml/2006/main" xmlns:c="http://schemas.openxmlformats.org/drawingml/2006/chart" xmlns:r="http://schemas.openxmlformats.org/officeDocument/2006/relationships">
+<p:sld xmlns:a="http://schemas.openxmlformats.org/drawingml/2006/main" xmlns:p="http://schemas.openxmlformats.org/presentationml/2006/main" xmlns:r="http://schemas.openxmlformats.org/officeDocument/2006/relationships">
   <p:cSld>
     <p:spTree>
       <p:nvGrpSpPr>
@@ -3463,1621 +3538,600 @@
         <p:cNvGrpSpPr/>
         <p:nvPr/>
       </p:nvGrpSpPr>
-      <p:grpSpPr>
-        <a:xfrm>
-          <a:off x="0" y="0"/>
-          <a:ext cx="0" cy="0"/>
-          <a:chOff x="0" y="0"/>
-          <a:chExt cx="0" cy="0"/>
-        </a:xfrm>
-      </p:grpSpPr>
-      <p:sp>
-        <p:nvSpPr>
-          <p:cNvPr name="TextBox 2" id="2"/>
-          <p:cNvSpPr txBox="true"/>
+      <p:grpSpPr/>
+      <p:sp>
+        <p:nvSpPr>
+          <p:cNvPr id="2" name="TextBox 1"/>
+          <p:cNvSpPr txBox="1"/>
           <p:nvPr/>
         </p:nvSpPr>
         <p:spPr>
           <a:xfrm>
-            <a:off x="304800" y="203200"/>
-            <a:ext cx="5334000" cy="457200"/>
+            <a:off x="365760" y="137160"/>
+            <a:ext cx="11460175" cy="411480"/>
           </a:xfrm>
           <a:prstGeom prst="rect">
             <a:avLst/>
           </a:prstGeom>
+          <a:noFill/>
         </p:spPr>
         <p:txBody>
-          <a:bodyPr anchor="t" rtlCol="false"/>
-          <a:lstStyle/>
-          <a:p>
-            <a:pPr algn="l"/>
-            <a:r>
-              <a:rPr lang="en-US" sz="2000" b="true">
+          <a:bodyPr wrap="square">
+            <a:spAutoFit/>
+          </a:bodyPr>
+          <a:lstStyle/>
+          <a:p>
+            <a:pPr algn="ctr">
+              <a:defRPr sz="2400" b="1">
                 <a:solidFill>
-                  <a:srgbClr val="1A3D6B"/>
+                  <a:srgbClr val="1C2833"/>
                 </a:solidFill>
-                <a:ea typeface="微软雅黑"/>
-              </a:rPr>
-              <a:t>偏债混-中欧瑾添</a:t>
-            </a:r>
-          </a:p>
-        </p:txBody>
-      </p:sp>
-      <p:sp>
-        <p:nvSpPr>
-          <p:cNvPr name="TextBox 3" id="3"/>
-          <p:cNvSpPr txBox="true"/>
+                <a:latin typeface="Arial"/>
+              </a:defRPr>
+            </a:pPr>
+            <a:r>
+              <a:t>基金业绩说明（示例数据）</a:t>
+            </a:r>
+          </a:p>
+        </p:txBody>
+      </p:sp>
+      <p:sp>
+        <p:nvSpPr>
+          <p:cNvPr id="3" name="TextBox 2"/>
+          <p:cNvSpPr txBox="1"/>
           <p:nvPr/>
         </p:nvSpPr>
         <p:spPr>
           <a:xfrm>
-            <a:off x="304800" y="660400"/>
-            <a:ext cx="5334000" cy="711200"/>
+            <a:off x="411480" y="685800"/>
+            <a:ext cx="4114800" cy="256032"/>
           </a:xfrm>
           <a:prstGeom prst="rect">
             <a:avLst/>
           </a:prstGeom>
+          <a:noFill/>
         </p:spPr>
         <p:txBody>
-          <a:bodyPr anchor="t" rtlCol="false"/>
-          <a:lstStyle/>
-          <a:p>
-            <a:pPr algn="l"/>
-            <a:r>
-              <a:rPr lang="en-US"/>
-              <a:t>A:013998  C:013999  |  成立日：2021-11-09（任职：2024-08-23）</a:t>
-            </a:r>
-          </a:p>
-          <a:p>
-            <a:pPr algn="l"/>
-            <a:r>
-              <a:rPr lang="en-US" sz="1000" b="false">
+          <a:bodyPr wrap="none">
+            <a:spAutoFit/>
+          </a:bodyPr>
+          <a:lstStyle/>
+          <a:p>
+            <a:pPr>
+              <a:defRPr sz="1100" b="1">
                 <a:solidFill>
-                  <a:srgbClr val="404040"/>
+                  <a:srgbClr val="2E4053"/>
                 </a:solidFill>
-                <a:ea typeface="微软雅黑"/>
-              </a:rPr>
-              <a:t>基金经理：王申、赵煜澄  |  最新规模：2.83亿</a:t>
-            </a:r>
-          </a:p>
-        </p:txBody>
-      </p:sp>
-      <p:sp>
-        <p:nvSpPr>
-          <p:cNvPr name="TextBox 4" id="4"/>
-          <p:cNvSpPr txBox="true"/>
+                <a:latin typeface="Arial"/>
+              </a:defRPr>
+            </a:pPr>
+            <a:r>
+              <a:t>基金基本情况</a:t>
+            </a:r>
+          </a:p>
+        </p:txBody>
+      </p:sp>
+      <p:sp>
+        <p:nvSpPr>
+          <p:cNvPr id="4" name="TextBox 3"/>
+          <p:cNvSpPr txBox="1"/>
           <p:nvPr/>
         </p:nvSpPr>
         <p:spPr>
           <a:xfrm>
-            <a:off x="304800" y="1422400"/>
-            <a:ext cx="2540000" cy="279400"/>
+            <a:off x="411480" y="960120"/>
+            <a:ext cx="5349240" cy="2331720"/>
           </a:xfrm>
           <a:prstGeom prst="rect">
             <a:avLst/>
           </a:prstGeom>
+          <a:noFill/>
         </p:spPr>
         <p:txBody>
-          <a:bodyPr anchor="t" rtlCol="false"/>
-          <a:lstStyle/>
-          <a:p>
-            <a:pPr algn="l"/>
-            <a:r>
-              <a:rPr lang="en-US" sz="1100" b="true">
+          <a:bodyPr wrap="square">
+            <a:spAutoFit/>
+          </a:bodyPr>
+          <a:lstStyle/>
+          <a:p>
+            <a:pPr>
+              <a:spcAft>
+                <a:spcPts val="400"/>
+              </a:spcAft>
+              <a:defRPr sz="1050" b="1">
                 <a:solidFill>
-                  <a:srgbClr val="1A3D6B"/>
+                  <a:srgbClr val="292929"/>
                 </a:solidFill>
-                <a:ea typeface="微软雅黑"/>
-              </a:rPr>
-              <a:t>投资范围及策略</a:t>
-            </a:r>
-          </a:p>
-        </p:txBody>
-      </p:sp>
-      <p:sp>
-        <p:nvSpPr>
-          <p:cNvPr name="TextBox 5" id="5"/>
-          <p:cNvSpPr txBox="true"/>
+                <a:latin typeface="Arial"/>
+              </a:defRPr>
+            </a:pPr>
+            <a:r>
+              <a:t>基金名称：蓝海稳健增长混合A（示例）</a:t>
+            </a:r>
+          </a:p>
+          <a:p>
+            <a:pPr>
+              <a:spcAft>
+                <a:spcPts val="400"/>
+              </a:spcAft>
+              <a:defRPr sz="1050" b="0">
+                <a:solidFill>
+                  <a:srgbClr val="292929"/>
+                </a:solidFill>
+                <a:latin typeface="Arial"/>
+              </a:defRPr>
+            </a:pPr>
+            <a:r>
+              <a:t>基金类型：偏股混合型基金</a:t>
+            </a:r>
+          </a:p>
+          <a:p>
+            <a:pPr>
+              <a:spcAft>
+                <a:spcPts val="400"/>
+              </a:spcAft>
+              <a:defRPr sz="1050" b="0">
+                <a:solidFill>
+                  <a:srgbClr val="292929"/>
+                </a:solidFill>
+                <a:latin typeface="Arial"/>
+              </a:defRPr>
+            </a:pPr>
+            <a:r>
+              <a:t>成立日期：2019-06-12　　最新规模：58.6 亿元（示例）</a:t>
+            </a:r>
+          </a:p>
+          <a:p>
+            <a:pPr>
+              <a:spcAft>
+                <a:spcPts val="400"/>
+              </a:spcAft>
+              <a:defRPr sz="1050" b="0">
+                <a:solidFill>
+                  <a:srgbClr val="292929"/>
+                </a:solidFill>
+                <a:latin typeface="Arial"/>
+              </a:defRPr>
+            </a:pPr>
+            <a:r>
+              <a:t>基金经理：张明、李悦（示例）</a:t>
+            </a:r>
+          </a:p>
+          <a:p>
+            <a:pPr>
+              <a:spcAft>
+                <a:spcPts val="400"/>
+              </a:spcAft>
+              <a:defRPr sz="1050" b="0">
+                <a:solidFill>
+                  <a:srgbClr val="292929"/>
+                </a:solidFill>
+                <a:latin typeface="Arial"/>
+              </a:defRPr>
+            </a:pPr>
+            <a:r>
+              <a:t>业绩比较基准：沪深300指数收益率×70% + 中债综合指数×30%</a:t>
+            </a:r>
+          </a:p>
+          <a:p>
+            <a:pPr>
+              <a:spcAft>
+                <a:spcPts val="400"/>
+              </a:spcAft>
+              <a:defRPr sz="1050" b="0">
+                <a:solidFill>
+                  <a:srgbClr val="292929"/>
+                </a:solidFill>
+                <a:latin typeface="Arial"/>
+              </a:defRPr>
+            </a:pPr>
+            <a:r>
+              <a:t>风险等级：R3（中风险）　　托管人：示例商业银行</a:t>
+            </a:r>
+          </a:p>
+        </p:txBody>
+      </p:sp>
+      <p:sp>
+        <p:nvSpPr>
+          <p:cNvPr id="5" name="TextBox 4"/>
+          <p:cNvSpPr txBox="1"/>
           <p:nvPr/>
         </p:nvSpPr>
         <p:spPr>
           <a:xfrm>
-            <a:off x="304800" y="1701800"/>
-            <a:ext cx="5334000" cy="2387600"/>
+            <a:off x="411480" y="3383280"/>
+            <a:ext cx="4114800" cy="256032"/>
           </a:xfrm>
           <a:prstGeom prst="rect">
             <a:avLst/>
           </a:prstGeom>
+          <a:noFill/>
         </p:spPr>
         <p:txBody>
-          <a:bodyPr anchor="t" rtlCol="false"/>
-          <a:lstStyle/>
-          <a:p>
-            <a:pPr algn="l"/>
-            <a:r>
-              <a:rPr lang="en-US"/>
-              <a:t>以30%权益中枢的高波收益+策略，在控制波动与回撤的前提下增强收益。</a:t>
-            </a:r>
-          </a:p>
-          <a:p>
-            <a:pPr algn="l"/>
-            <a:r>
-              <a:rPr lang="en-US"/>
-              <a:t>股票：采用smart beta宏观择时与自下而上宏观敏感度体系。</a:t>
-            </a:r>
-          </a:p>
-          <a:p>
-            <a:pPr algn="l"/>
-            <a:r>
-              <a:rPr lang="en-US"/>
-              <a:t>可转债：采用估值交易指数体系与量化模型获取可持续alpha。</a:t>
-            </a:r>
-          </a:p>
-          <a:p>
-            <a:pPr algn="l"/>
-            <a:r>
-              <a:rPr lang="en-US" sz="900" b="false">
+          <a:bodyPr wrap="none">
+            <a:spAutoFit/>
+          </a:bodyPr>
+          <a:lstStyle/>
+          <a:p>
+            <a:pPr>
+              <a:defRPr sz="1100" b="1">
                 <a:solidFill>
-                  <a:srgbClr val="000000"/>
+                  <a:srgbClr val="2E4053"/>
                 </a:solidFill>
-                <a:ea typeface="微软雅黑"/>
-              </a:rPr>
-              <a:t>纯债：高等级信用债为底仓，辅以利率交易。</a:t>
-            </a:r>
-          </a:p>
-        </p:txBody>
-      </p:sp>
-      <p:sp>
-        <p:nvSpPr>
-          <p:cNvPr name="TextBox 6" id="6"/>
-          <p:cNvSpPr txBox="true"/>
-          <p:nvPr/>
-        </p:nvSpPr>
-        <p:spPr>
-          <a:xfrm>
-            <a:off x="9144000" y="203200"/>
-            <a:ext cx="2794000" cy="609600"/>
-          </a:xfrm>
-          <a:prstGeom prst="rect">
-            <a:avLst/>
-          </a:prstGeom>
-        </p:spPr>
-        <p:txBody>
-          <a:bodyPr anchor="t" rtlCol="false"/>
-          <a:lstStyle/>
-          <a:p>
-            <a:pPr algn="r"/>
-            <a:r>
-              <a:rPr lang="en-US"/>
-              <a:t>中欧基金</a:t>
-            </a:r>
-          </a:p>
-          <a:p>
-            <a:pPr algn="r"/>
-            <a:r>
-              <a:rPr lang="en-US" sz="1200" b="true">
-                <a:solidFill>
-                  <a:srgbClr val="C03030"/>
-                </a:solidFill>
-                <a:ea typeface="微软雅黑"/>
-              </a:rPr>
-              <a:t>用长期业绩说话</a:t>
-            </a:r>
-          </a:p>
-        </p:txBody>
-      </p:sp>
-      <p:sp>
-        <p:nvSpPr>
-          <p:cNvPr name="TextBox 7" id="7"/>
-          <p:cNvSpPr txBox="true"/>
-          <p:nvPr/>
-        </p:nvSpPr>
-        <p:spPr>
-          <a:xfrm>
-            <a:off x="304800" y="4165600"/>
-            <a:ext cx="1524000" cy="254000"/>
-          </a:xfrm>
-          <a:prstGeom prst="rect">
-            <a:avLst/>
-          </a:prstGeom>
-        </p:spPr>
-        <p:txBody>
-          <a:bodyPr anchor="t" rtlCol="false"/>
-          <a:lstStyle/>
-          <a:p>
-            <a:pPr algn="l"/>
-            <a:r>
-              <a:rPr lang="en-US" sz="1100" b="true">
-                <a:solidFill>
-                  <a:srgbClr val="1A3D6B"/>
-                </a:solidFill>
-                <a:ea typeface="微软雅黑"/>
-              </a:rPr>
-              <a:t>业绩指标</a:t>
+                <a:latin typeface="Arial"/>
+              </a:defRPr>
+            </a:pPr>
+            <a:r>
+              <a:t>收益率排名（同类偏股混合）</a:t>
             </a:r>
           </a:p>
         </p:txBody>
       </p:sp>
       <p:graphicFrame>
         <p:nvGraphicFramePr>
-          <p:cNvPr name="Table 8" id="8"/>
+          <p:cNvPr id="6" name="Table 5"/>
           <p:cNvGraphicFramePr>
-            <a:graphicFrameLocks noGrp="true"/>
+            <a:graphicFrameLocks noGrp="1"/>
           </p:cNvGraphicFramePr>
           <p:nvPr/>
         </p:nvGraphicFramePr>
         <p:xfrm>
-          <a:off x="304800" y="4445000"/>
-          <a:ext cx="5334000" cy="1498600"/>
+          <a:off x="411480" y="3630168"/>
+          <a:ext cx="5349240" cy="1234440"/>
         </p:xfrm>
         <a:graphic>
           <a:graphicData uri="http://schemas.openxmlformats.org/drawingml/2006/table">
             <a:tbl>
-              <a:tblPr/>
+              <a:tblPr firstRow="1" bandRow="1">
+                <a:tableStyleId>{5C22544A-7EE6-4342-B048-85BDC9FD1C3A}</a:tableStyleId>
+              </a:tblPr>
               <a:tblGrid>
-                <a:gridCol w="1270000"/>
-                <a:gridCol w="1270000"/>
-                <a:gridCol w="1270000"/>
-                <a:gridCol w="1270000"/>
-                <a:gridCol w="1270000"/>
-                <a:gridCol w="1270000"/>
+                <a:gridCol w="1337310"/>
+                <a:gridCol w="1337310"/>
+                <a:gridCol w="1337310"/>
+                <a:gridCol w="1337310"/>
               </a:tblGrid>
-              <a:tr h="203200">
+              <a:tr h="308610">
                 <a:tc>
                   <a:txBody>
-                    <a:bodyPr anchor="t" rtlCol="false"/>
+                    <a:bodyPr/>
                     <a:lstStyle/>
                     <a:p>
-                      <a:pPr algn="l">
-                        <a:defRPr/>
+                      <a:pPr>
+                        <a:defRPr b="1" sz="950">
+                          <a:solidFill>
+                            <a:srgbClr val="FFFFFF"/>
+                          </a:solidFill>
+                          <a:latin typeface="Arial"/>
+                        </a:defRPr>
                       </a:pPr>
                       <a:r>
-                        <a:rPr lang="en-US" sz="800" b="true">
-                          <a:ea typeface="微软雅黑"/>
-                        </a:rPr>
-                        <a:t>指标</a:t>
+                        <a:t>区间</a:t>
                       </a:r>
-                      <a:endParaRPr lang="en-US" sz="1100"/>
                     </a:p>
                   </a:txBody>
                   <a:tcPr>
-                    <a:lnL>
-                      <a:noFill/>
-                    </a:lnL>
-                    <a:lnR>
-                      <a:noFill/>
-                    </a:lnR>
-                    <a:lnT>
-                      <a:noFill/>
-                    </a:lnT>
-                    <a:lnB>
-                      <a:noFill/>
-                    </a:lnB>
+                    <a:solidFill>
+                      <a:srgbClr val="2E4053"/>
+                    </a:solidFill>
                   </a:tcPr>
                 </a:tc>
                 <a:tc>
                   <a:txBody>
-                    <a:bodyPr anchor="t" rtlCol="false"/>
+                    <a:bodyPr/>
                     <a:lstStyle/>
                     <a:p>
-                      <a:pPr algn="l">
-                        <a:defRPr/>
+                      <a:pPr>
+                        <a:defRPr b="1" sz="950">
+                          <a:solidFill>
+                            <a:srgbClr val="FFFFFF"/>
+                          </a:solidFill>
+                          <a:latin typeface="Arial"/>
+                        </a:defRPr>
                       </a:pPr>
                       <a:r>
-                        <a:rPr lang="en-US" sz="800" b="true">
-                          <a:latin typeface="微软雅黑"/>
-                        </a:rPr>
-                        <a:t>2025年</a:t>
+                        <a:t>收益率</a:t>
                       </a:r>
-                      <a:endParaRPr lang="en-US" sz="1100"/>
                     </a:p>
                   </a:txBody>
                   <a:tcPr>
-                    <a:lnL>
-                      <a:noFill/>
-                    </a:lnL>
-                    <a:lnR>
-                      <a:noFill/>
-                    </a:lnR>
-                    <a:lnT>
-                      <a:noFill/>
-                    </a:lnT>
-                    <a:lnB>
-                      <a:noFill/>
-                    </a:lnB>
+                    <a:solidFill>
+                      <a:srgbClr val="2E4053"/>
+                    </a:solidFill>
                   </a:tcPr>
                 </a:tc>
                 <a:tc>
                   <a:txBody>
-                    <a:bodyPr anchor="t" rtlCol="false"/>
+                    <a:bodyPr/>
                     <a:lstStyle/>
                     <a:p>
-                      <a:pPr algn="l">
-                        <a:defRPr/>
+                      <a:pPr>
+                        <a:defRPr b="1" sz="950">
+                          <a:solidFill>
+                            <a:srgbClr val="FFFFFF"/>
+                          </a:solidFill>
+                          <a:latin typeface="Arial"/>
+                        </a:defRPr>
                       </a:pPr>
                       <a:r>
-                        <a:rPr lang="en-US" sz="800" b="true">
-                          <a:latin typeface="微软雅黑"/>
-                        </a:rPr>
-                        <a:t>YTD</a:t>
+                        <a:t>同类排名</a:t>
                       </a:r>
-                      <a:endParaRPr lang="en-US" sz="1100"/>
                     </a:p>
                   </a:txBody>
                   <a:tcPr>
-                    <a:lnL>
-                      <a:noFill/>
-                    </a:lnL>
-                    <a:lnR>
-                      <a:noFill/>
-                    </a:lnR>
-                    <a:lnT>
-                      <a:noFill/>
-                    </a:lnT>
-                    <a:lnB>
-                      <a:noFill/>
-                    </a:lnB>
+                    <a:solidFill>
+                      <a:srgbClr val="2E4053"/>
+                    </a:solidFill>
                   </a:tcPr>
                 </a:tc>
                 <a:tc>
                   <a:txBody>
-                    <a:bodyPr anchor="t" rtlCol="false"/>
+                    <a:bodyPr/>
                     <a:lstStyle/>
                     <a:p>
-                      <a:pPr algn="l">
-                        <a:defRPr/>
+                      <a:pPr>
+                        <a:defRPr b="1" sz="950">
+                          <a:solidFill>
+                            <a:srgbClr val="FFFFFF"/>
+                          </a:solidFill>
+                          <a:latin typeface="Arial"/>
+                        </a:defRPr>
                       </a:pPr>
                       <a:r>
-                        <a:rPr lang="en-US" sz="800" b="true">
-                          <a:ea typeface="微软雅黑"/>
-                        </a:rPr>
-                        <a:t>任职以来</a:t>
+                        <a:t>分位数</a:t>
                       </a:r>
-                      <a:endParaRPr lang="en-US" sz="1100"/>
                     </a:p>
                   </a:txBody>
                   <a:tcPr>
-                    <a:lnL>
-                      <a:noFill/>
-                    </a:lnL>
-                    <a:lnR>
-                      <a:noFill/>
-                    </a:lnR>
-                    <a:lnT>
-                      <a:noFill/>
-                    </a:lnT>
-                    <a:lnB>
-                      <a:noFill/>
-                    </a:lnB>
+                    <a:solidFill>
+                      <a:srgbClr val="2E4053"/>
+                    </a:solidFill>
                   </a:tcPr>
+                </a:tc>
+              </a:tr>
+              <a:tr h="308610">
+                <a:tc>
+                  <a:txBody>
+                    <a:bodyPr/>
+                    <a:lstStyle/>
+                    <a:p>
+                      <a:pPr>
+                        <a:defRPr sz="950">
+                          <a:solidFill>
+                            <a:srgbClr val="292929"/>
+                          </a:solidFill>
+                          <a:latin typeface="Arial"/>
+                        </a:defRPr>
+                      </a:pPr>
+                      <a:r>
+                        <a:t>近一年</a:t>
+                      </a:r>
+                    </a:p>
+                  </a:txBody>
+                  <a:tcPr/>
                 </a:tc>
                 <a:tc>
                   <a:txBody>
-                    <a:bodyPr anchor="t" rtlCol="false"/>
+                    <a:bodyPr/>
                     <a:lstStyle/>
                     <a:p>
-                      <a:pPr algn="l">
-                        <a:defRPr/>
+                      <a:pPr>
+                        <a:defRPr sz="950">
+                          <a:solidFill>
+                            <a:srgbClr val="292929"/>
+                          </a:solidFill>
+                          <a:latin typeface="Arial"/>
+                        </a:defRPr>
                       </a:pPr>
                       <a:r>
-                        <a:rPr lang="en-US" sz="800" b="true">
-                          <a:ea typeface="微软雅黑"/>
-                        </a:rPr>
-                        <a:t>近一年</a:t>
+                        <a:t>+12.8%</a:t>
                       </a:r>
-                      <a:endParaRPr lang="en-US" sz="1100"/>
                     </a:p>
                   </a:txBody>
-                  <a:tcPr>
-                    <a:lnL>
-                      <a:noFill/>
-                    </a:lnL>
-                    <a:lnR>
-                      <a:noFill/>
-                    </a:lnR>
-                    <a:lnT>
-                      <a:noFill/>
-                    </a:lnT>
-                    <a:lnB>
-                      <a:noFill/>
-                    </a:lnB>
-                  </a:tcPr>
+                  <a:tcPr/>
                 </a:tc>
                 <a:tc>
                   <a:txBody>
-                    <a:bodyPr anchor="t" rtlCol="false"/>
+                    <a:bodyPr/>
                     <a:lstStyle/>
                     <a:p>
-                      <a:pPr algn="l">
-                        <a:defRPr/>
+                      <a:pPr>
+                        <a:defRPr sz="950">
+                          <a:solidFill>
+                            <a:srgbClr val="292929"/>
+                          </a:solidFill>
+                          <a:latin typeface="Arial"/>
+                        </a:defRPr>
                       </a:pPr>
                       <a:r>
-                        <a:rPr lang="en-US" sz="800" b="true">
-                          <a:ea typeface="微软雅黑"/>
-                        </a:rPr>
-                        <a:t>近六个月</a:t>
+                        <a:t>128 / 856</a:t>
                       </a:r>
-                      <a:endParaRPr lang="en-US" sz="1100"/>
                     </a:p>
                   </a:txBody>
-                  <a:tcPr>
-                    <a:lnL>
-                      <a:noFill/>
-                    </a:lnL>
-                    <a:lnR>
-                      <a:noFill/>
-                    </a:lnR>
-                    <a:lnT>
-                      <a:noFill/>
-                    </a:lnT>
-                    <a:lnB>
-                      <a:noFill/>
-                    </a:lnB>
-                  </a:tcPr>
-                </a:tc>
-              </a:tr>
-              <a:tr h="203200">
-                <a:tc>
-                  <a:txBody>
-                    <a:bodyPr anchor="t" rtlCol="false"/>
-                    <a:lstStyle/>
-                    <a:p>
-                      <a:pPr algn="l">
-                        <a:defRPr/>
-                      </a:pPr>
-                      <a:r>
-                        <a:rPr lang="en-US" sz="750" b="false">
-                          <a:ea typeface="微软雅黑"/>
-                        </a:rPr>
-                        <a:t>累计收益</a:t>
-                      </a:r>
-                      <a:endParaRPr lang="en-US" sz="1100"/>
-                    </a:p>
-                  </a:txBody>
-                  <a:tcPr>
-                    <a:lnL>
-                      <a:noFill/>
-                    </a:lnL>
-                    <a:lnR>
-                      <a:noFill/>
-                    </a:lnR>
-                    <a:lnT>
-                      <a:noFill/>
-                    </a:lnT>
-                    <a:lnB>
-                      <a:noFill/>
-                    </a:lnB>
-                  </a:tcPr>
+                  <a:tcPr/>
                 </a:tc>
                 <a:tc>
                   <a:txBody>
-                    <a:bodyPr anchor="t" rtlCol="false"/>
+                    <a:bodyPr/>
                     <a:lstStyle/>
                     <a:p>
-                      <a:pPr algn="l">
-                        <a:defRPr/>
+                      <a:pPr>
+                        <a:defRPr sz="950">
+                          <a:solidFill>
+                            <a:srgbClr val="292929"/>
+                          </a:solidFill>
+                          <a:latin typeface="Arial"/>
+                        </a:defRPr>
                       </a:pPr>
                       <a:r>
-                        <a:rPr lang="en-US" sz="750" b="false">
-                          <a:latin typeface="微软雅黑"/>
-                        </a:rPr>
-                        <a:t>7.87%</a:t>
+                        <a:t>前 15%</a:t>
                       </a:r>
-                      <a:endParaRPr lang="en-US" sz="1100"/>
                     </a:p>
                   </a:txBody>
-                  <a:tcPr>
-                    <a:lnL>
-                      <a:noFill/>
-                    </a:lnL>
-                    <a:lnR>
-                      <a:noFill/>
-                    </a:lnR>
-                    <a:lnT>
-                      <a:noFill/>
-                    </a:lnT>
-                    <a:lnB>
-                      <a:noFill/>
-                    </a:lnB>
-                  </a:tcPr>
+                  <a:tcPr/>
+                </a:tc>
+              </a:tr>
+              <a:tr h="308610">
+                <a:tc>
+                  <a:txBody>
+                    <a:bodyPr/>
+                    <a:lstStyle/>
+                    <a:p>
+                      <a:pPr>
+                        <a:defRPr sz="950">
+                          <a:solidFill>
+                            <a:srgbClr val="292929"/>
+                          </a:solidFill>
+                          <a:latin typeface="Arial"/>
+                        </a:defRPr>
+                      </a:pPr>
+                      <a:r>
+                        <a:t>近两年</a:t>
+                      </a:r>
+                    </a:p>
+                  </a:txBody>
+                  <a:tcPr/>
                 </a:tc>
                 <a:tc>
                   <a:txBody>
-                    <a:bodyPr anchor="t" rtlCol="false"/>
+                    <a:bodyPr/>
                     <a:lstStyle/>
                     <a:p>
-                      <a:pPr algn="l">
-                        <a:defRPr/>
+                      <a:pPr>
+                        <a:defRPr sz="950">
+                          <a:solidFill>
+                            <a:srgbClr val="292929"/>
+                          </a:solidFill>
+                          <a:latin typeface="Arial"/>
+                        </a:defRPr>
                       </a:pPr>
                       <a:r>
-                        <a:rPr lang="en-US" sz="750" b="false">
-                          <a:latin typeface="微软雅黑"/>
-                        </a:rPr>
-                        <a:t>4.63%</a:t>
+                        <a:t>+18.6%</a:t>
                       </a:r>
-                      <a:endParaRPr lang="en-US" sz="1100"/>
                     </a:p>
                   </a:txBody>
-                  <a:tcPr>
-                    <a:lnL>
-                      <a:noFill/>
-                    </a:lnL>
-                    <a:lnR>
-                      <a:noFill/>
-                    </a:lnR>
-                    <a:lnT>
-                      <a:noFill/>
-                    </a:lnT>
-                    <a:lnB>
-                      <a:noFill/>
-                    </a:lnB>
-                  </a:tcPr>
+                  <a:tcPr/>
                 </a:tc>
                 <a:tc>
                   <a:txBody>
-                    <a:bodyPr anchor="t" rtlCol="false"/>
+                    <a:bodyPr/>
                     <a:lstStyle/>
                     <a:p>
-                      <a:pPr algn="l">
-                        <a:defRPr/>
+                      <a:pPr>
+                        <a:defRPr sz="950">
+                          <a:solidFill>
+                            <a:srgbClr val="292929"/>
+                          </a:solidFill>
+                          <a:latin typeface="Arial"/>
+                        </a:defRPr>
                       </a:pPr>
                       <a:r>
-                        <a:rPr lang="en-US" sz="750" b="false">
-                          <a:latin typeface="微软雅黑"/>
-                        </a:rPr>
-                        <a:t>21.08%</a:t>
+                        <a:t>95 / 812</a:t>
                       </a:r>
-                      <a:endParaRPr lang="en-US" sz="1100"/>
                     </a:p>
                   </a:txBody>
-                  <a:tcPr>
-                    <a:lnL>
-                      <a:noFill/>
-                    </a:lnL>
-                    <a:lnR>
-                      <a:noFill/>
-                    </a:lnR>
-                    <a:lnT>
-                      <a:noFill/>
-                    </a:lnT>
-                    <a:lnB>
-                      <a:noFill/>
-                    </a:lnB>
-                  </a:tcPr>
+                  <a:tcPr/>
                 </a:tc>
                 <a:tc>
                   <a:txBody>
-                    <a:bodyPr anchor="t" rtlCol="false"/>
+                    <a:bodyPr/>
                     <a:lstStyle/>
                     <a:p>
-                      <a:pPr algn="l">
-                        <a:defRPr/>
+                      <a:pPr>
+                        <a:defRPr sz="950">
+                          <a:solidFill>
+                            <a:srgbClr val="292929"/>
+                          </a:solidFill>
+                          <a:latin typeface="Arial"/>
+                        </a:defRPr>
                       </a:pPr>
                       <a:r>
-                        <a:rPr lang="en-US" sz="750" b="false">
-                          <a:latin typeface="微软雅黑"/>
-                        </a:rPr>
-                        <a:t>13.39%</a:t>
+                        <a:t>前 12%</a:t>
                       </a:r>
-                      <a:endParaRPr lang="en-US" sz="1100"/>
                     </a:p>
                   </a:txBody>
-                  <a:tcPr>
-                    <a:lnL>
-                      <a:noFill/>
-                    </a:lnL>
-                    <a:lnR>
-                      <a:noFill/>
-                    </a:lnR>
-                    <a:lnT>
-                      <a:noFill/>
-                    </a:lnT>
-                    <a:lnB>
-                      <a:noFill/>
-                    </a:lnB>
-                  </a:tcPr>
+                  <a:tcPr/>
+                </a:tc>
+              </a:tr>
+              <a:tr h="308610">
+                <a:tc>
+                  <a:txBody>
+                    <a:bodyPr/>
+                    <a:lstStyle/>
+                    <a:p>
+                      <a:pPr>
+                        <a:defRPr sz="950">
+                          <a:solidFill>
+                            <a:srgbClr val="292929"/>
+                          </a:solidFill>
+                          <a:latin typeface="Arial"/>
+                        </a:defRPr>
+                      </a:pPr>
+                      <a:r>
+                        <a:t>近三年</a:t>
+                      </a:r>
+                    </a:p>
+                  </a:txBody>
+                  <a:tcPr/>
                 </a:tc>
                 <a:tc>
                   <a:txBody>
-                    <a:bodyPr anchor="t" rtlCol="false"/>
+                    <a:bodyPr/>
                     <a:lstStyle/>
                     <a:p>
-                      <a:pPr algn="l">
-                        <a:defRPr/>
+                      <a:pPr>
+                        <a:defRPr sz="950">
+                          <a:solidFill>
+                            <a:srgbClr val="292929"/>
+                          </a:solidFill>
+                          <a:latin typeface="Arial"/>
+                        </a:defRPr>
                       </a:pPr>
                       <a:r>
-                        <a:rPr lang="en-US" sz="750" b="false">
-                          <a:latin typeface="微软雅黑"/>
-                        </a:rPr>
-                        <a:t>6.20%</a:t>
+                        <a:t>+22.4%</a:t>
                       </a:r>
-                      <a:endParaRPr lang="en-US" sz="1100"/>
                     </a:p>
                   </a:txBody>
-                  <a:tcPr>
-                    <a:lnL>
-                      <a:noFill/>
-                    </a:lnL>
-                    <a:lnR>
-                      <a:noFill/>
-                    </a:lnR>
-                    <a:lnT>
-                      <a:noFill/>
-                    </a:lnT>
-                    <a:lnB>
-                      <a:noFill/>
-                    </a:lnB>
-                  </a:tcPr>
-                </a:tc>
-              </a:tr>
-              <a:tr h="203200">
-                <a:tc>
-                  <a:txBody>
-                    <a:bodyPr anchor="t" rtlCol="false"/>
-                    <a:lstStyle/>
-                    <a:p>
-                      <a:pPr algn="l">
-                        <a:defRPr/>
-                      </a:pPr>
-                      <a:r>
-                        <a:rPr lang="en-US" sz="750" b="false">
-                          <a:ea typeface="微软雅黑"/>
-                        </a:rPr>
-                        <a:t>年化收益</a:t>
-                      </a:r>
-                      <a:endParaRPr lang="en-US" sz="1100"/>
-                    </a:p>
-                  </a:txBody>
-                  <a:tcPr>
-                    <a:lnL>
-                      <a:noFill/>
-                    </a:lnL>
-                    <a:lnR>
-                      <a:noFill/>
-                    </a:lnR>
-                    <a:lnT>
-                      <a:noFill/>
-                    </a:lnT>
-                    <a:lnB>
-                      <a:noFill/>
-                    </a:lnB>
-                  </a:tcPr>
+                  <a:tcPr/>
                 </a:tc>
                 <a:tc>
                   <a:txBody>
-                    <a:bodyPr anchor="t" rtlCol="false"/>
+                    <a:bodyPr/>
                     <a:lstStyle/>
                     <a:p>
-                      <a:pPr algn="l">
-                        <a:defRPr/>
+                      <a:pPr>
+                        <a:defRPr sz="950">
+                          <a:solidFill>
+                            <a:srgbClr val="292929"/>
+                          </a:solidFill>
+                          <a:latin typeface="Arial"/>
+                        </a:defRPr>
                       </a:pPr>
                       <a:r>
-                        <a:rPr lang="en-US" sz="750" b="false">
-                          <a:latin typeface="微软雅黑"/>
-                        </a:rPr>
-                        <a:t>7.87%</a:t>
+                        <a:t>76 / 698</a:t>
                       </a:r>
-                      <a:endParaRPr lang="en-US" sz="1100"/>
                     </a:p>
                   </a:txBody>
-                  <a:tcPr>
-                    <a:lnL>
-                      <a:noFill/>
-                    </a:lnL>
-                    <a:lnR>
-                      <a:noFill/>
-                    </a:lnR>
-                    <a:lnT>
-                      <a:noFill/>
-                    </a:lnT>
-                    <a:lnB>
-                      <a:noFill/>
-                    </a:lnB>
-                  </a:tcPr>
+                  <a:tcPr/>
                 </a:tc>
                 <a:tc>
                   <a:txBody>
-                    <a:bodyPr anchor="t" rtlCol="false"/>
+                    <a:bodyPr/>
                     <a:lstStyle/>
                     <a:p>
-                      <a:pPr algn="l">
-                        <a:defRPr/>
+                      <a:pPr>
+                        <a:defRPr sz="950">
+                          <a:solidFill>
+                            <a:srgbClr val="292929"/>
+                          </a:solidFill>
+                          <a:latin typeface="Arial"/>
+                        </a:defRPr>
                       </a:pPr>
                       <a:r>
-                        <a:rPr lang="en-US" sz="750" b="false">
-                          <a:latin typeface="微软雅黑"/>
-                        </a:rPr>
-                        <a:t>14.77%</a:t>
+                        <a:t>前 11%</a:t>
                       </a:r>
-                      <a:endParaRPr lang="en-US" sz="1100"/>
                     </a:p>
                   </a:txBody>
-                  <a:tcPr>
-                    <a:lnL>
-                      <a:noFill/>
-                    </a:lnL>
-                    <a:lnR>
-                      <a:noFill/>
-                    </a:lnR>
-                    <a:lnT>
-                      <a:noFill/>
-                    </a:lnT>
-                    <a:lnB>
-                      <a:noFill/>
-                    </a:lnB>
-                  </a:tcPr>
-                </a:tc>
-                <a:tc>
-                  <a:txBody>
-                    <a:bodyPr anchor="t" rtlCol="false"/>
-                    <a:lstStyle/>
-                    <a:p>
-                      <a:pPr algn="l">
-                        <a:defRPr/>
-                      </a:pPr>
-                      <a:r>
-                        <a:rPr lang="en-US" sz="750" b="false">
-                          <a:latin typeface="微软雅黑"/>
-                        </a:rPr>
-                        <a:t>12%</a:t>
-                      </a:r>
-                      <a:endParaRPr lang="en-US" sz="1100"/>
-                    </a:p>
-                  </a:txBody>
-                  <a:tcPr>
-                    <a:lnL>
-                      <a:noFill/>
-                    </a:lnL>
-                    <a:lnR>
-                      <a:noFill/>
-                    </a:lnR>
-                    <a:lnT>
-                      <a:noFill/>
-                    </a:lnT>
-                    <a:lnB>
-                      <a:noFill/>
-                    </a:lnB>
-                  </a:tcPr>
-                </a:tc>
-                <a:tc>
-                  <a:txBody>
-                    <a:bodyPr anchor="t" rtlCol="false"/>
-                    <a:lstStyle/>
-                    <a:p>
-                      <a:pPr algn="l">
-                        <a:defRPr/>
-                      </a:pPr>
-                      <a:r>
-                        <a:rPr lang="en-US" sz="750" b="false">
-                          <a:latin typeface="微软雅黑"/>
-                        </a:rPr>
-                        <a:t>13.39%</a:t>
-                      </a:r>
-                      <a:endParaRPr lang="en-US" sz="1100"/>
-                    </a:p>
-                  </a:txBody>
-                  <a:tcPr>
-                    <a:lnL>
-                      <a:noFill/>
-                    </a:lnL>
-                    <a:lnR>
-                      <a:noFill/>
-                    </a:lnR>
-                    <a:lnT>
-                      <a:noFill/>
-                    </a:lnT>
-                    <a:lnB>
-                      <a:noFill/>
-                    </a:lnB>
-                  </a:tcPr>
-                </a:tc>
-                <a:tc>
-                  <a:txBody>
-                    <a:bodyPr anchor="t" rtlCol="false"/>
-                    <a:lstStyle/>
-                    <a:p>
-                      <a:pPr algn="l">
-                        <a:defRPr/>
-                      </a:pPr>
-                      <a:r>
-                        <a:rPr lang="en-US" sz="750" b="false">
-                          <a:latin typeface="微软雅黑"/>
-                        </a:rPr>
-                        <a:t>12.18%</a:t>
-                      </a:r>
-                      <a:endParaRPr lang="en-US" sz="1100"/>
-                    </a:p>
-                  </a:txBody>
-                  <a:tcPr>
-                    <a:lnL>
-                      <a:noFill/>
-                    </a:lnL>
-                    <a:lnR>
-                      <a:noFill/>
-                    </a:lnR>
-                    <a:lnT>
-                      <a:noFill/>
-                    </a:lnT>
-                    <a:lnB>
-                      <a:noFill/>
-                    </a:lnB>
-                  </a:tcPr>
-                </a:tc>
-              </a:tr>
-              <a:tr h="203200">
-                <a:tc>
-                  <a:txBody>
-                    <a:bodyPr anchor="t" rtlCol="false"/>
-                    <a:lstStyle/>
-                    <a:p>
-                      <a:pPr algn="l">
-                        <a:defRPr/>
-                      </a:pPr>
-                      <a:r>
-                        <a:rPr lang="en-US" sz="750" b="false">
-                          <a:ea typeface="微软雅黑"/>
-                        </a:rPr>
-                        <a:t>收益排名</a:t>
-                      </a:r>
-                      <a:endParaRPr lang="en-US" sz="1100"/>
-                    </a:p>
-                  </a:txBody>
-                  <a:tcPr>
-                    <a:lnL>
-                      <a:noFill/>
-                    </a:lnL>
-                    <a:lnR>
-                      <a:noFill/>
-                    </a:lnR>
-                    <a:lnT>
-                      <a:noFill/>
-                    </a:lnT>
-                    <a:lnB>
-                      <a:noFill/>
-                    </a:lnB>
-                  </a:tcPr>
-                </a:tc>
-                <a:tc>
-                  <a:txBody>
-                    <a:bodyPr anchor="t" rtlCol="false"/>
-                    <a:lstStyle/>
-                    <a:p>
-                      <a:pPr algn="l">
-                        <a:defRPr/>
-                      </a:pPr>
-                      <a:r>
-                        <a:rPr lang="en-US" sz="750" b="false">
-                          <a:latin typeface="微软雅黑"/>
-                        </a:rPr>
-                        <a:t>--</a:t>
-                      </a:r>
-                      <a:endParaRPr lang="en-US" sz="1100"/>
-                    </a:p>
-                  </a:txBody>
-                  <a:tcPr>
-                    <a:lnL>
-                      <a:noFill/>
-                    </a:lnL>
-                    <a:lnR>
-                      <a:noFill/>
-                    </a:lnR>
-                    <a:lnT>
-                      <a:noFill/>
-                    </a:lnT>
-                    <a:lnB>
-                      <a:noFill/>
-                    </a:lnB>
-                  </a:tcPr>
-                </a:tc>
-                <a:tc>
-                  <a:txBody>
-                    <a:bodyPr anchor="t" rtlCol="false"/>
-                    <a:lstStyle/>
-                    <a:p>
-                      <a:pPr algn="l">
-                        <a:defRPr/>
-                      </a:pPr>
-                      <a:r>
-                        <a:rPr lang="en-US" sz="750" b="false">
-                          <a:latin typeface="微软雅黑"/>
-                        </a:rPr>
-                        <a:t>22%</a:t>
-                      </a:r>
-                      <a:endParaRPr lang="en-US" sz="1100"/>
-                    </a:p>
-                  </a:txBody>
-                  <a:tcPr>
-                    <a:lnL>
-                      <a:noFill/>
-                    </a:lnL>
-                    <a:lnR>
-                      <a:noFill/>
-                    </a:lnR>
-                    <a:lnT>
-                      <a:noFill/>
-                    </a:lnT>
-                    <a:lnB>
-                      <a:noFill/>
-                    </a:lnB>
-                  </a:tcPr>
-                </a:tc>
-                <a:tc>
-                  <a:txBody>
-                    <a:bodyPr anchor="t" rtlCol="false"/>
-                    <a:lstStyle/>
-                    <a:p>
-                      <a:pPr algn="l">
-                        <a:defRPr/>
-                      </a:pPr>
-                      <a:r>
-                        <a:rPr lang="en-US" sz="750" b="false">
-                          <a:latin typeface="微软雅黑"/>
-                        </a:rPr>
-                        <a:t>22%</a:t>
-                      </a:r>
-                      <a:endParaRPr lang="en-US" sz="1100"/>
-                    </a:p>
-                  </a:txBody>
-                  <a:tcPr>
-                    <a:lnL>
-                      <a:noFill/>
-                    </a:lnL>
-                    <a:lnR>
-                      <a:noFill/>
-                    </a:lnR>
-                    <a:lnT>
-                      <a:noFill/>
-                    </a:lnT>
-                    <a:lnB>
-                      <a:noFill/>
-                    </a:lnB>
-                  </a:tcPr>
-                </a:tc>
-                <a:tc>
-                  <a:txBody>
-                    <a:bodyPr anchor="t" rtlCol="false"/>
-                    <a:lstStyle/>
-                    <a:p>
-                      <a:pPr algn="l">
-                        <a:defRPr/>
-                      </a:pPr>
-                      <a:r>
-                        <a:rPr lang="en-US" sz="750" b="false">
-                          <a:latin typeface="微软雅黑"/>
-                        </a:rPr>
-                        <a:t>22%</a:t>
-                      </a:r>
-                      <a:endParaRPr lang="en-US" sz="1100"/>
-                    </a:p>
-                  </a:txBody>
-                  <a:tcPr>
-                    <a:lnL>
-                      <a:noFill/>
-                    </a:lnL>
-                    <a:lnR>
-                      <a:noFill/>
-                    </a:lnR>
-                    <a:lnT>
-                      <a:noFill/>
-                    </a:lnT>
-                    <a:lnB>
-                      <a:noFill/>
-                    </a:lnB>
-                  </a:tcPr>
-                </a:tc>
-                <a:tc>
-                  <a:txBody>
-                    <a:bodyPr anchor="t" rtlCol="false"/>
-                    <a:lstStyle/>
-                    <a:p>
-                      <a:pPr algn="l">
-                        <a:defRPr/>
-                      </a:pPr>
-                      <a:r>
-                        <a:rPr lang="en-US" sz="750" b="false">
-                          <a:latin typeface="微软雅黑"/>
-                        </a:rPr>
-                        <a:t>22%</a:t>
-                      </a:r>
-                      <a:endParaRPr lang="en-US" sz="1100"/>
-                    </a:p>
-                  </a:txBody>
-                  <a:tcPr>
-                    <a:lnL>
-                      <a:noFill/>
-                    </a:lnL>
-                    <a:lnR>
-                      <a:noFill/>
-                    </a:lnR>
-                    <a:lnT>
-                      <a:noFill/>
-                    </a:lnT>
-                    <a:lnB>
-                      <a:noFill/>
-                    </a:lnB>
-                  </a:tcPr>
-                </a:tc>
-              </a:tr>
-              <a:tr h="203200">
-                <a:tc>
-                  <a:txBody>
-                    <a:bodyPr anchor="t" rtlCol="false"/>
-                    <a:lstStyle/>
-                    <a:p>
-                      <a:pPr algn="l">
-                        <a:defRPr/>
-                      </a:pPr>
-                      <a:r>
-                        <a:rPr lang="en-US" sz="750" b="false">
-                          <a:ea typeface="微软雅黑"/>
-                        </a:rPr>
-                        <a:t>二级债基指数(年化)</a:t>
-                      </a:r>
-                      <a:endParaRPr lang="en-US" sz="1100"/>
-                    </a:p>
-                  </a:txBody>
-                  <a:tcPr>
-                    <a:lnL>
-                      <a:noFill/>
-                    </a:lnL>
-                    <a:lnR>
-                      <a:noFill/>
-                    </a:lnR>
-                    <a:lnT>
-                      <a:noFill/>
-                    </a:lnT>
-                    <a:lnB>
-                      <a:noFill/>
-                    </a:lnB>
-                  </a:tcPr>
-                </a:tc>
-                <a:tc>
-                  <a:txBody>
-                    <a:bodyPr anchor="t" rtlCol="false"/>
-                    <a:lstStyle/>
-                    <a:p>
-                      <a:pPr algn="l">
-                        <a:defRPr/>
-                      </a:pPr>
-                      <a:r>
-                        <a:rPr lang="en-US" sz="750" b="false">
-                          <a:latin typeface="微软雅黑"/>
-                        </a:rPr>
-                        <a:t>5.76%</a:t>
-                      </a:r>
-                      <a:endParaRPr lang="en-US" sz="1100"/>
-                    </a:p>
-                  </a:txBody>
-                  <a:tcPr>
-                    <a:lnL>
-                      <a:noFill/>
-                    </a:lnL>
-                    <a:lnR>
-                      <a:noFill/>
-                    </a:lnR>
-                    <a:lnT>
-                      <a:noFill/>
-                    </a:lnT>
-                    <a:lnB>
-                      <a:noFill/>
-                    </a:lnB>
-                  </a:tcPr>
-                </a:tc>
-                <a:tc>
-                  <a:txBody>
-                    <a:bodyPr anchor="t" rtlCol="false"/>
-                    <a:lstStyle/>
-                    <a:p>
-                      <a:pPr algn="l">
-                        <a:defRPr/>
-                      </a:pPr>
-                      <a:r>
-                        <a:rPr lang="en-US" sz="750" b="false">
-                          <a:latin typeface="微软雅黑"/>
-                        </a:rPr>
-                        <a:t>7.08%</a:t>
-                      </a:r>
-                      <a:endParaRPr lang="en-US" sz="1100"/>
-                    </a:p>
-                  </a:txBody>
-                  <a:tcPr>
-                    <a:lnL>
-                      <a:noFill/>
-                    </a:lnL>
-                    <a:lnR>
-                      <a:noFill/>
-                    </a:lnR>
-                    <a:lnT>
-                      <a:noFill/>
-                    </a:lnT>
-                    <a:lnB>
-                      <a:noFill/>
-                    </a:lnB>
-                  </a:tcPr>
-                </a:tc>
-                <a:tc>
-                  <a:txBody>
-                    <a:bodyPr anchor="t" rtlCol="false"/>
-                    <a:lstStyle/>
-                    <a:p>
-                      <a:pPr algn="l">
-                        <a:defRPr/>
-                      </a:pPr>
-                      <a:r>
-                        <a:rPr lang="en-US" sz="750" b="false">
-                          <a:latin typeface="微软雅黑"/>
-                        </a:rPr>
-                        <a:t>7.91%</a:t>
-                      </a:r>
-                      <a:endParaRPr lang="en-US" sz="1100"/>
-                    </a:p>
-                  </a:txBody>
-                  <a:tcPr>
-                    <a:lnL>
-                      <a:noFill/>
-                    </a:lnL>
-                    <a:lnR>
-                      <a:noFill/>
-                    </a:lnR>
-                    <a:lnT>
-                      <a:noFill/>
-                    </a:lnT>
-                    <a:lnB>
-                      <a:noFill/>
-                    </a:lnB>
-                  </a:tcPr>
-                </a:tc>
-                <a:tc>
-                  <a:txBody>
-                    <a:bodyPr anchor="t" rtlCol="false"/>
-                    <a:lstStyle/>
-                    <a:p>
-                      <a:pPr algn="l">
-                        <a:defRPr/>
-                      </a:pPr>
-                      <a:r>
-                        <a:rPr lang="en-US" sz="750" b="false">
-                          <a:latin typeface="微软雅黑"/>
-                        </a:rPr>
-                        <a:t>7.58%</a:t>
-                      </a:r>
-                      <a:endParaRPr lang="en-US" sz="1100"/>
-                    </a:p>
-                  </a:txBody>
-                  <a:tcPr>
-                    <a:lnL>
-                      <a:noFill/>
-                    </a:lnL>
-                    <a:lnR>
-                      <a:noFill/>
-                    </a:lnR>
-                    <a:lnT>
-                      <a:noFill/>
-                    </a:lnT>
-                    <a:lnB>
-                      <a:noFill/>
-                    </a:lnB>
-                  </a:tcPr>
-                </a:tc>
-                <a:tc>
-                  <a:txBody>
-                    <a:bodyPr anchor="t" rtlCol="false"/>
-                    <a:lstStyle/>
-                    <a:p>
-                      <a:pPr algn="l">
-                        <a:defRPr/>
-                      </a:pPr>
-                      <a:r>
-                        <a:rPr lang="en-US" sz="750" b="false">
-                          <a:latin typeface="微软雅黑"/>
-                        </a:rPr>
-                        <a:t>4.76%</a:t>
-                      </a:r>
-                      <a:endParaRPr lang="en-US" sz="1100"/>
-                    </a:p>
-                  </a:txBody>
-                  <a:tcPr>
-                    <a:lnL>
-                      <a:noFill/>
-                    </a:lnL>
-                    <a:lnR>
-                      <a:noFill/>
-                    </a:lnR>
-                    <a:lnT>
-                      <a:noFill/>
-                    </a:lnT>
-                    <a:lnB>
-                      <a:noFill/>
-                    </a:lnB>
-                  </a:tcPr>
-                </a:tc>
-              </a:tr>
-              <a:tr h="203200">
-                <a:tc>
-                  <a:txBody>
-                    <a:bodyPr anchor="t" rtlCol="false"/>
-                    <a:lstStyle/>
-                    <a:p>
-                      <a:pPr algn="l">
-                        <a:defRPr/>
-                      </a:pPr>
-                      <a:r>
-                        <a:rPr lang="en-US" sz="750" b="false">
-                          <a:ea typeface="微软雅黑"/>
-                        </a:rPr>
-                        <a:t>夏普比率</a:t>
-                      </a:r>
-                      <a:endParaRPr lang="en-US" sz="1100"/>
-                    </a:p>
-                  </a:txBody>
-                  <a:tcPr>
-                    <a:lnL>
-                      <a:noFill/>
-                    </a:lnL>
-                    <a:lnR>
-                      <a:noFill/>
-                    </a:lnR>
-                    <a:lnT>
-                      <a:noFill/>
-                    </a:lnT>
-                    <a:lnB>
-                      <a:noFill/>
-                    </a:lnB>
-                  </a:tcPr>
-                </a:tc>
-                <a:tc>
-                  <a:txBody>
-                    <a:bodyPr anchor="t" rtlCol="false"/>
-                    <a:lstStyle/>
-                    <a:p>
-                      <a:pPr algn="l">
-                        <a:defRPr/>
-                      </a:pPr>
-                      <a:r>
-                        <a:rPr lang="en-US" sz="750" b="false">
-                          <a:latin typeface="微软雅黑"/>
-                        </a:rPr>
-                        <a:t>1.36</a:t>
-                      </a:r>
-                      <a:endParaRPr lang="en-US" sz="1100"/>
-                    </a:p>
-                  </a:txBody>
-                  <a:tcPr>
-                    <a:lnL>
-                      <a:noFill/>
-                    </a:lnL>
-                    <a:lnR>
-                      <a:noFill/>
-                    </a:lnR>
-                    <a:lnT>
-                      <a:noFill/>
-                    </a:lnT>
-                    <a:lnB>
-                      <a:noFill/>
-                    </a:lnB>
-                  </a:tcPr>
-                </a:tc>
-                <a:tc>
-                  <a:txBody>
-                    <a:bodyPr anchor="t" rtlCol="false"/>
-                    <a:lstStyle/>
-                    <a:p>
-                      <a:pPr algn="l">
-                        <a:defRPr/>
-                      </a:pPr>
-                      <a:r>
-                        <a:rPr lang="en-US" sz="750" b="false">
-                          <a:latin typeface="微软雅黑"/>
-                        </a:rPr>
-                        <a:t>1.84</a:t>
-                      </a:r>
-                      <a:endParaRPr lang="en-US" sz="1100"/>
-                    </a:p>
-                  </a:txBody>
-                  <a:tcPr>
-                    <a:lnL>
-                      <a:noFill/>
-                    </a:lnL>
-                    <a:lnR>
-                      <a:noFill/>
-                    </a:lnR>
-                    <a:lnT>
-                      <a:noFill/>
-                    </a:lnT>
-                    <a:lnB>
-                      <a:noFill/>
-                    </a:lnB>
-                  </a:tcPr>
-                </a:tc>
-                <a:tc>
-                  <a:txBody>
-                    <a:bodyPr anchor="t" rtlCol="false"/>
-                    <a:lstStyle/>
-                    <a:p>
-                      <a:pPr algn="l">
-                        <a:defRPr/>
-                      </a:pPr>
-                      <a:r>
-                        <a:rPr lang="en-US" sz="750" b="false">
-                          <a:latin typeface="微软雅黑"/>
-                        </a:rPr>
-                        <a:t>1.65</a:t>
-                      </a:r>
-                      <a:endParaRPr lang="en-US" sz="1100"/>
-                    </a:p>
-                  </a:txBody>
-                  <a:tcPr>
-                    <a:lnL>
-                      <a:noFill/>
-                    </a:lnL>
-                    <a:lnR>
-                      <a:noFill/>
-                    </a:lnR>
-                    <a:lnT>
-                      <a:noFill/>
-                    </a:lnT>
-                    <a:lnB>
-                      <a:noFill/>
-                    </a:lnB>
-                  </a:tcPr>
-                </a:tc>
-                <a:tc>
-                  <a:txBody>
-                    <a:bodyPr anchor="t" rtlCol="false"/>
-                    <a:lstStyle/>
-                    <a:p>
-                      <a:pPr algn="l">
-                        <a:defRPr/>
-                      </a:pPr>
-                      <a:r>
-                        <a:rPr lang="en-US" sz="750" b="false">
-                          <a:latin typeface="微软雅黑"/>
-                        </a:rPr>
-                        <a:t>2.02</a:t>
-                      </a:r>
-                      <a:endParaRPr lang="en-US" sz="1100"/>
-                    </a:p>
-                  </a:txBody>
-                  <a:tcPr>
-                    <a:lnL>
-                      <a:noFill/>
-                    </a:lnL>
-                    <a:lnR>
-                      <a:noFill/>
-                    </a:lnR>
-                    <a:lnT>
-                      <a:noFill/>
-                    </a:lnT>
-                    <a:lnB>
-                      <a:noFill/>
-                    </a:lnB>
-                  </a:tcPr>
-                </a:tc>
-                <a:tc>
-                  <a:txBody>
-                    <a:bodyPr anchor="t" rtlCol="false"/>
-                    <a:lstStyle/>
-                    <a:p>
-                      <a:pPr algn="l">
-                        <a:defRPr/>
-                      </a:pPr>
-                      <a:r>
-                        <a:rPr lang="en-US" sz="750" b="false">
-                          <a:latin typeface="微软雅黑"/>
-                        </a:rPr>
-                        <a:t>1.60</a:t>
-                      </a:r>
-                      <a:endParaRPr lang="en-US" sz="1100"/>
-                    </a:p>
-                  </a:txBody>
-                  <a:tcPr>
-                    <a:lnL>
-                      <a:noFill/>
-                    </a:lnL>
-                    <a:lnR>
-                      <a:noFill/>
-                    </a:lnR>
-                    <a:lnT>
-                      <a:noFill/>
-                    </a:lnT>
-                    <a:lnB>
-                      <a:noFill/>
-                    </a:lnB>
-                  </a:tcPr>
-                </a:tc>
-              </a:tr>
-              <a:tr h="203200">
-                <a:tc>
-                  <a:txBody>
-                    <a:bodyPr anchor="t" rtlCol="false"/>
-                    <a:lstStyle/>
-                    <a:p>
-                      <a:pPr algn="l">
-                        <a:defRPr/>
-                      </a:pPr>
-                      <a:r>
-                        <a:rPr lang="en-US" sz="750" b="false">
-                          <a:ea typeface="微软雅黑"/>
-                        </a:rPr>
-                        <a:t>最大回撤</a:t>
-                      </a:r>
-                      <a:endParaRPr lang="en-US" sz="1100"/>
-                    </a:p>
-                  </a:txBody>
-                  <a:tcPr>
-                    <a:lnL>
-                      <a:noFill/>
-                    </a:lnL>
-                    <a:lnR>
-                      <a:noFill/>
-                    </a:lnR>
-                    <a:lnT>
-                      <a:noFill/>
-                    </a:lnT>
-                    <a:lnB>
-                      <a:noFill/>
-                    </a:lnB>
-                  </a:tcPr>
-                </a:tc>
-                <a:tc>
-                  <a:txBody>
-                    <a:bodyPr anchor="t" rtlCol="false"/>
-                    <a:lstStyle/>
-                    <a:p>
-                      <a:pPr algn="l">
-                        <a:defRPr/>
-                      </a:pPr>
-                      <a:r>
-                        <a:rPr lang="en-US" sz="750" b="false">
-                          <a:latin typeface="微软雅黑"/>
-                        </a:rPr>
-                        <a:t>-2.81%</a:t>
-                      </a:r>
-                      <a:endParaRPr lang="en-US" sz="1100"/>
-                    </a:p>
-                  </a:txBody>
-                  <a:tcPr>
-                    <a:lnL>
-                      <a:noFill/>
-                    </a:lnL>
-                    <a:lnR>
-                      <a:noFill/>
-                    </a:lnR>
-                    <a:lnT>
-                      <a:noFill/>
-                    </a:lnT>
-                    <a:lnB>
-                      <a:noFill/>
-                    </a:lnB>
-                  </a:tcPr>
-                </a:tc>
-                <a:tc>
-                  <a:txBody>
-                    <a:bodyPr anchor="t" rtlCol="false"/>
-                    <a:lstStyle/>
-                    <a:p>
-                      <a:pPr algn="l">
-                        <a:defRPr/>
-                      </a:pPr>
-                      <a:r>
-                        <a:rPr lang="en-US" sz="750" b="false">
-                          <a:latin typeface="微软雅黑"/>
-                        </a:rPr>
-                        <a:t>-4.43%</a:t>
-                      </a:r>
-                      <a:endParaRPr lang="en-US" sz="1100"/>
-                    </a:p>
-                  </a:txBody>
-                  <a:tcPr>
-                    <a:lnL>
-                      <a:noFill/>
-                    </a:lnL>
-                    <a:lnR>
-                      <a:noFill/>
-                    </a:lnR>
-                    <a:lnT>
-                      <a:noFill/>
-                    </a:lnT>
-                    <a:lnB>
-                      <a:noFill/>
-                    </a:lnB>
-                  </a:tcPr>
-                </a:tc>
-                <a:tc>
-                  <a:txBody>
-                    <a:bodyPr anchor="t" rtlCol="false"/>
-                    <a:lstStyle/>
-                    <a:p>
-                      <a:pPr algn="l">
-                        <a:defRPr/>
-                      </a:pPr>
-                      <a:r>
-                        <a:rPr lang="en-US" sz="750" b="false">
-                          <a:latin typeface="微软雅黑"/>
-                        </a:rPr>
-                        <a:t>-4.43%</a:t>
-                      </a:r>
-                      <a:endParaRPr lang="en-US" sz="1100"/>
-                    </a:p>
-                  </a:txBody>
-                  <a:tcPr>
-                    <a:lnL>
-                      <a:noFill/>
-                    </a:lnL>
-                    <a:lnR>
-                      <a:noFill/>
-                    </a:lnR>
-                    <a:lnT>
-                      <a:noFill/>
-                    </a:lnT>
-                    <a:lnB>
-                      <a:noFill/>
-                    </a:lnB>
-                  </a:tcPr>
-                </a:tc>
-                <a:tc>
-                  <a:txBody>
-                    <a:bodyPr anchor="t" rtlCol="false"/>
-                    <a:lstStyle/>
-                    <a:p>
-                      <a:pPr algn="l">
-                        <a:defRPr/>
-                      </a:pPr>
-                      <a:r>
-                        <a:rPr lang="en-US" sz="750" b="false">
-                          <a:latin typeface="微软雅黑"/>
-                        </a:rPr>
-                        <a:t>-4.43%</a:t>
-                      </a:r>
-                      <a:endParaRPr lang="en-US" sz="1100"/>
-                    </a:p>
-                  </a:txBody>
-                  <a:tcPr>
-                    <a:lnL>
-                      <a:noFill/>
-                    </a:lnL>
-                    <a:lnR>
-                      <a:noFill/>
-                    </a:lnR>
-                    <a:lnT>
-                      <a:noFill/>
-                    </a:lnT>
-                    <a:lnB>
-                      <a:noFill/>
-                    </a:lnB>
-                  </a:tcPr>
-                </a:tc>
-                <a:tc>
-                  <a:txBody>
-                    <a:bodyPr anchor="t" rtlCol="false"/>
-                    <a:lstStyle/>
-                    <a:p>
-                      <a:pPr algn="l">
-                        <a:defRPr/>
-                      </a:pPr>
-                      <a:r>
-                        <a:rPr lang="en-US" sz="750" b="false">
-                          <a:latin typeface="微软雅黑"/>
-                        </a:rPr>
-                        <a:t>-4.43%</a:t>
-                      </a:r>
-                      <a:endParaRPr lang="en-US" sz="1100"/>
-                    </a:p>
-                  </a:txBody>
-                  <a:tcPr>
-                    <a:lnL>
-                      <a:noFill/>
-                    </a:lnL>
-                    <a:lnR>
-                      <a:noFill/>
-                    </a:lnR>
-                    <a:lnT>
-                      <a:noFill/>
-                    </a:lnT>
-                    <a:lnB>
-                      <a:noFill/>
-                    </a:lnB>
-                  </a:tcPr>
+                  <a:tcPr/>
                 </a:tc>
               </a:tr>
             </a:tbl>
@@ -5086,133 +4140,195 @@
       </p:graphicFrame>
       <p:sp>
         <p:nvSpPr>
-          <p:cNvPr name="TextBox 9" id="9"/>
-          <p:cNvSpPr txBox="true"/>
+          <p:cNvPr id="7" name="TextBox 6"/>
+          <p:cNvSpPr txBox="1"/>
           <p:nvPr/>
         </p:nvSpPr>
         <p:spPr>
           <a:xfrm>
-            <a:off x="5969000" y="660400"/>
-            <a:ext cx="4064000" cy="279400"/>
+            <a:off x="5989320" y="685800"/>
+            <a:ext cx="4114800" cy="256032"/>
           </a:xfrm>
           <a:prstGeom prst="rect">
             <a:avLst/>
           </a:prstGeom>
+          <a:noFill/>
         </p:spPr>
         <p:txBody>
-          <a:bodyPr anchor="t" rtlCol="false"/>
-          <a:lstStyle/>
-          <a:p>
-            <a:pPr algn="l"/>
-            <a:r>
-              <a:rPr lang="en-US" sz="1100" b="true">
+          <a:bodyPr wrap="none">
+            <a:spAutoFit/>
+          </a:bodyPr>
+          <a:lstStyle/>
+          <a:p>
+            <a:pPr>
+              <a:defRPr sz="1100" b="1">
                 <a:solidFill>
-                  <a:srgbClr val="1A3D6B"/>
+                  <a:srgbClr val="2E4053"/>
                 </a:solidFill>
-                <a:ea typeface="微软雅黑"/>
-              </a:rPr>
-              <a:t>大类资产配置情况（%）</a:t>
+                <a:latin typeface="Arial"/>
+              </a:defRPr>
+            </a:pPr>
+            <a:r>
+              <a:t>过去4个季度资产类别配置（%）</a:t>
             </a:r>
           </a:p>
         </p:txBody>
       </p:sp>
       <p:graphicFrame>
         <p:nvGraphicFramePr>
-          <p:cNvPr name="Chart 10" id="10"/>
+          <p:cNvPr id="8" name="Chart 7"/>
           <p:cNvGraphicFramePr>
-            <a:graphicFrameLocks noGrp="true"/>
+            <a:graphicFrameLocks noGrp="1"/>
           </p:cNvGraphicFramePr>
           <p:nvPr/>
         </p:nvGraphicFramePr>
         <p:xfrm>
-          <a:off x="460" y="76"/>
-          <a:ext cx="485" cy="205"/>
+          <a:off x="5989320" y="960120"/>
+          <a:ext cx="5989320" cy="2423160"/>
         </p:xfrm>
         <a:graphic>
           <a:graphicData uri="http://schemas.openxmlformats.org/drawingml/2006/chart">
-            <c:chart r:id="rId2"/>
+            <c:chart xmlns:c="http://schemas.openxmlformats.org/drawingml/2006/chart" r:id="rId2"/>
           </a:graphicData>
         </a:graphic>
       </p:graphicFrame>
       <p:sp>
         <p:nvSpPr>
-          <p:cNvPr name="TextBox 11" id="11"/>
-          <p:cNvSpPr txBox="true"/>
+          <p:cNvPr id="9" name="TextBox 8"/>
+          <p:cNvSpPr txBox="1"/>
           <p:nvPr/>
         </p:nvSpPr>
         <p:spPr>
           <a:xfrm>
-            <a:off x="5969000" y="3657600"/>
-            <a:ext cx="4064000" cy="279400"/>
+            <a:off x="5989320" y="3383280"/>
+            <a:ext cx="4114800" cy="256032"/>
           </a:xfrm>
           <a:prstGeom prst="rect">
             <a:avLst/>
           </a:prstGeom>
+          <a:noFill/>
         </p:spPr>
         <p:txBody>
-          <a:bodyPr anchor="t" rtlCol="false"/>
-          <a:lstStyle/>
-          <a:p>
-            <a:pPr algn="l"/>
-            <a:r>
-              <a:rPr lang="en-US" sz="1100" b="true">
+          <a:bodyPr wrap="none">
+            <a:spAutoFit/>
+          </a:bodyPr>
+          <a:lstStyle/>
+          <a:p>
+            <a:pPr>
+              <a:defRPr sz="1100" b="1">
                 <a:solidFill>
-                  <a:srgbClr val="1A3D6B"/>
+                  <a:srgbClr val="2E4053"/>
                 </a:solidFill>
-                <a:ea typeface="微软雅黑"/>
-              </a:rPr>
-              <a:t>累计收益率走势（%）</a:t>
+                <a:latin typeface="Arial"/>
+              </a:defRPr>
+            </a:pPr>
+            <a:r>
+              <a:t>累计收益率走势（示例，%）</a:t>
             </a:r>
           </a:p>
         </p:txBody>
       </p:sp>
       <p:graphicFrame>
         <p:nvGraphicFramePr>
-          <p:cNvPr name="Chart 12" id="12"/>
+          <p:cNvPr id="10" name="Chart 9"/>
           <p:cNvGraphicFramePr>
-            <a:graphicFrameLocks noGrp="true"/>
+            <a:graphicFrameLocks noGrp="1"/>
           </p:cNvGraphicFramePr>
           <p:nvPr/>
         </p:nvGraphicFramePr>
         <p:xfrm>
-          <a:off x="460" y="312"/>
-          <a:ext cx="485" cy="200"/>
+          <a:off x="5989320" y="3630168"/>
+          <a:ext cx="5989320" cy="2697480"/>
         </p:xfrm>
         <a:graphic>
           <a:graphicData uri="http://schemas.openxmlformats.org/drawingml/2006/chart">
-            <c:chart r:id="rId3"/>
+            <c:chart xmlns:c="http://schemas.openxmlformats.org/drawingml/2006/chart" r:id="rId3"/>
           </a:graphicData>
         </a:graphic>
       </p:graphicFrame>
       <p:sp>
         <p:nvSpPr>
-          <p:cNvPr name="TextBox 13" id="13"/>
-          <p:cNvSpPr txBox="true"/>
+          <p:cNvPr id="11" name="Rectangle 10"/>
+          <p:cNvSpPr/>
           <p:nvPr/>
         </p:nvSpPr>
         <p:spPr>
           <a:xfrm>
-            <a:off x="304800" y="6375400"/>
-            <a:ext cx="7112000" cy="228600"/>
+            <a:off x="5852160" y="658368"/>
+            <a:ext cx="18288" cy="5943600"/>
           </a:xfrm>
           <a:prstGeom prst="rect">
             <a:avLst/>
           </a:prstGeom>
+          <a:solidFill>
+            <a:srgbClr val="CCCCCC"/>
+          </a:solidFill>
+          <a:ln>
+            <a:noFill/>
+          </a:ln>
         </p:spPr>
-        <p:txBody>
-          <a:bodyPr anchor="t" rtlCol="false"/>
-          <a:lstStyle/>
-          <a:p>
-            <a:pPr algn="l"/>
-            <a:r>
-              <a:rPr lang="en-US" sz="800" b="false">
-                <a:solidFill>
-                  <a:srgbClr val="808080"/>
-                </a:solidFill>
-                <a:ea typeface="微软雅黑"/>
-              </a:rPr>
-              <a:t>数据截点：2026/4/30  |  数据来源：WIND，中欧基金</a:t>
-            </a:r>
+        <p:style>
+          <a:lnRef idx="1">
+            <a:schemeClr val="accent1"/>
+          </a:lnRef>
+          <a:fillRef idx="3">
+            <a:schemeClr val="accent1"/>
+          </a:fillRef>
+          <a:effectRef idx="2">
+            <a:schemeClr val="accent1"/>
+          </a:effectRef>
+          <a:fontRef idx="minor">
+            <a:schemeClr val="lt1"/>
+          </a:fontRef>
+        </p:style>
+        <p:txBody>
+          <a:bodyPr rtlCol="0" anchor="ctr"/>
+          <a:lstStyle/>
+          <a:p>
+            <a:pPr algn="ctr"/>
+          </a:p>
+        </p:txBody>
+      </p:sp>
+      <p:sp>
+        <p:nvSpPr>
+          <p:cNvPr id="12" name="Rectangle 11"/>
+          <p:cNvSpPr/>
+          <p:nvPr/>
+        </p:nvSpPr>
+        <p:spPr>
+          <a:xfrm>
+            <a:off x="320040" y="3319272"/>
+            <a:ext cx="11521440" cy="18288"/>
+          </a:xfrm>
+          <a:prstGeom prst="rect">
+            <a:avLst/>
+          </a:prstGeom>
+          <a:solidFill>
+            <a:srgbClr val="CCCCCC"/>
+          </a:solidFill>
+          <a:ln>
+            <a:noFill/>
+          </a:ln>
+        </p:spPr>
+        <p:style>
+          <a:lnRef idx="1">
+            <a:schemeClr val="accent1"/>
+          </a:lnRef>
+          <a:fillRef idx="3">
+            <a:schemeClr val="accent1"/>
+          </a:fillRef>
+          <a:effectRef idx="2">
+            <a:schemeClr val="accent1"/>
+          </a:effectRef>
+          <a:fontRef idx="minor">
+            <a:schemeClr val="lt1"/>
+          </a:fontRef>
+        </p:style>
+        <p:txBody>
+          <a:bodyPr rtlCol="0" anchor="ctr"/>
+          <a:lstStyle/>
+          <a:p>
+            <a:pPr algn="ctr"/>
           </a:p>
         </p:txBody>
       </p:sp>
@@ -5299,6 +4415,7 @@
         <a:font script="Mong" typeface="Mongolian Baiti"/>
         <a:font script="Viet" typeface="Times New Roman"/>
         <a:font script="Uigh" typeface="Microsoft Uighur"/>
+        <a:font script="Geor" typeface="Sylfaen"/>
       </a:majorFont>
       <a:minorFont>
         <a:latin typeface="Calibri"/>
@@ -5333,6 +4450,7 @@
         <a:font script="Mong" typeface="Mongolian Baiti"/>
         <a:font script="Viet" typeface="Arial"/>
         <a:font script="Uigh" typeface="Microsoft Uighur"/>
+        <a:font script="Geor" typeface="Sylfaen"/>
       </a:minorFont>
     </a:fontScheme>
     <a:fmtScheme name="Office">
@@ -5367,20 +4485,16 @@
           <a:gsLst>
             <a:gs pos="0">
               <a:schemeClr val="phClr">
-                <a:shade val="51000"/>
-                <a:satMod val="130000"/>
-              </a:schemeClr>
-            </a:gs>
-            <a:gs pos="80000">
-              <a:schemeClr val="phClr">
-                <a:shade val="93000"/>
+                <a:tint val="100000"/>
+                <a:shade val="100000"/>
                 <a:satMod val="130000"/>
               </a:schemeClr>
             </a:gs>
             <a:gs pos="100000">
               <a:schemeClr val="phClr">
-                <a:shade val="94000"/>
-                <a:satMod val="135000"/>
+                <a:tint val="50000"/>
+                <a:shade val="100000"/>
+                <a:satMod val="350000"/>
               </a:schemeClr>
             </a:gs>
           </a:gsLst>
@@ -5502,7 +4616,46 @@
       </a:bgFillStyleLst>
     </a:fmtScheme>
   </a:themeElements>
-  <a:objectDefaults/>
+  <a:objectDefaults>
+    <a:spDef>
+      <a:spPr/>
+      <a:bodyPr/>
+      <a:lstStyle/>
+      <a:style>
+        <a:lnRef idx="1">
+          <a:schemeClr val="accent1"/>
+        </a:lnRef>
+        <a:fillRef idx="3">
+          <a:schemeClr val="accent1"/>
+        </a:fillRef>
+        <a:effectRef idx="2">
+          <a:schemeClr val="accent1"/>
+        </a:effectRef>
+        <a:fontRef idx="minor">
+          <a:schemeClr val="lt1"/>
+        </a:fontRef>
+      </a:style>
+    </a:spDef>
+    <a:lnDef>
+      <a:spPr/>
+      <a:bodyPr/>
+      <a:lstStyle/>
+      <a:style>
+        <a:lnRef idx="2">
+          <a:schemeClr val="accent1"/>
+        </a:lnRef>
+        <a:fillRef idx="0">
+          <a:schemeClr val="accent1"/>
+        </a:fillRef>
+        <a:effectRef idx="1">
+          <a:schemeClr val="accent1"/>
+        </a:effectRef>
+        <a:fontRef idx="minor">
+          <a:schemeClr val="tx1"/>
+        </a:fontRef>
+      </a:style>
+    </a:lnDef>
+  </a:objectDefaults>
   <a:extraClrSchemeLst/>
 </a:theme>
 </file>
--- a/samples/20260430-偏债混-M1.pptx
+++ b/samples/20260430-偏债混-M1.pptx
@@ -5,9 +5,9 @@
     <p:sldMasterId id="2147483648" r:id="rId1"/>
   </p:sldMasterIdLst>
   <p:sldIdLst>
-    <p:sldId id="256" r:id="rId7"/>
+    <p:sldId id="256" r:id="rId2"/>
   </p:sldIdLst>
-  <p:sldSz cx="12191695" cy="6858000" type="screen4x3"/>
+  <p:sldSz cx="12192000" cy="6858000"/>
   <p:notesSz cx="6858000" cy="9144000"/>
   <p:defaultTextStyle>
     <a:defPPr>
@@ -104,18 +104,39 @@
       </a:defRPr>
     </a:lvl9pPr>
   </p:defaultTextStyle>
+  <p:extLst>
+    <p:ext uri="{EFAFB233-063F-42B5-8137-9DF3F51BA10A}">
+      <p15:sldGuideLst xmlns:p15="http://schemas.microsoft.com/office/powerpoint/2012/main">
+        <p15:guide id="1" orient="horz" pos="2160">
+          <p15:clr>
+            <a:srgbClr val="A4A3A4"/>
+          </p15:clr>
+        </p15:guide>
+        <p15:guide id="2" pos="2880">
+          <p15:clr>
+            <a:srgbClr val="A4A3A4"/>
+          </p15:clr>
+        </p15:guide>
+      </p15:sldGuideLst>
+    </p:ext>
+  </p:extLst>
 </p:presentation>
 </file>
 
 <file path=ppt/charts/chart1.xml><?xml version="1.0" encoding="utf-8"?>
-<c:chartSpace xmlns:c="http://schemas.openxmlformats.org/drawingml/2006/chart" xmlns:a="http://schemas.openxmlformats.org/drawingml/2006/main" xmlns:r="http://schemas.openxmlformats.org/officeDocument/2006/relationships">
+<c:chartSpace xmlns:c="http://schemas.openxmlformats.org/drawingml/2006/chart" xmlns:a="http://schemas.openxmlformats.org/drawingml/2006/main" xmlns:r="http://schemas.openxmlformats.org/officeDocument/2006/relationships" xmlns:c16r2="http://schemas.microsoft.com/office/drawing/2015/06/chart">
   <c:date1904 val="0"/>
+  <c:lang val="zh-CN"/>
+  <c:roundedCorners val="1"/>
+  <c:style val="2"/>
   <c:chart>
     <c:autoTitleDeleted val="0"/>
     <c:plotArea>
+      <c:layout/>
       <c:barChart>
         <c:barDir val="col"/>
         <c:grouping val="clustered"/>
+        <c:varyColors val="1"/>
         <c:ser>
           <c:idx val="0"/>
           <c:order val="0"/>
@@ -130,6 +151,7 @@
               </c:strCache>
             </c:strRef>
           </c:tx>
+          <c:invertIfNegative val="1"/>
           <c:cat>
             <c:strRef>
               <c:f>Sheet1!$A$2:$A$5</c:f>
@@ -166,11 +188,16 @@
                   <c:v>65.8</c:v>
                 </c:pt>
                 <c:pt idx="3">
-                  <c:v>72.4</c:v>
+                  <c:v>72.400000000000006</c:v>
                 </c:pt>
               </c:numCache>
             </c:numRef>
           </c:val>
+          <c:extLst>
+            <c:ext xmlns:c16="http://schemas.microsoft.com/office/drawing/2014/chart" uri="{C3380CC4-5D6E-409C-BE32-E72D297353CC}">
+              <c16:uniqueId val="{00000000-81C7-4338-ABAF-2BE739DA1264}"/>
+            </c:ext>
+          </c:extLst>
         </c:ser>
         <c:ser>
           <c:idx val="1"/>
@@ -186,6 +213,7 @@
               </c:strCache>
             </c:strRef>
           </c:tx>
+          <c:invertIfNegative val="1"/>
           <c:cat>
             <c:strRef>
               <c:f>Sheet1!$A$2:$A$5</c:f>
@@ -222,11 +250,16 @@
                   <c:v>24.1</c:v>
                 </c:pt>
                 <c:pt idx="3">
-                  <c:v>18.6</c:v>
+                  <c:v>18.600000000000001</c:v>
                 </c:pt>
               </c:numCache>
             </c:numRef>
           </c:val>
+          <c:extLst>
+            <c:ext xmlns:c16="http://schemas.microsoft.com/office/drawing/2014/chart" uri="{C3380CC4-5D6E-409C-BE32-E72D297353CC}">
+              <c16:uniqueId val="{00000001-81C7-4338-ABAF-2BE739DA1264}"/>
+            </c:ext>
+          </c:extLst>
         </c:ser>
         <c:ser>
           <c:idx val="2"/>
@@ -242,6 +275,7 @@
               </c:strCache>
             </c:strRef>
           </c:tx>
+          <c:invertIfNegative val="1"/>
           <c:cat>
             <c:strRef>
               <c:f>Sheet1!$A$2:$A$5</c:f>
@@ -269,21 +303,35 @@
                 <c:formatCode>General</c:formatCode>
                 <c:ptCount val="4"/>
                 <c:pt idx="0">
-                  <c:v>9.3</c:v>
+                  <c:v>9.3000000000000007</c:v>
                 </c:pt>
                 <c:pt idx="1">
-                  <c:v>8.7</c:v>
+                  <c:v>8.6999999999999993</c:v>
                 </c:pt>
                 <c:pt idx="2">
                   <c:v>10.1</c:v>
                 </c:pt>
                 <c:pt idx="3">
-                  <c:v>9.0</c:v>
+                  <c:v>9</c:v>
                 </c:pt>
               </c:numCache>
             </c:numRef>
           </c:val>
+          <c:extLst>
+            <c:ext xmlns:c16="http://schemas.microsoft.com/office/drawing/2014/chart" uri="{C3380CC4-5D6E-409C-BE32-E72D297353CC}">
+              <c16:uniqueId val="{00000002-81C7-4338-ABAF-2BE739DA1264}"/>
+            </c:ext>
+          </c:extLst>
         </c:ser>
+        <c:dLbls>
+          <c:showLegendKey val="0"/>
+          <c:showVal val="0"/>
+          <c:showCatName val="0"/>
+          <c:showSerName val="0"/>
+          <c:showPercent val="0"/>
+          <c:showBubbleSize val="0"/>
+        </c:dLbls>
+        <c:gapWidth val="150"/>
         <c:axId val="-2068027336"/>
         <c:axId val="-2113994440"/>
       </c:barChart>
@@ -294,6 +342,7 @@
         </c:scaling>
         <c:delete val="0"/>
         <c:axPos val="b"/>
+        <c:numFmt formatCode="General" sourceLinked="0"/>
         <c:majorTickMark val="out"/>
         <c:minorTickMark val="none"/>
         <c:tickLblPos val="nextTo"/>
@@ -306,22 +355,28 @@
       </c:catAx>
       <c:valAx>
         <c:axId val="-2113994440"/>
-        <c:scaling/>
+        <c:scaling>
+          <c:orientation val="minMax"/>
+        </c:scaling>
         <c:delete val="0"/>
         <c:axPos val="l"/>
         <c:majorGridlines/>
+        <c:numFmt formatCode="General" sourceLinked="1"/>
         <c:majorTickMark val="out"/>
         <c:minorTickMark val="none"/>
         <c:tickLblPos val="nextTo"/>
         <c:crossAx val="-2068027336"/>
         <c:crosses val="autoZero"/>
+        <c:crossBetween val="between"/>
       </c:valAx>
     </c:plotArea>
     <c:legend>
       <c:legendPos val="b"/>
       <c:overlay val="0"/>
     </c:legend>
+    <c:plotVisOnly val="1"/>
     <c:dispBlanksAs val="gap"/>
+    <c:showDLblsOverMax val="1"/>
   </c:chart>
   <c:txPr>
     <a:bodyPr/>
@@ -330,7 +385,7 @@
       <a:pPr>
         <a:defRPr sz="1800"/>
       </a:pPr>
-      <a:endParaRPr lang="en-US"/>
+      <a:endParaRPr lang="zh-CN"/>
     </a:p>
   </c:txPr>
   <c:externalData r:id="rId1">
@@ -340,11 +395,15 @@
 </file>
 
 <file path=ppt/charts/chart2.xml><?xml version="1.0" encoding="utf-8"?>
-<c:chartSpace xmlns:c="http://schemas.openxmlformats.org/drawingml/2006/chart" xmlns:a="http://schemas.openxmlformats.org/drawingml/2006/main" xmlns:r="http://schemas.openxmlformats.org/officeDocument/2006/relationships">
+<c:chartSpace xmlns:c="http://schemas.openxmlformats.org/drawingml/2006/chart" xmlns:a="http://schemas.openxmlformats.org/drawingml/2006/main" xmlns:r="http://schemas.openxmlformats.org/officeDocument/2006/relationships" xmlns:c16r2="http://schemas.microsoft.com/office/drawing/2015/06/chart">
   <c:date1904 val="0"/>
+  <c:lang val="zh-CN"/>
+  <c:roundedCorners val="1"/>
+  <c:style val="2"/>
   <c:chart>
     <c:autoTitleDeleted val="0"/>
     <c:plotArea>
+      <c:layout/>
       <c:lineChart>
         <c:grouping val="standard"/>
         <c:varyColors val="0"/>
@@ -398,13 +457,13 @@
                 <c:formatCode>General</c:formatCode>
                 <c:ptCount val="7"/>
                 <c:pt idx="0">
-                  <c:v>0.0</c:v>
+                  <c:v>0</c:v>
                 </c:pt>
                 <c:pt idx="1">
                   <c:v>3.2</c:v>
                 </c:pt>
                 <c:pt idx="2">
-                  <c:v>5.1</c:v>
+                  <c:v>5.0999999999999996</c:v>
                 </c:pt>
                 <c:pt idx="3">
                   <c:v>7.8</c:v>
@@ -422,6 +481,11 @@
             </c:numRef>
           </c:val>
           <c:smooth val="0"/>
+          <c:extLst>
+            <c:ext xmlns:c16="http://schemas.microsoft.com/office/drawing/2014/chart" uri="{C3380CC4-5D6E-409C-BE32-E72D297353CC}">
+              <c16:uniqueId val="{00000000-F90F-4DEA-9AB8-4C96B1CC70C1}"/>
+            </c:ext>
+          </c:extLst>
         </c:ser>
         <c:ser>
           <c:idx val="1"/>
@@ -473,7 +537,7 @@
                 <c:formatCode>General</c:formatCode>
                 <c:ptCount val="7"/>
                 <c:pt idx="0">
-                  <c:v>0.0</c:v>
+                  <c:v>0</c:v>
                 </c:pt>
                 <c:pt idx="1">
                   <c:v>2.1</c:v>
@@ -497,7 +561,20 @@
             </c:numRef>
           </c:val>
           <c:smooth val="0"/>
+          <c:extLst>
+            <c:ext xmlns:c16="http://schemas.microsoft.com/office/drawing/2014/chart" uri="{C3380CC4-5D6E-409C-BE32-E72D297353CC}">
+              <c16:uniqueId val="{00000001-F90F-4DEA-9AB8-4C96B1CC70C1}"/>
+            </c:ext>
+          </c:extLst>
         </c:ser>
+        <c:dLbls>
+          <c:showLegendKey val="0"/>
+          <c:showVal val="0"/>
+          <c:showCatName val="0"/>
+          <c:showSerName val="0"/>
+          <c:showPercent val="0"/>
+          <c:showBubbleSize val="0"/>
+        </c:dLbls>
         <c:marker val="1"/>
         <c:smooth val="0"/>
         <c:axId val="2118791784"/>
@@ -510,6 +587,7 @@
         </c:scaling>
         <c:delete val="0"/>
         <c:axPos val="b"/>
+        <c:numFmt formatCode="General" sourceLinked="0"/>
         <c:majorTickMark val="out"/>
         <c:minorTickMark val="none"/>
         <c:tickLblPos val="nextTo"/>
@@ -522,20 +600,23 @@
       </c:catAx>
       <c:valAx>
         <c:axId val="2140495176"/>
-        <c:scaling/>
+        <c:scaling>
+          <c:orientation val="minMax"/>
+        </c:scaling>
         <c:delete val="0"/>
         <c:axPos val="l"/>
         <c:majorGridlines/>
+        <c:numFmt formatCode="General" sourceLinked="1"/>
         <c:majorTickMark val="out"/>
         <c:minorTickMark val="none"/>
         <c:tickLblPos val="nextTo"/>
         <c:crossAx val="2118791784"/>
         <c:crosses val="autoZero"/>
+        <c:crossBetween val="between"/>
       </c:valAx>
     </c:plotArea>
     <c:legend>
       <c:legendPos val="b"/>
-      <c:layout/>
       <c:overlay val="0"/>
     </c:legend>
     <c:plotVisOnly val="1"/>
@@ -549,7 +630,7 @@
       <a:pPr>
         <a:defRPr sz="1800"/>
       </a:pPr>
-      <a:endParaRPr lang="en-US"/>
+      <a:endParaRPr lang="zh-CN"/>
     </a:p>
   </c:txPr>
   <c:externalData r:id="rId1">
@@ -596,10 +677,9 @@
           <a:lstStyle/>
           <a:p>
             <a:r>
-              <a:rPr lang="en-US" smtClean="0"/>
+              <a:rPr lang="en-US"/>
               <a:t>Click to edit Master title style</a:t>
             </a:r>
-            <a:endParaRPr lang="en-US"/>
           </a:p>
         </p:txBody>
       </p:sp>
@@ -715,10 +795,9 @@
           </a:lstStyle>
           <a:p>
             <a:r>
-              <a:rPr lang="en-US" smtClean="0"/>
+              <a:rPr lang="en-US"/>
               <a:t>Click to edit Master subtitle style</a:t>
             </a:r>
-            <a:endParaRPr lang="en-US"/>
           </a:p>
         </p:txBody>
       </p:sp>
@@ -739,7 +818,7 @@
           <a:p>
             <a:fld id="{5BCAD085-E8A6-8845-BD4E-CB4CCA059FC4}" type="datetimeFigureOut">
               <a:rPr lang="en-US" smtClean="0"/>
-              <a:t>1/27/13</a:t>
+              <a:t>5/19/2026</a:t>
             </a:fld>
             <a:endParaRPr lang="en-US"/>
           </a:p>
@@ -833,10 +912,9 @@
           <a:lstStyle/>
           <a:p>
             <a:r>
-              <a:rPr lang="en-US" smtClean="0"/>
+              <a:rPr lang="en-US"/>
               <a:t>Click to edit Master title style</a:t>
             </a:r>
-            <a:endParaRPr lang="en-US"/>
           </a:p>
         </p:txBody>
       </p:sp>
@@ -857,38 +935,37 @@
           <a:p>
             <a:pPr lvl="0"/>
             <a:r>
-              <a:rPr lang="en-US" smtClean="0"/>
+              <a:rPr lang="en-US"/>
               <a:t>Click to edit Master text styles</a:t>
             </a:r>
           </a:p>
           <a:p>
             <a:pPr lvl="1"/>
             <a:r>
-              <a:rPr lang="en-US" smtClean="0"/>
+              <a:rPr lang="en-US"/>
               <a:t>Second level</a:t>
             </a:r>
           </a:p>
           <a:p>
             <a:pPr lvl="2"/>
             <a:r>
-              <a:rPr lang="en-US" smtClean="0"/>
+              <a:rPr lang="en-US"/>
               <a:t>Third level</a:t>
             </a:r>
           </a:p>
           <a:p>
             <a:pPr lvl="3"/>
             <a:r>
-              <a:rPr lang="en-US" smtClean="0"/>
+              <a:rPr lang="en-US"/>
               <a:t>Fourth level</a:t>
             </a:r>
           </a:p>
           <a:p>
             <a:pPr lvl="4"/>
             <a:r>
-              <a:rPr lang="en-US" smtClean="0"/>
+              <a:rPr lang="en-US"/>
               <a:t>Fifth level</a:t>
             </a:r>
-            <a:endParaRPr lang="en-US"/>
           </a:p>
         </p:txBody>
       </p:sp>
@@ -909,7 +986,7 @@
           <a:p>
             <a:fld id="{5BCAD085-E8A6-8845-BD4E-CB4CCA059FC4}" type="datetimeFigureOut">
               <a:rPr lang="en-US" smtClean="0"/>
-              <a:t>1/27/13</a:t>
+              <a:t>5/19/2026</a:t>
             </a:fld>
             <a:endParaRPr lang="en-US"/>
           </a:p>
@@ -1008,10 +1085,9 @@
           <a:lstStyle/>
           <a:p>
             <a:r>
-              <a:rPr lang="en-US" smtClean="0"/>
+              <a:rPr lang="en-US"/>
               <a:t>Click to edit Master title style</a:t>
             </a:r>
-            <a:endParaRPr lang="en-US"/>
           </a:p>
         </p:txBody>
       </p:sp>
@@ -1037,38 +1113,37 @@
           <a:p>
             <a:pPr lvl="0"/>
             <a:r>
-              <a:rPr lang="en-US" smtClean="0"/>
+              <a:rPr lang="en-US"/>
               <a:t>Click to edit Master text styles</a:t>
             </a:r>
           </a:p>
           <a:p>
             <a:pPr lvl="1"/>
             <a:r>
-              <a:rPr lang="en-US" smtClean="0"/>
+              <a:rPr lang="en-US"/>
               <a:t>Second level</a:t>
             </a:r>
           </a:p>
           <a:p>
             <a:pPr lvl="2"/>
             <a:r>
-              <a:rPr lang="en-US" smtClean="0"/>
+              <a:rPr lang="en-US"/>
               <a:t>Third level</a:t>
             </a:r>
           </a:p>
           <a:p>
             <a:pPr lvl="3"/>
             <a:r>
-              <a:rPr lang="en-US" smtClean="0"/>
+              <a:rPr lang="en-US"/>
               <a:t>Fourth level</a:t>
             </a:r>
           </a:p>
           <a:p>
             <a:pPr lvl="4"/>
             <a:r>
-              <a:rPr lang="en-US" smtClean="0"/>
+              <a:rPr lang="en-US"/>
               <a:t>Fifth level</a:t>
             </a:r>
-            <a:endParaRPr lang="en-US"/>
           </a:p>
         </p:txBody>
       </p:sp>
@@ -1089,7 +1164,7 @@
           <a:p>
             <a:fld id="{5BCAD085-E8A6-8845-BD4E-CB4CCA059FC4}" type="datetimeFigureOut">
               <a:rPr lang="en-US" smtClean="0"/>
-              <a:t>1/27/13</a:t>
+              <a:t>5/19/2026</a:t>
             </a:fld>
             <a:endParaRPr lang="en-US"/>
           </a:p>
@@ -1183,10 +1258,9 @@
           <a:lstStyle/>
           <a:p>
             <a:r>
-              <a:rPr lang="en-US" smtClean="0"/>
+              <a:rPr lang="en-US"/>
               <a:t>Click to edit Master title style</a:t>
             </a:r>
-            <a:endParaRPr lang="en-US"/>
           </a:p>
         </p:txBody>
       </p:sp>
@@ -1207,38 +1281,37 @@
           <a:p>
             <a:pPr lvl="0"/>
             <a:r>
-              <a:rPr lang="en-US" smtClean="0"/>
+              <a:rPr lang="en-US"/>
               <a:t>Click to edit Master text styles</a:t>
             </a:r>
           </a:p>
           <a:p>
             <a:pPr lvl="1"/>
             <a:r>
-              <a:rPr lang="en-US" smtClean="0"/>
+              <a:rPr lang="en-US"/>
               <a:t>Second level</a:t>
             </a:r>
           </a:p>
           <a:p>
             <a:pPr lvl="2"/>
             <a:r>
-              <a:rPr lang="en-US" smtClean="0"/>
+              <a:rPr lang="en-US"/>
               <a:t>Third level</a:t>
             </a:r>
           </a:p>
           <a:p>
             <a:pPr lvl="3"/>
             <a:r>
-              <a:rPr lang="en-US" smtClean="0"/>
+              <a:rPr lang="en-US"/>
               <a:t>Fourth level</a:t>
             </a:r>
           </a:p>
           <a:p>
             <a:pPr lvl="4"/>
             <a:r>
-              <a:rPr lang="en-US" smtClean="0"/>
+              <a:rPr lang="en-US"/>
               <a:t>Fifth level</a:t>
             </a:r>
-            <a:endParaRPr lang="en-US"/>
           </a:p>
         </p:txBody>
       </p:sp>
@@ -1259,7 +1332,7 @@
           <a:p>
             <a:fld id="{5BCAD085-E8A6-8845-BD4E-CB4CCA059FC4}" type="datetimeFigureOut">
               <a:rPr lang="en-US" smtClean="0"/>
-              <a:t>1/27/13</a:t>
+              <a:t>5/19/2026</a:t>
             </a:fld>
             <a:endParaRPr lang="en-US"/>
           </a:p>
@@ -1362,10 +1435,9 @@
           </a:lstStyle>
           <a:p>
             <a:r>
-              <a:rPr lang="en-US" smtClean="0"/>
+              <a:rPr lang="en-US"/>
               <a:t>Click to edit Master title style</a:t>
             </a:r>
-            <a:endParaRPr lang="en-US"/>
           </a:p>
         </p:txBody>
       </p:sp>
@@ -1482,7 +1554,7 @@
           <a:p>
             <a:pPr lvl="0"/>
             <a:r>
-              <a:rPr lang="en-US" smtClean="0"/>
+              <a:rPr lang="en-US"/>
               <a:t>Click to edit Master text styles</a:t>
             </a:r>
           </a:p>
@@ -1505,7 +1577,7 @@
           <a:p>
             <a:fld id="{5BCAD085-E8A6-8845-BD4E-CB4CCA059FC4}" type="datetimeFigureOut">
               <a:rPr lang="en-US" smtClean="0"/>
-              <a:t>1/27/13</a:t>
+              <a:t>5/19/2026</a:t>
             </a:fld>
             <a:endParaRPr lang="en-US"/>
           </a:p>
@@ -1599,10 +1671,9 @@
           <a:lstStyle/>
           <a:p>
             <a:r>
-              <a:rPr lang="en-US" smtClean="0"/>
+              <a:rPr lang="en-US"/>
               <a:t>Click to edit Master title style</a:t>
             </a:r>
-            <a:endParaRPr lang="en-US"/>
           </a:p>
         </p:txBody>
       </p:sp>
@@ -1656,38 +1727,37 @@
           <a:p>
             <a:pPr lvl="0"/>
             <a:r>
-              <a:rPr lang="en-US" smtClean="0"/>
+              <a:rPr lang="en-US"/>
               <a:t>Click to edit Master text styles</a:t>
             </a:r>
           </a:p>
           <a:p>
             <a:pPr lvl="1"/>
             <a:r>
-              <a:rPr lang="en-US" smtClean="0"/>
+              <a:rPr lang="en-US"/>
               <a:t>Second level</a:t>
             </a:r>
           </a:p>
           <a:p>
             <a:pPr lvl="2"/>
             <a:r>
-              <a:rPr lang="en-US" smtClean="0"/>
+              <a:rPr lang="en-US"/>
               <a:t>Third level</a:t>
             </a:r>
           </a:p>
           <a:p>
             <a:pPr lvl="3"/>
             <a:r>
-              <a:rPr lang="en-US" smtClean="0"/>
+              <a:rPr lang="en-US"/>
               <a:t>Fourth level</a:t>
             </a:r>
           </a:p>
           <a:p>
             <a:pPr lvl="4"/>
             <a:r>
-              <a:rPr lang="en-US" smtClean="0"/>
+              <a:rPr lang="en-US"/>
               <a:t>Fifth level</a:t>
             </a:r>
-            <a:endParaRPr lang="en-US"/>
           </a:p>
         </p:txBody>
       </p:sp>
@@ -1741,38 +1811,37 @@
           <a:p>
             <a:pPr lvl="0"/>
             <a:r>
-              <a:rPr lang="en-US" smtClean="0"/>
+              <a:rPr lang="en-US"/>
               <a:t>Click to edit Master text styles</a:t>
             </a:r>
           </a:p>
           <a:p>
             <a:pPr lvl="1"/>
             <a:r>
-              <a:rPr lang="en-US" smtClean="0"/>
+              <a:rPr lang="en-US"/>
               <a:t>Second level</a:t>
             </a:r>
           </a:p>
           <a:p>
             <a:pPr lvl="2"/>
             <a:r>
-              <a:rPr lang="en-US" smtClean="0"/>
+              <a:rPr lang="en-US"/>
               <a:t>Third level</a:t>
             </a:r>
           </a:p>
           <a:p>
             <a:pPr lvl="3"/>
             <a:r>
-              <a:rPr lang="en-US" smtClean="0"/>
+              <a:rPr lang="en-US"/>
               <a:t>Fourth level</a:t>
             </a:r>
           </a:p>
           <a:p>
             <a:pPr lvl="4"/>
             <a:r>
-              <a:rPr lang="en-US" smtClean="0"/>
+              <a:rPr lang="en-US"/>
               <a:t>Fifth level</a:t>
             </a:r>
-            <a:endParaRPr lang="en-US"/>
           </a:p>
         </p:txBody>
       </p:sp>
@@ -1793,7 +1862,7 @@
           <a:p>
             <a:fld id="{5BCAD085-E8A6-8845-BD4E-CB4CCA059FC4}" type="datetimeFigureOut">
               <a:rPr lang="en-US" smtClean="0"/>
-              <a:t>1/27/13</a:t>
+              <a:t>5/19/2026</a:t>
             </a:fld>
             <a:endParaRPr lang="en-US"/>
           </a:p>
@@ -1891,10 +1960,9 @@
           </a:lstStyle>
           <a:p>
             <a:r>
-              <a:rPr lang="en-US" smtClean="0"/>
+              <a:rPr lang="en-US"/>
               <a:t>Click to edit Master title style</a:t>
             </a:r>
-            <a:endParaRPr lang="en-US"/>
           </a:p>
         </p:txBody>
       </p:sp>
@@ -1957,7 +2025,7 @@
           <a:p>
             <a:pPr lvl="0"/>
             <a:r>
-              <a:rPr lang="en-US" smtClean="0"/>
+              <a:rPr lang="en-US"/>
               <a:t>Click to edit Master text styles</a:t>
             </a:r>
           </a:p>
@@ -2013,38 +2081,37 @@
           <a:p>
             <a:pPr lvl="0"/>
             <a:r>
-              <a:rPr lang="en-US" smtClean="0"/>
+              <a:rPr lang="en-US"/>
               <a:t>Click to edit Master text styles</a:t>
             </a:r>
           </a:p>
           <a:p>
             <a:pPr lvl="1"/>
             <a:r>
-              <a:rPr lang="en-US" smtClean="0"/>
+              <a:rPr lang="en-US"/>
               <a:t>Second level</a:t>
             </a:r>
           </a:p>
           <a:p>
             <a:pPr lvl="2"/>
             <a:r>
-              <a:rPr lang="en-US" smtClean="0"/>
+              <a:rPr lang="en-US"/>
               <a:t>Third level</a:t>
             </a:r>
           </a:p>
           <a:p>
             <a:pPr lvl="3"/>
             <a:r>
-              <a:rPr lang="en-US" smtClean="0"/>
+              <a:rPr lang="en-US"/>
               <a:t>Fourth level</a:t>
             </a:r>
           </a:p>
           <a:p>
             <a:pPr lvl="4"/>
             <a:r>
-              <a:rPr lang="en-US" smtClean="0"/>
+              <a:rPr lang="en-US"/>
               <a:t>Fifth level</a:t>
             </a:r>
-            <a:endParaRPr lang="en-US"/>
           </a:p>
         </p:txBody>
       </p:sp>
@@ -2107,7 +2174,7 @@
           <a:p>
             <a:pPr lvl="0"/>
             <a:r>
-              <a:rPr lang="en-US" smtClean="0"/>
+              <a:rPr lang="en-US"/>
               <a:t>Click to edit Master text styles</a:t>
             </a:r>
           </a:p>
@@ -2163,38 +2230,37 @@
           <a:p>
             <a:pPr lvl="0"/>
             <a:r>
-              <a:rPr lang="en-US" smtClean="0"/>
+              <a:rPr lang="en-US"/>
               <a:t>Click to edit Master text styles</a:t>
             </a:r>
           </a:p>
           <a:p>
             <a:pPr lvl="1"/>
             <a:r>
-              <a:rPr lang="en-US" smtClean="0"/>
+              <a:rPr lang="en-US"/>
               <a:t>Second level</a:t>
             </a:r>
           </a:p>
           <a:p>
             <a:pPr lvl="2"/>
             <a:r>
-              <a:rPr lang="en-US" smtClean="0"/>
+              <a:rPr lang="en-US"/>
               <a:t>Third level</a:t>
             </a:r>
           </a:p>
           <a:p>
             <a:pPr lvl="3"/>
             <a:r>
-              <a:rPr lang="en-US" smtClean="0"/>
+              <a:rPr lang="en-US"/>
               <a:t>Fourth level</a:t>
             </a:r>
           </a:p>
           <a:p>
             <a:pPr lvl="4"/>
             <a:r>
-              <a:rPr lang="en-US" smtClean="0"/>
+              <a:rPr lang="en-US"/>
               <a:t>Fifth level</a:t>
             </a:r>
-            <a:endParaRPr lang="en-US"/>
           </a:p>
         </p:txBody>
       </p:sp>
@@ -2215,7 +2281,7 @@
           <a:p>
             <a:fld id="{5BCAD085-E8A6-8845-BD4E-CB4CCA059FC4}" type="datetimeFigureOut">
               <a:rPr lang="en-US" smtClean="0"/>
-              <a:t>1/27/13</a:t>
+              <a:t>5/19/2026</a:t>
             </a:fld>
             <a:endParaRPr lang="en-US"/>
           </a:p>
@@ -2309,10 +2375,9 @@
           <a:lstStyle/>
           <a:p>
             <a:r>
-              <a:rPr lang="en-US" smtClean="0"/>
+              <a:rPr lang="en-US"/>
               <a:t>Click to edit Master title style</a:t>
             </a:r>
-            <a:endParaRPr lang="en-US"/>
           </a:p>
         </p:txBody>
       </p:sp>
@@ -2333,7 +2398,7 @@
           <a:p>
             <a:fld id="{5BCAD085-E8A6-8845-BD4E-CB4CCA059FC4}" type="datetimeFigureOut">
               <a:rPr lang="en-US" smtClean="0"/>
-              <a:t>1/27/13</a:t>
+              <a:t>5/19/2026</a:t>
             </a:fld>
             <a:endParaRPr lang="en-US"/>
           </a:p>
@@ -2428,7 +2493,7 @@
           <a:p>
             <a:fld id="{5BCAD085-E8A6-8845-BD4E-CB4CCA059FC4}" type="datetimeFigureOut">
               <a:rPr lang="en-US" smtClean="0"/>
-              <a:t>1/27/13</a:t>
+              <a:t>5/19/2026</a:t>
             </a:fld>
             <a:endParaRPr lang="en-US"/>
           </a:p>
@@ -2531,10 +2596,9 @@
           </a:lstStyle>
           <a:p>
             <a:r>
-              <a:rPr lang="en-US" smtClean="0"/>
+              <a:rPr lang="en-US"/>
               <a:t>Click to edit Master title style</a:t>
             </a:r>
-            <a:endParaRPr lang="en-US"/>
           </a:p>
         </p:txBody>
       </p:sp>
@@ -2588,38 +2652,37 @@
           <a:p>
             <a:pPr lvl="0"/>
             <a:r>
-              <a:rPr lang="en-US" smtClean="0"/>
+              <a:rPr lang="en-US"/>
               <a:t>Click to edit Master text styles</a:t>
             </a:r>
           </a:p>
           <a:p>
             <a:pPr lvl="1"/>
             <a:r>
-              <a:rPr lang="en-US" smtClean="0"/>
+              <a:rPr lang="en-US"/>
               <a:t>Second level</a:t>
             </a:r>
           </a:p>
           <a:p>
             <a:pPr lvl="2"/>
             <a:r>
-              <a:rPr lang="en-US" smtClean="0"/>
+              <a:rPr lang="en-US"/>
               <a:t>Third level</a:t>
             </a:r>
           </a:p>
           <a:p>
             <a:pPr lvl="3"/>
             <a:r>
-              <a:rPr lang="en-US" smtClean="0"/>
+              <a:rPr lang="en-US"/>
               <a:t>Fourth level</a:t>
             </a:r>
           </a:p>
           <a:p>
             <a:pPr lvl="4"/>
             <a:r>
-              <a:rPr lang="en-US" smtClean="0"/>
+              <a:rPr lang="en-US"/>
               <a:t>Fifth level</a:t>
             </a:r>
-            <a:endParaRPr lang="en-US"/>
           </a:p>
         </p:txBody>
       </p:sp>
@@ -2682,7 +2745,7 @@
           <a:p>
             <a:pPr lvl="0"/>
             <a:r>
-              <a:rPr lang="en-US" smtClean="0"/>
+              <a:rPr lang="en-US"/>
               <a:t>Click to edit Master text styles</a:t>
             </a:r>
           </a:p>
@@ -2705,7 +2768,7 @@
           <a:p>
             <a:fld id="{5BCAD085-E8A6-8845-BD4E-CB4CCA059FC4}" type="datetimeFigureOut">
               <a:rPr lang="en-US" smtClean="0"/>
-              <a:t>1/27/13</a:t>
+              <a:t>5/19/2026</a:t>
             </a:fld>
             <a:endParaRPr lang="en-US"/>
           </a:p>
@@ -2808,10 +2871,9 @@
           </a:lstStyle>
           <a:p>
             <a:r>
-              <a:rPr lang="en-US" smtClean="0"/>
+              <a:rPr lang="en-US"/>
               <a:t>Click to edit Master title style</a:t>
             </a:r>
-            <a:endParaRPr lang="en-US"/>
           </a:p>
         </p:txBody>
       </p:sp>
@@ -2935,7 +2997,7 @@
           <a:p>
             <a:pPr lvl="0"/>
             <a:r>
-              <a:rPr lang="en-US" smtClean="0"/>
+              <a:rPr lang="en-US"/>
               <a:t>Click to edit Master text styles</a:t>
             </a:r>
           </a:p>
@@ -2958,7 +3020,7 @@
           <a:p>
             <a:fld id="{5BCAD085-E8A6-8845-BD4E-CB4CCA059FC4}" type="datetimeFigureOut">
               <a:rPr lang="en-US" smtClean="0"/>
-              <a:t>1/27/13</a:t>
+              <a:t>5/19/2026</a:t>
             </a:fld>
             <a:endParaRPr lang="en-US"/>
           </a:p>
@@ -3067,10 +3129,9 @@
           <a:lstStyle/>
           <a:p>
             <a:r>
-              <a:rPr lang="en-US" smtClean="0"/>
+              <a:rPr lang="en-US"/>
               <a:t>Click to edit Master title style</a:t>
             </a:r>
-            <a:endParaRPr lang="en-US"/>
           </a:p>
         </p:txBody>
       </p:sp>
@@ -3101,38 +3162,37 @@
           <a:p>
             <a:pPr lvl="0"/>
             <a:r>
-              <a:rPr lang="en-US" smtClean="0"/>
+              <a:rPr lang="en-US"/>
               <a:t>Click to edit Master text styles</a:t>
             </a:r>
           </a:p>
           <a:p>
             <a:pPr lvl="1"/>
             <a:r>
-              <a:rPr lang="en-US" smtClean="0"/>
+              <a:rPr lang="en-US"/>
               <a:t>Second level</a:t>
             </a:r>
           </a:p>
           <a:p>
             <a:pPr lvl="2"/>
             <a:r>
-              <a:rPr lang="en-US" smtClean="0"/>
+              <a:rPr lang="en-US"/>
               <a:t>Third level</a:t>
             </a:r>
           </a:p>
           <a:p>
             <a:pPr lvl="3"/>
             <a:r>
-              <a:rPr lang="en-US" smtClean="0"/>
+              <a:rPr lang="en-US"/>
               <a:t>Fourth level</a:t>
             </a:r>
           </a:p>
           <a:p>
             <a:pPr lvl="4"/>
             <a:r>
-              <a:rPr lang="en-US" smtClean="0"/>
+              <a:rPr lang="en-US"/>
               <a:t>Fifth level</a:t>
             </a:r>
-            <a:endParaRPr lang="en-US"/>
           </a:p>
         </p:txBody>
       </p:sp>
@@ -3171,7 +3231,7 @@
           <a:p>
             <a:fld id="{5BCAD085-E8A6-8845-BD4E-CB4CCA059FC4}" type="datetimeFigureOut">
               <a:rPr lang="en-US" smtClean="0"/>
-              <a:t>1/27/13</a:t>
+              <a:t>5/19/2026</a:t>
             </a:fld>
             <a:endParaRPr lang="en-US"/>
           </a:p>
@@ -3530,7 +3590,7 @@
 </file>
 
 <file path=ppt/slides/slide1.xml><?xml version="1.0" encoding="utf-8"?>
-<p:sld xmlns:a="http://schemas.openxmlformats.org/drawingml/2006/main" xmlns:p="http://schemas.openxmlformats.org/presentationml/2006/main" xmlns:r="http://schemas.openxmlformats.org/officeDocument/2006/relationships">
+<p:sld xmlns:a="http://schemas.openxmlformats.org/drawingml/2006/main" xmlns:r="http://schemas.openxmlformats.org/officeDocument/2006/relationships" xmlns:p="http://schemas.openxmlformats.org/presentationml/2006/main">
   <p:cSld>
     <p:spTree>
       <p:nvGrpSpPr>
@@ -3538,7 +3598,14 @@
         <p:cNvGrpSpPr/>
         <p:nvPr/>
       </p:nvGrpSpPr>
-      <p:grpSpPr/>
+      <p:grpSpPr>
+        <a:xfrm>
+          <a:off x="0" y="0"/>
+          <a:ext cx="0" cy="0"/>
+          <a:chOff x="0" y="0"/>
+          <a:chExt cx="0" cy="0"/>
+        </a:xfrm>
+      </p:grpSpPr>
       <p:sp>
         <p:nvSpPr>
           <p:cNvPr id="2" name="TextBox 1"/>
@@ -3606,8 +3673,10 @@
               </a:defRPr>
             </a:pPr>
             <a:r>
+              <a:rPr dirty="0" err="1"/>
               <a:t>基金基本情况</a:t>
             </a:r>
+            <a:endParaRPr dirty="0"/>
           </a:p>
         </p:txBody>
       </p:sp>
@@ -3620,7 +3689,7 @@
         <p:spPr>
           <a:xfrm>
             <a:off x="411480" y="960120"/>
-            <a:ext cx="5349240" cy="2331720"/>
+            <a:ext cx="5349240" cy="1318310"/>
           </a:xfrm>
           <a:prstGeom prst="rect">
             <a:avLst/>
@@ -3645,8 +3714,57 @@
               </a:defRPr>
             </a:pPr>
             <a:r>
-              <a:t>基金名称：蓝海稳健增长混合A（示例）</a:t>
-            </a:r>
+              <a:rPr lang="zh-CN" altLang="en-US" sz="1050" b="1" dirty="0">
+                <a:solidFill>
+                  <a:srgbClr val="292929"/>
+                </a:solidFill>
+                <a:latin typeface="Arial" panose="020B0604020202020204" pitchFamily="34" charset="0"/>
+                <a:cs typeface="Arial" panose="020B0604020202020204" pitchFamily="34" charset="0"/>
+              </a:rPr>
+              <a:t>偏债混</a:t>
+            </a:r>
+            <a:r>
+              <a:rPr lang="en-US" altLang="zh-CN" sz="1050" b="1" dirty="0">
+                <a:solidFill>
+                  <a:srgbClr val="292929"/>
+                </a:solidFill>
+                <a:latin typeface="Arial" panose="020B0604020202020204" pitchFamily="34" charset="0"/>
+                <a:cs typeface="Arial" panose="020B0604020202020204" pitchFamily="34" charset="0"/>
+              </a:rPr>
+              <a:t>-</a:t>
+            </a:r>
+            <a:r>
+              <a:rPr sz="1050" b="1" dirty="0" err="1">
+                <a:solidFill>
+                  <a:srgbClr val="292929"/>
+                </a:solidFill>
+                <a:latin typeface="Arial"/>
+              </a:rPr>
+              <a:t>蓝海稳健增长混合</a:t>
+            </a:r>
+            <a:r>
+              <a:rPr dirty="0" err="1"/>
+              <a:t>A</a:t>
+            </a:r>
+            <a:endParaRPr lang="en-US" dirty="0"/>
+          </a:p>
+          <a:p>
+            <a:pPr>
+              <a:spcAft>
+                <a:spcPts val="400"/>
+              </a:spcAft>
+              <a:defRPr sz="1050" b="1">
+                <a:solidFill>
+                  <a:srgbClr val="292929"/>
+                </a:solidFill>
+                <a:latin typeface="Arial"/>
+              </a:defRPr>
+            </a:pPr>
+            <a:r>
+              <a:rPr dirty="0" err="1"/>
+              <a:t>基金类型：偏股混合型基金</a:t>
+            </a:r>
+            <a:endParaRPr dirty="0"/>
           </a:p>
           <a:p>
             <a:pPr>
@@ -3661,7 +3779,16 @@
               </a:defRPr>
             </a:pPr>
             <a:r>
-              <a:t>基金类型：偏股混合型基金</a:t>
+              <a:rPr dirty="0"/>
+              <a:t>成立日期：2019-06-12　　最新规模：58.6 </a:t>
+            </a:r>
+            <a:r>
+              <a:rPr dirty="0" err="1"/>
+              <a:t>亿元（示例</a:t>
+            </a:r>
+            <a:r>
+              <a:rPr dirty="0"/>
+              <a:t>）</a:t>
             </a:r>
           </a:p>
           <a:p>
@@ -3677,7 +3804,12 @@
               </a:defRPr>
             </a:pPr>
             <a:r>
-              <a:t>成立日期：2019-06-12　　最新规模：58.6 亿元（示例）</a:t>
+              <a:rPr dirty="0" err="1"/>
+              <a:t>基金经理：张明、李悦（示例</a:t>
+            </a:r>
+            <a:r>
+              <a:rPr dirty="0"/>
+              <a:t>）</a:t>
             </a:r>
           </a:p>
           <a:p>
@@ -3693,7 +3825,8 @@
               </a:defRPr>
             </a:pPr>
             <a:r>
-              <a:t>基金经理：张明、李悦（示例）</a:t>
+              <a:rPr dirty="0"/>
+              <a:t>业绩比较基准：沪深300指数收益率×70% + 中债综合指数×30%</a:t>
             </a:r>
           </a:p>
           <a:p>
@@ -3709,24 +3842,14 @@
               </a:defRPr>
             </a:pPr>
             <a:r>
-              <a:t>业绩比较基准：沪深300指数收益率×70% + 中债综合指数×30%</a:t>
-            </a:r>
-          </a:p>
-          <a:p>
-            <a:pPr>
-              <a:spcAft>
-                <a:spcPts val="400"/>
-              </a:spcAft>
-              <a:defRPr sz="1050" b="0">
-                <a:solidFill>
-                  <a:srgbClr val="292929"/>
-                </a:solidFill>
-                <a:latin typeface="Arial"/>
-              </a:defRPr>
-            </a:pPr>
-            <a:r>
-              <a:t>风险等级：R3（中风险）　　托管人：示例商业银行</a:t>
-            </a:r>
+              <a:rPr dirty="0"/>
+              <a:t>风险等级：R3（中风险）　　</a:t>
+            </a:r>
+            <a:r>
+              <a:rPr dirty="0" err="1"/>
+              <a:t>托管人：示例商业银行</a:t>
+            </a:r>
+            <a:endParaRPr dirty="0"/>
           </a:p>
         </p:txBody>
       </p:sp>
@@ -3785,10 +3908,34 @@
                 <a:tableStyleId>{5C22544A-7EE6-4342-B048-85BDC9FD1C3A}</a:tableStyleId>
               </a:tblPr>
               <a:tblGrid>
-                <a:gridCol w="1337310"/>
-                <a:gridCol w="1337310"/>
-                <a:gridCol w="1337310"/>
-                <a:gridCol w="1337310"/>
+                <a:gridCol w="1337310">
+                  <a:extLst>
+                    <a:ext uri="{9D8B030D-6E8A-4147-A177-3AD203B41FA5}">
+                      <a16:colId xmlns:a16="http://schemas.microsoft.com/office/drawing/2014/main" val="20000"/>
+                    </a:ext>
+                  </a:extLst>
+                </a:gridCol>
+                <a:gridCol w="1337310">
+                  <a:extLst>
+                    <a:ext uri="{9D8B030D-6E8A-4147-A177-3AD203B41FA5}">
+                      <a16:colId xmlns:a16="http://schemas.microsoft.com/office/drawing/2014/main" val="20001"/>
+                    </a:ext>
+                  </a:extLst>
+                </a:gridCol>
+                <a:gridCol w="1337310">
+                  <a:extLst>
+                    <a:ext uri="{9D8B030D-6E8A-4147-A177-3AD203B41FA5}">
+                      <a16:colId xmlns:a16="http://schemas.microsoft.com/office/drawing/2014/main" val="20002"/>
+                    </a:ext>
+                  </a:extLst>
+                </a:gridCol>
+                <a:gridCol w="1337310">
+                  <a:extLst>
+                    <a:ext uri="{9D8B030D-6E8A-4147-A177-3AD203B41FA5}">
+                      <a16:colId xmlns:a16="http://schemas.microsoft.com/office/drawing/2014/main" val="20003"/>
+                    </a:ext>
+                  </a:extLst>
+                </a:gridCol>
               </a:tblGrid>
               <a:tr h="308610">
                 <a:tc>
@@ -3797,7 +3944,7 @@
                     <a:lstStyle/>
                     <a:p>
                       <a:pPr>
-                        <a:defRPr b="1" sz="950">
+                        <a:defRPr sz="950" b="1">
                           <a:solidFill>
                             <a:srgbClr val="FFFFFF"/>
                           </a:solidFill>
@@ -3821,7 +3968,7 @@
                     <a:lstStyle/>
                     <a:p>
                       <a:pPr>
-                        <a:defRPr b="1" sz="950">
+                        <a:defRPr sz="950" b="1">
                           <a:solidFill>
                             <a:srgbClr val="FFFFFF"/>
                           </a:solidFill>
@@ -3845,7 +3992,7 @@
                     <a:lstStyle/>
                     <a:p>
                       <a:pPr>
-                        <a:defRPr b="1" sz="950">
+                        <a:defRPr sz="950" b="1">
                           <a:solidFill>
                             <a:srgbClr val="FFFFFF"/>
                           </a:solidFill>
@@ -3869,7 +4016,7 @@
                     <a:lstStyle/>
                     <a:p>
                       <a:pPr>
-                        <a:defRPr b="1" sz="950">
+                        <a:defRPr sz="950" b="1">
                           <a:solidFill>
                             <a:srgbClr val="FFFFFF"/>
                           </a:solidFill>
@@ -3887,6 +4034,11 @@
                     </a:solidFill>
                   </a:tcPr>
                 </a:tc>
+                <a:extLst>
+                  <a:ext uri="{0D108BD9-81ED-4DB2-BD59-A6C34878D82A}">
+                    <a16:rowId xmlns:a16="http://schemas.microsoft.com/office/drawing/2014/main" val="10000"/>
+                  </a:ext>
+                </a:extLst>
               </a:tr>
               <a:tr h="308610">
                 <a:tc>
@@ -3969,6 +4121,11 @@
                   </a:txBody>
                   <a:tcPr/>
                 </a:tc>
+                <a:extLst>
+                  <a:ext uri="{0D108BD9-81ED-4DB2-BD59-A6C34878D82A}">
+                    <a16:rowId xmlns:a16="http://schemas.microsoft.com/office/drawing/2014/main" val="10001"/>
+                  </a:ext>
+                </a:extLst>
               </a:tr>
               <a:tr h="308610">
                 <a:tc>
@@ -4051,6 +4208,11 @@
                   </a:txBody>
                   <a:tcPr/>
                 </a:tc>
+                <a:extLst>
+                  <a:ext uri="{0D108BD9-81ED-4DB2-BD59-A6C34878D82A}">
+                    <a16:rowId xmlns:a16="http://schemas.microsoft.com/office/drawing/2014/main" val="10002"/>
+                  </a:ext>
+                </a:extLst>
               </a:tr>
               <a:tr h="308610">
                 <a:tc>
@@ -4133,6 +4295,11 @@
                   </a:txBody>
                   <a:tcPr/>
                 </a:tc>
+                <a:extLst>
+                  <a:ext uri="{0D108BD9-81ED-4DB2-BD59-A6C34878D82A}">
+                    <a16:rowId xmlns:a16="http://schemas.microsoft.com/office/drawing/2014/main" val="10003"/>
+                  </a:ext>
+                </a:extLst>
               </a:tr>
             </a:tbl>
           </a:graphicData>
@@ -4188,7 +4355,7 @@
         </p:xfrm>
         <a:graphic>
           <a:graphicData uri="http://schemas.openxmlformats.org/drawingml/2006/chart">
-            <c:chart xmlns:c="http://schemas.openxmlformats.org/drawingml/2006/chart" r:id="rId2"/>
+            <c:chart xmlns:c="http://schemas.openxmlformats.org/drawingml/2006/chart" xmlns:r="http://schemas.openxmlformats.org/officeDocument/2006/relationships" r:id="rId2"/>
           </a:graphicData>
         </a:graphic>
       </p:graphicFrame>
@@ -4242,7 +4409,7 @@
         </p:xfrm>
         <a:graphic>
           <a:graphicData uri="http://schemas.openxmlformats.org/drawingml/2006/chart">
-            <c:chart xmlns:c="http://schemas.openxmlformats.org/drawingml/2006/chart" r:id="rId3"/>
+            <c:chart xmlns:c="http://schemas.openxmlformats.org/drawingml/2006/chart" xmlns:r="http://schemas.openxmlformats.org/officeDocument/2006/relationships" r:id="rId3"/>
           </a:graphicData>
         </a:graphic>
       </p:graphicFrame>
@@ -4286,6 +4453,7 @@
           <a:lstStyle/>
           <a:p>
             <a:pPr algn="ctr"/>
+            <a:endParaRPr/>
           </a:p>
         </p:txBody>
       </p:sp>
@@ -4329,6 +4497,7 @@
           <a:lstStyle/>
           <a:p>
             <a:pPr algn="ctr"/>
+            <a:endParaRPr/>
           </a:p>
         </p:txBody>
       </p:sp>

--- a/samples/20260430-偏债混-M1.pptx
+++ b/samples/20260430-偏债混-M1.pptx
@@ -5,7 +5,7 @@
     <p:sldMasterId id="2147483648" r:id="rId1"/>
   </p:sldMasterIdLst>
   <p:sldIdLst>
-    <p:sldId id="256" r:id="rId2"/>
+    <p:sldId id="257" r:id="rId2"/>
   </p:sldIdLst>
   <p:sldSz cx="12192000" cy="6858000"/>
   <p:notesSz cx="6858000" cy="9144000"/>
@@ -818,7 +818,7 @@
           <a:p>
             <a:fld id="{5BCAD085-E8A6-8845-BD4E-CB4CCA059FC4}" type="datetimeFigureOut">
               <a:rPr lang="en-US" smtClean="0"/>
-              <a:t>5/19/2026</a:t>
+              <a:t>5/20/2026</a:t>
             </a:fld>
             <a:endParaRPr lang="en-US"/>
           </a:p>
@@ -986,7 +986,7 @@
           <a:p>
             <a:fld id="{5BCAD085-E8A6-8845-BD4E-CB4CCA059FC4}" type="datetimeFigureOut">
               <a:rPr lang="en-US" smtClean="0"/>
-              <a:t>5/19/2026</a:t>
+              <a:t>5/20/2026</a:t>
             </a:fld>
             <a:endParaRPr lang="en-US"/>
           </a:p>
@@ -1164,7 +1164,7 @@
           <a:p>
             <a:fld id="{5BCAD085-E8A6-8845-BD4E-CB4CCA059FC4}" type="datetimeFigureOut">
               <a:rPr lang="en-US" smtClean="0"/>
-              <a:t>5/19/2026</a:t>
+              <a:t>5/20/2026</a:t>
             </a:fld>
             <a:endParaRPr lang="en-US"/>
           </a:p>
@@ -1332,7 +1332,7 @@
           <a:p>
             <a:fld id="{5BCAD085-E8A6-8845-BD4E-CB4CCA059FC4}" type="datetimeFigureOut">
               <a:rPr lang="en-US" smtClean="0"/>
-              <a:t>5/19/2026</a:t>
+              <a:t>5/20/2026</a:t>
             </a:fld>
             <a:endParaRPr lang="en-US"/>
           </a:p>
@@ -1577,7 +1577,7 @@
           <a:p>
             <a:fld id="{5BCAD085-E8A6-8845-BD4E-CB4CCA059FC4}" type="datetimeFigureOut">
               <a:rPr lang="en-US" smtClean="0"/>
-              <a:t>5/19/2026</a:t>
+              <a:t>5/20/2026</a:t>
             </a:fld>
             <a:endParaRPr lang="en-US"/>
           </a:p>
@@ -1862,7 +1862,7 @@
           <a:p>
             <a:fld id="{5BCAD085-E8A6-8845-BD4E-CB4CCA059FC4}" type="datetimeFigureOut">
               <a:rPr lang="en-US" smtClean="0"/>
-              <a:t>5/19/2026</a:t>
+              <a:t>5/20/2026</a:t>
             </a:fld>
             <a:endParaRPr lang="en-US"/>
           </a:p>
@@ -2281,7 +2281,7 @@
           <a:p>
             <a:fld id="{5BCAD085-E8A6-8845-BD4E-CB4CCA059FC4}" type="datetimeFigureOut">
               <a:rPr lang="en-US" smtClean="0"/>
-              <a:t>5/19/2026</a:t>
+              <a:t>5/20/2026</a:t>
             </a:fld>
             <a:endParaRPr lang="en-US"/>
           </a:p>
@@ -2398,7 +2398,7 @@
           <a:p>
             <a:fld id="{5BCAD085-E8A6-8845-BD4E-CB4CCA059FC4}" type="datetimeFigureOut">
               <a:rPr lang="en-US" smtClean="0"/>
-              <a:t>5/19/2026</a:t>
+              <a:t>5/20/2026</a:t>
             </a:fld>
             <a:endParaRPr lang="en-US"/>
           </a:p>
@@ -2493,7 +2493,7 @@
           <a:p>
             <a:fld id="{5BCAD085-E8A6-8845-BD4E-CB4CCA059FC4}" type="datetimeFigureOut">
               <a:rPr lang="en-US" smtClean="0"/>
-              <a:t>5/19/2026</a:t>
+              <a:t>5/20/2026</a:t>
             </a:fld>
             <a:endParaRPr lang="en-US"/>
           </a:p>
@@ -2768,7 +2768,7 @@
           <a:p>
             <a:fld id="{5BCAD085-E8A6-8845-BD4E-CB4CCA059FC4}" type="datetimeFigureOut">
               <a:rPr lang="en-US" smtClean="0"/>
-              <a:t>5/19/2026</a:t>
+              <a:t>5/20/2026</a:t>
             </a:fld>
             <a:endParaRPr lang="en-US"/>
           </a:p>
@@ -3020,7 +3020,7 @@
           <a:p>
             <a:fld id="{5BCAD085-E8A6-8845-BD4E-CB4CCA059FC4}" type="datetimeFigureOut">
               <a:rPr lang="en-US" smtClean="0"/>
-              <a:t>5/19/2026</a:t>
+              <a:t>5/20/2026</a:t>
             </a:fld>
             <a:endParaRPr lang="en-US"/>
           </a:p>
@@ -3231,7 +3231,7 @@
           <a:p>
             <a:fld id="{5BCAD085-E8A6-8845-BD4E-CB4CCA059FC4}" type="datetimeFigureOut">
               <a:rPr lang="en-US" smtClean="0"/>
-              <a:t>5/19/2026</a:t>
+              <a:t>5/20/2026</a:t>
             </a:fld>
             <a:endParaRPr lang="en-US"/>
           </a:p>
@@ -3889,422 +3889,6 @@
           </a:p>
         </p:txBody>
       </p:sp>
-      <p:graphicFrame>
-        <p:nvGraphicFramePr>
-          <p:cNvPr id="6" name="Table 5"/>
-          <p:cNvGraphicFramePr>
-            <a:graphicFrameLocks noGrp="1"/>
-          </p:cNvGraphicFramePr>
-          <p:nvPr/>
-        </p:nvGraphicFramePr>
-        <p:xfrm>
-          <a:off x="411480" y="3630168"/>
-          <a:ext cx="5349240" cy="1234440"/>
-        </p:xfrm>
-        <a:graphic>
-          <a:graphicData uri="http://schemas.openxmlformats.org/drawingml/2006/table">
-            <a:tbl>
-              <a:tblPr firstRow="1" bandRow="1">
-                <a:tableStyleId>{5C22544A-7EE6-4342-B048-85BDC9FD1C3A}</a:tableStyleId>
-              </a:tblPr>
-              <a:tblGrid>
-                <a:gridCol w="1337310">
-                  <a:extLst>
-                    <a:ext uri="{9D8B030D-6E8A-4147-A177-3AD203B41FA5}">
-                      <a16:colId xmlns:a16="http://schemas.microsoft.com/office/drawing/2014/main" val="20000"/>
-                    </a:ext>
-                  </a:extLst>
-                </a:gridCol>
-                <a:gridCol w="1337310">
-                  <a:extLst>
-                    <a:ext uri="{9D8B030D-6E8A-4147-A177-3AD203B41FA5}">
-                      <a16:colId xmlns:a16="http://schemas.microsoft.com/office/drawing/2014/main" val="20001"/>
-                    </a:ext>
-                  </a:extLst>
-                </a:gridCol>
-                <a:gridCol w="1337310">
-                  <a:extLst>
-                    <a:ext uri="{9D8B030D-6E8A-4147-A177-3AD203B41FA5}">
-                      <a16:colId xmlns:a16="http://schemas.microsoft.com/office/drawing/2014/main" val="20002"/>
-                    </a:ext>
-                  </a:extLst>
-                </a:gridCol>
-                <a:gridCol w="1337310">
-                  <a:extLst>
-                    <a:ext uri="{9D8B030D-6E8A-4147-A177-3AD203B41FA5}">
-                      <a16:colId xmlns:a16="http://schemas.microsoft.com/office/drawing/2014/main" val="20003"/>
-                    </a:ext>
-                  </a:extLst>
-                </a:gridCol>
-              </a:tblGrid>
-              <a:tr h="308610">
-                <a:tc>
-                  <a:txBody>
-                    <a:bodyPr/>
-                    <a:lstStyle/>
-                    <a:p>
-                      <a:pPr>
-                        <a:defRPr sz="950" b="1">
-                          <a:solidFill>
-                            <a:srgbClr val="FFFFFF"/>
-                          </a:solidFill>
-                          <a:latin typeface="Arial"/>
-                        </a:defRPr>
-                      </a:pPr>
-                      <a:r>
-                        <a:t>区间</a:t>
-                      </a:r>
-                    </a:p>
-                  </a:txBody>
-                  <a:tcPr>
-                    <a:solidFill>
-                      <a:srgbClr val="2E4053"/>
-                    </a:solidFill>
-                  </a:tcPr>
-                </a:tc>
-                <a:tc>
-                  <a:txBody>
-                    <a:bodyPr/>
-                    <a:lstStyle/>
-                    <a:p>
-                      <a:pPr>
-                        <a:defRPr sz="950" b="1">
-                          <a:solidFill>
-                            <a:srgbClr val="FFFFFF"/>
-                          </a:solidFill>
-                          <a:latin typeface="Arial"/>
-                        </a:defRPr>
-                      </a:pPr>
-                      <a:r>
-                        <a:t>收益率</a:t>
-                      </a:r>
-                    </a:p>
-                  </a:txBody>
-                  <a:tcPr>
-                    <a:solidFill>
-                      <a:srgbClr val="2E4053"/>
-                    </a:solidFill>
-                  </a:tcPr>
-                </a:tc>
-                <a:tc>
-                  <a:txBody>
-                    <a:bodyPr/>
-                    <a:lstStyle/>
-                    <a:p>
-                      <a:pPr>
-                        <a:defRPr sz="950" b="1">
-                          <a:solidFill>
-                            <a:srgbClr val="FFFFFF"/>
-                          </a:solidFill>
-                          <a:latin typeface="Arial"/>
-                        </a:defRPr>
-                      </a:pPr>
-                      <a:r>
-                        <a:t>同类排名</a:t>
-                      </a:r>
-                    </a:p>
-                  </a:txBody>
-                  <a:tcPr>
-                    <a:solidFill>
-                      <a:srgbClr val="2E4053"/>
-                    </a:solidFill>
-                  </a:tcPr>
-                </a:tc>
-                <a:tc>
-                  <a:txBody>
-                    <a:bodyPr/>
-                    <a:lstStyle/>
-                    <a:p>
-                      <a:pPr>
-                        <a:defRPr sz="950" b="1">
-                          <a:solidFill>
-                            <a:srgbClr val="FFFFFF"/>
-                          </a:solidFill>
-                          <a:latin typeface="Arial"/>
-                        </a:defRPr>
-                      </a:pPr>
-                      <a:r>
-                        <a:t>分位数</a:t>
-                      </a:r>
-                    </a:p>
-                  </a:txBody>
-                  <a:tcPr>
-                    <a:solidFill>
-                      <a:srgbClr val="2E4053"/>
-                    </a:solidFill>
-                  </a:tcPr>
-                </a:tc>
-                <a:extLst>
-                  <a:ext uri="{0D108BD9-81ED-4DB2-BD59-A6C34878D82A}">
-                    <a16:rowId xmlns:a16="http://schemas.microsoft.com/office/drawing/2014/main" val="10000"/>
-                  </a:ext>
-                </a:extLst>
-              </a:tr>
-              <a:tr h="308610">
-                <a:tc>
-                  <a:txBody>
-                    <a:bodyPr/>
-                    <a:lstStyle/>
-                    <a:p>
-                      <a:pPr>
-                        <a:defRPr sz="950">
-                          <a:solidFill>
-                            <a:srgbClr val="292929"/>
-                          </a:solidFill>
-                          <a:latin typeface="Arial"/>
-                        </a:defRPr>
-                      </a:pPr>
-                      <a:r>
-                        <a:t>近一年</a:t>
-                      </a:r>
-                    </a:p>
-                  </a:txBody>
-                  <a:tcPr/>
-                </a:tc>
-                <a:tc>
-                  <a:txBody>
-                    <a:bodyPr/>
-                    <a:lstStyle/>
-                    <a:p>
-                      <a:pPr>
-                        <a:defRPr sz="950">
-                          <a:solidFill>
-                            <a:srgbClr val="292929"/>
-                          </a:solidFill>
-                          <a:latin typeface="Arial"/>
-                        </a:defRPr>
-                      </a:pPr>
-                      <a:r>
-                        <a:t>+12.8%</a:t>
-                      </a:r>
-                    </a:p>
-                  </a:txBody>
-                  <a:tcPr/>
-                </a:tc>
-                <a:tc>
-                  <a:txBody>
-                    <a:bodyPr/>
-                    <a:lstStyle/>
-                    <a:p>
-                      <a:pPr>
-                        <a:defRPr sz="950">
-                          <a:solidFill>
-                            <a:srgbClr val="292929"/>
-                          </a:solidFill>
-                          <a:latin typeface="Arial"/>
-                        </a:defRPr>
-                      </a:pPr>
-                      <a:r>
-                        <a:t>128 / 856</a:t>
-                      </a:r>
-                    </a:p>
-                  </a:txBody>
-                  <a:tcPr/>
-                </a:tc>
-                <a:tc>
-                  <a:txBody>
-                    <a:bodyPr/>
-                    <a:lstStyle/>
-                    <a:p>
-                      <a:pPr>
-                        <a:defRPr sz="950">
-                          <a:solidFill>
-                            <a:srgbClr val="292929"/>
-                          </a:solidFill>
-                          <a:latin typeface="Arial"/>
-                        </a:defRPr>
-                      </a:pPr>
-                      <a:r>
-                        <a:t>前 15%</a:t>
-                      </a:r>
-                    </a:p>
-                  </a:txBody>
-                  <a:tcPr/>
-                </a:tc>
-                <a:extLst>
-                  <a:ext uri="{0D108BD9-81ED-4DB2-BD59-A6C34878D82A}">
-                    <a16:rowId xmlns:a16="http://schemas.microsoft.com/office/drawing/2014/main" val="10001"/>
-                  </a:ext>
-                </a:extLst>
-              </a:tr>
-              <a:tr h="308610">
-                <a:tc>
-                  <a:txBody>
-                    <a:bodyPr/>
-                    <a:lstStyle/>
-                    <a:p>
-                      <a:pPr>
-                        <a:defRPr sz="950">
-                          <a:solidFill>
-                            <a:srgbClr val="292929"/>
-                          </a:solidFill>
-                          <a:latin typeface="Arial"/>
-                        </a:defRPr>
-                      </a:pPr>
-                      <a:r>
-                        <a:t>近两年</a:t>
-                      </a:r>
-                    </a:p>
-                  </a:txBody>
-                  <a:tcPr/>
-                </a:tc>
-                <a:tc>
-                  <a:txBody>
-                    <a:bodyPr/>
-                    <a:lstStyle/>
-                    <a:p>
-                      <a:pPr>
-                        <a:defRPr sz="950">
-                          <a:solidFill>
-                            <a:srgbClr val="292929"/>
-                          </a:solidFill>
-                          <a:latin typeface="Arial"/>
-                        </a:defRPr>
-                      </a:pPr>
-                      <a:r>
-                        <a:t>+18.6%</a:t>
-                      </a:r>
-                    </a:p>
-                  </a:txBody>
-                  <a:tcPr/>
-                </a:tc>
-                <a:tc>
-                  <a:txBody>
-                    <a:bodyPr/>
-                    <a:lstStyle/>
-                    <a:p>
-                      <a:pPr>
-                        <a:defRPr sz="950">
-                          <a:solidFill>
-                            <a:srgbClr val="292929"/>
-                          </a:solidFill>
-                          <a:latin typeface="Arial"/>
-                        </a:defRPr>
-                      </a:pPr>
-                      <a:r>
-                        <a:t>95 / 812</a:t>
-                      </a:r>
-                    </a:p>
-                  </a:txBody>
-                  <a:tcPr/>
-                </a:tc>
-                <a:tc>
-                  <a:txBody>
-                    <a:bodyPr/>
-                    <a:lstStyle/>
-                    <a:p>
-                      <a:pPr>
-                        <a:defRPr sz="950">
-                          <a:solidFill>
-                            <a:srgbClr val="292929"/>
-                          </a:solidFill>
-                          <a:latin typeface="Arial"/>
-                        </a:defRPr>
-                      </a:pPr>
-                      <a:r>
-                        <a:t>前 12%</a:t>
-                      </a:r>
-                    </a:p>
-                  </a:txBody>
-                  <a:tcPr/>
-                </a:tc>
-                <a:extLst>
-                  <a:ext uri="{0D108BD9-81ED-4DB2-BD59-A6C34878D82A}">
-                    <a16:rowId xmlns:a16="http://schemas.microsoft.com/office/drawing/2014/main" val="10002"/>
-                  </a:ext>
-                </a:extLst>
-              </a:tr>
-              <a:tr h="308610">
-                <a:tc>
-                  <a:txBody>
-                    <a:bodyPr/>
-                    <a:lstStyle/>
-                    <a:p>
-                      <a:pPr>
-                        <a:defRPr sz="950">
-                          <a:solidFill>
-                            <a:srgbClr val="292929"/>
-                          </a:solidFill>
-                          <a:latin typeface="Arial"/>
-                        </a:defRPr>
-                      </a:pPr>
-                      <a:r>
-                        <a:t>近三年</a:t>
-                      </a:r>
-                    </a:p>
-                  </a:txBody>
-                  <a:tcPr/>
-                </a:tc>
-                <a:tc>
-                  <a:txBody>
-                    <a:bodyPr/>
-                    <a:lstStyle/>
-                    <a:p>
-                      <a:pPr>
-                        <a:defRPr sz="950">
-                          <a:solidFill>
-                            <a:srgbClr val="292929"/>
-                          </a:solidFill>
-                          <a:latin typeface="Arial"/>
-                        </a:defRPr>
-                      </a:pPr>
-                      <a:r>
-                        <a:t>+22.4%</a:t>
-                      </a:r>
-                    </a:p>
-                  </a:txBody>
-                  <a:tcPr/>
-                </a:tc>
-                <a:tc>
-                  <a:txBody>
-                    <a:bodyPr/>
-                    <a:lstStyle/>
-                    <a:p>
-                      <a:pPr>
-                        <a:defRPr sz="950">
-                          <a:solidFill>
-                            <a:srgbClr val="292929"/>
-                          </a:solidFill>
-                          <a:latin typeface="Arial"/>
-                        </a:defRPr>
-                      </a:pPr>
-                      <a:r>
-                        <a:t>76 / 698</a:t>
-                      </a:r>
-                    </a:p>
-                  </a:txBody>
-                  <a:tcPr/>
-                </a:tc>
-                <a:tc>
-                  <a:txBody>
-                    <a:bodyPr/>
-                    <a:lstStyle/>
-                    <a:p>
-                      <a:pPr>
-                        <a:defRPr sz="950">
-                          <a:solidFill>
-                            <a:srgbClr val="292929"/>
-                          </a:solidFill>
-                          <a:latin typeface="Arial"/>
-                        </a:defRPr>
-                      </a:pPr>
-                      <a:r>
-                        <a:t>前 11%</a:t>
-                      </a:r>
-                    </a:p>
-                  </a:txBody>
-                  <a:tcPr/>
-                </a:tc>
-                <a:extLst>
-                  <a:ext uri="{0D108BD9-81ED-4DB2-BD59-A6C34878D82A}">
-                    <a16:rowId xmlns:a16="http://schemas.microsoft.com/office/drawing/2014/main" val="10003"/>
-                  </a:ext>
-                </a:extLst>
-              </a:tr>
-            </a:tbl>
-          </a:graphicData>
-        </a:graphic>
-      </p:graphicFrame>
       <p:sp>
         <p:nvSpPr>
           <p:cNvPr id="7" name="TextBox 6"/>
@@ -4501,6 +4085,554 @@
           </a:p>
         </p:txBody>
       </p:sp>
+      <p:graphicFrame>
+        <p:nvGraphicFramePr>
+          <p:cNvPr id="13" name="Table 12"/>
+          <p:cNvGraphicFramePr>
+            <a:graphicFrameLocks noGrp="1"/>
+          </p:cNvGraphicFramePr>
+          <p:nvPr/>
+        </p:nvGraphicFramePr>
+        <p:xfrm>
+          <a:off x="411480" y="3630168"/>
+          <a:ext cx="5349240" cy="1828800"/>
+        </p:xfrm>
+        <a:graphic>
+          <a:graphicData uri="http://schemas.openxmlformats.org/drawingml/2006/table">
+            <a:tbl>
+              <a:tblPr firstRow="1" bandRow="1">
+                <a:tableStyleId>{5C22544A-7EE6-4342-B048-85BDC9FD1C3A}</a:tableStyleId>
+              </a:tblPr>
+              <a:tblGrid>
+                <a:gridCol w="1069848">
+                  <a:extLst>
+                    <a:ext uri="{9D8B030D-6E8A-4147-A177-3AD203B41FA5}">
+                      <a16:colId xmlns:a16="http://schemas.microsoft.com/office/drawing/2014/main" val="20000"/>
+                    </a:ext>
+                  </a:extLst>
+                </a:gridCol>
+                <a:gridCol w="1069848">
+                  <a:extLst>
+                    <a:ext uri="{9D8B030D-6E8A-4147-A177-3AD203B41FA5}">
+                      <a16:colId xmlns:a16="http://schemas.microsoft.com/office/drawing/2014/main" val="20001"/>
+                    </a:ext>
+                  </a:extLst>
+                </a:gridCol>
+                <a:gridCol w="1069848">
+                  <a:extLst>
+                    <a:ext uri="{9D8B030D-6E8A-4147-A177-3AD203B41FA5}">
+                      <a16:colId xmlns:a16="http://schemas.microsoft.com/office/drawing/2014/main" val="20002"/>
+                    </a:ext>
+                  </a:extLst>
+                </a:gridCol>
+                <a:gridCol w="1069848">
+                  <a:extLst>
+                    <a:ext uri="{9D8B030D-6E8A-4147-A177-3AD203B41FA5}">
+                      <a16:colId xmlns:a16="http://schemas.microsoft.com/office/drawing/2014/main" val="20003"/>
+                    </a:ext>
+                  </a:extLst>
+                </a:gridCol>
+                <a:gridCol w="1069848">
+                  <a:extLst>
+                    <a:ext uri="{9D8B030D-6E8A-4147-A177-3AD203B41FA5}">
+                      <a16:colId xmlns:a16="http://schemas.microsoft.com/office/drawing/2014/main" val="20004"/>
+                    </a:ext>
+                  </a:extLst>
+                </a:gridCol>
+              </a:tblGrid>
+              <a:tr h="205740">
+                <a:tc>
+                  <a:txBody>
+                    <a:bodyPr/>
+                    <a:lstStyle/>
+                    <a:p>
+                      <a:endParaRPr/>
+                    </a:p>
+                  </a:txBody>
+                  <a:tcPr/>
+                </a:tc>
+                <a:tc>
+                  <a:txBody>
+                    <a:bodyPr/>
+                    <a:lstStyle/>
+                    <a:p>
+                      <a:pPr algn="ctr">
+                        <a:defRPr sz="1100" b="1"/>
+                      </a:pPr>
+                      <a:r>
+                        <a:t>任职以来</a:t>
+                      </a:r>
+                    </a:p>
+                  </a:txBody>
+                  <a:tcPr/>
+                </a:tc>
+                <a:tc>
+                  <a:txBody>
+                    <a:bodyPr/>
+                    <a:lstStyle/>
+                    <a:p>
+                      <a:pPr algn="ctr">
+                        <a:defRPr sz="1100" b="1"/>
+                      </a:pPr>
+                      <a:r>
+                        <a:t>过去一年</a:t>
+                      </a:r>
+                    </a:p>
+                  </a:txBody>
+                  <a:tcPr/>
+                </a:tc>
+                <a:tc>
+                  <a:txBody>
+                    <a:bodyPr/>
+                    <a:lstStyle/>
+                    <a:p>
+                      <a:pPr algn="ctr">
+                        <a:defRPr sz="1100" b="1"/>
+                      </a:pPr>
+                      <a:r>
+                        <a:t>过去两年</a:t>
+                      </a:r>
+                    </a:p>
+                  </a:txBody>
+                  <a:tcPr/>
+                </a:tc>
+                <a:tc>
+                  <a:txBody>
+                    <a:bodyPr/>
+                    <a:lstStyle/>
+                    <a:p>
+                      <a:pPr algn="ctr">
+                        <a:defRPr sz="1100" b="1"/>
+                      </a:pPr>
+                      <a:r>
+                        <a:t>过去三年</a:t>
+                      </a:r>
+                    </a:p>
+                  </a:txBody>
+                  <a:tcPr/>
+                </a:tc>
+                <a:extLst>
+                  <a:ext uri="{0D108BD9-81ED-4DB2-BD59-A6C34878D82A}">
+                    <a16:rowId xmlns:a16="http://schemas.microsoft.com/office/drawing/2014/main" val="10000"/>
+                  </a:ext>
+                </a:extLst>
+              </a:tr>
+              <a:tr h="205740">
+                <a:tc>
+                  <a:txBody>
+                    <a:bodyPr/>
+                    <a:lstStyle/>
+                    <a:p>
+                      <a:pPr>
+                        <a:defRPr sz="1100" b="1"/>
+                      </a:pPr>
+                      <a:r>
+                        <a:t>收益率</a:t>
+                      </a:r>
+                    </a:p>
+                  </a:txBody>
+                  <a:tcPr/>
+                </a:tc>
+                <a:tc>
+                  <a:txBody>
+                    <a:bodyPr/>
+                    <a:lstStyle/>
+                    <a:p>
+                      <a:pPr>
+                        <a:defRPr sz="1100"/>
+                      </a:pPr>
+                      <a:r>
+                        <a:t>45.2%</a:t>
+                      </a:r>
+                    </a:p>
+                  </a:txBody>
+                  <a:tcPr/>
+                </a:tc>
+                <a:tc>
+                  <a:txBody>
+                    <a:bodyPr/>
+                    <a:lstStyle/>
+                    <a:p>
+                      <a:pPr>
+                        <a:defRPr sz="1100"/>
+                      </a:pPr>
+                      <a:r>
+                        <a:t>12.8%</a:t>
+                      </a:r>
+                    </a:p>
+                  </a:txBody>
+                  <a:tcPr/>
+                </a:tc>
+                <a:tc>
+                  <a:txBody>
+                    <a:bodyPr/>
+                    <a:lstStyle/>
+                    <a:p>
+                      <a:pPr>
+                        <a:defRPr sz="1100"/>
+                      </a:pPr>
+                      <a:r>
+                        <a:t>24.5%</a:t>
+                      </a:r>
+                    </a:p>
+                  </a:txBody>
+                  <a:tcPr/>
+                </a:tc>
+                <a:tc>
+                  <a:txBody>
+                    <a:bodyPr/>
+                    <a:lstStyle/>
+                    <a:p>
+                      <a:pPr>
+                        <a:defRPr sz="1100"/>
+                      </a:pPr>
+                      <a:r>
+                        <a:t>35.8%</a:t>
+                      </a:r>
+                    </a:p>
+                  </a:txBody>
+                  <a:tcPr/>
+                </a:tc>
+                <a:extLst>
+                  <a:ext uri="{0D108BD9-81ED-4DB2-BD59-A6C34878D82A}">
+                    <a16:rowId xmlns:a16="http://schemas.microsoft.com/office/drawing/2014/main" val="10001"/>
+                  </a:ext>
+                </a:extLst>
+              </a:tr>
+              <a:tr h="205740">
+                <a:tc>
+                  <a:txBody>
+                    <a:bodyPr/>
+                    <a:lstStyle/>
+                    <a:p>
+                      <a:pPr>
+                        <a:defRPr sz="1100" b="1"/>
+                      </a:pPr>
+                      <a:r>
+                        <a:t>业绩排名</a:t>
+                      </a:r>
+                    </a:p>
+                  </a:txBody>
+                  <a:tcPr/>
+                </a:tc>
+                <a:tc>
+                  <a:txBody>
+                    <a:bodyPr/>
+                    <a:lstStyle/>
+                    <a:p>
+                      <a:pPr>
+                        <a:defRPr sz="1100"/>
+                      </a:pPr>
+                      <a:r>
+                        <a:t>15 / 200</a:t>
+                      </a:r>
+                    </a:p>
+                  </a:txBody>
+                  <a:tcPr/>
+                </a:tc>
+                <a:tc>
+                  <a:txBody>
+                    <a:bodyPr/>
+                    <a:lstStyle/>
+                    <a:p>
+                      <a:pPr>
+                        <a:defRPr sz="1100"/>
+                      </a:pPr>
+                      <a:r>
+                        <a:rPr dirty="0"/>
+                        <a:t>128 / 856</a:t>
+                      </a:r>
+                    </a:p>
+                  </a:txBody>
+                  <a:tcPr/>
+                </a:tc>
+                <a:tc>
+                  <a:txBody>
+                    <a:bodyPr/>
+                    <a:lstStyle/>
+                    <a:p>
+                      <a:pPr>
+                        <a:defRPr sz="1100"/>
+                      </a:pPr>
+                      <a:r>
+                        <a:t>95 / 812</a:t>
+                      </a:r>
+                    </a:p>
+                  </a:txBody>
+                  <a:tcPr/>
+                </a:tc>
+                <a:tc>
+                  <a:txBody>
+                    <a:bodyPr/>
+                    <a:lstStyle/>
+                    <a:p>
+                      <a:pPr>
+                        <a:defRPr sz="1100"/>
+                      </a:pPr>
+                      <a:r>
+                        <a:t>76 / 698</a:t>
+                      </a:r>
+                    </a:p>
+                  </a:txBody>
+                  <a:tcPr/>
+                </a:tc>
+                <a:extLst>
+                  <a:ext uri="{0D108BD9-81ED-4DB2-BD59-A6C34878D82A}">
+                    <a16:rowId xmlns:a16="http://schemas.microsoft.com/office/drawing/2014/main" val="10002"/>
+                  </a:ext>
+                </a:extLst>
+              </a:tr>
+              <a:tr h="205740">
+                <a:tc>
+                  <a:txBody>
+                    <a:bodyPr/>
+                    <a:lstStyle/>
+                    <a:p>
+                      <a:pPr>
+                        <a:defRPr sz="1100" b="1"/>
+                      </a:pPr>
+                      <a:r>
+                        <a:t>偏债混合基金指数</a:t>
+                      </a:r>
+                    </a:p>
+                  </a:txBody>
+                  <a:tcPr/>
+                </a:tc>
+                <a:tc>
+                  <a:txBody>
+                    <a:bodyPr/>
+                    <a:lstStyle/>
+                    <a:p>
+                      <a:pPr>
+                        <a:defRPr sz="1100"/>
+                      </a:pPr>
+                      <a:r>
+                        <a:t>+20.1%</a:t>
+                      </a:r>
+                    </a:p>
+                  </a:txBody>
+                  <a:tcPr/>
+                </a:tc>
+                <a:tc>
+                  <a:txBody>
+                    <a:bodyPr/>
+                    <a:lstStyle/>
+                    <a:p>
+                      <a:pPr>
+                        <a:defRPr sz="1100"/>
+                      </a:pPr>
+                      <a:r>
+                        <a:t>+5.2%</a:t>
+                      </a:r>
+                    </a:p>
+                  </a:txBody>
+                  <a:tcPr/>
+                </a:tc>
+                <a:tc>
+                  <a:txBody>
+                    <a:bodyPr/>
+                    <a:lstStyle/>
+                    <a:p>
+                      <a:pPr>
+                        <a:defRPr sz="1100"/>
+                      </a:pPr>
+                      <a:r>
+                        <a:t>+8.5%</a:t>
+                      </a:r>
+                    </a:p>
+                  </a:txBody>
+                  <a:tcPr/>
+                </a:tc>
+                <a:tc>
+                  <a:txBody>
+                    <a:bodyPr/>
+                    <a:lstStyle/>
+                    <a:p>
+                      <a:pPr>
+                        <a:defRPr sz="1100"/>
+                      </a:pPr>
+                      <a:r>
+                        <a:t>+12.3%</a:t>
+                      </a:r>
+                    </a:p>
+                  </a:txBody>
+                  <a:tcPr/>
+                </a:tc>
+                <a:extLst>
+                  <a:ext uri="{0D108BD9-81ED-4DB2-BD59-A6C34878D82A}">
+                    <a16:rowId xmlns:a16="http://schemas.microsoft.com/office/drawing/2014/main" val="10003"/>
+                  </a:ext>
+                </a:extLst>
+              </a:tr>
+              <a:tr h="205740">
+                <a:tc>
+                  <a:txBody>
+                    <a:bodyPr/>
+                    <a:lstStyle/>
+                    <a:p>
+                      <a:pPr>
+                        <a:defRPr sz="1100" b="1"/>
+                      </a:pPr>
+                      <a:r>
+                        <a:t>夏普比率</a:t>
+                      </a:r>
+                    </a:p>
+                  </a:txBody>
+                  <a:tcPr/>
+                </a:tc>
+                <a:tc>
+                  <a:txBody>
+                    <a:bodyPr/>
+                    <a:lstStyle/>
+                    <a:p>
+                      <a:pPr>
+                        <a:defRPr sz="1100"/>
+                      </a:pPr>
+                      <a:r>
+                        <a:t>1.25</a:t>
+                      </a:r>
+                    </a:p>
+                  </a:txBody>
+                  <a:tcPr/>
+                </a:tc>
+                <a:tc>
+                  <a:txBody>
+                    <a:bodyPr/>
+                    <a:lstStyle/>
+                    <a:p>
+                      <a:pPr>
+                        <a:defRPr sz="1100"/>
+                      </a:pPr>
+                      <a:r>
+                        <a:t>1.10</a:t>
+                      </a:r>
+                    </a:p>
+                  </a:txBody>
+                  <a:tcPr/>
+                </a:tc>
+                <a:tc>
+                  <a:txBody>
+                    <a:bodyPr/>
+                    <a:lstStyle/>
+                    <a:p>
+                      <a:pPr>
+                        <a:defRPr sz="1100"/>
+                      </a:pPr>
+                      <a:r>
+                        <a:t>1.05</a:t>
+                      </a:r>
+                    </a:p>
+                  </a:txBody>
+                  <a:tcPr/>
+                </a:tc>
+                <a:tc>
+                  <a:txBody>
+                    <a:bodyPr/>
+                    <a:lstStyle/>
+                    <a:p>
+                      <a:pPr>
+                        <a:defRPr sz="1100"/>
+                      </a:pPr>
+                      <a:r>
+                        <a:t>0.98</a:t>
+                      </a:r>
+                    </a:p>
+                  </a:txBody>
+                  <a:tcPr/>
+                </a:tc>
+                <a:extLst>
+                  <a:ext uri="{0D108BD9-81ED-4DB2-BD59-A6C34878D82A}">
+                    <a16:rowId xmlns:a16="http://schemas.microsoft.com/office/drawing/2014/main" val="10004"/>
+                  </a:ext>
+                </a:extLst>
+              </a:tr>
+              <a:tr h="205740">
+                <a:tc>
+                  <a:txBody>
+                    <a:bodyPr/>
+                    <a:lstStyle/>
+                    <a:p>
+                      <a:pPr>
+                        <a:defRPr sz="1100" b="1"/>
+                      </a:pPr>
+                      <a:r>
+                        <a:t>最大回撤</a:t>
+                      </a:r>
+                    </a:p>
+                  </a:txBody>
+                  <a:tcPr/>
+                </a:tc>
+                <a:tc>
+                  <a:txBody>
+                    <a:bodyPr/>
+                    <a:lstStyle/>
+                    <a:p>
+                      <a:pPr>
+                        <a:defRPr sz="1100"/>
+                      </a:pPr>
+                      <a:r>
+                        <a:t>-5.4%</a:t>
+                      </a:r>
+                    </a:p>
+                  </a:txBody>
+                  <a:tcPr/>
+                </a:tc>
+                <a:tc>
+                  <a:txBody>
+                    <a:bodyPr/>
+                    <a:lstStyle/>
+                    <a:p>
+                      <a:pPr>
+                        <a:defRPr sz="1100"/>
+                      </a:pPr>
+                      <a:r>
+                        <a:t>-3.2%</a:t>
+                      </a:r>
+                    </a:p>
+                  </a:txBody>
+                  <a:tcPr/>
+                </a:tc>
+                <a:tc>
+                  <a:txBody>
+                    <a:bodyPr/>
+                    <a:lstStyle/>
+                    <a:p>
+                      <a:pPr>
+                        <a:defRPr sz="1100"/>
+                      </a:pPr>
+                      <a:r>
+                        <a:t>-6.1%</a:t>
+                      </a:r>
+                    </a:p>
+                  </a:txBody>
+                  <a:tcPr/>
+                </a:tc>
+                <a:tc>
+                  <a:txBody>
+                    <a:bodyPr/>
+                    <a:lstStyle/>
+                    <a:p>
+                      <a:pPr>
+                        <a:defRPr sz="1100"/>
+                      </a:pPr>
+                      <a:r>
+                        <a:rPr dirty="0"/>
+                        <a:t>-8.5%</a:t>
+                      </a:r>
+                    </a:p>
+                  </a:txBody>
+                  <a:tcPr/>
+                </a:tc>
+                <a:extLst>
+                  <a:ext uri="{0D108BD9-81ED-4DB2-BD59-A6C34878D82A}">
+                    <a16:rowId xmlns:a16="http://schemas.microsoft.com/office/drawing/2014/main" val="10005"/>
+                  </a:ext>
+                </a:extLst>
+              </a:tr>
+            </a:tbl>
+          </a:graphicData>
+        </a:graphic>
+      </p:graphicFrame>
     </p:spTree>
   </p:cSld>
   <p:clrMapOvr>

--- a/samples/20260430-偏债混-M1.pptx
+++ b/samples/20260430-偏债混-M1.pptx
@@ -5,9 +5,9 @@
     <p:sldMasterId id="2147483648" r:id="rId1"/>
   </p:sldMasterIdLst>
   <p:sldIdLst>
-    <p:sldId id="257" r:id="rId2"/>
+    <p:sldId id="256" r:id="rId7"/>
   </p:sldIdLst>
-  <p:sldSz cx="12192000" cy="6858000"/>
+  <p:sldSz cx="12191695" cy="6858000" type="screen4x3"/>
   <p:notesSz cx="6858000" cy="9144000"/>
   <p:defaultTextStyle>
     <a:defPPr>
@@ -104,39 +104,18 @@
       </a:defRPr>
     </a:lvl9pPr>
   </p:defaultTextStyle>
-  <p:extLst>
-    <p:ext uri="{EFAFB233-063F-42B5-8137-9DF3F51BA10A}">
-      <p15:sldGuideLst xmlns:p15="http://schemas.microsoft.com/office/powerpoint/2012/main">
-        <p15:guide id="1" orient="horz" pos="2160">
-          <p15:clr>
-            <a:srgbClr val="A4A3A4"/>
-          </p15:clr>
-        </p15:guide>
-        <p15:guide id="2" pos="2880">
-          <p15:clr>
-            <a:srgbClr val="A4A3A4"/>
-          </p15:clr>
-        </p15:guide>
-      </p15:sldGuideLst>
-    </p:ext>
-  </p:extLst>
 </p:presentation>
 </file>
 
 <file path=ppt/charts/chart1.xml><?xml version="1.0" encoding="utf-8"?>
-<c:chartSpace xmlns:c="http://schemas.openxmlformats.org/drawingml/2006/chart" xmlns:a="http://schemas.openxmlformats.org/drawingml/2006/main" xmlns:r="http://schemas.openxmlformats.org/officeDocument/2006/relationships" xmlns:c16r2="http://schemas.microsoft.com/office/drawing/2015/06/chart">
+<c:chartSpace xmlns:c="http://schemas.openxmlformats.org/drawingml/2006/chart" xmlns:a="http://schemas.openxmlformats.org/drawingml/2006/main" xmlns:r="http://schemas.openxmlformats.org/officeDocument/2006/relationships">
   <c:date1904 val="0"/>
-  <c:lang val="zh-CN"/>
-  <c:roundedCorners val="1"/>
-  <c:style val="2"/>
   <c:chart>
     <c:autoTitleDeleted val="0"/>
     <c:plotArea>
-      <c:layout/>
       <c:barChart>
         <c:barDir val="col"/>
         <c:grouping val="clustered"/>
-        <c:varyColors val="1"/>
         <c:ser>
           <c:idx val="0"/>
           <c:order val="0"/>
@@ -146,28 +125,27 @@
               <c:strCache>
                 <c:ptCount val="1"/>
                 <c:pt idx="0">
-                  <c:v>股票</c:v>
+                  <c:v>2025Q2</c:v>
                 </c:pt>
               </c:strCache>
             </c:strRef>
           </c:tx>
-          <c:invertIfNegative val="1"/>
           <c:cat>
             <c:strRef>
               <c:f>Sheet1!$A$2:$A$5</c:f>
               <c:strCache>
                 <c:ptCount val="4"/>
                 <c:pt idx="0">
-                  <c:v>2024Q2</c:v>
+                  <c:v>股票</c:v>
                 </c:pt>
                 <c:pt idx="1">
-                  <c:v>2024Q3</c:v>
+                  <c:v>可转债</c:v>
                 </c:pt>
                 <c:pt idx="2">
-                  <c:v>2024Q4</c:v>
+                  <c:v>利率债</c:v>
                 </c:pt>
                 <c:pt idx="3">
-                  <c:v>2025Q1</c:v>
+                  <c:v>信用债</c:v>
                 </c:pt>
               </c:strCache>
             </c:strRef>
@@ -179,25 +157,20 @@
                 <c:formatCode>General</c:formatCode>
                 <c:ptCount val="4"/>
                 <c:pt idx="0">
-                  <c:v>68.2</c:v>
+                  <c:v>28.5</c:v>
                 </c:pt>
                 <c:pt idx="1">
-                  <c:v>71.5</c:v>
+                  <c:v>22.0</c:v>
                 </c:pt>
                 <c:pt idx="2">
-                  <c:v>65.8</c:v>
+                  <c:v>30.5</c:v>
                 </c:pt>
                 <c:pt idx="3">
-                  <c:v>72.400000000000006</c:v>
+                  <c:v>19.0</c:v>
                 </c:pt>
               </c:numCache>
             </c:numRef>
           </c:val>
-          <c:extLst>
-            <c:ext xmlns:c16="http://schemas.microsoft.com/office/drawing/2014/chart" uri="{C3380CC4-5D6E-409C-BE32-E72D297353CC}">
-              <c16:uniqueId val="{00000000-81C7-4338-ABAF-2BE739DA1264}"/>
-            </c:ext>
-          </c:extLst>
         </c:ser>
         <c:ser>
           <c:idx val="1"/>
@@ -208,28 +181,27 @@
               <c:strCache>
                 <c:ptCount val="1"/>
                 <c:pt idx="0">
-                  <c:v>债券</c:v>
+                  <c:v>2025Q3</c:v>
                 </c:pt>
               </c:strCache>
             </c:strRef>
           </c:tx>
-          <c:invertIfNegative val="1"/>
           <c:cat>
             <c:strRef>
               <c:f>Sheet1!$A$2:$A$5</c:f>
               <c:strCache>
                 <c:ptCount val="4"/>
                 <c:pt idx="0">
-                  <c:v>2024Q2</c:v>
+                  <c:v>股票</c:v>
                 </c:pt>
                 <c:pt idx="1">
-                  <c:v>2024Q3</c:v>
+                  <c:v>可转债</c:v>
                 </c:pt>
                 <c:pt idx="2">
-                  <c:v>2024Q4</c:v>
+                  <c:v>利率债</c:v>
                 </c:pt>
                 <c:pt idx="3">
-                  <c:v>2025Q1</c:v>
+                  <c:v>信用债</c:v>
                 </c:pt>
               </c:strCache>
             </c:strRef>
@@ -241,25 +213,20 @@
                 <c:formatCode>General</c:formatCode>
                 <c:ptCount val="4"/>
                 <c:pt idx="0">
-                  <c:v>22.5</c:v>
+                  <c:v>30.0</c:v>
                 </c:pt>
                 <c:pt idx="1">
-                  <c:v>19.8</c:v>
+                  <c:v>20.5</c:v>
                 </c:pt>
                 <c:pt idx="2">
-                  <c:v>24.1</c:v>
+                  <c:v>28.0</c:v>
                 </c:pt>
                 <c:pt idx="3">
-                  <c:v>18.600000000000001</c:v>
+                  <c:v>21.5</c:v>
                 </c:pt>
               </c:numCache>
             </c:numRef>
           </c:val>
-          <c:extLst>
-            <c:ext xmlns:c16="http://schemas.microsoft.com/office/drawing/2014/chart" uri="{C3380CC4-5D6E-409C-BE32-E72D297353CC}">
-              <c16:uniqueId val="{00000001-81C7-4338-ABAF-2BE739DA1264}"/>
-            </c:ext>
-          </c:extLst>
         </c:ser>
         <c:ser>
           <c:idx val="2"/>
@@ -270,28 +237,27 @@
               <c:strCache>
                 <c:ptCount val="1"/>
                 <c:pt idx="0">
-                  <c:v>现金及其他</c:v>
+                  <c:v>2025Q4</c:v>
                 </c:pt>
               </c:strCache>
             </c:strRef>
           </c:tx>
-          <c:invertIfNegative val="1"/>
           <c:cat>
             <c:strRef>
               <c:f>Sheet1!$A$2:$A$5</c:f>
               <c:strCache>
                 <c:ptCount val="4"/>
                 <c:pt idx="0">
-                  <c:v>2024Q2</c:v>
+                  <c:v>股票</c:v>
                 </c:pt>
                 <c:pt idx="1">
-                  <c:v>2024Q3</c:v>
+                  <c:v>可转债</c:v>
                 </c:pt>
                 <c:pt idx="2">
-                  <c:v>2024Q4</c:v>
+                  <c:v>利率债</c:v>
                 </c:pt>
                 <c:pt idx="3">
-                  <c:v>2025Q1</c:v>
+                  <c:v>信用债</c:v>
                 </c:pt>
               </c:strCache>
             </c:strRef>
@@ -303,35 +269,77 @@
                 <c:formatCode>General</c:formatCode>
                 <c:ptCount val="4"/>
                 <c:pt idx="0">
-                  <c:v>9.3000000000000007</c:v>
+                  <c:v>26.0</c:v>
                 </c:pt>
                 <c:pt idx="1">
-                  <c:v>8.6999999999999993</c:v>
+                  <c:v>24.0</c:v>
                 </c:pt>
                 <c:pt idx="2">
-                  <c:v>10.1</c:v>
+                  <c:v>32.0</c:v>
                 </c:pt>
                 <c:pt idx="3">
-                  <c:v>9</c:v>
+                  <c:v>18.0</c:v>
                 </c:pt>
               </c:numCache>
             </c:numRef>
           </c:val>
-          <c:extLst>
-            <c:ext xmlns:c16="http://schemas.microsoft.com/office/drawing/2014/chart" uri="{C3380CC4-5D6E-409C-BE32-E72D297353CC}">
-              <c16:uniqueId val="{00000002-81C7-4338-ABAF-2BE739DA1264}"/>
-            </c:ext>
-          </c:extLst>
         </c:ser>
-        <c:dLbls>
-          <c:showLegendKey val="0"/>
-          <c:showVal val="0"/>
-          <c:showCatName val="0"/>
-          <c:showSerName val="0"/>
-          <c:showPercent val="0"/>
-          <c:showBubbleSize val="0"/>
-        </c:dLbls>
-        <c:gapWidth val="150"/>
+        <c:ser>
+          <c:idx val="3"/>
+          <c:order val="3"/>
+          <c:tx>
+            <c:strRef>
+              <c:f>Sheet1!$E$1</c:f>
+              <c:strCache>
+                <c:ptCount val="1"/>
+                <c:pt idx="0">
+                  <c:v>2026Q1</c:v>
+                </c:pt>
+              </c:strCache>
+            </c:strRef>
+          </c:tx>
+          <c:cat>
+            <c:strRef>
+              <c:f>Sheet1!$A$2:$A$5</c:f>
+              <c:strCache>
+                <c:ptCount val="4"/>
+                <c:pt idx="0">
+                  <c:v>股票</c:v>
+                </c:pt>
+                <c:pt idx="1">
+                  <c:v>可转债</c:v>
+                </c:pt>
+                <c:pt idx="2">
+                  <c:v>利率债</c:v>
+                </c:pt>
+                <c:pt idx="3">
+                  <c:v>信用债</c:v>
+                </c:pt>
+              </c:strCache>
+            </c:strRef>
+          </c:cat>
+          <c:val>
+            <c:numRef>
+              <c:f>Sheet1!$E$2:$E$5</c:f>
+              <c:numCache>
+                <c:formatCode>General</c:formatCode>
+                <c:ptCount val="4"/>
+                <c:pt idx="0">
+                  <c:v>32.5</c:v>
+                </c:pt>
+                <c:pt idx="1">
+                  <c:v>18.5</c:v>
+                </c:pt>
+                <c:pt idx="2">
+                  <c:v>27.0</c:v>
+                </c:pt>
+                <c:pt idx="3">
+                  <c:v>22.0</c:v>
+                </c:pt>
+              </c:numCache>
+            </c:numRef>
+          </c:val>
+        </c:ser>
         <c:axId val="-2068027336"/>
         <c:axId val="-2113994440"/>
       </c:barChart>
@@ -342,7 +350,6 @@
         </c:scaling>
         <c:delete val="0"/>
         <c:axPos val="b"/>
-        <c:numFmt formatCode="General" sourceLinked="0"/>
         <c:majorTickMark val="out"/>
         <c:minorTickMark val="none"/>
         <c:tickLblPos val="nextTo"/>
@@ -355,28 +362,22 @@
       </c:catAx>
       <c:valAx>
         <c:axId val="-2113994440"/>
-        <c:scaling>
-          <c:orientation val="minMax"/>
-        </c:scaling>
+        <c:scaling/>
         <c:delete val="0"/>
         <c:axPos val="l"/>
         <c:majorGridlines/>
-        <c:numFmt formatCode="General" sourceLinked="1"/>
         <c:majorTickMark val="out"/>
         <c:minorTickMark val="none"/>
         <c:tickLblPos val="nextTo"/>
         <c:crossAx val="-2068027336"/>
         <c:crosses val="autoZero"/>
-        <c:crossBetween val="between"/>
       </c:valAx>
     </c:plotArea>
     <c:legend>
       <c:legendPos val="b"/>
       <c:overlay val="0"/>
     </c:legend>
-    <c:plotVisOnly val="1"/>
     <c:dispBlanksAs val="gap"/>
-    <c:showDLblsOverMax val="1"/>
   </c:chart>
   <c:txPr>
     <a:bodyPr/>
@@ -385,7 +386,7 @@
       <a:pPr>
         <a:defRPr sz="1800"/>
       </a:pPr>
-      <a:endParaRPr lang="zh-CN"/>
+      <a:endParaRPr lang="en-US"/>
     </a:p>
   </c:txPr>
   <c:externalData r:id="rId1">
@@ -395,15 +396,11 @@
 </file>
 
 <file path=ppt/charts/chart2.xml><?xml version="1.0" encoding="utf-8"?>
-<c:chartSpace xmlns:c="http://schemas.openxmlformats.org/drawingml/2006/chart" xmlns:a="http://schemas.openxmlformats.org/drawingml/2006/main" xmlns:r="http://schemas.openxmlformats.org/officeDocument/2006/relationships" xmlns:c16r2="http://schemas.microsoft.com/office/drawing/2015/06/chart">
+<c:chartSpace xmlns:c="http://schemas.openxmlformats.org/drawingml/2006/chart" xmlns:a="http://schemas.openxmlformats.org/drawingml/2006/main" xmlns:r="http://schemas.openxmlformats.org/officeDocument/2006/relationships">
   <c:date1904 val="0"/>
-  <c:lang val="zh-CN"/>
-  <c:roundedCorners val="1"/>
-  <c:style val="2"/>
   <c:chart>
-    <c:autoTitleDeleted val="0"/>
+    <c:autoTitleDeleted val="true"/>
     <c:plotArea>
-      <c:layout/>
       <c:lineChart>
         <c:grouping val="standard"/>
         <c:varyColors val="0"/>
@@ -416,76 +413,1605 @@
               <c:strCache>
                 <c:ptCount val="1"/>
                 <c:pt idx="0">
-                  <c:v>本基金</c:v>
+                  <c:v>蓝海稳健增长混合A</c:v>
                 </c:pt>
               </c:strCache>
             </c:strRef>
           </c:tx>
           <c:cat>
             <c:strRef>
-              <c:f>Sheet1!$A$2:$A$8</c:f>
+              <c:f>Sheet1!$A$2:$A$262</c:f>
               <c:strCache>
-                <c:ptCount val="7"/>
+                <c:ptCount val="261"/>
                 <c:pt idx="0">
-                  <c:v>2024-05</c:v>
+                  <c:v>2025-05-01</c:v>
                 </c:pt>
                 <c:pt idx="1">
-                  <c:v>2024-07</c:v>
+                  <c:v>2025-05-02</c:v>
                 </c:pt>
                 <c:pt idx="2">
-                  <c:v>2024-09</c:v>
+                  <c:v>2025-05-05</c:v>
                 </c:pt>
                 <c:pt idx="3">
-                  <c:v>2024-11</c:v>
+                  <c:v>2025-05-06</c:v>
                 </c:pt>
                 <c:pt idx="4">
-                  <c:v>2025-01</c:v>
+                  <c:v>2025-05-07</c:v>
                 </c:pt>
                 <c:pt idx="5">
-                  <c:v>2025-03</c:v>
+                  <c:v>2025-05-08</c:v>
                 </c:pt>
                 <c:pt idx="6">
-                  <c:v>2025-05</c:v>
+                  <c:v>2025-05-09</c:v>
+                </c:pt>
+                <c:pt idx="7">
+                  <c:v>2025-05-12</c:v>
+                </c:pt>
+                <c:pt idx="8">
+                  <c:v>2025-05-13</c:v>
+                </c:pt>
+                <c:pt idx="9">
+                  <c:v>2025-05-14</c:v>
+                </c:pt>
+                <c:pt idx="10">
+                  <c:v>2025-05-15</c:v>
+                </c:pt>
+                <c:pt idx="11">
+                  <c:v>2025-05-16</c:v>
+                </c:pt>
+                <c:pt idx="12">
+                  <c:v>2025-05-19</c:v>
+                </c:pt>
+                <c:pt idx="13">
+                  <c:v>2025-05-20</c:v>
+                </c:pt>
+                <c:pt idx="14">
+                  <c:v>2025-05-21</c:v>
+                </c:pt>
+                <c:pt idx="15">
+                  <c:v>2025-05-22</c:v>
+                </c:pt>
+                <c:pt idx="16">
+                  <c:v>2025-05-23</c:v>
+                </c:pt>
+                <c:pt idx="17">
+                  <c:v>2025-05-26</c:v>
+                </c:pt>
+                <c:pt idx="18">
+                  <c:v>2025-05-27</c:v>
+                </c:pt>
+                <c:pt idx="19">
+                  <c:v>2025-05-28</c:v>
+                </c:pt>
+                <c:pt idx="20">
+                  <c:v>2025-05-29</c:v>
+                </c:pt>
+                <c:pt idx="21">
+                  <c:v>2025-05-30</c:v>
+                </c:pt>
+                <c:pt idx="22">
+                  <c:v>2025-06-02</c:v>
+                </c:pt>
+                <c:pt idx="23">
+                  <c:v>2025-06-03</c:v>
+                </c:pt>
+                <c:pt idx="24">
+                  <c:v>2025-06-04</c:v>
+                </c:pt>
+                <c:pt idx="25">
+                  <c:v>2025-06-05</c:v>
+                </c:pt>
+                <c:pt idx="26">
+                  <c:v>2025-06-06</c:v>
+                </c:pt>
+                <c:pt idx="27">
+                  <c:v>2025-06-09</c:v>
+                </c:pt>
+                <c:pt idx="28">
+                  <c:v>2025-06-10</c:v>
+                </c:pt>
+                <c:pt idx="29">
+                  <c:v>2025-06-11</c:v>
+                </c:pt>
+                <c:pt idx="30">
+                  <c:v>2025-06-12</c:v>
+                </c:pt>
+                <c:pt idx="31">
+                  <c:v>2025-06-13</c:v>
+                </c:pt>
+                <c:pt idx="32">
+                  <c:v>2025-06-16</c:v>
+                </c:pt>
+                <c:pt idx="33">
+                  <c:v>2025-06-17</c:v>
+                </c:pt>
+                <c:pt idx="34">
+                  <c:v>2025-06-18</c:v>
+                </c:pt>
+                <c:pt idx="35">
+                  <c:v>2025-06-19</c:v>
+                </c:pt>
+                <c:pt idx="36">
+                  <c:v>2025-06-20</c:v>
+                </c:pt>
+                <c:pt idx="37">
+                  <c:v>2025-06-23</c:v>
+                </c:pt>
+                <c:pt idx="38">
+                  <c:v>2025-06-24</c:v>
+                </c:pt>
+                <c:pt idx="39">
+                  <c:v>2025-06-25</c:v>
+                </c:pt>
+                <c:pt idx="40">
+                  <c:v>2025-06-26</c:v>
+                </c:pt>
+                <c:pt idx="41">
+                  <c:v>2025-06-27</c:v>
+                </c:pt>
+                <c:pt idx="42">
+                  <c:v>2025-06-30</c:v>
+                </c:pt>
+                <c:pt idx="43">
+                  <c:v>2025-07-01</c:v>
+                </c:pt>
+                <c:pt idx="44">
+                  <c:v>2025-07-02</c:v>
+                </c:pt>
+                <c:pt idx="45">
+                  <c:v>2025-07-03</c:v>
+                </c:pt>
+                <c:pt idx="46">
+                  <c:v>2025-07-04</c:v>
+                </c:pt>
+                <c:pt idx="47">
+                  <c:v>2025-07-07</c:v>
+                </c:pt>
+                <c:pt idx="48">
+                  <c:v>2025-07-08</c:v>
+                </c:pt>
+                <c:pt idx="49">
+                  <c:v>2025-07-09</c:v>
+                </c:pt>
+                <c:pt idx="50">
+                  <c:v>2025-07-10</c:v>
+                </c:pt>
+                <c:pt idx="51">
+                  <c:v>2025-07-11</c:v>
+                </c:pt>
+                <c:pt idx="52">
+                  <c:v>2025-07-14</c:v>
+                </c:pt>
+                <c:pt idx="53">
+                  <c:v>2025-07-15</c:v>
+                </c:pt>
+                <c:pt idx="54">
+                  <c:v>2025-07-16</c:v>
+                </c:pt>
+                <c:pt idx="55">
+                  <c:v>2025-07-17</c:v>
+                </c:pt>
+                <c:pt idx="56">
+                  <c:v>2025-07-18</c:v>
+                </c:pt>
+                <c:pt idx="57">
+                  <c:v>2025-07-21</c:v>
+                </c:pt>
+                <c:pt idx="58">
+                  <c:v>2025-07-22</c:v>
+                </c:pt>
+                <c:pt idx="59">
+                  <c:v>2025-07-23</c:v>
+                </c:pt>
+                <c:pt idx="60">
+                  <c:v>2025-07-24</c:v>
+                </c:pt>
+                <c:pt idx="61">
+                  <c:v>2025-07-25</c:v>
+                </c:pt>
+                <c:pt idx="62">
+                  <c:v>2025-07-28</c:v>
+                </c:pt>
+                <c:pt idx="63">
+                  <c:v>2025-07-29</c:v>
+                </c:pt>
+                <c:pt idx="64">
+                  <c:v>2025-07-30</c:v>
+                </c:pt>
+                <c:pt idx="65">
+                  <c:v>2025-07-31</c:v>
+                </c:pt>
+                <c:pt idx="66">
+                  <c:v>2025-08-01</c:v>
+                </c:pt>
+                <c:pt idx="67">
+                  <c:v>2025-08-04</c:v>
+                </c:pt>
+                <c:pt idx="68">
+                  <c:v>2025-08-05</c:v>
+                </c:pt>
+                <c:pt idx="69">
+                  <c:v>2025-08-06</c:v>
+                </c:pt>
+                <c:pt idx="70">
+                  <c:v>2025-08-07</c:v>
+                </c:pt>
+                <c:pt idx="71">
+                  <c:v>2025-08-08</c:v>
+                </c:pt>
+                <c:pt idx="72">
+                  <c:v>2025-08-11</c:v>
+                </c:pt>
+                <c:pt idx="73">
+                  <c:v>2025-08-12</c:v>
+                </c:pt>
+                <c:pt idx="74">
+                  <c:v>2025-08-13</c:v>
+                </c:pt>
+                <c:pt idx="75">
+                  <c:v>2025-08-14</c:v>
+                </c:pt>
+                <c:pt idx="76">
+                  <c:v>2025-08-15</c:v>
+                </c:pt>
+                <c:pt idx="77">
+                  <c:v>2025-08-18</c:v>
+                </c:pt>
+                <c:pt idx="78">
+                  <c:v>2025-08-19</c:v>
+                </c:pt>
+                <c:pt idx="79">
+                  <c:v>2025-08-20</c:v>
+                </c:pt>
+                <c:pt idx="80">
+                  <c:v>2025-08-21</c:v>
+                </c:pt>
+                <c:pt idx="81">
+                  <c:v>2025-08-22</c:v>
+                </c:pt>
+                <c:pt idx="82">
+                  <c:v>2025-08-25</c:v>
+                </c:pt>
+                <c:pt idx="83">
+                  <c:v>2025-08-26</c:v>
+                </c:pt>
+                <c:pt idx="84">
+                  <c:v>2025-08-27</c:v>
+                </c:pt>
+                <c:pt idx="85">
+                  <c:v>2025-08-28</c:v>
+                </c:pt>
+                <c:pt idx="86">
+                  <c:v>2025-08-29</c:v>
+                </c:pt>
+                <c:pt idx="87">
+                  <c:v>2025-09-01</c:v>
+                </c:pt>
+                <c:pt idx="88">
+                  <c:v>2025-09-02</c:v>
+                </c:pt>
+                <c:pt idx="89">
+                  <c:v>2025-09-03</c:v>
+                </c:pt>
+                <c:pt idx="90">
+                  <c:v>2025-09-04</c:v>
+                </c:pt>
+                <c:pt idx="91">
+                  <c:v>2025-09-05</c:v>
+                </c:pt>
+                <c:pt idx="92">
+                  <c:v>2025-09-08</c:v>
+                </c:pt>
+                <c:pt idx="93">
+                  <c:v>2025-09-09</c:v>
+                </c:pt>
+                <c:pt idx="94">
+                  <c:v>2025-09-10</c:v>
+                </c:pt>
+                <c:pt idx="95">
+                  <c:v>2025-09-11</c:v>
+                </c:pt>
+                <c:pt idx="96">
+                  <c:v>2025-09-12</c:v>
+                </c:pt>
+                <c:pt idx="97">
+                  <c:v>2025-09-15</c:v>
+                </c:pt>
+                <c:pt idx="98">
+                  <c:v>2025-09-16</c:v>
+                </c:pt>
+                <c:pt idx="99">
+                  <c:v>2025-09-17</c:v>
+                </c:pt>
+                <c:pt idx="100">
+                  <c:v>2025-09-18</c:v>
+                </c:pt>
+                <c:pt idx="101">
+                  <c:v>2025-09-19</c:v>
+                </c:pt>
+                <c:pt idx="102">
+                  <c:v>2025-09-22</c:v>
+                </c:pt>
+                <c:pt idx="103">
+                  <c:v>2025-09-23</c:v>
+                </c:pt>
+                <c:pt idx="104">
+                  <c:v>2025-09-24</c:v>
+                </c:pt>
+                <c:pt idx="105">
+                  <c:v>2025-09-25</c:v>
+                </c:pt>
+                <c:pt idx="106">
+                  <c:v>2025-09-26</c:v>
+                </c:pt>
+                <c:pt idx="107">
+                  <c:v>2025-09-29</c:v>
+                </c:pt>
+                <c:pt idx="108">
+                  <c:v>2025-09-30</c:v>
+                </c:pt>
+                <c:pt idx="109">
+                  <c:v>2025-10-01</c:v>
+                </c:pt>
+                <c:pt idx="110">
+                  <c:v>2025-10-02</c:v>
+                </c:pt>
+                <c:pt idx="111">
+                  <c:v>2025-10-03</c:v>
+                </c:pt>
+                <c:pt idx="112">
+                  <c:v>2025-10-06</c:v>
+                </c:pt>
+                <c:pt idx="113">
+                  <c:v>2025-10-07</c:v>
+                </c:pt>
+                <c:pt idx="114">
+                  <c:v>2025-10-08</c:v>
+                </c:pt>
+                <c:pt idx="115">
+                  <c:v>2025-10-09</c:v>
+                </c:pt>
+                <c:pt idx="116">
+                  <c:v>2025-10-10</c:v>
+                </c:pt>
+                <c:pt idx="117">
+                  <c:v>2025-10-13</c:v>
+                </c:pt>
+                <c:pt idx="118">
+                  <c:v>2025-10-14</c:v>
+                </c:pt>
+                <c:pt idx="119">
+                  <c:v>2025-10-15</c:v>
+                </c:pt>
+                <c:pt idx="120">
+                  <c:v>2025-10-16</c:v>
+                </c:pt>
+                <c:pt idx="121">
+                  <c:v>2025-10-17</c:v>
+                </c:pt>
+                <c:pt idx="122">
+                  <c:v>2025-10-20</c:v>
+                </c:pt>
+                <c:pt idx="123">
+                  <c:v>2025-10-21</c:v>
+                </c:pt>
+                <c:pt idx="124">
+                  <c:v>2025-10-22</c:v>
+                </c:pt>
+                <c:pt idx="125">
+                  <c:v>2025-10-23</c:v>
+                </c:pt>
+                <c:pt idx="126">
+                  <c:v>2025-10-24</c:v>
+                </c:pt>
+                <c:pt idx="127">
+                  <c:v>2025-10-27</c:v>
+                </c:pt>
+                <c:pt idx="128">
+                  <c:v>2025-10-28</c:v>
+                </c:pt>
+                <c:pt idx="129">
+                  <c:v>2025-10-29</c:v>
+                </c:pt>
+                <c:pt idx="130">
+                  <c:v>2025-10-30</c:v>
+                </c:pt>
+                <c:pt idx="131">
+                  <c:v>2025-10-31</c:v>
+                </c:pt>
+                <c:pt idx="132">
+                  <c:v>2025-11-03</c:v>
+                </c:pt>
+                <c:pt idx="133">
+                  <c:v>2025-11-04</c:v>
+                </c:pt>
+                <c:pt idx="134">
+                  <c:v>2025-11-05</c:v>
+                </c:pt>
+                <c:pt idx="135">
+                  <c:v>2025-11-06</c:v>
+                </c:pt>
+                <c:pt idx="136">
+                  <c:v>2025-11-07</c:v>
+                </c:pt>
+                <c:pt idx="137">
+                  <c:v>2025-11-10</c:v>
+                </c:pt>
+                <c:pt idx="138">
+                  <c:v>2025-11-11</c:v>
+                </c:pt>
+                <c:pt idx="139">
+                  <c:v>2025-11-12</c:v>
+                </c:pt>
+                <c:pt idx="140">
+                  <c:v>2025-11-13</c:v>
+                </c:pt>
+                <c:pt idx="141">
+                  <c:v>2025-11-14</c:v>
+                </c:pt>
+                <c:pt idx="142">
+                  <c:v>2025-11-17</c:v>
+                </c:pt>
+                <c:pt idx="143">
+                  <c:v>2025-11-18</c:v>
+                </c:pt>
+                <c:pt idx="144">
+                  <c:v>2025-11-19</c:v>
+                </c:pt>
+                <c:pt idx="145">
+                  <c:v>2025-11-20</c:v>
+                </c:pt>
+                <c:pt idx="146">
+                  <c:v>2025-11-21</c:v>
+                </c:pt>
+                <c:pt idx="147">
+                  <c:v>2025-11-24</c:v>
+                </c:pt>
+                <c:pt idx="148">
+                  <c:v>2025-11-25</c:v>
+                </c:pt>
+                <c:pt idx="149">
+                  <c:v>2025-11-26</c:v>
+                </c:pt>
+                <c:pt idx="150">
+                  <c:v>2025-11-27</c:v>
+                </c:pt>
+                <c:pt idx="151">
+                  <c:v>2025-11-28</c:v>
+                </c:pt>
+                <c:pt idx="152">
+                  <c:v>2025-12-01</c:v>
+                </c:pt>
+                <c:pt idx="153">
+                  <c:v>2025-12-02</c:v>
+                </c:pt>
+                <c:pt idx="154">
+                  <c:v>2025-12-03</c:v>
+                </c:pt>
+                <c:pt idx="155">
+                  <c:v>2025-12-04</c:v>
+                </c:pt>
+                <c:pt idx="156">
+                  <c:v>2025-12-05</c:v>
+                </c:pt>
+                <c:pt idx="157">
+                  <c:v>2025-12-08</c:v>
+                </c:pt>
+                <c:pt idx="158">
+                  <c:v>2025-12-09</c:v>
+                </c:pt>
+                <c:pt idx="159">
+                  <c:v>2025-12-10</c:v>
+                </c:pt>
+                <c:pt idx="160">
+                  <c:v>2025-12-11</c:v>
+                </c:pt>
+                <c:pt idx="161">
+                  <c:v>2025-12-12</c:v>
+                </c:pt>
+                <c:pt idx="162">
+                  <c:v>2025-12-15</c:v>
+                </c:pt>
+                <c:pt idx="163">
+                  <c:v>2025-12-16</c:v>
+                </c:pt>
+                <c:pt idx="164">
+                  <c:v>2025-12-17</c:v>
+                </c:pt>
+                <c:pt idx="165">
+                  <c:v>2025-12-18</c:v>
+                </c:pt>
+                <c:pt idx="166">
+                  <c:v>2025-12-19</c:v>
+                </c:pt>
+                <c:pt idx="167">
+                  <c:v>2025-12-22</c:v>
+                </c:pt>
+                <c:pt idx="168">
+                  <c:v>2025-12-23</c:v>
+                </c:pt>
+                <c:pt idx="169">
+                  <c:v>2025-12-24</c:v>
+                </c:pt>
+                <c:pt idx="170">
+                  <c:v>2025-12-25</c:v>
+                </c:pt>
+                <c:pt idx="171">
+                  <c:v>2025-12-26</c:v>
+                </c:pt>
+                <c:pt idx="172">
+                  <c:v>2025-12-29</c:v>
+                </c:pt>
+                <c:pt idx="173">
+                  <c:v>2025-12-30</c:v>
+                </c:pt>
+                <c:pt idx="174">
+                  <c:v>2025-12-31</c:v>
+                </c:pt>
+                <c:pt idx="175">
+                  <c:v>2026-01-01</c:v>
+                </c:pt>
+                <c:pt idx="176">
+                  <c:v>2026-01-02</c:v>
+                </c:pt>
+                <c:pt idx="177">
+                  <c:v>2026-01-05</c:v>
+                </c:pt>
+                <c:pt idx="178">
+                  <c:v>2026-01-06</c:v>
+                </c:pt>
+                <c:pt idx="179">
+                  <c:v>2026-01-07</c:v>
+                </c:pt>
+                <c:pt idx="180">
+                  <c:v>2026-01-08</c:v>
+                </c:pt>
+                <c:pt idx="181">
+                  <c:v>2026-01-09</c:v>
+                </c:pt>
+                <c:pt idx="182">
+                  <c:v>2026-01-12</c:v>
+                </c:pt>
+                <c:pt idx="183">
+                  <c:v>2026-01-13</c:v>
+                </c:pt>
+                <c:pt idx="184">
+                  <c:v>2026-01-14</c:v>
+                </c:pt>
+                <c:pt idx="185">
+                  <c:v>2026-01-15</c:v>
+                </c:pt>
+                <c:pt idx="186">
+                  <c:v>2026-01-16</c:v>
+                </c:pt>
+                <c:pt idx="187">
+                  <c:v>2026-01-19</c:v>
+                </c:pt>
+                <c:pt idx="188">
+                  <c:v>2026-01-20</c:v>
+                </c:pt>
+                <c:pt idx="189">
+                  <c:v>2026-01-21</c:v>
+                </c:pt>
+                <c:pt idx="190">
+                  <c:v>2026-01-22</c:v>
+                </c:pt>
+                <c:pt idx="191">
+                  <c:v>2026-01-23</c:v>
+                </c:pt>
+                <c:pt idx="192">
+                  <c:v>2026-01-26</c:v>
+                </c:pt>
+                <c:pt idx="193">
+                  <c:v>2026-01-27</c:v>
+                </c:pt>
+                <c:pt idx="194">
+                  <c:v>2026-01-28</c:v>
+                </c:pt>
+                <c:pt idx="195">
+                  <c:v>2026-01-29</c:v>
+                </c:pt>
+                <c:pt idx="196">
+                  <c:v>2026-01-30</c:v>
+                </c:pt>
+                <c:pt idx="197">
+                  <c:v>2026-02-02</c:v>
+                </c:pt>
+                <c:pt idx="198">
+                  <c:v>2026-02-03</c:v>
+                </c:pt>
+                <c:pt idx="199">
+                  <c:v>2026-02-04</c:v>
+                </c:pt>
+                <c:pt idx="200">
+                  <c:v>2026-02-05</c:v>
+                </c:pt>
+                <c:pt idx="201">
+                  <c:v>2026-02-06</c:v>
+                </c:pt>
+                <c:pt idx="202">
+                  <c:v>2026-02-09</c:v>
+                </c:pt>
+                <c:pt idx="203">
+                  <c:v>2026-02-10</c:v>
+                </c:pt>
+                <c:pt idx="204">
+                  <c:v>2026-02-11</c:v>
+                </c:pt>
+                <c:pt idx="205">
+                  <c:v>2026-02-12</c:v>
+                </c:pt>
+                <c:pt idx="206">
+                  <c:v>2026-02-13</c:v>
+                </c:pt>
+                <c:pt idx="207">
+                  <c:v>2026-02-16</c:v>
+                </c:pt>
+                <c:pt idx="208">
+                  <c:v>2026-02-17</c:v>
+                </c:pt>
+                <c:pt idx="209">
+                  <c:v>2026-02-18</c:v>
+                </c:pt>
+                <c:pt idx="210">
+                  <c:v>2026-02-19</c:v>
+                </c:pt>
+                <c:pt idx="211">
+                  <c:v>2026-02-20</c:v>
+                </c:pt>
+                <c:pt idx="212">
+                  <c:v>2026-02-23</c:v>
+                </c:pt>
+                <c:pt idx="213">
+                  <c:v>2026-02-24</c:v>
+                </c:pt>
+                <c:pt idx="214">
+                  <c:v>2026-02-25</c:v>
+                </c:pt>
+                <c:pt idx="215">
+                  <c:v>2026-02-26</c:v>
+                </c:pt>
+                <c:pt idx="216">
+                  <c:v>2026-02-27</c:v>
+                </c:pt>
+                <c:pt idx="217">
+                  <c:v>2026-03-02</c:v>
+                </c:pt>
+                <c:pt idx="218">
+                  <c:v>2026-03-03</c:v>
+                </c:pt>
+                <c:pt idx="219">
+                  <c:v>2026-03-04</c:v>
+                </c:pt>
+                <c:pt idx="220">
+                  <c:v>2026-03-05</c:v>
+                </c:pt>
+                <c:pt idx="221">
+                  <c:v>2026-03-06</c:v>
+                </c:pt>
+                <c:pt idx="222">
+                  <c:v>2026-03-09</c:v>
+                </c:pt>
+                <c:pt idx="223">
+                  <c:v>2026-03-10</c:v>
+                </c:pt>
+                <c:pt idx="224">
+                  <c:v>2026-03-11</c:v>
+                </c:pt>
+                <c:pt idx="225">
+                  <c:v>2026-03-12</c:v>
+                </c:pt>
+                <c:pt idx="226">
+                  <c:v>2026-03-13</c:v>
+                </c:pt>
+                <c:pt idx="227">
+                  <c:v>2026-03-16</c:v>
+                </c:pt>
+                <c:pt idx="228">
+                  <c:v>2026-03-17</c:v>
+                </c:pt>
+                <c:pt idx="229">
+                  <c:v>2026-03-18</c:v>
+                </c:pt>
+                <c:pt idx="230">
+                  <c:v>2026-03-19</c:v>
+                </c:pt>
+                <c:pt idx="231">
+                  <c:v>2026-03-20</c:v>
+                </c:pt>
+                <c:pt idx="232">
+                  <c:v>2026-03-23</c:v>
+                </c:pt>
+                <c:pt idx="233">
+                  <c:v>2026-03-24</c:v>
+                </c:pt>
+                <c:pt idx="234">
+                  <c:v>2026-03-25</c:v>
+                </c:pt>
+                <c:pt idx="235">
+                  <c:v>2026-03-26</c:v>
+                </c:pt>
+                <c:pt idx="236">
+                  <c:v>2026-03-27</c:v>
+                </c:pt>
+                <c:pt idx="237">
+                  <c:v>2026-03-30</c:v>
+                </c:pt>
+                <c:pt idx="238">
+                  <c:v>2026-03-31</c:v>
+                </c:pt>
+                <c:pt idx="239">
+                  <c:v>2026-04-01</c:v>
+                </c:pt>
+                <c:pt idx="240">
+                  <c:v>2026-04-02</c:v>
+                </c:pt>
+                <c:pt idx="241">
+                  <c:v>2026-04-03</c:v>
+                </c:pt>
+                <c:pt idx="242">
+                  <c:v>2026-04-06</c:v>
+                </c:pt>
+                <c:pt idx="243">
+                  <c:v>2026-04-07</c:v>
+                </c:pt>
+                <c:pt idx="244">
+                  <c:v>2026-04-08</c:v>
+                </c:pt>
+                <c:pt idx="245">
+                  <c:v>2026-04-09</c:v>
+                </c:pt>
+                <c:pt idx="246">
+                  <c:v>2026-04-10</c:v>
+                </c:pt>
+                <c:pt idx="247">
+                  <c:v>2026-04-13</c:v>
+                </c:pt>
+                <c:pt idx="248">
+                  <c:v>2026-04-14</c:v>
+                </c:pt>
+                <c:pt idx="249">
+                  <c:v>2026-04-15</c:v>
+                </c:pt>
+                <c:pt idx="250">
+                  <c:v>2026-04-16</c:v>
+                </c:pt>
+                <c:pt idx="251">
+                  <c:v>2026-04-17</c:v>
+                </c:pt>
+                <c:pt idx="252">
+                  <c:v>2026-04-20</c:v>
+                </c:pt>
+                <c:pt idx="253">
+                  <c:v>2026-04-21</c:v>
+                </c:pt>
+                <c:pt idx="254">
+                  <c:v>2026-04-22</c:v>
+                </c:pt>
+                <c:pt idx="255">
+                  <c:v>2026-04-23</c:v>
+                </c:pt>
+                <c:pt idx="256">
+                  <c:v>2026-04-24</c:v>
+                </c:pt>
+                <c:pt idx="257">
+                  <c:v>2026-04-27</c:v>
+                </c:pt>
+                <c:pt idx="258">
+                  <c:v>2026-04-28</c:v>
+                </c:pt>
+                <c:pt idx="259">
+                  <c:v>2026-04-29</c:v>
+                </c:pt>
+                <c:pt idx="260">
+                  <c:v>2026-04-30</c:v>
                 </c:pt>
               </c:strCache>
             </c:strRef>
           </c:cat>
           <c:val>
             <c:numRef>
-              <c:f>Sheet1!$B$2:$B$8</c:f>
+              <c:f>Sheet1!$B$2:$B$262</c:f>
               <c:numCache>
-                <c:formatCode>General</c:formatCode>
-                <c:ptCount val="7"/>
+                <c:formatCode>0.00"%"</c:formatCode>
+                <c:ptCount val="261"/>
                 <c:pt idx="0">
-                  <c:v>0</c:v>
+                  <c:v>0.0</c:v>
                 </c:pt>
                 <c:pt idx="1">
-                  <c:v>3.2</c:v>
+                  <c:v>0.27</c:v>
                 </c:pt>
                 <c:pt idx="2">
-                  <c:v>5.0999999999999996</c:v>
+                  <c:v>0.52</c:v>
                 </c:pt>
                 <c:pt idx="3">
-                  <c:v>7.8</c:v>
+                  <c:v>0.66</c:v>
                 </c:pt>
                 <c:pt idx="4">
-                  <c:v>6.2</c:v>
+                  <c:v>0.79</c:v>
                 </c:pt>
                 <c:pt idx="5">
-                  <c:v>9.5</c:v>
+                  <c:v>1.04</c:v>
                 </c:pt>
                 <c:pt idx="6">
-                  <c:v>12.8</c:v>
+                  <c:v>1.36</c:v>
+                </c:pt>
+                <c:pt idx="7">
+                  <c:v>1.52</c:v>
+                </c:pt>
+                <c:pt idx="8">
+                  <c:v>1.65</c:v>
+                </c:pt>
+                <c:pt idx="9">
+                  <c:v>1.84</c:v>
+                </c:pt>
+                <c:pt idx="10">
+                  <c:v>2.12</c:v>
+                </c:pt>
+                <c:pt idx="11">
+                  <c:v>2.45</c:v>
+                </c:pt>
+                <c:pt idx="12">
+                  <c:v>2.63</c:v>
+                </c:pt>
+                <c:pt idx="13">
+                  <c:v>2.9</c:v>
+                </c:pt>
+                <c:pt idx="14">
+                  <c:v>3.07</c:v>
+                </c:pt>
+                <c:pt idx="15">
+                  <c:v>3.17</c:v>
+                </c:pt>
+                <c:pt idx="16">
+                  <c:v>3.4</c:v>
+                </c:pt>
+                <c:pt idx="17">
+                  <c:v>3.51</c:v>
+                </c:pt>
+                <c:pt idx="18">
+                  <c:v>3.81</c:v>
+                </c:pt>
+                <c:pt idx="19">
+                  <c:v>3.91</c:v>
+                </c:pt>
+                <c:pt idx="20">
+                  <c:v>4.14</c:v>
+                </c:pt>
+                <c:pt idx="21">
+                  <c:v>4.42</c:v>
+                </c:pt>
+                <c:pt idx="22">
+                  <c:v>4.64</c:v>
+                </c:pt>
+                <c:pt idx="23">
+                  <c:v>4.86</c:v>
+                </c:pt>
+                <c:pt idx="24">
+                  <c:v>5.14</c:v>
+                </c:pt>
+                <c:pt idx="25">
+                  <c:v>5.2</c:v>
+                </c:pt>
+                <c:pt idx="26">
+                  <c:v>5.36</c:v>
+                </c:pt>
+                <c:pt idx="27">
+                  <c:v>5.66</c:v>
+                </c:pt>
+                <c:pt idx="28">
+                  <c:v>5.84</c:v>
+                </c:pt>
+                <c:pt idx="29">
+                  <c:v>6.18</c:v>
+                </c:pt>
+                <c:pt idx="30">
+                  <c:v>6.44</c:v>
+                </c:pt>
+                <c:pt idx="31">
+                  <c:v>6.5</c:v>
+                </c:pt>
+                <c:pt idx="32">
+                  <c:v>6.5</c:v>
+                </c:pt>
+                <c:pt idx="33">
+                  <c:v>6.5</c:v>
+                </c:pt>
+                <c:pt idx="34">
+                  <c:v>6.5</c:v>
+                </c:pt>
+                <c:pt idx="35">
+                  <c:v>6.5</c:v>
+                </c:pt>
+                <c:pt idx="36">
+                  <c:v>6.5</c:v>
+                </c:pt>
+                <c:pt idx="37">
+                  <c:v>6.5</c:v>
+                </c:pt>
+                <c:pt idx="38">
+                  <c:v>6.5</c:v>
+                </c:pt>
+                <c:pt idx="39">
+                  <c:v>6.5</c:v>
+                </c:pt>
+                <c:pt idx="40">
+                  <c:v>6.5</c:v>
+                </c:pt>
+                <c:pt idx="41">
+                  <c:v>6.5</c:v>
+                </c:pt>
+                <c:pt idx="42">
+                  <c:v>6.5</c:v>
+                </c:pt>
+                <c:pt idx="43">
+                  <c:v>6.5</c:v>
+                </c:pt>
+                <c:pt idx="44">
+                  <c:v>6.5</c:v>
+                </c:pt>
+                <c:pt idx="45">
+                  <c:v>6.5</c:v>
+                </c:pt>
+                <c:pt idx="46">
+                  <c:v>6.5</c:v>
+                </c:pt>
+                <c:pt idx="47">
+                  <c:v>6.5</c:v>
+                </c:pt>
+                <c:pt idx="48">
+                  <c:v>6.5</c:v>
+                </c:pt>
+                <c:pt idx="49">
+                  <c:v>6.5</c:v>
+                </c:pt>
+                <c:pt idx="50">
+                  <c:v>6.5</c:v>
+                </c:pt>
+                <c:pt idx="51">
+                  <c:v>6.5</c:v>
+                </c:pt>
+                <c:pt idx="52">
+                  <c:v>6.5</c:v>
+                </c:pt>
+                <c:pt idx="53">
+                  <c:v>6.5</c:v>
+                </c:pt>
+                <c:pt idx="54">
+                  <c:v>6.5</c:v>
+                </c:pt>
+                <c:pt idx="55">
+                  <c:v>6.5</c:v>
+                </c:pt>
+                <c:pt idx="56">
+                  <c:v>6.5</c:v>
+                </c:pt>
+                <c:pt idx="57">
+                  <c:v>6.5</c:v>
+                </c:pt>
+                <c:pt idx="58">
+                  <c:v>6.5</c:v>
+                </c:pt>
+                <c:pt idx="59">
+                  <c:v>6.5</c:v>
+                </c:pt>
+                <c:pt idx="60">
+                  <c:v>6.5</c:v>
+                </c:pt>
+                <c:pt idx="61">
+                  <c:v>6.5</c:v>
+                </c:pt>
+                <c:pt idx="62">
+                  <c:v>6.5</c:v>
+                </c:pt>
+                <c:pt idx="63">
+                  <c:v>6.5</c:v>
+                </c:pt>
+                <c:pt idx="64">
+                  <c:v>6.5</c:v>
+                </c:pt>
+                <c:pt idx="65">
+                  <c:v>6.5</c:v>
+                </c:pt>
+                <c:pt idx="66">
+                  <c:v>6.5</c:v>
+                </c:pt>
+                <c:pt idx="67">
+                  <c:v>6.5</c:v>
+                </c:pt>
+                <c:pt idx="68">
+                  <c:v>6.5</c:v>
+                </c:pt>
+                <c:pt idx="69">
+                  <c:v>6.5</c:v>
+                </c:pt>
+                <c:pt idx="70">
+                  <c:v>6.5</c:v>
+                </c:pt>
+                <c:pt idx="71">
+                  <c:v>6.5</c:v>
+                </c:pt>
+                <c:pt idx="72">
+                  <c:v>6.5</c:v>
+                </c:pt>
+                <c:pt idx="73">
+                  <c:v>6.5</c:v>
+                </c:pt>
+                <c:pt idx="74">
+                  <c:v>6.5</c:v>
+                </c:pt>
+                <c:pt idx="75">
+                  <c:v>6.5</c:v>
+                </c:pt>
+                <c:pt idx="76">
+                  <c:v>6.5</c:v>
+                </c:pt>
+                <c:pt idx="77">
+                  <c:v>6.5</c:v>
+                </c:pt>
+                <c:pt idx="78">
+                  <c:v>6.5</c:v>
+                </c:pt>
+                <c:pt idx="79">
+                  <c:v>6.5</c:v>
+                </c:pt>
+                <c:pt idx="80">
+                  <c:v>6.5</c:v>
+                </c:pt>
+                <c:pt idx="81">
+                  <c:v>6.5</c:v>
+                </c:pt>
+                <c:pt idx="82">
+                  <c:v>6.5</c:v>
+                </c:pt>
+                <c:pt idx="83">
+                  <c:v>6.5</c:v>
+                </c:pt>
+                <c:pt idx="84">
+                  <c:v>6.5</c:v>
+                </c:pt>
+                <c:pt idx="85">
+                  <c:v>6.5</c:v>
+                </c:pt>
+                <c:pt idx="86">
+                  <c:v>6.5</c:v>
+                </c:pt>
+                <c:pt idx="87">
+                  <c:v>6.5</c:v>
+                </c:pt>
+                <c:pt idx="88">
+                  <c:v>6.5</c:v>
+                </c:pt>
+                <c:pt idx="89">
+                  <c:v>6.5</c:v>
+                </c:pt>
+                <c:pt idx="90">
+                  <c:v>6.5</c:v>
+                </c:pt>
+                <c:pt idx="91">
+                  <c:v>6.5</c:v>
+                </c:pt>
+                <c:pt idx="92">
+                  <c:v>6.5</c:v>
+                </c:pt>
+                <c:pt idx="93">
+                  <c:v>6.5</c:v>
+                </c:pt>
+                <c:pt idx="94">
+                  <c:v>6.5</c:v>
+                </c:pt>
+                <c:pt idx="95">
+                  <c:v>6.5</c:v>
+                </c:pt>
+                <c:pt idx="96">
+                  <c:v>6.5</c:v>
+                </c:pt>
+                <c:pt idx="97">
+                  <c:v>6.5</c:v>
+                </c:pt>
+                <c:pt idx="98">
+                  <c:v>6.5</c:v>
+                </c:pt>
+                <c:pt idx="99">
+                  <c:v>6.5</c:v>
+                </c:pt>
+                <c:pt idx="100">
+                  <c:v>6.5</c:v>
+                </c:pt>
+                <c:pt idx="101">
+                  <c:v>6.5</c:v>
+                </c:pt>
+                <c:pt idx="102">
+                  <c:v>6.5</c:v>
+                </c:pt>
+                <c:pt idx="103">
+                  <c:v>6.5</c:v>
+                </c:pt>
+                <c:pt idx="104">
+                  <c:v>6.5</c:v>
+                </c:pt>
+                <c:pt idx="105">
+                  <c:v>6.5</c:v>
+                </c:pt>
+                <c:pt idx="106">
+                  <c:v>6.5</c:v>
+                </c:pt>
+                <c:pt idx="107">
+                  <c:v>6.5</c:v>
+                </c:pt>
+                <c:pt idx="108">
+                  <c:v>6.5</c:v>
+                </c:pt>
+                <c:pt idx="109">
+                  <c:v>6.5</c:v>
+                </c:pt>
+                <c:pt idx="110">
+                  <c:v>6.5</c:v>
+                </c:pt>
+                <c:pt idx="111">
+                  <c:v>6.5</c:v>
+                </c:pt>
+                <c:pt idx="112">
+                  <c:v>6.5</c:v>
+                </c:pt>
+                <c:pt idx="113">
+                  <c:v>6.5</c:v>
+                </c:pt>
+                <c:pt idx="114">
+                  <c:v>6.5</c:v>
+                </c:pt>
+                <c:pt idx="115">
+                  <c:v>6.5</c:v>
+                </c:pt>
+                <c:pt idx="116">
+                  <c:v>6.5</c:v>
+                </c:pt>
+                <c:pt idx="117">
+                  <c:v>6.5</c:v>
+                </c:pt>
+                <c:pt idx="118">
+                  <c:v>6.5</c:v>
+                </c:pt>
+                <c:pt idx="119">
+                  <c:v>6.5</c:v>
+                </c:pt>
+                <c:pt idx="120">
+                  <c:v>6.5</c:v>
+                </c:pt>
+                <c:pt idx="121">
+                  <c:v>6.5</c:v>
+                </c:pt>
+                <c:pt idx="122">
+                  <c:v>6.5</c:v>
+                </c:pt>
+                <c:pt idx="123">
+                  <c:v>6.5</c:v>
+                </c:pt>
+                <c:pt idx="124">
+                  <c:v>6.5</c:v>
+                </c:pt>
+                <c:pt idx="125">
+                  <c:v>6.5</c:v>
+                </c:pt>
+                <c:pt idx="126">
+                  <c:v>6.5</c:v>
+                </c:pt>
+                <c:pt idx="127">
+                  <c:v>6.5</c:v>
+                </c:pt>
+                <c:pt idx="128">
+                  <c:v>6.5</c:v>
+                </c:pt>
+                <c:pt idx="129">
+                  <c:v>6.5</c:v>
+                </c:pt>
+                <c:pt idx="130">
+                  <c:v>6.5</c:v>
+                </c:pt>
+                <c:pt idx="131">
+                  <c:v>6.5</c:v>
+                </c:pt>
+                <c:pt idx="132">
+                  <c:v>6.5</c:v>
+                </c:pt>
+                <c:pt idx="133">
+                  <c:v>6.5</c:v>
+                </c:pt>
+                <c:pt idx="134">
+                  <c:v>6.5</c:v>
+                </c:pt>
+                <c:pt idx="135">
+                  <c:v>6.5</c:v>
+                </c:pt>
+                <c:pt idx="136">
+                  <c:v>6.5</c:v>
+                </c:pt>
+                <c:pt idx="137">
+                  <c:v>6.5</c:v>
+                </c:pt>
+                <c:pt idx="138">
+                  <c:v>6.5</c:v>
+                </c:pt>
+                <c:pt idx="139">
+                  <c:v>6.5</c:v>
+                </c:pt>
+                <c:pt idx="140">
+                  <c:v>6.5</c:v>
+                </c:pt>
+                <c:pt idx="141">
+                  <c:v>6.5</c:v>
+                </c:pt>
+                <c:pt idx="142">
+                  <c:v>6.5</c:v>
+                </c:pt>
+                <c:pt idx="143">
+                  <c:v>6.5</c:v>
+                </c:pt>
+                <c:pt idx="144">
+                  <c:v>6.5</c:v>
+                </c:pt>
+                <c:pt idx="145">
+                  <c:v>6.5</c:v>
+                </c:pt>
+                <c:pt idx="146">
+                  <c:v>6.5</c:v>
+                </c:pt>
+                <c:pt idx="147">
+                  <c:v>6.5</c:v>
+                </c:pt>
+                <c:pt idx="148">
+                  <c:v>6.5</c:v>
+                </c:pt>
+                <c:pt idx="149">
+                  <c:v>6.5</c:v>
+                </c:pt>
+                <c:pt idx="150">
+                  <c:v>6.5</c:v>
+                </c:pt>
+                <c:pt idx="151">
+                  <c:v>6.5</c:v>
+                </c:pt>
+                <c:pt idx="152">
+                  <c:v>6.5</c:v>
+                </c:pt>
+                <c:pt idx="153">
+                  <c:v>6.5</c:v>
+                </c:pt>
+                <c:pt idx="154">
+                  <c:v>6.5</c:v>
+                </c:pt>
+                <c:pt idx="155">
+                  <c:v>6.5</c:v>
+                </c:pt>
+                <c:pt idx="156">
+                  <c:v>6.5</c:v>
+                </c:pt>
+                <c:pt idx="157">
+                  <c:v>6.5</c:v>
+                </c:pt>
+                <c:pt idx="158">
+                  <c:v>6.5</c:v>
+                </c:pt>
+                <c:pt idx="159">
+                  <c:v>6.5</c:v>
+                </c:pt>
+                <c:pt idx="160">
+                  <c:v>6.5</c:v>
+                </c:pt>
+                <c:pt idx="161">
+                  <c:v>6.5</c:v>
+                </c:pt>
+                <c:pt idx="162">
+                  <c:v>6.5</c:v>
+                </c:pt>
+                <c:pt idx="163">
+                  <c:v>6.5</c:v>
+                </c:pt>
+                <c:pt idx="164">
+                  <c:v>6.5</c:v>
+                </c:pt>
+                <c:pt idx="165">
+                  <c:v>6.5</c:v>
+                </c:pt>
+                <c:pt idx="166">
+                  <c:v>6.5</c:v>
+                </c:pt>
+                <c:pt idx="167">
+                  <c:v>6.5</c:v>
+                </c:pt>
+                <c:pt idx="168">
+                  <c:v>6.5</c:v>
+                </c:pt>
+                <c:pt idx="169">
+                  <c:v>6.5</c:v>
+                </c:pt>
+                <c:pt idx="170">
+                  <c:v>6.5</c:v>
+                </c:pt>
+                <c:pt idx="171">
+                  <c:v>6.5</c:v>
+                </c:pt>
+                <c:pt idx="172">
+                  <c:v>6.5</c:v>
+                </c:pt>
+                <c:pt idx="173">
+                  <c:v>6.5</c:v>
+                </c:pt>
+                <c:pt idx="174">
+                  <c:v>6.5</c:v>
+                </c:pt>
+                <c:pt idx="175">
+                  <c:v>6.5</c:v>
+                </c:pt>
+                <c:pt idx="176">
+                  <c:v>6.5</c:v>
+                </c:pt>
+                <c:pt idx="177">
+                  <c:v>6.5</c:v>
+                </c:pt>
+                <c:pt idx="178">
+                  <c:v>6.5</c:v>
+                </c:pt>
+                <c:pt idx="179">
+                  <c:v>6.5</c:v>
+                </c:pt>
+                <c:pt idx="180">
+                  <c:v>6.5</c:v>
+                </c:pt>
+                <c:pt idx="181">
+                  <c:v>6.5</c:v>
+                </c:pt>
+                <c:pt idx="182">
+                  <c:v>6.5</c:v>
+                </c:pt>
+                <c:pt idx="183">
+                  <c:v>6.5</c:v>
+                </c:pt>
+                <c:pt idx="184">
+                  <c:v>6.5</c:v>
+                </c:pt>
+                <c:pt idx="185">
+                  <c:v>6.5</c:v>
+                </c:pt>
+                <c:pt idx="186">
+                  <c:v>6.5</c:v>
+                </c:pt>
+                <c:pt idx="187">
+                  <c:v>6.5</c:v>
+                </c:pt>
+                <c:pt idx="188">
+                  <c:v>6.5</c:v>
+                </c:pt>
+                <c:pt idx="189">
+                  <c:v>6.5</c:v>
+                </c:pt>
+                <c:pt idx="190">
+                  <c:v>6.5</c:v>
+                </c:pt>
+                <c:pt idx="191">
+                  <c:v>6.5</c:v>
+                </c:pt>
+                <c:pt idx="192">
+                  <c:v>6.5</c:v>
+                </c:pt>
+                <c:pt idx="193">
+                  <c:v>6.5</c:v>
+                </c:pt>
+                <c:pt idx="194">
+                  <c:v>6.5</c:v>
+                </c:pt>
+                <c:pt idx="195">
+                  <c:v>6.5</c:v>
+                </c:pt>
+                <c:pt idx="196">
+                  <c:v>6.5</c:v>
+                </c:pt>
+                <c:pt idx="197">
+                  <c:v>6.5</c:v>
+                </c:pt>
+                <c:pt idx="198">
+                  <c:v>6.5</c:v>
+                </c:pt>
+                <c:pt idx="199">
+                  <c:v>6.5</c:v>
+                </c:pt>
+                <c:pt idx="200">
+                  <c:v>6.5</c:v>
+                </c:pt>
+                <c:pt idx="201">
+                  <c:v>6.5</c:v>
+                </c:pt>
+                <c:pt idx="202">
+                  <c:v>6.5</c:v>
+                </c:pt>
+                <c:pt idx="203">
+                  <c:v>6.5</c:v>
+                </c:pt>
+                <c:pt idx="204">
+                  <c:v>6.5</c:v>
+                </c:pt>
+                <c:pt idx="205">
+                  <c:v>6.5</c:v>
+                </c:pt>
+                <c:pt idx="206">
+                  <c:v>6.5</c:v>
+                </c:pt>
+                <c:pt idx="207">
+                  <c:v>6.5</c:v>
+                </c:pt>
+                <c:pt idx="208">
+                  <c:v>6.5</c:v>
+                </c:pt>
+                <c:pt idx="209">
+                  <c:v>6.5</c:v>
+                </c:pt>
+                <c:pt idx="210">
+                  <c:v>6.5</c:v>
+                </c:pt>
+                <c:pt idx="211">
+                  <c:v>6.5</c:v>
+                </c:pt>
+                <c:pt idx="212">
+                  <c:v>6.5</c:v>
+                </c:pt>
+                <c:pt idx="213">
+                  <c:v>6.5</c:v>
+                </c:pt>
+                <c:pt idx="214">
+                  <c:v>6.5</c:v>
+                </c:pt>
+                <c:pt idx="215">
+                  <c:v>6.5</c:v>
+                </c:pt>
+                <c:pt idx="216">
+                  <c:v>6.5</c:v>
+                </c:pt>
+                <c:pt idx="217">
+                  <c:v>6.5</c:v>
+                </c:pt>
+                <c:pt idx="218">
+                  <c:v>6.5</c:v>
+                </c:pt>
+                <c:pt idx="219">
+                  <c:v>6.5</c:v>
+                </c:pt>
+                <c:pt idx="220">
+                  <c:v>6.5</c:v>
+                </c:pt>
+                <c:pt idx="221">
+                  <c:v>6.5</c:v>
+                </c:pt>
+                <c:pt idx="222">
+                  <c:v>6.5</c:v>
+                </c:pt>
+                <c:pt idx="223">
+                  <c:v>6.5</c:v>
+                </c:pt>
+                <c:pt idx="224">
+                  <c:v>6.5</c:v>
+                </c:pt>
+                <c:pt idx="225">
+                  <c:v>6.5</c:v>
+                </c:pt>
+                <c:pt idx="226">
+                  <c:v>6.5</c:v>
+                </c:pt>
+                <c:pt idx="227">
+                  <c:v>6.5</c:v>
+                </c:pt>
+                <c:pt idx="228">
+                  <c:v>6.5</c:v>
+                </c:pt>
+                <c:pt idx="229">
+                  <c:v>6.5</c:v>
+                </c:pt>
+                <c:pt idx="230">
+                  <c:v>6.5</c:v>
+                </c:pt>
+                <c:pt idx="231">
+                  <c:v>6.5</c:v>
+                </c:pt>
+                <c:pt idx="232">
+                  <c:v>6.5</c:v>
+                </c:pt>
+                <c:pt idx="233">
+                  <c:v>6.5</c:v>
+                </c:pt>
+                <c:pt idx="234">
+                  <c:v>6.5</c:v>
+                </c:pt>
+                <c:pt idx="235">
+                  <c:v>6.5</c:v>
+                </c:pt>
+                <c:pt idx="236">
+                  <c:v>6.5</c:v>
+                </c:pt>
+                <c:pt idx="237">
+                  <c:v>6.5</c:v>
+                </c:pt>
+                <c:pt idx="238">
+                  <c:v>6.5</c:v>
+                </c:pt>
+                <c:pt idx="239">
+                  <c:v>6.5</c:v>
+                </c:pt>
+                <c:pt idx="240">
+                  <c:v>6.5</c:v>
+                </c:pt>
+                <c:pt idx="241">
+                  <c:v>6.5</c:v>
+                </c:pt>
+                <c:pt idx="242">
+                  <c:v>6.5</c:v>
+                </c:pt>
+                <c:pt idx="243">
+                  <c:v>6.5</c:v>
+                </c:pt>
+                <c:pt idx="244">
+                  <c:v>6.5</c:v>
+                </c:pt>
+                <c:pt idx="245">
+                  <c:v>6.5</c:v>
+                </c:pt>
+                <c:pt idx="246">
+                  <c:v>6.5</c:v>
+                </c:pt>
+                <c:pt idx="247">
+                  <c:v>6.5</c:v>
+                </c:pt>
+                <c:pt idx="248">
+                  <c:v>6.5</c:v>
+                </c:pt>
+                <c:pt idx="249">
+                  <c:v>6.5</c:v>
+                </c:pt>
+                <c:pt idx="250">
+                  <c:v>6.5</c:v>
+                </c:pt>
+                <c:pt idx="251">
+                  <c:v>6.5</c:v>
+                </c:pt>
+                <c:pt idx="252">
+                  <c:v>6.5</c:v>
+                </c:pt>
+                <c:pt idx="253">
+                  <c:v>6.5</c:v>
+                </c:pt>
+                <c:pt idx="254">
+                  <c:v>6.5</c:v>
+                </c:pt>
+                <c:pt idx="255">
+                  <c:v>6.5</c:v>
+                </c:pt>
+                <c:pt idx="256">
+                  <c:v>6.5</c:v>
+                </c:pt>
+                <c:pt idx="257">
+                  <c:v>6.5</c:v>
+                </c:pt>
+                <c:pt idx="258">
+                  <c:v>6.5</c:v>
+                </c:pt>
+                <c:pt idx="259">
+                  <c:v>6.5</c:v>
+                </c:pt>
+                <c:pt idx="260">
+                  <c:v>6.5</c:v>
                 </c:pt>
               </c:numCache>
             </c:numRef>
           </c:val>
+          <c:spPr>
+            <a:ln w="12700" cap="flat" cmpd="sng">
+              <a:solidFill>
+                <a:srgbClr val="4472C4"/>
+              </a:solidFill>
+            </a:ln>
+          </c:spPr>
+          <c:marker>
+            <c:symbol val="none"/>
+          </c:marker>
           <c:smooth val="0"/>
-          <c:extLst>
-            <c:ext xmlns:c16="http://schemas.microsoft.com/office/drawing/2014/chart" uri="{C3380CC4-5D6E-409C-BE32-E72D297353CC}">
-              <c16:uniqueId val="{00000000-F90F-4DEA-9AB8-4C96B1CC70C1}"/>
-            </c:ext>
-          </c:extLst>
         </c:ser>
         <c:ser>
           <c:idx val="1"/>
@@ -496,86 +2022,1607 @@
               <c:strCache>
                 <c:ptCount val="1"/>
                 <c:pt idx="0">
-                  <c:v>业绩基准</c:v>
+                  <c:v>偏债混合基金指数</c:v>
                 </c:pt>
               </c:strCache>
             </c:strRef>
           </c:tx>
           <c:cat>
             <c:strRef>
-              <c:f>Sheet1!$A$2:$A$8</c:f>
+              <c:f>Sheet1!$A$2:$A$262</c:f>
               <c:strCache>
-                <c:ptCount val="7"/>
+                <c:ptCount val="261"/>
                 <c:pt idx="0">
-                  <c:v>2024-05</c:v>
+                  <c:v>2025-05-01</c:v>
                 </c:pt>
                 <c:pt idx="1">
-                  <c:v>2024-07</c:v>
+                  <c:v>2025-05-02</c:v>
                 </c:pt>
                 <c:pt idx="2">
-                  <c:v>2024-09</c:v>
+                  <c:v>2025-05-05</c:v>
                 </c:pt>
                 <c:pt idx="3">
-                  <c:v>2024-11</c:v>
+                  <c:v>2025-05-06</c:v>
                 </c:pt>
                 <c:pt idx="4">
-                  <c:v>2025-01</c:v>
+                  <c:v>2025-05-07</c:v>
                 </c:pt>
                 <c:pt idx="5">
-                  <c:v>2025-03</c:v>
+                  <c:v>2025-05-08</c:v>
                 </c:pt>
                 <c:pt idx="6">
-                  <c:v>2025-05</c:v>
+                  <c:v>2025-05-09</c:v>
+                </c:pt>
+                <c:pt idx="7">
+                  <c:v>2025-05-12</c:v>
+                </c:pt>
+                <c:pt idx="8">
+                  <c:v>2025-05-13</c:v>
+                </c:pt>
+                <c:pt idx="9">
+                  <c:v>2025-05-14</c:v>
+                </c:pt>
+                <c:pt idx="10">
+                  <c:v>2025-05-15</c:v>
+                </c:pt>
+                <c:pt idx="11">
+                  <c:v>2025-05-16</c:v>
+                </c:pt>
+                <c:pt idx="12">
+                  <c:v>2025-05-19</c:v>
+                </c:pt>
+                <c:pt idx="13">
+                  <c:v>2025-05-20</c:v>
+                </c:pt>
+                <c:pt idx="14">
+                  <c:v>2025-05-21</c:v>
+                </c:pt>
+                <c:pt idx="15">
+                  <c:v>2025-05-22</c:v>
+                </c:pt>
+                <c:pt idx="16">
+                  <c:v>2025-05-23</c:v>
+                </c:pt>
+                <c:pt idx="17">
+                  <c:v>2025-05-26</c:v>
+                </c:pt>
+                <c:pt idx="18">
+                  <c:v>2025-05-27</c:v>
+                </c:pt>
+                <c:pt idx="19">
+                  <c:v>2025-05-28</c:v>
+                </c:pt>
+                <c:pt idx="20">
+                  <c:v>2025-05-29</c:v>
+                </c:pt>
+                <c:pt idx="21">
+                  <c:v>2025-05-30</c:v>
+                </c:pt>
+                <c:pt idx="22">
+                  <c:v>2025-06-02</c:v>
+                </c:pt>
+                <c:pt idx="23">
+                  <c:v>2025-06-03</c:v>
+                </c:pt>
+                <c:pt idx="24">
+                  <c:v>2025-06-04</c:v>
+                </c:pt>
+                <c:pt idx="25">
+                  <c:v>2025-06-05</c:v>
+                </c:pt>
+                <c:pt idx="26">
+                  <c:v>2025-06-06</c:v>
+                </c:pt>
+                <c:pt idx="27">
+                  <c:v>2025-06-09</c:v>
+                </c:pt>
+                <c:pt idx="28">
+                  <c:v>2025-06-10</c:v>
+                </c:pt>
+                <c:pt idx="29">
+                  <c:v>2025-06-11</c:v>
+                </c:pt>
+                <c:pt idx="30">
+                  <c:v>2025-06-12</c:v>
+                </c:pt>
+                <c:pt idx="31">
+                  <c:v>2025-06-13</c:v>
+                </c:pt>
+                <c:pt idx="32">
+                  <c:v>2025-06-16</c:v>
+                </c:pt>
+                <c:pt idx="33">
+                  <c:v>2025-06-17</c:v>
+                </c:pt>
+                <c:pt idx="34">
+                  <c:v>2025-06-18</c:v>
+                </c:pt>
+                <c:pt idx="35">
+                  <c:v>2025-06-19</c:v>
+                </c:pt>
+                <c:pt idx="36">
+                  <c:v>2025-06-20</c:v>
+                </c:pt>
+                <c:pt idx="37">
+                  <c:v>2025-06-23</c:v>
+                </c:pt>
+                <c:pt idx="38">
+                  <c:v>2025-06-24</c:v>
+                </c:pt>
+                <c:pt idx="39">
+                  <c:v>2025-06-25</c:v>
+                </c:pt>
+                <c:pt idx="40">
+                  <c:v>2025-06-26</c:v>
+                </c:pt>
+                <c:pt idx="41">
+                  <c:v>2025-06-27</c:v>
+                </c:pt>
+                <c:pt idx="42">
+                  <c:v>2025-06-30</c:v>
+                </c:pt>
+                <c:pt idx="43">
+                  <c:v>2025-07-01</c:v>
+                </c:pt>
+                <c:pt idx="44">
+                  <c:v>2025-07-02</c:v>
+                </c:pt>
+                <c:pt idx="45">
+                  <c:v>2025-07-03</c:v>
+                </c:pt>
+                <c:pt idx="46">
+                  <c:v>2025-07-04</c:v>
+                </c:pt>
+                <c:pt idx="47">
+                  <c:v>2025-07-07</c:v>
+                </c:pt>
+                <c:pt idx="48">
+                  <c:v>2025-07-08</c:v>
+                </c:pt>
+                <c:pt idx="49">
+                  <c:v>2025-07-09</c:v>
+                </c:pt>
+                <c:pt idx="50">
+                  <c:v>2025-07-10</c:v>
+                </c:pt>
+                <c:pt idx="51">
+                  <c:v>2025-07-11</c:v>
+                </c:pt>
+                <c:pt idx="52">
+                  <c:v>2025-07-14</c:v>
+                </c:pt>
+                <c:pt idx="53">
+                  <c:v>2025-07-15</c:v>
+                </c:pt>
+                <c:pt idx="54">
+                  <c:v>2025-07-16</c:v>
+                </c:pt>
+                <c:pt idx="55">
+                  <c:v>2025-07-17</c:v>
+                </c:pt>
+                <c:pt idx="56">
+                  <c:v>2025-07-18</c:v>
+                </c:pt>
+                <c:pt idx="57">
+                  <c:v>2025-07-21</c:v>
+                </c:pt>
+                <c:pt idx="58">
+                  <c:v>2025-07-22</c:v>
+                </c:pt>
+                <c:pt idx="59">
+                  <c:v>2025-07-23</c:v>
+                </c:pt>
+                <c:pt idx="60">
+                  <c:v>2025-07-24</c:v>
+                </c:pt>
+                <c:pt idx="61">
+                  <c:v>2025-07-25</c:v>
+                </c:pt>
+                <c:pt idx="62">
+                  <c:v>2025-07-28</c:v>
+                </c:pt>
+                <c:pt idx="63">
+                  <c:v>2025-07-29</c:v>
+                </c:pt>
+                <c:pt idx="64">
+                  <c:v>2025-07-30</c:v>
+                </c:pt>
+                <c:pt idx="65">
+                  <c:v>2025-07-31</c:v>
+                </c:pt>
+                <c:pt idx="66">
+                  <c:v>2025-08-01</c:v>
+                </c:pt>
+                <c:pt idx="67">
+                  <c:v>2025-08-04</c:v>
+                </c:pt>
+                <c:pt idx="68">
+                  <c:v>2025-08-05</c:v>
+                </c:pt>
+                <c:pt idx="69">
+                  <c:v>2025-08-06</c:v>
+                </c:pt>
+                <c:pt idx="70">
+                  <c:v>2025-08-07</c:v>
+                </c:pt>
+                <c:pt idx="71">
+                  <c:v>2025-08-08</c:v>
+                </c:pt>
+                <c:pt idx="72">
+                  <c:v>2025-08-11</c:v>
+                </c:pt>
+                <c:pt idx="73">
+                  <c:v>2025-08-12</c:v>
+                </c:pt>
+                <c:pt idx="74">
+                  <c:v>2025-08-13</c:v>
+                </c:pt>
+                <c:pt idx="75">
+                  <c:v>2025-08-14</c:v>
+                </c:pt>
+                <c:pt idx="76">
+                  <c:v>2025-08-15</c:v>
+                </c:pt>
+                <c:pt idx="77">
+                  <c:v>2025-08-18</c:v>
+                </c:pt>
+                <c:pt idx="78">
+                  <c:v>2025-08-19</c:v>
+                </c:pt>
+                <c:pt idx="79">
+                  <c:v>2025-08-20</c:v>
+                </c:pt>
+                <c:pt idx="80">
+                  <c:v>2025-08-21</c:v>
+                </c:pt>
+                <c:pt idx="81">
+                  <c:v>2025-08-22</c:v>
+                </c:pt>
+                <c:pt idx="82">
+                  <c:v>2025-08-25</c:v>
+                </c:pt>
+                <c:pt idx="83">
+                  <c:v>2025-08-26</c:v>
+                </c:pt>
+                <c:pt idx="84">
+                  <c:v>2025-08-27</c:v>
+                </c:pt>
+                <c:pt idx="85">
+                  <c:v>2025-08-28</c:v>
+                </c:pt>
+                <c:pt idx="86">
+                  <c:v>2025-08-29</c:v>
+                </c:pt>
+                <c:pt idx="87">
+                  <c:v>2025-09-01</c:v>
+                </c:pt>
+                <c:pt idx="88">
+                  <c:v>2025-09-02</c:v>
+                </c:pt>
+                <c:pt idx="89">
+                  <c:v>2025-09-03</c:v>
+                </c:pt>
+                <c:pt idx="90">
+                  <c:v>2025-09-04</c:v>
+                </c:pt>
+                <c:pt idx="91">
+                  <c:v>2025-09-05</c:v>
+                </c:pt>
+                <c:pt idx="92">
+                  <c:v>2025-09-08</c:v>
+                </c:pt>
+                <c:pt idx="93">
+                  <c:v>2025-09-09</c:v>
+                </c:pt>
+                <c:pt idx="94">
+                  <c:v>2025-09-10</c:v>
+                </c:pt>
+                <c:pt idx="95">
+                  <c:v>2025-09-11</c:v>
+                </c:pt>
+                <c:pt idx="96">
+                  <c:v>2025-09-12</c:v>
+                </c:pt>
+                <c:pt idx="97">
+                  <c:v>2025-09-15</c:v>
+                </c:pt>
+                <c:pt idx="98">
+                  <c:v>2025-09-16</c:v>
+                </c:pt>
+                <c:pt idx="99">
+                  <c:v>2025-09-17</c:v>
+                </c:pt>
+                <c:pt idx="100">
+                  <c:v>2025-09-18</c:v>
+                </c:pt>
+                <c:pt idx="101">
+                  <c:v>2025-09-19</c:v>
+                </c:pt>
+                <c:pt idx="102">
+                  <c:v>2025-09-22</c:v>
+                </c:pt>
+                <c:pt idx="103">
+                  <c:v>2025-09-23</c:v>
+                </c:pt>
+                <c:pt idx="104">
+                  <c:v>2025-09-24</c:v>
+                </c:pt>
+                <c:pt idx="105">
+                  <c:v>2025-09-25</c:v>
+                </c:pt>
+                <c:pt idx="106">
+                  <c:v>2025-09-26</c:v>
+                </c:pt>
+                <c:pt idx="107">
+                  <c:v>2025-09-29</c:v>
+                </c:pt>
+                <c:pt idx="108">
+                  <c:v>2025-09-30</c:v>
+                </c:pt>
+                <c:pt idx="109">
+                  <c:v>2025-10-01</c:v>
+                </c:pt>
+                <c:pt idx="110">
+                  <c:v>2025-10-02</c:v>
+                </c:pt>
+                <c:pt idx="111">
+                  <c:v>2025-10-03</c:v>
+                </c:pt>
+                <c:pt idx="112">
+                  <c:v>2025-10-06</c:v>
+                </c:pt>
+                <c:pt idx="113">
+                  <c:v>2025-10-07</c:v>
+                </c:pt>
+                <c:pt idx="114">
+                  <c:v>2025-10-08</c:v>
+                </c:pt>
+                <c:pt idx="115">
+                  <c:v>2025-10-09</c:v>
+                </c:pt>
+                <c:pt idx="116">
+                  <c:v>2025-10-10</c:v>
+                </c:pt>
+                <c:pt idx="117">
+                  <c:v>2025-10-13</c:v>
+                </c:pt>
+                <c:pt idx="118">
+                  <c:v>2025-10-14</c:v>
+                </c:pt>
+                <c:pt idx="119">
+                  <c:v>2025-10-15</c:v>
+                </c:pt>
+                <c:pt idx="120">
+                  <c:v>2025-10-16</c:v>
+                </c:pt>
+                <c:pt idx="121">
+                  <c:v>2025-10-17</c:v>
+                </c:pt>
+                <c:pt idx="122">
+                  <c:v>2025-10-20</c:v>
+                </c:pt>
+                <c:pt idx="123">
+                  <c:v>2025-10-21</c:v>
+                </c:pt>
+                <c:pt idx="124">
+                  <c:v>2025-10-22</c:v>
+                </c:pt>
+                <c:pt idx="125">
+                  <c:v>2025-10-23</c:v>
+                </c:pt>
+                <c:pt idx="126">
+                  <c:v>2025-10-24</c:v>
+                </c:pt>
+                <c:pt idx="127">
+                  <c:v>2025-10-27</c:v>
+                </c:pt>
+                <c:pt idx="128">
+                  <c:v>2025-10-28</c:v>
+                </c:pt>
+                <c:pt idx="129">
+                  <c:v>2025-10-29</c:v>
+                </c:pt>
+                <c:pt idx="130">
+                  <c:v>2025-10-30</c:v>
+                </c:pt>
+                <c:pt idx="131">
+                  <c:v>2025-10-31</c:v>
+                </c:pt>
+                <c:pt idx="132">
+                  <c:v>2025-11-03</c:v>
+                </c:pt>
+                <c:pt idx="133">
+                  <c:v>2025-11-04</c:v>
+                </c:pt>
+                <c:pt idx="134">
+                  <c:v>2025-11-05</c:v>
+                </c:pt>
+                <c:pt idx="135">
+                  <c:v>2025-11-06</c:v>
+                </c:pt>
+                <c:pt idx="136">
+                  <c:v>2025-11-07</c:v>
+                </c:pt>
+                <c:pt idx="137">
+                  <c:v>2025-11-10</c:v>
+                </c:pt>
+                <c:pt idx="138">
+                  <c:v>2025-11-11</c:v>
+                </c:pt>
+                <c:pt idx="139">
+                  <c:v>2025-11-12</c:v>
+                </c:pt>
+                <c:pt idx="140">
+                  <c:v>2025-11-13</c:v>
+                </c:pt>
+                <c:pt idx="141">
+                  <c:v>2025-11-14</c:v>
+                </c:pt>
+                <c:pt idx="142">
+                  <c:v>2025-11-17</c:v>
+                </c:pt>
+                <c:pt idx="143">
+                  <c:v>2025-11-18</c:v>
+                </c:pt>
+                <c:pt idx="144">
+                  <c:v>2025-11-19</c:v>
+                </c:pt>
+                <c:pt idx="145">
+                  <c:v>2025-11-20</c:v>
+                </c:pt>
+                <c:pt idx="146">
+                  <c:v>2025-11-21</c:v>
+                </c:pt>
+                <c:pt idx="147">
+                  <c:v>2025-11-24</c:v>
+                </c:pt>
+                <c:pt idx="148">
+                  <c:v>2025-11-25</c:v>
+                </c:pt>
+                <c:pt idx="149">
+                  <c:v>2025-11-26</c:v>
+                </c:pt>
+                <c:pt idx="150">
+                  <c:v>2025-11-27</c:v>
+                </c:pt>
+                <c:pt idx="151">
+                  <c:v>2025-11-28</c:v>
+                </c:pt>
+                <c:pt idx="152">
+                  <c:v>2025-12-01</c:v>
+                </c:pt>
+                <c:pt idx="153">
+                  <c:v>2025-12-02</c:v>
+                </c:pt>
+                <c:pt idx="154">
+                  <c:v>2025-12-03</c:v>
+                </c:pt>
+                <c:pt idx="155">
+                  <c:v>2025-12-04</c:v>
+                </c:pt>
+                <c:pt idx="156">
+                  <c:v>2025-12-05</c:v>
+                </c:pt>
+                <c:pt idx="157">
+                  <c:v>2025-12-08</c:v>
+                </c:pt>
+                <c:pt idx="158">
+                  <c:v>2025-12-09</c:v>
+                </c:pt>
+                <c:pt idx="159">
+                  <c:v>2025-12-10</c:v>
+                </c:pt>
+                <c:pt idx="160">
+                  <c:v>2025-12-11</c:v>
+                </c:pt>
+                <c:pt idx="161">
+                  <c:v>2025-12-12</c:v>
+                </c:pt>
+                <c:pt idx="162">
+                  <c:v>2025-12-15</c:v>
+                </c:pt>
+                <c:pt idx="163">
+                  <c:v>2025-12-16</c:v>
+                </c:pt>
+                <c:pt idx="164">
+                  <c:v>2025-12-17</c:v>
+                </c:pt>
+                <c:pt idx="165">
+                  <c:v>2025-12-18</c:v>
+                </c:pt>
+                <c:pt idx="166">
+                  <c:v>2025-12-19</c:v>
+                </c:pt>
+                <c:pt idx="167">
+                  <c:v>2025-12-22</c:v>
+                </c:pt>
+                <c:pt idx="168">
+                  <c:v>2025-12-23</c:v>
+                </c:pt>
+                <c:pt idx="169">
+                  <c:v>2025-12-24</c:v>
+                </c:pt>
+                <c:pt idx="170">
+                  <c:v>2025-12-25</c:v>
+                </c:pt>
+                <c:pt idx="171">
+                  <c:v>2025-12-26</c:v>
+                </c:pt>
+                <c:pt idx="172">
+                  <c:v>2025-12-29</c:v>
+                </c:pt>
+                <c:pt idx="173">
+                  <c:v>2025-12-30</c:v>
+                </c:pt>
+                <c:pt idx="174">
+                  <c:v>2025-12-31</c:v>
+                </c:pt>
+                <c:pt idx="175">
+                  <c:v>2026-01-01</c:v>
+                </c:pt>
+                <c:pt idx="176">
+                  <c:v>2026-01-02</c:v>
+                </c:pt>
+                <c:pt idx="177">
+                  <c:v>2026-01-05</c:v>
+                </c:pt>
+                <c:pt idx="178">
+                  <c:v>2026-01-06</c:v>
+                </c:pt>
+                <c:pt idx="179">
+                  <c:v>2026-01-07</c:v>
+                </c:pt>
+                <c:pt idx="180">
+                  <c:v>2026-01-08</c:v>
+                </c:pt>
+                <c:pt idx="181">
+                  <c:v>2026-01-09</c:v>
+                </c:pt>
+                <c:pt idx="182">
+                  <c:v>2026-01-12</c:v>
+                </c:pt>
+                <c:pt idx="183">
+                  <c:v>2026-01-13</c:v>
+                </c:pt>
+                <c:pt idx="184">
+                  <c:v>2026-01-14</c:v>
+                </c:pt>
+                <c:pt idx="185">
+                  <c:v>2026-01-15</c:v>
+                </c:pt>
+                <c:pt idx="186">
+                  <c:v>2026-01-16</c:v>
+                </c:pt>
+                <c:pt idx="187">
+                  <c:v>2026-01-19</c:v>
+                </c:pt>
+                <c:pt idx="188">
+                  <c:v>2026-01-20</c:v>
+                </c:pt>
+                <c:pt idx="189">
+                  <c:v>2026-01-21</c:v>
+                </c:pt>
+                <c:pt idx="190">
+                  <c:v>2026-01-22</c:v>
+                </c:pt>
+                <c:pt idx="191">
+                  <c:v>2026-01-23</c:v>
+                </c:pt>
+                <c:pt idx="192">
+                  <c:v>2026-01-26</c:v>
+                </c:pt>
+                <c:pt idx="193">
+                  <c:v>2026-01-27</c:v>
+                </c:pt>
+                <c:pt idx="194">
+                  <c:v>2026-01-28</c:v>
+                </c:pt>
+                <c:pt idx="195">
+                  <c:v>2026-01-29</c:v>
+                </c:pt>
+                <c:pt idx="196">
+                  <c:v>2026-01-30</c:v>
+                </c:pt>
+                <c:pt idx="197">
+                  <c:v>2026-02-02</c:v>
+                </c:pt>
+                <c:pt idx="198">
+                  <c:v>2026-02-03</c:v>
+                </c:pt>
+                <c:pt idx="199">
+                  <c:v>2026-02-04</c:v>
+                </c:pt>
+                <c:pt idx="200">
+                  <c:v>2026-02-05</c:v>
+                </c:pt>
+                <c:pt idx="201">
+                  <c:v>2026-02-06</c:v>
+                </c:pt>
+                <c:pt idx="202">
+                  <c:v>2026-02-09</c:v>
+                </c:pt>
+                <c:pt idx="203">
+                  <c:v>2026-02-10</c:v>
+                </c:pt>
+                <c:pt idx="204">
+                  <c:v>2026-02-11</c:v>
+                </c:pt>
+                <c:pt idx="205">
+                  <c:v>2026-02-12</c:v>
+                </c:pt>
+                <c:pt idx="206">
+                  <c:v>2026-02-13</c:v>
+                </c:pt>
+                <c:pt idx="207">
+                  <c:v>2026-02-16</c:v>
+                </c:pt>
+                <c:pt idx="208">
+                  <c:v>2026-02-17</c:v>
+                </c:pt>
+                <c:pt idx="209">
+                  <c:v>2026-02-18</c:v>
+                </c:pt>
+                <c:pt idx="210">
+                  <c:v>2026-02-19</c:v>
+                </c:pt>
+                <c:pt idx="211">
+                  <c:v>2026-02-20</c:v>
+                </c:pt>
+                <c:pt idx="212">
+                  <c:v>2026-02-23</c:v>
+                </c:pt>
+                <c:pt idx="213">
+                  <c:v>2026-02-24</c:v>
+                </c:pt>
+                <c:pt idx="214">
+                  <c:v>2026-02-25</c:v>
+                </c:pt>
+                <c:pt idx="215">
+                  <c:v>2026-02-26</c:v>
+                </c:pt>
+                <c:pt idx="216">
+                  <c:v>2026-02-27</c:v>
+                </c:pt>
+                <c:pt idx="217">
+                  <c:v>2026-03-02</c:v>
+                </c:pt>
+                <c:pt idx="218">
+                  <c:v>2026-03-03</c:v>
+                </c:pt>
+                <c:pt idx="219">
+                  <c:v>2026-03-04</c:v>
+                </c:pt>
+                <c:pt idx="220">
+                  <c:v>2026-03-05</c:v>
+                </c:pt>
+                <c:pt idx="221">
+                  <c:v>2026-03-06</c:v>
+                </c:pt>
+                <c:pt idx="222">
+                  <c:v>2026-03-09</c:v>
+                </c:pt>
+                <c:pt idx="223">
+                  <c:v>2026-03-10</c:v>
+                </c:pt>
+                <c:pt idx="224">
+                  <c:v>2026-03-11</c:v>
+                </c:pt>
+                <c:pt idx="225">
+                  <c:v>2026-03-12</c:v>
+                </c:pt>
+                <c:pt idx="226">
+                  <c:v>2026-03-13</c:v>
+                </c:pt>
+                <c:pt idx="227">
+                  <c:v>2026-03-16</c:v>
+                </c:pt>
+                <c:pt idx="228">
+                  <c:v>2026-03-17</c:v>
+                </c:pt>
+                <c:pt idx="229">
+                  <c:v>2026-03-18</c:v>
+                </c:pt>
+                <c:pt idx="230">
+                  <c:v>2026-03-19</c:v>
+                </c:pt>
+                <c:pt idx="231">
+                  <c:v>2026-03-20</c:v>
+                </c:pt>
+                <c:pt idx="232">
+                  <c:v>2026-03-23</c:v>
+                </c:pt>
+                <c:pt idx="233">
+                  <c:v>2026-03-24</c:v>
+                </c:pt>
+                <c:pt idx="234">
+                  <c:v>2026-03-25</c:v>
+                </c:pt>
+                <c:pt idx="235">
+                  <c:v>2026-03-26</c:v>
+                </c:pt>
+                <c:pt idx="236">
+                  <c:v>2026-03-27</c:v>
+                </c:pt>
+                <c:pt idx="237">
+                  <c:v>2026-03-30</c:v>
+                </c:pt>
+                <c:pt idx="238">
+                  <c:v>2026-03-31</c:v>
+                </c:pt>
+                <c:pt idx="239">
+                  <c:v>2026-04-01</c:v>
+                </c:pt>
+                <c:pt idx="240">
+                  <c:v>2026-04-02</c:v>
+                </c:pt>
+                <c:pt idx="241">
+                  <c:v>2026-04-03</c:v>
+                </c:pt>
+                <c:pt idx="242">
+                  <c:v>2026-04-06</c:v>
+                </c:pt>
+                <c:pt idx="243">
+                  <c:v>2026-04-07</c:v>
+                </c:pt>
+                <c:pt idx="244">
+                  <c:v>2026-04-08</c:v>
+                </c:pt>
+                <c:pt idx="245">
+                  <c:v>2026-04-09</c:v>
+                </c:pt>
+                <c:pt idx="246">
+                  <c:v>2026-04-10</c:v>
+                </c:pt>
+                <c:pt idx="247">
+                  <c:v>2026-04-13</c:v>
+                </c:pt>
+                <c:pt idx="248">
+                  <c:v>2026-04-14</c:v>
+                </c:pt>
+                <c:pt idx="249">
+                  <c:v>2026-04-15</c:v>
+                </c:pt>
+                <c:pt idx="250">
+                  <c:v>2026-04-16</c:v>
+                </c:pt>
+                <c:pt idx="251">
+                  <c:v>2026-04-17</c:v>
+                </c:pt>
+                <c:pt idx="252">
+                  <c:v>2026-04-20</c:v>
+                </c:pt>
+                <c:pt idx="253">
+                  <c:v>2026-04-21</c:v>
+                </c:pt>
+                <c:pt idx="254">
+                  <c:v>2026-04-22</c:v>
+                </c:pt>
+                <c:pt idx="255">
+                  <c:v>2026-04-23</c:v>
+                </c:pt>
+                <c:pt idx="256">
+                  <c:v>2026-04-24</c:v>
+                </c:pt>
+                <c:pt idx="257">
+                  <c:v>2026-04-27</c:v>
+                </c:pt>
+                <c:pt idx="258">
+                  <c:v>2026-04-28</c:v>
+                </c:pt>
+                <c:pt idx="259">
+                  <c:v>2026-04-29</c:v>
+                </c:pt>
+                <c:pt idx="260">
+                  <c:v>2026-04-30</c:v>
                 </c:pt>
               </c:strCache>
             </c:strRef>
           </c:cat>
           <c:val>
             <c:numRef>
-              <c:f>Sheet1!$C$2:$C$8</c:f>
+              <c:f>Sheet1!$C$2:$C$262</c:f>
               <c:numCache>
-                <c:formatCode>General</c:formatCode>
-                <c:ptCount val="7"/>
+                <c:formatCode>0.00"%"</c:formatCode>
+                <c:ptCount val="261"/>
                 <c:pt idx="0">
-                  <c:v>0</c:v>
+                  <c:v>0.0</c:v>
                 </c:pt>
                 <c:pt idx="1">
-                  <c:v>2.1</c:v>
+                  <c:v>0.27</c:v>
                 </c:pt>
                 <c:pt idx="2">
-                  <c:v>3.8</c:v>
+                  <c:v>0.37</c:v>
                 </c:pt>
                 <c:pt idx="3">
-                  <c:v>5.5</c:v>
+                  <c:v>0.51</c:v>
                 </c:pt>
                 <c:pt idx="4">
-                  <c:v>4.2</c:v>
+                  <c:v>0.64</c:v>
                 </c:pt>
                 <c:pt idx="5">
-                  <c:v>6.1</c:v>
+                  <c:v>1.02</c:v>
                 </c:pt>
                 <c:pt idx="6">
-                  <c:v>8.4</c:v>
+                  <c:v>1.24</c:v>
+                </c:pt>
+                <c:pt idx="7">
+                  <c:v>1.37</c:v>
+                </c:pt>
+                <c:pt idx="8">
+                  <c:v>1.5</c:v>
+                </c:pt>
+                <c:pt idx="9">
+                  <c:v>1.69</c:v>
+                </c:pt>
+                <c:pt idx="10">
+                  <c:v>1.97</c:v>
+                </c:pt>
+                <c:pt idx="11">
+                  <c:v>2.24</c:v>
+                </c:pt>
+                <c:pt idx="12">
+                  <c:v>2.49</c:v>
+                </c:pt>
+                <c:pt idx="13">
+                  <c:v>2.81</c:v>
+                </c:pt>
+                <c:pt idx="14">
+                  <c:v>2.92</c:v>
+                </c:pt>
+                <c:pt idx="15">
+                  <c:v>3.02</c:v>
+                </c:pt>
+                <c:pt idx="16">
+                  <c:v>3.25</c:v>
+                </c:pt>
+                <c:pt idx="17">
+                  <c:v>3.36</c:v>
+                </c:pt>
+                <c:pt idx="18">
+                  <c:v>3.66</c:v>
+                </c:pt>
+                <c:pt idx="19">
+                  <c:v>3.76</c:v>
+                </c:pt>
+                <c:pt idx="20">
+                  <c:v>3.99</c:v>
+                </c:pt>
+                <c:pt idx="21">
+                  <c:v>4.27</c:v>
+                </c:pt>
+                <c:pt idx="22">
+                  <c:v>4.49</c:v>
+                </c:pt>
+                <c:pt idx="23">
+                  <c:v>4.71</c:v>
+                </c:pt>
+                <c:pt idx="24">
+                  <c:v>4.99</c:v>
+                </c:pt>
+                <c:pt idx="25">
+                  <c:v>5.05</c:v>
+                </c:pt>
+                <c:pt idx="26">
+                  <c:v>5.21</c:v>
+                </c:pt>
+                <c:pt idx="27">
+                  <c:v>5.51</c:v>
+                </c:pt>
+                <c:pt idx="28">
+                  <c:v>5.8</c:v>
+                </c:pt>
+                <c:pt idx="29">
+                  <c:v>5.8</c:v>
+                </c:pt>
+                <c:pt idx="30">
+                  <c:v>5.8</c:v>
+                </c:pt>
+                <c:pt idx="31">
+                  <c:v>5.8</c:v>
+                </c:pt>
+                <c:pt idx="32">
+                  <c:v>5.8</c:v>
+                </c:pt>
+                <c:pt idx="33">
+                  <c:v>5.8</c:v>
+                </c:pt>
+                <c:pt idx="34">
+                  <c:v>5.8</c:v>
+                </c:pt>
+                <c:pt idx="35">
+                  <c:v>5.8</c:v>
+                </c:pt>
+                <c:pt idx="36">
+                  <c:v>5.8</c:v>
+                </c:pt>
+                <c:pt idx="37">
+                  <c:v>5.8</c:v>
+                </c:pt>
+                <c:pt idx="38">
+                  <c:v>5.8</c:v>
+                </c:pt>
+                <c:pt idx="39">
+                  <c:v>5.8</c:v>
+                </c:pt>
+                <c:pt idx="40">
+                  <c:v>5.8</c:v>
+                </c:pt>
+                <c:pt idx="41">
+                  <c:v>5.8</c:v>
+                </c:pt>
+                <c:pt idx="42">
+                  <c:v>5.8</c:v>
+                </c:pt>
+                <c:pt idx="43">
+                  <c:v>5.8</c:v>
+                </c:pt>
+                <c:pt idx="44">
+                  <c:v>5.8</c:v>
+                </c:pt>
+                <c:pt idx="45">
+                  <c:v>5.8</c:v>
+                </c:pt>
+                <c:pt idx="46">
+                  <c:v>5.8</c:v>
+                </c:pt>
+                <c:pt idx="47">
+                  <c:v>5.8</c:v>
+                </c:pt>
+                <c:pt idx="48">
+                  <c:v>5.8</c:v>
+                </c:pt>
+                <c:pt idx="49">
+                  <c:v>5.8</c:v>
+                </c:pt>
+                <c:pt idx="50">
+                  <c:v>5.8</c:v>
+                </c:pt>
+                <c:pt idx="51">
+                  <c:v>5.8</c:v>
+                </c:pt>
+                <c:pt idx="52">
+                  <c:v>5.8</c:v>
+                </c:pt>
+                <c:pt idx="53">
+                  <c:v>5.8</c:v>
+                </c:pt>
+                <c:pt idx="54">
+                  <c:v>5.8</c:v>
+                </c:pt>
+                <c:pt idx="55">
+                  <c:v>5.8</c:v>
+                </c:pt>
+                <c:pt idx="56">
+                  <c:v>5.8</c:v>
+                </c:pt>
+                <c:pt idx="57">
+                  <c:v>5.8</c:v>
+                </c:pt>
+                <c:pt idx="58">
+                  <c:v>5.8</c:v>
+                </c:pt>
+                <c:pt idx="59">
+                  <c:v>5.8</c:v>
+                </c:pt>
+                <c:pt idx="60">
+                  <c:v>5.8</c:v>
+                </c:pt>
+                <c:pt idx="61">
+                  <c:v>5.8</c:v>
+                </c:pt>
+                <c:pt idx="62">
+                  <c:v>5.8</c:v>
+                </c:pt>
+                <c:pt idx="63">
+                  <c:v>5.8</c:v>
+                </c:pt>
+                <c:pt idx="64">
+                  <c:v>5.8</c:v>
+                </c:pt>
+                <c:pt idx="65">
+                  <c:v>5.8</c:v>
+                </c:pt>
+                <c:pt idx="66">
+                  <c:v>5.8</c:v>
+                </c:pt>
+                <c:pt idx="67">
+                  <c:v>5.8</c:v>
+                </c:pt>
+                <c:pt idx="68">
+                  <c:v>5.8</c:v>
+                </c:pt>
+                <c:pt idx="69">
+                  <c:v>5.8</c:v>
+                </c:pt>
+                <c:pt idx="70">
+                  <c:v>5.8</c:v>
+                </c:pt>
+                <c:pt idx="71">
+                  <c:v>5.8</c:v>
+                </c:pt>
+                <c:pt idx="72">
+                  <c:v>5.8</c:v>
+                </c:pt>
+                <c:pt idx="73">
+                  <c:v>5.8</c:v>
+                </c:pt>
+                <c:pt idx="74">
+                  <c:v>5.8</c:v>
+                </c:pt>
+                <c:pt idx="75">
+                  <c:v>5.8</c:v>
+                </c:pt>
+                <c:pt idx="76">
+                  <c:v>5.8</c:v>
+                </c:pt>
+                <c:pt idx="77">
+                  <c:v>5.8</c:v>
+                </c:pt>
+                <c:pt idx="78">
+                  <c:v>5.8</c:v>
+                </c:pt>
+                <c:pt idx="79">
+                  <c:v>5.8</c:v>
+                </c:pt>
+                <c:pt idx="80">
+                  <c:v>5.8</c:v>
+                </c:pt>
+                <c:pt idx="81">
+                  <c:v>5.8</c:v>
+                </c:pt>
+                <c:pt idx="82">
+                  <c:v>5.8</c:v>
+                </c:pt>
+                <c:pt idx="83">
+                  <c:v>5.8</c:v>
+                </c:pt>
+                <c:pt idx="84">
+                  <c:v>5.8</c:v>
+                </c:pt>
+                <c:pt idx="85">
+                  <c:v>5.8</c:v>
+                </c:pt>
+                <c:pt idx="86">
+                  <c:v>5.8</c:v>
+                </c:pt>
+                <c:pt idx="87">
+                  <c:v>5.8</c:v>
+                </c:pt>
+                <c:pt idx="88">
+                  <c:v>5.8</c:v>
+                </c:pt>
+                <c:pt idx="89">
+                  <c:v>5.8</c:v>
+                </c:pt>
+                <c:pt idx="90">
+                  <c:v>5.8</c:v>
+                </c:pt>
+                <c:pt idx="91">
+                  <c:v>5.8</c:v>
+                </c:pt>
+                <c:pt idx="92">
+                  <c:v>5.8</c:v>
+                </c:pt>
+                <c:pt idx="93">
+                  <c:v>5.8</c:v>
+                </c:pt>
+                <c:pt idx="94">
+                  <c:v>5.8</c:v>
+                </c:pt>
+                <c:pt idx="95">
+                  <c:v>5.8</c:v>
+                </c:pt>
+                <c:pt idx="96">
+                  <c:v>5.8</c:v>
+                </c:pt>
+                <c:pt idx="97">
+                  <c:v>5.8</c:v>
+                </c:pt>
+                <c:pt idx="98">
+                  <c:v>5.8</c:v>
+                </c:pt>
+                <c:pt idx="99">
+                  <c:v>5.8</c:v>
+                </c:pt>
+                <c:pt idx="100">
+                  <c:v>5.8</c:v>
+                </c:pt>
+                <c:pt idx="101">
+                  <c:v>5.8</c:v>
+                </c:pt>
+                <c:pt idx="102">
+                  <c:v>5.8</c:v>
+                </c:pt>
+                <c:pt idx="103">
+                  <c:v>5.8</c:v>
+                </c:pt>
+                <c:pt idx="104">
+                  <c:v>5.8</c:v>
+                </c:pt>
+                <c:pt idx="105">
+                  <c:v>5.8</c:v>
+                </c:pt>
+                <c:pt idx="106">
+                  <c:v>5.8</c:v>
+                </c:pt>
+                <c:pt idx="107">
+                  <c:v>5.8</c:v>
+                </c:pt>
+                <c:pt idx="108">
+                  <c:v>5.8</c:v>
+                </c:pt>
+                <c:pt idx="109">
+                  <c:v>5.8</c:v>
+                </c:pt>
+                <c:pt idx="110">
+                  <c:v>5.8</c:v>
+                </c:pt>
+                <c:pt idx="111">
+                  <c:v>5.8</c:v>
+                </c:pt>
+                <c:pt idx="112">
+                  <c:v>5.8</c:v>
+                </c:pt>
+                <c:pt idx="113">
+                  <c:v>5.8</c:v>
+                </c:pt>
+                <c:pt idx="114">
+                  <c:v>5.8</c:v>
+                </c:pt>
+                <c:pt idx="115">
+                  <c:v>5.8</c:v>
+                </c:pt>
+                <c:pt idx="116">
+                  <c:v>5.8</c:v>
+                </c:pt>
+                <c:pt idx="117">
+                  <c:v>5.8</c:v>
+                </c:pt>
+                <c:pt idx="118">
+                  <c:v>5.8</c:v>
+                </c:pt>
+                <c:pt idx="119">
+                  <c:v>5.8</c:v>
+                </c:pt>
+                <c:pt idx="120">
+                  <c:v>5.8</c:v>
+                </c:pt>
+                <c:pt idx="121">
+                  <c:v>5.8</c:v>
+                </c:pt>
+                <c:pt idx="122">
+                  <c:v>5.8</c:v>
+                </c:pt>
+                <c:pt idx="123">
+                  <c:v>5.8</c:v>
+                </c:pt>
+                <c:pt idx="124">
+                  <c:v>5.8</c:v>
+                </c:pt>
+                <c:pt idx="125">
+                  <c:v>5.8</c:v>
+                </c:pt>
+                <c:pt idx="126">
+                  <c:v>5.8</c:v>
+                </c:pt>
+                <c:pt idx="127">
+                  <c:v>5.8</c:v>
+                </c:pt>
+                <c:pt idx="128">
+                  <c:v>5.8</c:v>
+                </c:pt>
+                <c:pt idx="129">
+                  <c:v>5.8</c:v>
+                </c:pt>
+                <c:pt idx="130">
+                  <c:v>5.8</c:v>
+                </c:pt>
+                <c:pt idx="131">
+                  <c:v>5.8</c:v>
+                </c:pt>
+                <c:pt idx="132">
+                  <c:v>5.8</c:v>
+                </c:pt>
+                <c:pt idx="133">
+                  <c:v>5.8</c:v>
+                </c:pt>
+                <c:pt idx="134">
+                  <c:v>5.8</c:v>
+                </c:pt>
+                <c:pt idx="135">
+                  <c:v>5.8</c:v>
+                </c:pt>
+                <c:pt idx="136">
+                  <c:v>5.8</c:v>
+                </c:pt>
+                <c:pt idx="137">
+                  <c:v>5.8</c:v>
+                </c:pt>
+                <c:pt idx="138">
+                  <c:v>5.8</c:v>
+                </c:pt>
+                <c:pt idx="139">
+                  <c:v>5.8</c:v>
+                </c:pt>
+                <c:pt idx="140">
+                  <c:v>5.8</c:v>
+                </c:pt>
+                <c:pt idx="141">
+                  <c:v>5.8</c:v>
+                </c:pt>
+                <c:pt idx="142">
+                  <c:v>5.8</c:v>
+                </c:pt>
+                <c:pt idx="143">
+                  <c:v>5.8</c:v>
+                </c:pt>
+                <c:pt idx="144">
+                  <c:v>5.8</c:v>
+                </c:pt>
+                <c:pt idx="145">
+                  <c:v>5.8</c:v>
+                </c:pt>
+                <c:pt idx="146">
+                  <c:v>5.8</c:v>
+                </c:pt>
+                <c:pt idx="147">
+                  <c:v>5.8</c:v>
+                </c:pt>
+                <c:pt idx="148">
+                  <c:v>5.8</c:v>
+                </c:pt>
+                <c:pt idx="149">
+                  <c:v>5.8</c:v>
+                </c:pt>
+                <c:pt idx="150">
+                  <c:v>5.8</c:v>
+                </c:pt>
+                <c:pt idx="151">
+                  <c:v>5.8</c:v>
+                </c:pt>
+                <c:pt idx="152">
+                  <c:v>5.8</c:v>
+                </c:pt>
+                <c:pt idx="153">
+                  <c:v>5.8</c:v>
+                </c:pt>
+                <c:pt idx="154">
+                  <c:v>5.8</c:v>
+                </c:pt>
+                <c:pt idx="155">
+                  <c:v>5.8</c:v>
+                </c:pt>
+                <c:pt idx="156">
+                  <c:v>5.8</c:v>
+                </c:pt>
+                <c:pt idx="157">
+                  <c:v>5.8</c:v>
+                </c:pt>
+                <c:pt idx="158">
+                  <c:v>5.8</c:v>
+                </c:pt>
+                <c:pt idx="159">
+                  <c:v>5.8</c:v>
+                </c:pt>
+                <c:pt idx="160">
+                  <c:v>5.8</c:v>
+                </c:pt>
+                <c:pt idx="161">
+                  <c:v>5.8</c:v>
+                </c:pt>
+                <c:pt idx="162">
+                  <c:v>5.8</c:v>
+                </c:pt>
+                <c:pt idx="163">
+                  <c:v>5.8</c:v>
+                </c:pt>
+                <c:pt idx="164">
+                  <c:v>5.8</c:v>
+                </c:pt>
+                <c:pt idx="165">
+                  <c:v>5.8</c:v>
+                </c:pt>
+                <c:pt idx="166">
+                  <c:v>5.8</c:v>
+                </c:pt>
+                <c:pt idx="167">
+                  <c:v>5.8</c:v>
+                </c:pt>
+                <c:pt idx="168">
+                  <c:v>5.8</c:v>
+                </c:pt>
+                <c:pt idx="169">
+                  <c:v>5.8</c:v>
+                </c:pt>
+                <c:pt idx="170">
+                  <c:v>5.8</c:v>
+                </c:pt>
+                <c:pt idx="171">
+                  <c:v>5.8</c:v>
+                </c:pt>
+                <c:pt idx="172">
+                  <c:v>5.8</c:v>
+                </c:pt>
+                <c:pt idx="173">
+                  <c:v>5.8</c:v>
+                </c:pt>
+                <c:pt idx="174">
+                  <c:v>5.8</c:v>
+                </c:pt>
+                <c:pt idx="175">
+                  <c:v>5.8</c:v>
+                </c:pt>
+                <c:pt idx="176">
+                  <c:v>5.8</c:v>
+                </c:pt>
+                <c:pt idx="177">
+                  <c:v>5.8</c:v>
+                </c:pt>
+                <c:pt idx="178">
+                  <c:v>5.8</c:v>
+                </c:pt>
+                <c:pt idx="179">
+                  <c:v>5.8</c:v>
+                </c:pt>
+                <c:pt idx="180">
+                  <c:v>5.8</c:v>
+                </c:pt>
+                <c:pt idx="181">
+                  <c:v>5.8</c:v>
+                </c:pt>
+                <c:pt idx="182">
+                  <c:v>5.8</c:v>
+                </c:pt>
+                <c:pt idx="183">
+                  <c:v>5.8</c:v>
+                </c:pt>
+                <c:pt idx="184">
+                  <c:v>5.8</c:v>
+                </c:pt>
+                <c:pt idx="185">
+                  <c:v>5.8</c:v>
+                </c:pt>
+                <c:pt idx="186">
+                  <c:v>5.8</c:v>
+                </c:pt>
+                <c:pt idx="187">
+                  <c:v>5.8</c:v>
+                </c:pt>
+                <c:pt idx="188">
+                  <c:v>5.8</c:v>
+                </c:pt>
+                <c:pt idx="189">
+                  <c:v>5.8</c:v>
+                </c:pt>
+                <c:pt idx="190">
+                  <c:v>5.8</c:v>
+                </c:pt>
+                <c:pt idx="191">
+                  <c:v>5.8</c:v>
+                </c:pt>
+                <c:pt idx="192">
+                  <c:v>5.8</c:v>
+                </c:pt>
+                <c:pt idx="193">
+                  <c:v>5.8</c:v>
+                </c:pt>
+                <c:pt idx="194">
+                  <c:v>5.8</c:v>
+                </c:pt>
+                <c:pt idx="195">
+                  <c:v>5.8</c:v>
+                </c:pt>
+                <c:pt idx="196">
+                  <c:v>5.8</c:v>
+                </c:pt>
+                <c:pt idx="197">
+                  <c:v>5.8</c:v>
+                </c:pt>
+                <c:pt idx="198">
+                  <c:v>5.8</c:v>
+                </c:pt>
+                <c:pt idx="199">
+                  <c:v>5.8</c:v>
+                </c:pt>
+                <c:pt idx="200">
+                  <c:v>5.8</c:v>
+                </c:pt>
+                <c:pt idx="201">
+                  <c:v>5.8</c:v>
+                </c:pt>
+                <c:pt idx="202">
+                  <c:v>5.8</c:v>
+                </c:pt>
+                <c:pt idx="203">
+                  <c:v>5.8</c:v>
+                </c:pt>
+                <c:pt idx="204">
+                  <c:v>5.8</c:v>
+                </c:pt>
+                <c:pt idx="205">
+                  <c:v>5.8</c:v>
+                </c:pt>
+                <c:pt idx="206">
+                  <c:v>5.8</c:v>
+                </c:pt>
+                <c:pt idx="207">
+                  <c:v>5.8</c:v>
+                </c:pt>
+                <c:pt idx="208">
+                  <c:v>5.8</c:v>
+                </c:pt>
+                <c:pt idx="209">
+                  <c:v>5.8</c:v>
+                </c:pt>
+                <c:pt idx="210">
+                  <c:v>5.8</c:v>
+                </c:pt>
+                <c:pt idx="211">
+                  <c:v>5.8</c:v>
+                </c:pt>
+                <c:pt idx="212">
+                  <c:v>5.8</c:v>
+                </c:pt>
+                <c:pt idx="213">
+                  <c:v>5.8</c:v>
+                </c:pt>
+                <c:pt idx="214">
+                  <c:v>5.8</c:v>
+                </c:pt>
+                <c:pt idx="215">
+                  <c:v>5.8</c:v>
+                </c:pt>
+                <c:pt idx="216">
+                  <c:v>5.8</c:v>
+                </c:pt>
+                <c:pt idx="217">
+                  <c:v>5.8</c:v>
+                </c:pt>
+                <c:pt idx="218">
+                  <c:v>5.8</c:v>
+                </c:pt>
+                <c:pt idx="219">
+                  <c:v>5.8</c:v>
+                </c:pt>
+                <c:pt idx="220">
+                  <c:v>5.8</c:v>
+                </c:pt>
+                <c:pt idx="221">
+                  <c:v>5.8</c:v>
+                </c:pt>
+                <c:pt idx="222">
+                  <c:v>5.8</c:v>
+                </c:pt>
+                <c:pt idx="223">
+                  <c:v>5.8</c:v>
+                </c:pt>
+                <c:pt idx="224">
+                  <c:v>5.8</c:v>
+                </c:pt>
+                <c:pt idx="225">
+                  <c:v>5.8</c:v>
+                </c:pt>
+                <c:pt idx="226">
+                  <c:v>5.8</c:v>
+                </c:pt>
+                <c:pt idx="227">
+                  <c:v>5.8</c:v>
+                </c:pt>
+                <c:pt idx="228">
+                  <c:v>5.8</c:v>
+                </c:pt>
+                <c:pt idx="229">
+                  <c:v>5.8</c:v>
+                </c:pt>
+                <c:pt idx="230">
+                  <c:v>5.8</c:v>
+                </c:pt>
+                <c:pt idx="231">
+                  <c:v>5.8</c:v>
+                </c:pt>
+                <c:pt idx="232">
+                  <c:v>5.8</c:v>
+                </c:pt>
+                <c:pt idx="233">
+                  <c:v>5.8</c:v>
+                </c:pt>
+                <c:pt idx="234">
+                  <c:v>5.8</c:v>
+                </c:pt>
+                <c:pt idx="235">
+                  <c:v>5.8</c:v>
+                </c:pt>
+                <c:pt idx="236">
+                  <c:v>5.8</c:v>
+                </c:pt>
+                <c:pt idx="237">
+                  <c:v>5.8</c:v>
+                </c:pt>
+                <c:pt idx="238">
+                  <c:v>5.8</c:v>
+                </c:pt>
+                <c:pt idx="239">
+                  <c:v>5.8</c:v>
+                </c:pt>
+                <c:pt idx="240">
+                  <c:v>5.8</c:v>
+                </c:pt>
+                <c:pt idx="241">
+                  <c:v>5.8</c:v>
+                </c:pt>
+                <c:pt idx="242">
+                  <c:v>5.8</c:v>
+                </c:pt>
+                <c:pt idx="243">
+                  <c:v>5.8</c:v>
+                </c:pt>
+                <c:pt idx="244">
+                  <c:v>5.8</c:v>
+                </c:pt>
+                <c:pt idx="245">
+                  <c:v>5.8</c:v>
+                </c:pt>
+                <c:pt idx="246">
+                  <c:v>5.8</c:v>
+                </c:pt>
+                <c:pt idx="247">
+                  <c:v>5.8</c:v>
+                </c:pt>
+                <c:pt idx="248">
+                  <c:v>5.8</c:v>
+                </c:pt>
+                <c:pt idx="249">
+                  <c:v>5.8</c:v>
+                </c:pt>
+                <c:pt idx="250">
+                  <c:v>5.8</c:v>
+                </c:pt>
+                <c:pt idx="251">
+                  <c:v>5.8</c:v>
+                </c:pt>
+                <c:pt idx="252">
+                  <c:v>5.8</c:v>
+                </c:pt>
+                <c:pt idx="253">
+                  <c:v>5.8</c:v>
+                </c:pt>
+                <c:pt idx="254">
+                  <c:v>5.8</c:v>
+                </c:pt>
+                <c:pt idx="255">
+                  <c:v>5.8</c:v>
+                </c:pt>
+                <c:pt idx="256">
+                  <c:v>5.8</c:v>
+                </c:pt>
+                <c:pt idx="257">
+                  <c:v>5.8</c:v>
+                </c:pt>
+                <c:pt idx="258">
+                  <c:v>5.8</c:v>
+                </c:pt>
+                <c:pt idx="259">
+                  <c:v>5.8</c:v>
+                </c:pt>
+                <c:pt idx="260">
+                  <c:v>5.8</c:v>
                 </c:pt>
               </c:numCache>
             </c:numRef>
           </c:val>
+          <c:spPr>
+            <a:ln w="12700" cap="flat" cmpd="sng">
+              <a:solidFill>
+                <a:srgbClr val="C0504D"/>
+              </a:solidFill>
+            </a:ln>
+          </c:spPr>
+          <c:marker>
+            <c:symbol val="none"/>
+          </c:marker>
           <c:smooth val="0"/>
-          <c:extLst>
-            <c:ext xmlns:c16="http://schemas.microsoft.com/office/drawing/2014/chart" uri="{C3380CC4-5D6E-409C-BE32-E72D297353CC}">
-              <c16:uniqueId val="{00000001-F90F-4DEA-9AB8-4C96B1CC70C1}"/>
-            </c:ext>
-          </c:extLst>
         </c:ser>
-        <c:dLbls>
-          <c:showLegendKey val="0"/>
-          <c:showVal val="0"/>
-          <c:showCatName val="0"/>
-          <c:showSerName val="0"/>
-          <c:showPercent val="0"/>
-          <c:showBubbleSize val="0"/>
-        </c:dLbls>
-        <c:marker val="1"/>
+        <c:marker val="0"/>
         <c:smooth val="0"/>
         <c:axId val="2118791784"/>
         <c:axId val="2140495176"/>
@@ -587,36 +3634,55 @@
         </c:scaling>
         <c:delete val="0"/>
         <c:axPos val="b"/>
-        <c:numFmt formatCode="General" sourceLinked="0"/>
         <c:majorTickMark val="out"/>
         <c:minorTickMark val="none"/>
         <c:tickLblPos val="nextTo"/>
+        <c:txPr>
+          <a:bodyPr rot="-5400000"/>
+          <a:lstStyle/>
+          <a:p>
+            <a:pPr>
+              <a:defRPr sz="800"/>
+            </a:pPr>
+            <a:endParaRPr/>
+          </a:p>
+        </c:txPr>
         <c:crossAx val="2140495176"/>
         <c:crosses val="autoZero"/>
-        <c:auto val="1"/>
+        <c:auto val="false"/>
         <c:lblAlgn val="ctr"/>
         <c:lblOffset val="100"/>
-        <c:noMultiLvlLbl val="0"/>
+        <c:noMultiLvlLbl val="true"/>
+        <c:tickLblSkip val="22"/>
       </c:catAx>
       <c:valAx>
         <c:axId val="2140495176"/>
-        <c:scaling>
-          <c:orientation val="minMax"/>
-        </c:scaling>
+        <c:scaling/>
         <c:delete val="0"/>
         <c:axPos val="l"/>
-        <c:majorGridlines/>
-        <c:numFmt formatCode="General" sourceLinked="1"/>
+        <c:majorGridlines>
+          <c:spPr>
+            <a:ln w="6350">
+              <a:solidFill>
+                <a:schemeClr val="tx1">
+                  <a:lumMod val="85000"/>
+                  <a:lumOff val="15000"/>
+                </a:schemeClr>
+              </a:solidFill>
+            </a:ln>
+          </c:spPr>
+        </c:majorGridlines>
+        <c:numFmt formatCode="0.00&quot;%&quot;" sourceLinked="false"/>
         <c:majorTickMark val="out"/>
         <c:minorTickMark val="none"/>
         <c:tickLblPos val="nextTo"/>
         <c:crossAx val="2118791784"/>
         <c:crosses val="autoZero"/>
-        <c:crossBetween val="between"/>
       </c:valAx>
     </c:plotArea>
     <c:legend>
       <c:legendPos val="b"/>
+      <c:layout/>
       <c:overlay val="0"/>
     </c:legend>
     <c:plotVisOnly val="1"/>
@@ -630,7 +3696,7 @@
       <a:pPr>
         <a:defRPr sz="1800"/>
       </a:pPr>
-      <a:endParaRPr lang="zh-CN"/>
+      <a:endParaRPr lang="en-US"/>
     </a:p>
   </c:txPr>
   <c:externalData r:id="rId1">
@@ -677,9 +3743,10 @@
           <a:lstStyle/>
           <a:p>
             <a:r>
-              <a:rPr lang="en-US"/>
+              <a:rPr lang="en-US" smtClean="0"/>
               <a:t>Click to edit Master title style</a:t>
             </a:r>
+            <a:endParaRPr lang="en-US"/>
           </a:p>
         </p:txBody>
       </p:sp>
@@ -795,9 +3862,10 @@
           </a:lstStyle>
           <a:p>
             <a:r>
-              <a:rPr lang="en-US"/>
+              <a:rPr lang="en-US" smtClean="0"/>
               <a:t>Click to edit Master subtitle style</a:t>
             </a:r>
+            <a:endParaRPr lang="en-US"/>
           </a:p>
         </p:txBody>
       </p:sp>
@@ -818,7 +3886,7 @@
           <a:p>
             <a:fld id="{5BCAD085-E8A6-8845-BD4E-CB4CCA059FC4}" type="datetimeFigureOut">
               <a:rPr lang="en-US" smtClean="0"/>
-              <a:t>5/20/2026</a:t>
+              <a:t>1/27/13</a:t>
             </a:fld>
             <a:endParaRPr lang="en-US"/>
           </a:p>
@@ -912,9 +3980,10 @@
           <a:lstStyle/>
           <a:p>
             <a:r>
-              <a:rPr lang="en-US"/>
+              <a:rPr lang="en-US" smtClean="0"/>
               <a:t>Click to edit Master title style</a:t>
             </a:r>
+            <a:endParaRPr lang="en-US"/>
           </a:p>
         </p:txBody>
       </p:sp>
@@ -935,37 +4004,38 @@
           <a:p>
             <a:pPr lvl="0"/>
             <a:r>
-              <a:rPr lang="en-US"/>
+              <a:rPr lang="en-US" smtClean="0"/>
               <a:t>Click to edit Master text styles</a:t>
             </a:r>
           </a:p>
           <a:p>
             <a:pPr lvl="1"/>
             <a:r>
-              <a:rPr lang="en-US"/>
+              <a:rPr lang="en-US" smtClean="0"/>
               <a:t>Second level</a:t>
             </a:r>
           </a:p>
           <a:p>
             <a:pPr lvl="2"/>
             <a:r>
-              <a:rPr lang="en-US"/>
+              <a:rPr lang="en-US" smtClean="0"/>
               <a:t>Third level</a:t>
             </a:r>
           </a:p>
           <a:p>
             <a:pPr lvl="3"/>
             <a:r>
-              <a:rPr lang="en-US"/>
+              <a:rPr lang="en-US" smtClean="0"/>
               <a:t>Fourth level</a:t>
             </a:r>
           </a:p>
           <a:p>
             <a:pPr lvl="4"/>
             <a:r>
-              <a:rPr lang="en-US"/>
+              <a:rPr lang="en-US" smtClean="0"/>
               <a:t>Fifth level</a:t>
             </a:r>
+            <a:endParaRPr lang="en-US"/>
           </a:p>
         </p:txBody>
       </p:sp>
@@ -986,7 +4056,7 @@
           <a:p>
             <a:fld id="{5BCAD085-E8A6-8845-BD4E-CB4CCA059FC4}" type="datetimeFigureOut">
               <a:rPr lang="en-US" smtClean="0"/>
-              <a:t>5/20/2026</a:t>
+              <a:t>1/27/13</a:t>
             </a:fld>
             <a:endParaRPr lang="en-US"/>
           </a:p>
@@ -1085,9 +4155,10 @@
           <a:lstStyle/>
           <a:p>
             <a:r>
-              <a:rPr lang="en-US"/>
+              <a:rPr lang="en-US" smtClean="0"/>
               <a:t>Click to edit Master title style</a:t>
             </a:r>
+            <a:endParaRPr lang="en-US"/>
           </a:p>
         </p:txBody>
       </p:sp>
@@ -1113,37 +4184,38 @@
           <a:p>
             <a:pPr lvl="0"/>
             <a:r>
-              <a:rPr lang="en-US"/>
+              <a:rPr lang="en-US" smtClean="0"/>
               <a:t>Click to edit Master text styles</a:t>
             </a:r>
           </a:p>
           <a:p>
             <a:pPr lvl="1"/>
             <a:r>
-              <a:rPr lang="en-US"/>
+              <a:rPr lang="en-US" smtClean="0"/>
               <a:t>Second level</a:t>
             </a:r>
           </a:p>
           <a:p>
             <a:pPr lvl="2"/>
             <a:r>
-              <a:rPr lang="en-US"/>
+              <a:rPr lang="en-US" smtClean="0"/>
               <a:t>Third level</a:t>
             </a:r>
           </a:p>
           <a:p>
             <a:pPr lvl="3"/>
             <a:r>
-              <a:rPr lang="en-US"/>
+              <a:rPr lang="en-US" smtClean="0"/>
               <a:t>Fourth level</a:t>
             </a:r>
           </a:p>
           <a:p>
             <a:pPr lvl="4"/>
             <a:r>
-              <a:rPr lang="en-US"/>
+              <a:rPr lang="en-US" smtClean="0"/>
               <a:t>Fifth level</a:t>
             </a:r>
+            <a:endParaRPr lang="en-US"/>
           </a:p>
         </p:txBody>
       </p:sp>
@@ -1164,7 +4236,7 @@
           <a:p>
             <a:fld id="{5BCAD085-E8A6-8845-BD4E-CB4CCA059FC4}" type="datetimeFigureOut">
               <a:rPr lang="en-US" smtClean="0"/>
-              <a:t>5/20/2026</a:t>
+              <a:t>1/27/13</a:t>
             </a:fld>
             <a:endParaRPr lang="en-US"/>
           </a:p>
@@ -1258,9 +4330,10 @@
           <a:lstStyle/>
           <a:p>
             <a:r>
-              <a:rPr lang="en-US"/>
+              <a:rPr lang="en-US" smtClean="0"/>
               <a:t>Click to edit Master title style</a:t>
             </a:r>
+            <a:endParaRPr lang="en-US"/>
           </a:p>
         </p:txBody>
       </p:sp>
@@ -1281,37 +4354,38 @@
           <a:p>
             <a:pPr lvl="0"/>
             <a:r>
-              <a:rPr lang="en-US"/>
+              <a:rPr lang="en-US" smtClean="0"/>
               <a:t>Click to edit Master text styles</a:t>
             </a:r>
           </a:p>
           <a:p>
             <a:pPr lvl="1"/>
             <a:r>
-              <a:rPr lang="en-US"/>
+              <a:rPr lang="en-US" smtClean="0"/>
               <a:t>Second level</a:t>
             </a:r>
           </a:p>
           <a:p>
             <a:pPr lvl="2"/>
             <a:r>
-              <a:rPr lang="en-US"/>
+              <a:rPr lang="en-US" smtClean="0"/>
               <a:t>Third level</a:t>
             </a:r>
           </a:p>
           <a:p>
             <a:pPr lvl="3"/>
             <a:r>
-              <a:rPr lang="en-US"/>
+              <a:rPr lang="en-US" smtClean="0"/>
               <a:t>Fourth level</a:t>
             </a:r>
           </a:p>
           <a:p>
             <a:pPr lvl="4"/>
             <a:r>
-              <a:rPr lang="en-US"/>
+              <a:rPr lang="en-US" smtClean="0"/>
               <a:t>Fifth level</a:t>
             </a:r>
+            <a:endParaRPr lang="en-US"/>
           </a:p>
         </p:txBody>
       </p:sp>
@@ -1332,7 +4406,7 @@
           <a:p>
             <a:fld id="{5BCAD085-E8A6-8845-BD4E-CB4CCA059FC4}" type="datetimeFigureOut">
               <a:rPr lang="en-US" smtClean="0"/>
-              <a:t>5/20/2026</a:t>
+              <a:t>1/27/13</a:t>
             </a:fld>
             <a:endParaRPr lang="en-US"/>
           </a:p>
@@ -1435,9 +4509,10 @@
           </a:lstStyle>
           <a:p>
             <a:r>
-              <a:rPr lang="en-US"/>
+              <a:rPr lang="en-US" smtClean="0"/>
               <a:t>Click to edit Master title style</a:t>
             </a:r>
+            <a:endParaRPr lang="en-US"/>
           </a:p>
         </p:txBody>
       </p:sp>
@@ -1554,7 +4629,7 @@
           <a:p>
             <a:pPr lvl="0"/>
             <a:r>
-              <a:rPr lang="en-US"/>
+              <a:rPr lang="en-US" smtClean="0"/>
               <a:t>Click to edit Master text styles</a:t>
             </a:r>
           </a:p>
@@ -1577,7 +4652,7 @@
           <a:p>
             <a:fld id="{5BCAD085-E8A6-8845-BD4E-CB4CCA059FC4}" type="datetimeFigureOut">
               <a:rPr lang="en-US" smtClean="0"/>
-              <a:t>5/20/2026</a:t>
+              <a:t>1/27/13</a:t>
             </a:fld>
             <a:endParaRPr lang="en-US"/>
           </a:p>
@@ -1671,9 +4746,10 @@
           <a:lstStyle/>
           <a:p>
             <a:r>
-              <a:rPr lang="en-US"/>
+              <a:rPr lang="en-US" smtClean="0"/>
               <a:t>Click to edit Master title style</a:t>
             </a:r>
+            <a:endParaRPr lang="en-US"/>
           </a:p>
         </p:txBody>
       </p:sp>
@@ -1727,37 +4803,38 @@
           <a:p>
             <a:pPr lvl="0"/>
             <a:r>
-              <a:rPr lang="en-US"/>
+              <a:rPr lang="en-US" smtClean="0"/>
               <a:t>Click to edit Master text styles</a:t>
             </a:r>
           </a:p>
           <a:p>
             <a:pPr lvl="1"/>
             <a:r>
-              <a:rPr lang="en-US"/>
+              <a:rPr lang="en-US" smtClean="0"/>
               <a:t>Second level</a:t>
             </a:r>
           </a:p>
           <a:p>
             <a:pPr lvl="2"/>
             <a:r>
-              <a:rPr lang="en-US"/>
+              <a:rPr lang="en-US" smtClean="0"/>
               <a:t>Third level</a:t>
             </a:r>
           </a:p>
           <a:p>
             <a:pPr lvl="3"/>
             <a:r>
-              <a:rPr lang="en-US"/>
+              <a:rPr lang="en-US" smtClean="0"/>
               <a:t>Fourth level</a:t>
             </a:r>
           </a:p>
           <a:p>
             <a:pPr lvl="4"/>
             <a:r>
-              <a:rPr lang="en-US"/>
+              <a:rPr lang="en-US" smtClean="0"/>
               <a:t>Fifth level</a:t>
             </a:r>
+            <a:endParaRPr lang="en-US"/>
           </a:p>
         </p:txBody>
       </p:sp>
@@ -1811,37 +4888,38 @@
           <a:p>
             <a:pPr lvl="0"/>
             <a:r>
-              <a:rPr lang="en-US"/>
+              <a:rPr lang="en-US" smtClean="0"/>
               <a:t>Click to edit Master text styles</a:t>
             </a:r>
           </a:p>
           <a:p>
             <a:pPr lvl="1"/>
             <a:r>
-              <a:rPr lang="en-US"/>
+              <a:rPr lang="en-US" smtClean="0"/>
               <a:t>Second level</a:t>
             </a:r>
           </a:p>
           <a:p>
             <a:pPr lvl="2"/>
             <a:r>
-              <a:rPr lang="en-US"/>
+              <a:rPr lang="en-US" smtClean="0"/>
               <a:t>Third level</a:t>
             </a:r>
           </a:p>
           <a:p>
             <a:pPr lvl="3"/>
             <a:r>
-              <a:rPr lang="en-US"/>
+              <a:rPr lang="en-US" smtClean="0"/>
               <a:t>Fourth level</a:t>
             </a:r>
           </a:p>
           <a:p>
             <a:pPr lvl="4"/>
             <a:r>
-              <a:rPr lang="en-US"/>
+              <a:rPr lang="en-US" smtClean="0"/>
               <a:t>Fifth level</a:t>
             </a:r>
+            <a:endParaRPr lang="en-US"/>
           </a:p>
         </p:txBody>
       </p:sp>
@@ -1862,7 +4940,7 @@
           <a:p>
             <a:fld id="{5BCAD085-E8A6-8845-BD4E-CB4CCA059FC4}" type="datetimeFigureOut">
               <a:rPr lang="en-US" smtClean="0"/>
-              <a:t>5/20/2026</a:t>
+              <a:t>1/27/13</a:t>
             </a:fld>
             <a:endParaRPr lang="en-US"/>
           </a:p>
@@ -1960,9 +5038,10 @@
           </a:lstStyle>
           <a:p>
             <a:r>
-              <a:rPr lang="en-US"/>
+              <a:rPr lang="en-US" smtClean="0"/>
               <a:t>Click to edit Master title style</a:t>
             </a:r>
+            <a:endParaRPr lang="en-US"/>
           </a:p>
         </p:txBody>
       </p:sp>
@@ -2025,7 +5104,7 @@
           <a:p>
             <a:pPr lvl="0"/>
             <a:r>
-              <a:rPr lang="en-US"/>
+              <a:rPr lang="en-US" smtClean="0"/>
               <a:t>Click to edit Master text styles</a:t>
             </a:r>
           </a:p>
@@ -2081,37 +5160,38 @@
           <a:p>
             <a:pPr lvl="0"/>
             <a:r>
-              <a:rPr lang="en-US"/>
+              <a:rPr lang="en-US" smtClean="0"/>
               <a:t>Click to edit Master text styles</a:t>
             </a:r>
           </a:p>
           <a:p>
             <a:pPr lvl="1"/>
             <a:r>
-              <a:rPr lang="en-US"/>
+              <a:rPr lang="en-US" smtClean="0"/>
               <a:t>Second level</a:t>
             </a:r>
           </a:p>
           <a:p>
             <a:pPr lvl="2"/>
             <a:r>
-              <a:rPr lang="en-US"/>
+              <a:rPr lang="en-US" smtClean="0"/>
               <a:t>Third level</a:t>
             </a:r>
           </a:p>
           <a:p>
             <a:pPr lvl="3"/>
             <a:r>
-              <a:rPr lang="en-US"/>
+              <a:rPr lang="en-US" smtClean="0"/>
               <a:t>Fourth level</a:t>
             </a:r>
           </a:p>
           <a:p>
             <a:pPr lvl="4"/>
             <a:r>
-              <a:rPr lang="en-US"/>
+              <a:rPr lang="en-US" smtClean="0"/>
               <a:t>Fifth level</a:t>
             </a:r>
+            <a:endParaRPr lang="en-US"/>
           </a:p>
         </p:txBody>
       </p:sp>
@@ -2174,7 +5254,7 @@
           <a:p>
             <a:pPr lvl="0"/>
             <a:r>
-              <a:rPr lang="en-US"/>
+              <a:rPr lang="en-US" smtClean="0"/>
               <a:t>Click to edit Master text styles</a:t>
             </a:r>
           </a:p>
@@ -2230,37 +5310,38 @@
           <a:p>
             <a:pPr lvl="0"/>
             <a:r>
-              <a:rPr lang="en-US"/>
+              <a:rPr lang="en-US" smtClean="0"/>
               <a:t>Click to edit Master text styles</a:t>
             </a:r>
           </a:p>
           <a:p>
             <a:pPr lvl="1"/>
             <a:r>
-              <a:rPr lang="en-US"/>
+              <a:rPr lang="en-US" smtClean="0"/>
               <a:t>Second level</a:t>
             </a:r>
           </a:p>
           <a:p>
             <a:pPr lvl="2"/>
             <a:r>
-              <a:rPr lang="en-US"/>
+              <a:rPr lang="en-US" smtClean="0"/>
               <a:t>Third level</a:t>
             </a:r>
           </a:p>
           <a:p>
             <a:pPr lvl="3"/>
             <a:r>
-              <a:rPr lang="en-US"/>
+              <a:rPr lang="en-US" smtClean="0"/>
               <a:t>Fourth level</a:t>
             </a:r>
           </a:p>
           <a:p>
             <a:pPr lvl="4"/>
             <a:r>
-              <a:rPr lang="en-US"/>
+              <a:rPr lang="en-US" smtClean="0"/>
               <a:t>Fifth level</a:t>
             </a:r>
+            <a:endParaRPr lang="en-US"/>
           </a:p>
         </p:txBody>
       </p:sp>
@@ -2281,7 +5362,7 @@
           <a:p>
             <a:fld id="{5BCAD085-E8A6-8845-BD4E-CB4CCA059FC4}" type="datetimeFigureOut">
               <a:rPr lang="en-US" smtClean="0"/>
-              <a:t>5/20/2026</a:t>
+              <a:t>1/27/13</a:t>
             </a:fld>
             <a:endParaRPr lang="en-US"/>
           </a:p>
@@ -2375,9 +5456,10 @@
           <a:lstStyle/>
           <a:p>
             <a:r>
-              <a:rPr lang="en-US"/>
+              <a:rPr lang="en-US" smtClean="0"/>
               <a:t>Click to edit Master title style</a:t>
             </a:r>
+            <a:endParaRPr lang="en-US"/>
           </a:p>
         </p:txBody>
       </p:sp>
@@ -2398,7 +5480,7 @@
           <a:p>
             <a:fld id="{5BCAD085-E8A6-8845-BD4E-CB4CCA059FC4}" type="datetimeFigureOut">
               <a:rPr lang="en-US" smtClean="0"/>
-              <a:t>5/20/2026</a:t>
+              <a:t>1/27/13</a:t>
             </a:fld>
             <a:endParaRPr lang="en-US"/>
           </a:p>
@@ -2493,7 +5575,7 @@
           <a:p>
             <a:fld id="{5BCAD085-E8A6-8845-BD4E-CB4CCA059FC4}" type="datetimeFigureOut">
               <a:rPr lang="en-US" smtClean="0"/>
-              <a:t>5/20/2026</a:t>
+              <a:t>1/27/13</a:t>
             </a:fld>
             <a:endParaRPr lang="en-US"/>
           </a:p>
@@ -2596,9 +5678,10 @@
           </a:lstStyle>
           <a:p>
             <a:r>
-              <a:rPr lang="en-US"/>
+              <a:rPr lang="en-US" smtClean="0"/>
               <a:t>Click to edit Master title style</a:t>
             </a:r>
+            <a:endParaRPr lang="en-US"/>
           </a:p>
         </p:txBody>
       </p:sp>
@@ -2652,37 +5735,38 @@
           <a:p>
             <a:pPr lvl="0"/>
             <a:r>
-              <a:rPr lang="en-US"/>
+              <a:rPr lang="en-US" smtClean="0"/>
               <a:t>Click to edit Master text styles</a:t>
             </a:r>
           </a:p>
           <a:p>
             <a:pPr lvl="1"/>
             <a:r>
-              <a:rPr lang="en-US"/>
+              <a:rPr lang="en-US" smtClean="0"/>
               <a:t>Second level</a:t>
             </a:r>
           </a:p>
           <a:p>
             <a:pPr lvl="2"/>
             <a:r>
-              <a:rPr lang="en-US"/>
+              <a:rPr lang="en-US" smtClean="0"/>
               <a:t>Third level</a:t>
             </a:r>
           </a:p>
           <a:p>
             <a:pPr lvl="3"/>
             <a:r>
-              <a:rPr lang="en-US"/>
+              <a:rPr lang="en-US" smtClean="0"/>
               <a:t>Fourth level</a:t>
             </a:r>
           </a:p>
           <a:p>
             <a:pPr lvl="4"/>
             <a:r>
-              <a:rPr lang="en-US"/>
+              <a:rPr lang="en-US" smtClean="0"/>
               <a:t>Fifth level</a:t>
             </a:r>
+            <a:endParaRPr lang="en-US"/>
           </a:p>
         </p:txBody>
       </p:sp>
@@ -2745,7 +5829,7 @@
           <a:p>
             <a:pPr lvl="0"/>
             <a:r>
-              <a:rPr lang="en-US"/>
+              <a:rPr lang="en-US" smtClean="0"/>
               <a:t>Click to edit Master text styles</a:t>
             </a:r>
           </a:p>
@@ -2768,7 +5852,7 @@
           <a:p>
             <a:fld id="{5BCAD085-E8A6-8845-BD4E-CB4CCA059FC4}" type="datetimeFigureOut">
               <a:rPr lang="en-US" smtClean="0"/>
-              <a:t>5/20/2026</a:t>
+              <a:t>1/27/13</a:t>
             </a:fld>
             <a:endParaRPr lang="en-US"/>
           </a:p>
@@ -2871,9 +5955,10 @@
           </a:lstStyle>
           <a:p>
             <a:r>
-              <a:rPr lang="en-US"/>
+              <a:rPr lang="en-US" smtClean="0"/>
               <a:t>Click to edit Master title style</a:t>
             </a:r>
+            <a:endParaRPr lang="en-US"/>
           </a:p>
         </p:txBody>
       </p:sp>
@@ -2997,7 +6082,7 @@
           <a:p>
             <a:pPr lvl="0"/>
             <a:r>
-              <a:rPr lang="en-US"/>
+              <a:rPr lang="en-US" smtClean="0"/>
               <a:t>Click to edit Master text styles</a:t>
             </a:r>
           </a:p>
@@ -3020,7 +6105,7 @@
           <a:p>
             <a:fld id="{5BCAD085-E8A6-8845-BD4E-CB4CCA059FC4}" type="datetimeFigureOut">
               <a:rPr lang="en-US" smtClean="0"/>
-              <a:t>5/20/2026</a:t>
+              <a:t>1/27/13</a:t>
             </a:fld>
             <a:endParaRPr lang="en-US"/>
           </a:p>
@@ -3129,9 +6214,10 @@
           <a:lstStyle/>
           <a:p>
             <a:r>
-              <a:rPr lang="en-US"/>
+              <a:rPr lang="en-US" smtClean="0"/>
               <a:t>Click to edit Master title style</a:t>
             </a:r>
+            <a:endParaRPr lang="en-US"/>
           </a:p>
         </p:txBody>
       </p:sp>
@@ -3162,37 +6248,38 @@
           <a:p>
             <a:pPr lvl="0"/>
             <a:r>
-              <a:rPr lang="en-US"/>
+              <a:rPr lang="en-US" smtClean="0"/>
               <a:t>Click to edit Master text styles</a:t>
             </a:r>
           </a:p>
           <a:p>
             <a:pPr lvl="1"/>
             <a:r>
-              <a:rPr lang="en-US"/>
+              <a:rPr lang="en-US" smtClean="0"/>
               <a:t>Second level</a:t>
             </a:r>
           </a:p>
           <a:p>
             <a:pPr lvl="2"/>
             <a:r>
-              <a:rPr lang="en-US"/>
+              <a:rPr lang="en-US" smtClean="0"/>
               <a:t>Third level</a:t>
             </a:r>
           </a:p>
           <a:p>
             <a:pPr lvl="3"/>
             <a:r>
-              <a:rPr lang="en-US"/>
+              <a:rPr lang="en-US" smtClean="0"/>
               <a:t>Fourth level</a:t>
             </a:r>
           </a:p>
           <a:p>
             <a:pPr lvl="4"/>
             <a:r>
-              <a:rPr lang="en-US"/>
+              <a:rPr lang="en-US" smtClean="0"/>
               <a:t>Fifth level</a:t>
             </a:r>
+            <a:endParaRPr lang="en-US"/>
           </a:p>
         </p:txBody>
       </p:sp>
@@ -3231,7 +6318,7 @@
           <a:p>
             <a:fld id="{5BCAD085-E8A6-8845-BD4E-CB4CCA059FC4}" type="datetimeFigureOut">
               <a:rPr lang="en-US" smtClean="0"/>
-              <a:t>5/20/2026</a:t>
+              <a:t>1/27/13</a:t>
             </a:fld>
             <a:endParaRPr lang="en-US"/>
           </a:p>
@@ -3590,7 +6677,7 @@
 </file>
 
 <file path=ppt/slides/slide1.xml><?xml version="1.0" encoding="utf-8"?>
-<p:sld xmlns:a="http://schemas.openxmlformats.org/drawingml/2006/main" xmlns:r="http://schemas.openxmlformats.org/officeDocument/2006/relationships" xmlns:p="http://schemas.openxmlformats.org/presentationml/2006/main">
+<p:sld xmlns:a="http://schemas.openxmlformats.org/drawingml/2006/main" xmlns:p="http://schemas.openxmlformats.org/presentationml/2006/main" xmlns:r="http://schemas.openxmlformats.org/officeDocument/2006/relationships">
   <p:cSld>
     <p:spTree>
       <p:nvGrpSpPr>
@@ -3598,14 +6685,7 @@
         <p:cNvGrpSpPr/>
         <p:nvPr/>
       </p:nvGrpSpPr>
-      <p:grpSpPr>
-        <a:xfrm>
-          <a:off x="0" y="0"/>
-          <a:ext cx="0" cy="0"/>
-          <a:chOff x="0" y="0"/>
-          <a:chExt cx="0" cy="0"/>
-        </a:xfrm>
-      </p:grpSpPr>
+      <p:grpSpPr/>
       <p:sp>
         <p:nvSpPr>
           <p:cNvPr id="2" name="TextBox 1"/>
@@ -3629,7 +6709,7 @@
           <a:lstStyle/>
           <a:p>
             <a:pPr algn="ctr">
-              <a:defRPr sz="2400" b="1">
+              <a:defRPr b="1" sz="2400">
                 <a:solidFill>
                   <a:srgbClr val="1C2833"/>
                 </a:solidFill>
@@ -3665,7 +6745,7 @@
           <a:lstStyle/>
           <a:p>
             <a:pPr>
-              <a:defRPr sz="1100" b="1">
+              <a:defRPr b="1" sz="1100">
                 <a:solidFill>
                   <a:srgbClr val="2E4053"/>
                 </a:solidFill>
@@ -3673,10 +6753,8 @@
               </a:defRPr>
             </a:pPr>
             <a:r>
-              <a:rPr dirty="0" err="1"/>
               <a:t>基金基本情况</a:t>
             </a:r>
-            <a:endParaRPr dirty="0"/>
           </a:p>
         </p:txBody>
       </p:sp>
@@ -3689,7 +6767,7 @@
         <p:spPr>
           <a:xfrm>
             <a:off x="411480" y="960120"/>
-            <a:ext cx="5349240" cy="1318310"/>
+            <a:ext cx="5349240" cy="2331720"/>
           </a:xfrm>
           <a:prstGeom prst="rect">
             <a:avLst/>
@@ -3706,7 +6784,7 @@
               <a:spcAft>
                 <a:spcPts val="400"/>
               </a:spcAft>
-              <a:defRPr sz="1050" b="1">
+              <a:defRPr b="1" sz="1050">
                 <a:solidFill>
                   <a:srgbClr val="292929"/>
                 </a:solidFill>
@@ -3714,46 +6792,15 @@
               </a:defRPr>
             </a:pPr>
             <a:r>
-              <a:rPr lang="zh-CN" altLang="en-US" sz="1050" b="1" dirty="0">
-                <a:solidFill>
-                  <a:srgbClr val="292929"/>
-                </a:solidFill>
-                <a:latin typeface="Arial" panose="020B0604020202020204" pitchFamily="34" charset="0"/>
-                <a:cs typeface="Arial" panose="020B0604020202020204" pitchFamily="34" charset="0"/>
-              </a:rPr>
-              <a:t>偏债混</a:t>
+              <a:t>基金名称：蓝海稳健增长混合A（示例）</a:t>
             </a:r>
-            <a:r>
-              <a:rPr lang="en-US" altLang="zh-CN" sz="1050" b="1" dirty="0">
-                <a:solidFill>
-                  <a:srgbClr val="292929"/>
-                </a:solidFill>
-                <a:latin typeface="Arial" panose="020B0604020202020204" pitchFamily="34" charset="0"/>
-                <a:cs typeface="Arial" panose="020B0604020202020204" pitchFamily="34" charset="0"/>
-              </a:rPr>
-              <a:t>-</a:t>
-            </a:r>
-            <a:r>
-              <a:rPr sz="1050" b="1" dirty="0" err="1">
-                <a:solidFill>
-                  <a:srgbClr val="292929"/>
-                </a:solidFill>
-                <a:latin typeface="Arial"/>
-              </a:rPr>
-              <a:t>蓝海稳健增长混合</a:t>
-            </a:r>
-            <a:r>
-              <a:rPr dirty="0" err="1"/>
-              <a:t>A</a:t>
-            </a:r>
-            <a:endParaRPr lang="en-US" dirty="0"/>
           </a:p>
           <a:p>
             <a:pPr>
               <a:spcAft>
                 <a:spcPts val="400"/>
               </a:spcAft>
-              <a:defRPr sz="1050" b="1">
+              <a:defRPr b="0" sz="1050">
                 <a:solidFill>
                   <a:srgbClr val="292929"/>
                 </a:solidFill>
@@ -3761,17 +6808,15 @@
               </a:defRPr>
             </a:pPr>
             <a:r>
-              <a:rPr dirty="0" err="1"/>
               <a:t>基金类型：偏股混合型基金</a:t>
             </a:r>
-            <a:endParaRPr dirty="0"/>
           </a:p>
           <a:p>
             <a:pPr>
               <a:spcAft>
                 <a:spcPts val="400"/>
               </a:spcAft>
-              <a:defRPr sz="1050" b="0">
+              <a:defRPr b="0" sz="1050">
                 <a:solidFill>
                   <a:srgbClr val="292929"/>
                 </a:solidFill>
@@ -3779,16 +6824,7 @@
               </a:defRPr>
             </a:pPr>
             <a:r>
-              <a:rPr dirty="0"/>
-              <a:t>成立日期：2019-06-12　　最新规模：58.6 </a:t>
-            </a:r>
-            <a:r>
-              <a:rPr dirty="0" err="1"/>
-              <a:t>亿元（示例</a:t>
-            </a:r>
-            <a:r>
-              <a:rPr dirty="0"/>
-              <a:t>）</a:t>
+              <a:t>成立日期：2019-06-12　　最新规模：58.6 亿元（示例）</a:t>
             </a:r>
           </a:p>
           <a:p>
@@ -3796,7 +6832,7 @@
               <a:spcAft>
                 <a:spcPts val="400"/>
               </a:spcAft>
-              <a:defRPr sz="1050" b="0">
+              <a:defRPr b="0" sz="1050">
                 <a:solidFill>
                   <a:srgbClr val="292929"/>
                 </a:solidFill>
@@ -3804,12 +6840,7 @@
               </a:defRPr>
             </a:pPr>
             <a:r>
-              <a:rPr dirty="0" err="1"/>
-              <a:t>基金经理：张明、李悦（示例</a:t>
-            </a:r>
-            <a:r>
-              <a:rPr dirty="0"/>
-              <a:t>）</a:t>
+              <a:t>基金经理：张明、李悦（示例）</a:t>
             </a:r>
           </a:p>
           <a:p>
@@ -3817,7 +6848,7 @@
               <a:spcAft>
                 <a:spcPts val="400"/>
               </a:spcAft>
-              <a:defRPr sz="1050" b="0">
+              <a:defRPr b="0" sz="1050">
                 <a:solidFill>
                   <a:srgbClr val="292929"/>
                 </a:solidFill>
@@ -3825,7 +6856,6 @@
               </a:defRPr>
             </a:pPr>
             <a:r>
-              <a:rPr dirty="0"/>
               <a:t>业绩比较基准：沪深300指数收益率×70% + 中债综合指数×30%</a:t>
             </a:r>
           </a:p>
@@ -3834,7 +6864,7 @@
               <a:spcAft>
                 <a:spcPts val="400"/>
               </a:spcAft>
-              <a:defRPr sz="1050" b="0">
+              <a:defRPr b="0" sz="1050">
                 <a:solidFill>
                   <a:srgbClr val="292929"/>
                 </a:solidFill>
@@ -3842,14 +6872,8 @@
               </a:defRPr>
             </a:pPr>
             <a:r>
-              <a:rPr dirty="0"/>
-              <a:t>风险等级：R3（中风险）　　</a:t>
+              <a:t>风险等级：R3（中风险）　　托管人：示例商业银行</a:t>
             </a:r>
-            <a:r>
-              <a:rPr dirty="0" err="1"/>
-              <a:t>托管人：示例商业银行</a:t>
-            </a:r>
-            <a:endParaRPr dirty="0"/>
           </a:p>
         </p:txBody>
       </p:sp>
@@ -3876,7 +6900,7 @@
           <a:lstStyle/>
           <a:p>
             <a:pPr>
-              <a:defRPr sz="1100" b="1">
+              <a:defRPr b="1" sz="1100">
                 <a:solidFill>
                   <a:srgbClr val="2E4053"/>
                 </a:solidFill>
@@ -3889,6 +6913,378 @@
           </a:p>
         </p:txBody>
       </p:sp>
+      <p:graphicFrame>
+        <p:nvGraphicFramePr>
+          <p:cNvPr id="6" name="Table 5"/>
+          <p:cNvGraphicFramePr>
+            <a:graphicFrameLocks noGrp="1"/>
+          </p:cNvGraphicFramePr>
+          <p:nvPr/>
+        </p:nvGraphicFramePr>
+        <p:xfrm>
+          <a:off x="411480" y="3630168"/>
+          <a:ext cx="5349240" cy="1234440"/>
+        </p:xfrm>
+        <a:graphic>
+          <a:graphicData uri="http://schemas.openxmlformats.org/drawingml/2006/table">
+            <a:tbl>
+              <a:tblPr bandRow="1" firstRow="1">
+                <a:tableStyleId>{5C22544A-7EE6-4342-B048-85BDC9FD1C3A}</a:tableStyleId>
+              </a:tblPr>
+              <a:tblGrid>
+                <a:gridCol w="1337310"/>
+                <a:gridCol w="1337310"/>
+                <a:gridCol w="1337310"/>
+                <a:gridCol w="1337310"/>
+              </a:tblGrid>
+              <a:tr h="308610">
+                <a:tc>
+                  <a:txBody>
+                    <a:bodyPr/>
+                    <a:lstStyle/>
+                    <a:p>
+                      <a:pPr>
+                        <a:defRPr b="1" sz="950">
+                          <a:solidFill>
+                            <a:srgbClr val="FFFFFF"/>
+                          </a:solidFill>
+                          <a:latin typeface="Arial"/>
+                        </a:defRPr>
+                      </a:pPr>
+                      <a:r>
+                        <a:t>区间</a:t>
+                      </a:r>
+                    </a:p>
+                  </a:txBody>
+                  <a:tcPr>
+                    <a:solidFill>
+                      <a:srgbClr val="2E4053"/>
+                    </a:solidFill>
+                  </a:tcPr>
+                </a:tc>
+                <a:tc>
+                  <a:txBody>
+                    <a:bodyPr/>
+                    <a:lstStyle/>
+                    <a:p>
+                      <a:pPr>
+                        <a:defRPr b="1" sz="950">
+                          <a:solidFill>
+                            <a:srgbClr val="FFFFFF"/>
+                          </a:solidFill>
+                          <a:latin typeface="Arial"/>
+                        </a:defRPr>
+                      </a:pPr>
+                      <a:r>
+                        <a:t>收益率</a:t>
+                      </a:r>
+                    </a:p>
+                  </a:txBody>
+                  <a:tcPr>
+                    <a:solidFill>
+                      <a:srgbClr val="2E4053"/>
+                    </a:solidFill>
+                  </a:tcPr>
+                </a:tc>
+                <a:tc>
+                  <a:txBody>
+                    <a:bodyPr/>
+                    <a:lstStyle/>
+                    <a:p>
+                      <a:pPr>
+                        <a:defRPr b="1" sz="950">
+                          <a:solidFill>
+                            <a:srgbClr val="FFFFFF"/>
+                          </a:solidFill>
+                          <a:latin typeface="Arial"/>
+                        </a:defRPr>
+                      </a:pPr>
+                      <a:r>
+                        <a:t>同类排名</a:t>
+                      </a:r>
+                    </a:p>
+                  </a:txBody>
+                  <a:tcPr>
+                    <a:solidFill>
+                      <a:srgbClr val="2E4053"/>
+                    </a:solidFill>
+                  </a:tcPr>
+                </a:tc>
+                <a:tc>
+                  <a:txBody>
+                    <a:bodyPr/>
+                    <a:lstStyle/>
+                    <a:p>
+                      <a:pPr>
+                        <a:defRPr b="1" sz="950">
+                          <a:solidFill>
+                            <a:srgbClr val="FFFFFF"/>
+                          </a:solidFill>
+                          <a:latin typeface="Arial"/>
+                        </a:defRPr>
+                      </a:pPr>
+                      <a:r>
+                        <a:t>分位数</a:t>
+                      </a:r>
+                    </a:p>
+                  </a:txBody>
+                  <a:tcPr>
+                    <a:solidFill>
+                      <a:srgbClr val="2E4053"/>
+                    </a:solidFill>
+                  </a:tcPr>
+                </a:tc>
+              </a:tr>
+              <a:tr h="308610">
+                <a:tc>
+                  <a:txBody>
+                    <a:bodyPr/>
+                    <a:lstStyle/>
+                    <a:p>
+                      <a:pPr>
+                        <a:defRPr sz="950">
+                          <a:solidFill>
+                            <a:srgbClr val="292929"/>
+                          </a:solidFill>
+                          <a:latin typeface="Arial"/>
+                        </a:defRPr>
+                      </a:pPr>
+                      <a:r>
+                        <a:t>近一年</a:t>
+                      </a:r>
+                    </a:p>
+                  </a:txBody>
+                  <a:tcPr/>
+                </a:tc>
+                <a:tc>
+                  <a:txBody>
+                    <a:bodyPr/>
+                    <a:lstStyle/>
+                    <a:p>
+                      <a:pPr>
+                        <a:defRPr sz="950">
+                          <a:solidFill>
+                            <a:srgbClr val="292929"/>
+                          </a:solidFill>
+                          <a:latin typeface="Arial"/>
+                        </a:defRPr>
+                      </a:pPr>
+                      <a:r>
+                        <a:t>+12.8%</a:t>
+                      </a:r>
+                    </a:p>
+                  </a:txBody>
+                  <a:tcPr/>
+                </a:tc>
+                <a:tc>
+                  <a:txBody>
+                    <a:bodyPr/>
+                    <a:lstStyle/>
+                    <a:p>
+                      <a:pPr>
+                        <a:defRPr sz="950">
+                          <a:solidFill>
+                            <a:srgbClr val="292929"/>
+                          </a:solidFill>
+                          <a:latin typeface="Arial"/>
+                        </a:defRPr>
+                      </a:pPr>
+                      <a:r>
+                        <a:t>128 / 856</a:t>
+                      </a:r>
+                    </a:p>
+                  </a:txBody>
+                  <a:tcPr/>
+                </a:tc>
+                <a:tc>
+                  <a:txBody>
+                    <a:bodyPr/>
+                    <a:lstStyle/>
+                    <a:p>
+                      <a:pPr>
+                        <a:defRPr sz="950">
+                          <a:solidFill>
+                            <a:srgbClr val="292929"/>
+                          </a:solidFill>
+                          <a:latin typeface="Arial"/>
+                        </a:defRPr>
+                      </a:pPr>
+                      <a:r>
+                        <a:t>前 15%</a:t>
+                      </a:r>
+                    </a:p>
+                  </a:txBody>
+                  <a:tcPr/>
+                </a:tc>
+              </a:tr>
+              <a:tr h="308610">
+                <a:tc>
+                  <a:txBody>
+                    <a:bodyPr/>
+                    <a:lstStyle/>
+                    <a:p>
+                      <a:pPr>
+                        <a:defRPr sz="950">
+                          <a:solidFill>
+                            <a:srgbClr val="292929"/>
+                          </a:solidFill>
+                          <a:latin typeface="Arial"/>
+                        </a:defRPr>
+                      </a:pPr>
+                      <a:r>
+                        <a:t>近两年</a:t>
+                      </a:r>
+                    </a:p>
+                  </a:txBody>
+                  <a:tcPr/>
+                </a:tc>
+                <a:tc>
+                  <a:txBody>
+                    <a:bodyPr/>
+                    <a:lstStyle/>
+                    <a:p>
+                      <a:pPr>
+                        <a:defRPr sz="950">
+                          <a:solidFill>
+                            <a:srgbClr val="292929"/>
+                          </a:solidFill>
+                          <a:latin typeface="Arial"/>
+                        </a:defRPr>
+                      </a:pPr>
+                      <a:r>
+                        <a:t>+18.6%</a:t>
+                      </a:r>
+                    </a:p>
+                  </a:txBody>
+                  <a:tcPr/>
+                </a:tc>
+                <a:tc>
+                  <a:txBody>
+                    <a:bodyPr/>
+                    <a:lstStyle/>
+                    <a:p>
+                      <a:pPr>
+                        <a:defRPr sz="950">
+                          <a:solidFill>
+                            <a:srgbClr val="292929"/>
+                          </a:solidFill>
+                          <a:latin typeface="Arial"/>
+                        </a:defRPr>
+                      </a:pPr>
+                      <a:r>
+                        <a:t>95 / 812</a:t>
+                      </a:r>
+                    </a:p>
+                  </a:txBody>
+                  <a:tcPr/>
+                </a:tc>
+                <a:tc>
+                  <a:txBody>
+                    <a:bodyPr/>
+                    <a:lstStyle/>
+                    <a:p>
+                      <a:pPr>
+                        <a:defRPr sz="950">
+                          <a:solidFill>
+                            <a:srgbClr val="292929"/>
+                          </a:solidFill>
+                          <a:latin typeface="Arial"/>
+                        </a:defRPr>
+                      </a:pPr>
+                      <a:r>
+                        <a:t>前 12%</a:t>
+                      </a:r>
+                    </a:p>
+                  </a:txBody>
+                  <a:tcPr/>
+                </a:tc>
+              </a:tr>
+              <a:tr h="308610">
+                <a:tc>
+                  <a:txBody>
+                    <a:bodyPr/>
+                    <a:lstStyle/>
+                    <a:p>
+                      <a:pPr>
+                        <a:defRPr sz="950">
+                          <a:solidFill>
+                            <a:srgbClr val="292929"/>
+                          </a:solidFill>
+                          <a:latin typeface="Arial"/>
+                        </a:defRPr>
+                      </a:pPr>
+                      <a:r>
+                        <a:t>近三年</a:t>
+                      </a:r>
+                    </a:p>
+                  </a:txBody>
+                  <a:tcPr/>
+                </a:tc>
+                <a:tc>
+                  <a:txBody>
+                    <a:bodyPr/>
+                    <a:lstStyle/>
+                    <a:p>
+                      <a:pPr>
+                        <a:defRPr sz="950">
+                          <a:solidFill>
+                            <a:srgbClr val="292929"/>
+                          </a:solidFill>
+                          <a:latin typeface="Arial"/>
+                        </a:defRPr>
+                      </a:pPr>
+                      <a:r>
+                        <a:t>+22.4%</a:t>
+                      </a:r>
+                    </a:p>
+                  </a:txBody>
+                  <a:tcPr/>
+                </a:tc>
+                <a:tc>
+                  <a:txBody>
+                    <a:bodyPr/>
+                    <a:lstStyle/>
+                    <a:p>
+                      <a:pPr>
+                        <a:defRPr sz="950">
+                          <a:solidFill>
+                            <a:srgbClr val="292929"/>
+                          </a:solidFill>
+                          <a:latin typeface="Arial"/>
+                        </a:defRPr>
+                      </a:pPr>
+                      <a:r>
+                        <a:t>76 / 698</a:t>
+                      </a:r>
+                    </a:p>
+                  </a:txBody>
+                  <a:tcPr/>
+                </a:tc>
+                <a:tc>
+                  <a:txBody>
+                    <a:bodyPr/>
+                    <a:lstStyle/>
+                    <a:p>
+                      <a:pPr>
+                        <a:defRPr sz="950">
+                          <a:solidFill>
+                            <a:srgbClr val="292929"/>
+                          </a:solidFill>
+                          <a:latin typeface="Arial"/>
+                        </a:defRPr>
+                      </a:pPr>
+                      <a:r>
+                        <a:t>前 11%</a:t>
+                      </a:r>
+                    </a:p>
+                  </a:txBody>
+                  <a:tcPr/>
+                </a:tc>
+              </a:tr>
+            </a:tbl>
+          </a:graphicData>
+        </a:graphic>
+      </p:graphicFrame>
       <p:sp>
         <p:nvSpPr>
           <p:cNvPr id="7" name="TextBox 6"/>
@@ -3912,7 +7308,7 @@
           <a:lstStyle/>
           <a:p>
             <a:pPr>
-              <a:defRPr sz="1100" b="1">
+              <a:defRPr b="1" sz="1100">
                 <a:solidFill>
                   <a:srgbClr val="2E4053"/>
                 </a:solidFill>
@@ -3939,46 +7335,10 @@
         </p:xfrm>
         <a:graphic>
           <a:graphicData uri="http://schemas.openxmlformats.org/drawingml/2006/chart">
-            <c:chart xmlns:c="http://schemas.openxmlformats.org/drawingml/2006/chart" xmlns:r="http://schemas.openxmlformats.org/officeDocument/2006/relationships" r:id="rId2"/>
+            <c:chart xmlns:c="http://schemas.openxmlformats.org/drawingml/2006/chart" r:id="rId2"/>
           </a:graphicData>
         </a:graphic>
       </p:graphicFrame>
-      <p:sp>
-        <p:nvSpPr>
-          <p:cNvPr id="9" name="TextBox 8"/>
-          <p:cNvSpPr txBox="1"/>
-          <p:nvPr/>
-        </p:nvSpPr>
-        <p:spPr>
-          <a:xfrm>
-            <a:off x="5989320" y="3383280"/>
-            <a:ext cx="4114800" cy="256032"/>
-          </a:xfrm>
-          <a:prstGeom prst="rect">
-            <a:avLst/>
-          </a:prstGeom>
-          <a:noFill/>
-        </p:spPr>
-        <p:txBody>
-          <a:bodyPr wrap="none">
-            <a:spAutoFit/>
-          </a:bodyPr>
-          <a:lstStyle/>
-          <a:p>
-            <a:pPr>
-              <a:defRPr sz="1100" b="1">
-                <a:solidFill>
-                  <a:srgbClr val="2E4053"/>
-                </a:solidFill>
-                <a:latin typeface="Arial"/>
-              </a:defRPr>
-            </a:pPr>
-            <a:r>
-              <a:t>累计收益率走势（示例，%）</a:t>
-            </a:r>
-          </a:p>
-        </p:txBody>
-      </p:sp>
       <p:graphicFrame>
         <p:nvGraphicFramePr>
           <p:cNvPr id="10" name="Chart 9"/>
@@ -3993,7 +7353,7 @@
         </p:xfrm>
         <a:graphic>
           <a:graphicData uri="http://schemas.openxmlformats.org/drawingml/2006/chart">
-            <c:chart xmlns:c="http://schemas.openxmlformats.org/drawingml/2006/chart" xmlns:r="http://schemas.openxmlformats.org/officeDocument/2006/relationships" r:id="rId3"/>
+            <c:chart xmlns:c="http://schemas.openxmlformats.org/drawingml/2006/chart" r:id="rId3"/>
           </a:graphicData>
         </a:graphic>
       </p:graphicFrame>
@@ -4033,11 +7393,10 @@
           </a:fontRef>
         </p:style>
         <p:txBody>
-          <a:bodyPr rtlCol="0" anchor="ctr"/>
+          <a:bodyPr anchor="ctr" rtlCol="0"/>
           <a:lstStyle/>
           <a:p>
             <a:pPr algn="ctr"/>
-            <a:endParaRPr/>
           </a:p>
         </p:txBody>
       </p:sp>
@@ -4077,562 +7436,13 @@
           </a:fontRef>
         </p:style>
         <p:txBody>
-          <a:bodyPr rtlCol="0" anchor="ctr"/>
+          <a:bodyPr anchor="ctr" rtlCol="0"/>
           <a:lstStyle/>
           <a:p>
             <a:pPr algn="ctr"/>
-            <a:endParaRPr/>
           </a:p>
         </p:txBody>
       </p:sp>
-      <p:graphicFrame>
-        <p:nvGraphicFramePr>
-          <p:cNvPr id="13" name="Table 12"/>
-          <p:cNvGraphicFramePr>
-            <a:graphicFrameLocks noGrp="1"/>
-          </p:cNvGraphicFramePr>
-          <p:nvPr/>
-        </p:nvGraphicFramePr>
-        <p:xfrm>
-          <a:off x="411480" y="3630168"/>
-          <a:ext cx="5349240" cy="1828800"/>
-        </p:xfrm>
-        <a:graphic>
-          <a:graphicData uri="http://schemas.openxmlformats.org/drawingml/2006/table">
-            <a:tbl>
-              <a:tblPr firstRow="1" bandRow="1">
-                <a:tableStyleId>{5C22544A-7EE6-4342-B048-85BDC9FD1C3A}</a:tableStyleId>
-              </a:tblPr>
-              <a:tblGrid>
-                <a:gridCol w="1069848">
-                  <a:extLst>
-                    <a:ext uri="{9D8B030D-6E8A-4147-A177-3AD203B41FA5}">
-                      <a16:colId xmlns:a16="http://schemas.microsoft.com/office/drawing/2014/main" val="20000"/>
-                    </a:ext>
-                  </a:extLst>
-                </a:gridCol>
-                <a:gridCol w="1069848">
-                  <a:extLst>
-                    <a:ext uri="{9D8B030D-6E8A-4147-A177-3AD203B41FA5}">
-                      <a16:colId xmlns:a16="http://schemas.microsoft.com/office/drawing/2014/main" val="20001"/>
-                    </a:ext>
-                  </a:extLst>
-                </a:gridCol>
-                <a:gridCol w="1069848">
-                  <a:extLst>
-                    <a:ext uri="{9D8B030D-6E8A-4147-A177-3AD203B41FA5}">
-                      <a16:colId xmlns:a16="http://schemas.microsoft.com/office/drawing/2014/main" val="20002"/>
-                    </a:ext>
-                  </a:extLst>
-                </a:gridCol>
-                <a:gridCol w="1069848">
-                  <a:extLst>
-                    <a:ext uri="{9D8B030D-6E8A-4147-A177-3AD203B41FA5}">
-                      <a16:colId xmlns:a16="http://schemas.microsoft.com/office/drawing/2014/main" val="20003"/>
-                    </a:ext>
-                  </a:extLst>
-                </a:gridCol>
-                <a:gridCol w="1069848">
-                  <a:extLst>
-                    <a:ext uri="{9D8B030D-6E8A-4147-A177-3AD203B41FA5}">
-                      <a16:colId xmlns:a16="http://schemas.microsoft.com/office/drawing/2014/main" val="20004"/>
-                    </a:ext>
-                  </a:extLst>
-                </a:gridCol>
-              </a:tblGrid>
-              <a:tr h="205740">
-                <a:tc>
-                  <a:txBody>
-                    <a:bodyPr/>
-                    <a:lstStyle/>
-                    <a:p>
-                      <a:endParaRPr/>
-                    </a:p>
-                  </a:txBody>
-                  <a:tcPr/>
-                </a:tc>
-                <a:tc>
-                  <a:txBody>
-                    <a:bodyPr/>
-                    <a:lstStyle/>
-                    <a:p>
-                      <a:pPr algn="ctr">
-                        <a:defRPr sz="1100" b="1"/>
-                      </a:pPr>
-                      <a:r>
-                        <a:t>任职以来</a:t>
-                      </a:r>
-                    </a:p>
-                  </a:txBody>
-                  <a:tcPr/>
-                </a:tc>
-                <a:tc>
-                  <a:txBody>
-                    <a:bodyPr/>
-                    <a:lstStyle/>
-                    <a:p>
-                      <a:pPr algn="ctr">
-                        <a:defRPr sz="1100" b="1"/>
-                      </a:pPr>
-                      <a:r>
-                        <a:t>过去一年</a:t>
-                      </a:r>
-                    </a:p>
-                  </a:txBody>
-                  <a:tcPr/>
-                </a:tc>
-                <a:tc>
-                  <a:txBody>
-                    <a:bodyPr/>
-                    <a:lstStyle/>
-                    <a:p>
-                      <a:pPr algn="ctr">
-                        <a:defRPr sz="1100" b="1"/>
-                      </a:pPr>
-                      <a:r>
-                        <a:t>过去两年</a:t>
-                      </a:r>
-                    </a:p>
-                  </a:txBody>
-                  <a:tcPr/>
-                </a:tc>
-                <a:tc>
-                  <a:txBody>
-                    <a:bodyPr/>
-                    <a:lstStyle/>
-                    <a:p>
-                      <a:pPr algn="ctr">
-                        <a:defRPr sz="1100" b="1"/>
-                      </a:pPr>
-                      <a:r>
-                        <a:t>过去三年</a:t>
-                      </a:r>
-                    </a:p>
-                  </a:txBody>
-                  <a:tcPr/>
-                </a:tc>
-                <a:extLst>
-                  <a:ext uri="{0D108BD9-81ED-4DB2-BD59-A6C34878D82A}">
-                    <a16:rowId xmlns:a16="http://schemas.microsoft.com/office/drawing/2014/main" val="10000"/>
-                  </a:ext>
-                </a:extLst>
-              </a:tr>
-              <a:tr h="205740">
-                <a:tc>
-                  <a:txBody>
-                    <a:bodyPr/>
-                    <a:lstStyle/>
-                    <a:p>
-                      <a:pPr>
-                        <a:defRPr sz="1100" b="1"/>
-                      </a:pPr>
-                      <a:r>
-                        <a:t>收益率</a:t>
-                      </a:r>
-                    </a:p>
-                  </a:txBody>
-                  <a:tcPr/>
-                </a:tc>
-                <a:tc>
-                  <a:txBody>
-                    <a:bodyPr/>
-                    <a:lstStyle/>
-                    <a:p>
-                      <a:pPr>
-                        <a:defRPr sz="1100"/>
-                      </a:pPr>
-                      <a:r>
-                        <a:t>45.2%</a:t>
-                      </a:r>
-                    </a:p>
-                  </a:txBody>
-                  <a:tcPr/>
-                </a:tc>
-                <a:tc>
-                  <a:txBody>
-                    <a:bodyPr/>
-                    <a:lstStyle/>
-                    <a:p>
-                      <a:pPr>
-                        <a:defRPr sz="1100"/>
-                      </a:pPr>
-                      <a:r>
-                        <a:t>12.8%</a:t>
-                      </a:r>
-                    </a:p>
-                  </a:txBody>
-                  <a:tcPr/>
-                </a:tc>
-                <a:tc>
-                  <a:txBody>
-                    <a:bodyPr/>
-                    <a:lstStyle/>
-                    <a:p>
-                      <a:pPr>
-                        <a:defRPr sz="1100"/>
-                      </a:pPr>
-                      <a:r>
-                        <a:t>24.5%</a:t>
-                      </a:r>
-                    </a:p>
-                  </a:txBody>
-                  <a:tcPr/>
-                </a:tc>
-                <a:tc>
-                  <a:txBody>
-                    <a:bodyPr/>
-                    <a:lstStyle/>
-                    <a:p>
-                      <a:pPr>
-                        <a:defRPr sz="1100"/>
-                      </a:pPr>
-                      <a:r>
-                        <a:t>35.8%</a:t>
-                      </a:r>
-                    </a:p>
-                  </a:txBody>
-                  <a:tcPr/>
-                </a:tc>
-                <a:extLst>
-                  <a:ext uri="{0D108BD9-81ED-4DB2-BD59-A6C34878D82A}">
-                    <a16:rowId xmlns:a16="http://schemas.microsoft.com/office/drawing/2014/main" val="10001"/>
-                  </a:ext>
-                </a:extLst>
-              </a:tr>
-              <a:tr h="205740">
-                <a:tc>
-                  <a:txBody>
-                    <a:bodyPr/>
-                    <a:lstStyle/>
-                    <a:p>
-                      <a:pPr>
-                        <a:defRPr sz="1100" b="1"/>
-                      </a:pPr>
-                      <a:r>
-                        <a:t>业绩排名</a:t>
-                      </a:r>
-                    </a:p>
-                  </a:txBody>
-                  <a:tcPr/>
-                </a:tc>
-                <a:tc>
-                  <a:txBody>
-                    <a:bodyPr/>
-                    <a:lstStyle/>
-                    <a:p>
-                      <a:pPr>
-                        <a:defRPr sz="1100"/>
-                      </a:pPr>
-                      <a:r>
-                        <a:t>15 / 200</a:t>
-                      </a:r>
-                    </a:p>
-                  </a:txBody>
-                  <a:tcPr/>
-                </a:tc>
-                <a:tc>
-                  <a:txBody>
-                    <a:bodyPr/>
-                    <a:lstStyle/>
-                    <a:p>
-                      <a:pPr>
-                        <a:defRPr sz="1100"/>
-                      </a:pPr>
-                      <a:r>
-                        <a:rPr dirty="0"/>
-                        <a:t>128 / 856</a:t>
-                      </a:r>
-                    </a:p>
-                  </a:txBody>
-                  <a:tcPr/>
-                </a:tc>
-                <a:tc>
-                  <a:txBody>
-                    <a:bodyPr/>
-                    <a:lstStyle/>
-                    <a:p>
-                      <a:pPr>
-                        <a:defRPr sz="1100"/>
-                      </a:pPr>
-                      <a:r>
-                        <a:t>95 / 812</a:t>
-                      </a:r>
-                    </a:p>
-                  </a:txBody>
-                  <a:tcPr/>
-                </a:tc>
-                <a:tc>
-                  <a:txBody>
-                    <a:bodyPr/>
-                    <a:lstStyle/>
-                    <a:p>
-                      <a:pPr>
-                        <a:defRPr sz="1100"/>
-                      </a:pPr>
-                      <a:r>
-                        <a:t>76 / 698</a:t>
-                      </a:r>
-                    </a:p>
-                  </a:txBody>
-                  <a:tcPr/>
-                </a:tc>
-                <a:extLst>
-                  <a:ext uri="{0D108BD9-81ED-4DB2-BD59-A6C34878D82A}">
-                    <a16:rowId xmlns:a16="http://schemas.microsoft.com/office/drawing/2014/main" val="10002"/>
-                  </a:ext>
-                </a:extLst>
-              </a:tr>
-              <a:tr h="205740">
-                <a:tc>
-                  <a:txBody>
-                    <a:bodyPr/>
-                    <a:lstStyle/>
-                    <a:p>
-                      <a:pPr>
-                        <a:defRPr sz="1100" b="1"/>
-                      </a:pPr>
-                      <a:r>
-                        <a:t>偏债混合基金指数</a:t>
-                      </a:r>
-                    </a:p>
-                  </a:txBody>
-                  <a:tcPr/>
-                </a:tc>
-                <a:tc>
-                  <a:txBody>
-                    <a:bodyPr/>
-                    <a:lstStyle/>
-                    <a:p>
-                      <a:pPr>
-                        <a:defRPr sz="1100"/>
-                      </a:pPr>
-                      <a:r>
-                        <a:t>+20.1%</a:t>
-                      </a:r>
-                    </a:p>
-                  </a:txBody>
-                  <a:tcPr/>
-                </a:tc>
-                <a:tc>
-                  <a:txBody>
-                    <a:bodyPr/>
-                    <a:lstStyle/>
-                    <a:p>
-                      <a:pPr>
-                        <a:defRPr sz="1100"/>
-                      </a:pPr>
-                      <a:r>
-                        <a:t>+5.2%</a:t>
-                      </a:r>
-                    </a:p>
-                  </a:txBody>
-                  <a:tcPr/>
-                </a:tc>
-                <a:tc>
-                  <a:txBody>
-                    <a:bodyPr/>
-                    <a:lstStyle/>
-                    <a:p>
-                      <a:pPr>
-                        <a:defRPr sz="1100"/>
-                      </a:pPr>
-                      <a:r>
-                        <a:t>+8.5%</a:t>
-                      </a:r>
-                    </a:p>
-                  </a:txBody>
-                  <a:tcPr/>
-                </a:tc>
-                <a:tc>
-                  <a:txBody>
-                    <a:bodyPr/>
-                    <a:lstStyle/>
-                    <a:p>
-                      <a:pPr>
-                        <a:defRPr sz="1100"/>
-                      </a:pPr>
-                      <a:r>
-                        <a:t>+12.3%</a:t>
-                      </a:r>
-                    </a:p>
-                  </a:txBody>
-                  <a:tcPr/>
-                </a:tc>
-                <a:extLst>
-                  <a:ext uri="{0D108BD9-81ED-4DB2-BD59-A6C34878D82A}">
-                    <a16:rowId xmlns:a16="http://schemas.microsoft.com/office/drawing/2014/main" val="10003"/>
-                  </a:ext>
-                </a:extLst>
-              </a:tr>
-              <a:tr h="205740">
-                <a:tc>
-                  <a:txBody>
-                    <a:bodyPr/>
-                    <a:lstStyle/>
-                    <a:p>
-                      <a:pPr>
-                        <a:defRPr sz="1100" b="1"/>
-                      </a:pPr>
-                      <a:r>
-                        <a:t>夏普比率</a:t>
-                      </a:r>
-                    </a:p>
-                  </a:txBody>
-                  <a:tcPr/>
-                </a:tc>
-                <a:tc>
-                  <a:txBody>
-                    <a:bodyPr/>
-                    <a:lstStyle/>
-                    <a:p>
-                      <a:pPr>
-                        <a:defRPr sz="1100"/>
-                      </a:pPr>
-                      <a:r>
-                        <a:t>1.25</a:t>
-                      </a:r>
-                    </a:p>
-                  </a:txBody>
-                  <a:tcPr/>
-                </a:tc>
-                <a:tc>
-                  <a:txBody>
-                    <a:bodyPr/>
-                    <a:lstStyle/>
-                    <a:p>
-                      <a:pPr>
-                        <a:defRPr sz="1100"/>
-                      </a:pPr>
-                      <a:r>
-                        <a:t>1.10</a:t>
-                      </a:r>
-                    </a:p>
-                  </a:txBody>
-                  <a:tcPr/>
-                </a:tc>
-                <a:tc>
-                  <a:txBody>
-                    <a:bodyPr/>
-                    <a:lstStyle/>
-                    <a:p>
-                      <a:pPr>
-                        <a:defRPr sz="1100"/>
-                      </a:pPr>
-                      <a:r>
-                        <a:t>1.05</a:t>
-                      </a:r>
-                    </a:p>
-                  </a:txBody>
-                  <a:tcPr/>
-                </a:tc>
-                <a:tc>
-                  <a:txBody>
-                    <a:bodyPr/>
-                    <a:lstStyle/>
-                    <a:p>
-                      <a:pPr>
-                        <a:defRPr sz="1100"/>
-                      </a:pPr>
-                      <a:r>
-                        <a:t>0.98</a:t>
-                      </a:r>
-                    </a:p>
-                  </a:txBody>
-                  <a:tcPr/>
-                </a:tc>
-                <a:extLst>
-                  <a:ext uri="{0D108BD9-81ED-4DB2-BD59-A6C34878D82A}">
-                    <a16:rowId xmlns:a16="http://schemas.microsoft.com/office/drawing/2014/main" val="10004"/>
-                  </a:ext>
-                </a:extLst>
-              </a:tr>
-              <a:tr h="205740">
-                <a:tc>
-                  <a:txBody>
-                    <a:bodyPr/>
-                    <a:lstStyle/>
-                    <a:p>
-                      <a:pPr>
-                        <a:defRPr sz="1100" b="1"/>
-                      </a:pPr>
-                      <a:r>
-                        <a:t>最大回撤</a:t>
-                      </a:r>
-                    </a:p>
-                  </a:txBody>
-                  <a:tcPr/>
-                </a:tc>
-                <a:tc>
-                  <a:txBody>
-                    <a:bodyPr/>
-                    <a:lstStyle/>
-                    <a:p>
-                      <a:pPr>
-                        <a:defRPr sz="1100"/>
-                      </a:pPr>
-                      <a:r>
-                        <a:t>-5.4%</a:t>
-                      </a:r>
-                    </a:p>
-                  </a:txBody>
-                  <a:tcPr/>
-                </a:tc>
-                <a:tc>
-                  <a:txBody>
-                    <a:bodyPr/>
-                    <a:lstStyle/>
-                    <a:p>
-                      <a:pPr>
-                        <a:defRPr sz="1100"/>
-                      </a:pPr>
-                      <a:r>
-                        <a:t>-3.2%</a:t>
-                      </a:r>
-                    </a:p>
-                  </a:txBody>
-                  <a:tcPr/>
-                </a:tc>
-                <a:tc>
-                  <a:txBody>
-                    <a:bodyPr/>
-                    <a:lstStyle/>
-                    <a:p>
-                      <a:pPr>
-                        <a:defRPr sz="1100"/>
-                      </a:pPr>
-                      <a:r>
-                        <a:t>-6.1%</a:t>
-                      </a:r>
-                    </a:p>
-                  </a:txBody>
-                  <a:tcPr/>
-                </a:tc>
-                <a:tc>
-                  <a:txBody>
-                    <a:bodyPr/>
-                    <a:lstStyle/>
-                    <a:p>
-                      <a:pPr>
-                        <a:defRPr sz="1100"/>
-                      </a:pPr>
-                      <a:r>
-                        <a:rPr dirty="0"/>
-                        <a:t>-8.5%</a:t>
-                      </a:r>
-                    </a:p>
-                  </a:txBody>
-                  <a:tcPr/>
-                </a:tc>
-                <a:extLst>
-                  <a:ext uri="{0D108BD9-81ED-4DB2-BD59-A6C34878D82A}">
-                    <a16:rowId xmlns:a16="http://schemas.microsoft.com/office/drawing/2014/main" val="10005"/>
-                  </a:ext>
-                </a:extLst>
-              </a:tr>
-            </a:tbl>
-          </a:graphicData>
-        </a:graphic>
-      </p:graphicFrame>
     </p:spTree>
   </p:cSld>
   <p:clrMapOvr>

--- a/samples/20260430-偏债混-M1.pptx
+++ b/samples/20260430-偏债混-M1.pptx
@@ -5,9 +5,9 @@
     <p:sldMasterId id="2147483648" r:id="rId1"/>
   </p:sldMasterIdLst>
   <p:sldIdLst>
-    <p:sldId id="256" r:id="rId7"/>
+    <p:sldId id="257" r:id="rId2"/>
   </p:sldIdLst>
-  <p:sldSz cx="12191695" cy="6858000" type="screen4x3"/>
+  <p:sldSz cx="12192000" cy="6858000"/>
   <p:notesSz cx="6858000" cy="9144000"/>
   <p:defaultTextStyle>
     <a:defPPr>
@@ -104,18 +104,39 @@
       </a:defRPr>
     </a:lvl9pPr>
   </p:defaultTextStyle>
+  <p:extLst>
+    <p:ext uri="{EFAFB233-063F-42B5-8137-9DF3F51BA10A}">
+      <p15:sldGuideLst xmlns:p15="http://schemas.microsoft.com/office/powerpoint/2012/main">
+        <p15:guide id="1" orient="horz" pos="2160">
+          <p15:clr>
+            <a:srgbClr val="A4A3A4"/>
+          </p15:clr>
+        </p15:guide>
+        <p15:guide id="2" pos="2880">
+          <p15:clr>
+            <a:srgbClr val="A4A3A4"/>
+          </p15:clr>
+        </p15:guide>
+      </p15:sldGuideLst>
+    </p:ext>
+  </p:extLst>
 </p:presentation>
 </file>
 
 <file path=ppt/charts/chart1.xml><?xml version="1.0" encoding="utf-8"?>
-<c:chartSpace xmlns:c="http://schemas.openxmlformats.org/drawingml/2006/chart" xmlns:a="http://schemas.openxmlformats.org/drawingml/2006/main" xmlns:r="http://schemas.openxmlformats.org/officeDocument/2006/relationships">
+<c:chartSpace xmlns:c="http://schemas.openxmlformats.org/drawingml/2006/chart" xmlns:a="http://schemas.openxmlformats.org/drawingml/2006/main" xmlns:r="http://schemas.openxmlformats.org/officeDocument/2006/relationships" xmlns:c16r2="http://schemas.microsoft.com/office/drawing/2015/06/chart">
   <c:date1904 val="0"/>
+  <c:lang val="zh-CN"/>
+  <c:roundedCorners val="1"/>
+  <c:style val="2"/>
   <c:chart>
     <c:autoTitleDeleted val="0"/>
     <c:plotArea>
+      <c:layout/>
       <c:barChart>
         <c:barDir val="col"/>
         <c:grouping val="clustered"/>
+        <c:varyColors val="1"/>
         <c:ser>
           <c:idx val="0"/>
           <c:order val="0"/>
@@ -130,6 +151,7 @@
               </c:strCache>
             </c:strRef>
           </c:tx>
+          <c:invertIfNegative val="1"/>
           <c:cat>
             <c:strRef>
               <c:f>Sheet1!$A$2:$A$5</c:f>
@@ -160,17 +182,22 @@
                   <c:v>28.5</c:v>
                 </c:pt>
                 <c:pt idx="1">
-                  <c:v>22.0</c:v>
+                  <c:v>22</c:v>
                 </c:pt>
                 <c:pt idx="2">
                   <c:v>30.5</c:v>
                 </c:pt>
                 <c:pt idx="3">
-                  <c:v>19.0</c:v>
+                  <c:v>19</c:v>
                 </c:pt>
               </c:numCache>
             </c:numRef>
           </c:val>
+          <c:extLst>
+            <c:ext xmlns:c16="http://schemas.microsoft.com/office/drawing/2014/chart" uri="{C3380CC4-5D6E-409C-BE32-E72D297353CC}">
+              <c16:uniqueId val="{00000000-AA29-408F-AEB6-0FAB503F9685}"/>
+            </c:ext>
+          </c:extLst>
         </c:ser>
         <c:ser>
           <c:idx val="1"/>
@@ -186,6 +213,7 @@
               </c:strCache>
             </c:strRef>
           </c:tx>
+          <c:invertIfNegative val="1"/>
           <c:cat>
             <c:strRef>
               <c:f>Sheet1!$A$2:$A$5</c:f>
@@ -213,13 +241,13 @@
                 <c:formatCode>General</c:formatCode>
                 <c:ptCount val="4"/>
                 <c:pt idx="0">
-                  <c:v>30.0</c:v>
+                  <c:v>30</c:v>
                 </c:pt>
                 <c:pt idx="1">
                   <c:v>20.5</c:v>
                 </c:pt>
                 <c:pt idx="2">
-                  <c:v>28.0</c:v>
+                  <c:v>28</c:v>
                 </c:pt>
                 <c:pt idx="3">
                   <c:v>21.5</c:v>
@@ -227,6 +255,11 @@
               </c:numCache>
             </c:numRef>
           </c:val>
+          <c:extLst>
+            <c:ext xmlns:c16="http://schemas.microsoft.com/office/drawing/2014/chart" uri="{C3380CC4-5D6E-409C-BE32-E72D297353CC}">
+              <c16:uniqueId val="{00000001-AA29-408F-AEB6-0FAB503F9685}"/>
+            </c:ext>
+          </c:extLst>
         </c:ser>
         <c:ser>
           <c:idx val="2"/>
@@ -242,6 +275,7 @@
               </c:strCache>
             </c:strRef>
           </c:tx>
+          <c:invertIfNegative val="1"/>
           <c:cat>
             <c:strRef>
               <c:f>Sheet1!$A$2:$A$5</c:f>
@@ -269,20 +303,25 @@
                 <c:formatCode>General</c:formatCode>
                 <c:ptCount val="4"/>
                 <c:pt idx="0">
-                  <c:v>26.0</c:v>
+                  <c:v>26</c:v>
                 </c:pt>
                 <c:pt idx="1">
-                  <c:v>24.0</c:v>
+                  <c:v>24</c:v>
                 </c:pt>
                 <c:pt idx="2">
-                  <c:v>32.0</c:v>
+                  <c:v>32</c:v>
                 </c:pt>
                 <c:pt idx="3">
-                  <c:v>18.0</c:v>
+                  <c:v>18</c:v>
                 </c:pt>
               </c:numCache>
             </c:numRef>
           </c:val>
+          <c:extLst>
+            <c:ext xmlns:c16="http://schemas.microsoft.com/office/drawing/2014/chart" uri="{C3380CC4-5D6E-409C-BE32-E72D297353CC}">
+              <c16:uniqueId val="{00000002-AA29-408F-AEB6-0FAB503F9685}"/>
+            </c:ext>
+          </c:extLst>
         </c:ser>
         <c:ser>
           <c:idx val="3"/>
@@ -298,6 +337,7 @@
               </c:strCache>
             </c:strRef>
           </c:tx>
+          <c:invertIfNegative val="1"/>
           <c:cat>
             <c:strRef>
               <c:f>Sheet1!$A$2:$A$5</c:f>
@@ -331,15 +371,29 @@
                   <c:v>18.5</c:v>
                 </c:pt>
                 <c:pt idx="2">
-                  <c:v>27.0</c:v>
+                  <c:v>27</c:v>
                 </c:pt>
                 <c:pt idx="3">
-                  <c:v>22.0</c:v>
+                  <c:v>22</c:v>
                 </c:pt>
               </c:numCache>
             </c:numRef>
           </c:val>
+          <c:extLst>
+            <c:ext xmlns:c16="http://schemas.microsoft.com/office/drawing/2014/chart" uri="{C3380CC4-5D6E-409C-BE32-E72D297353CC}">
+              <c16:uniqueId val="{00000003-AA29-408F-AEB6-0FAB503F9685}"/>
+            </c:ext>
+          </c:extLst>
         </c:ser>
+        <c:dLbls>
+          <c:showLegendKey val="0"/>
+          <c:showVal val="0"/>
+          <c:showCatName val="0"/>
+          <c:showSerName val="0"/>
+          <c:showPercent val="0"/>
+          <c:showBubbleSize val="0"/>
+        </c:dLbls>
+        <c:gapWidth val="150"/>
         <c:axId val="-2068027336"/>
         <c:axId val="-2113994440"/>
       </c:barChart>
@@ -350,6 +404,7 @@
         </c:scaling>
         <c:delete val="0"/>
         <c:axPos val="b"/>
+        <c:numFmt formatCode="General" sourceLinked="0"/>
         <c:majorTickMark val="out"/>
         <c:minorTickMark val="none"/>
         <c:tickLblPos val="nextTo"/>
@@ -362,22 +417,28 @@
       </c:catAx>
       <c:valAx>
         <c:axId val="-2113994440"/>
-        <c:scaling/>
+        <c:scaling>
+          <c:orientation val="minMax"/>
+        </c:scaling>
         <c:delete val="0"/>
         <c:axPos val="l"/>
         <c:majorGridlines/>
+        <c:numFmt formatCode="General" sourceLinked="1"/>
         <c:majorTickMark val="out"/>
         <c:minorTickMark val="none"/>
         <c:tickLblPos val="nextTo"/>
         <c:crossAx val="-2068027336"/>
         <c:crosses val="autoZero"/>
+        <c:crossBetween val="between"/>
       </c:valAx>
     </c:plotArea>
     <c:legend>
       <c:legendPos val="b"/>
       <c:overlay val="0"/>
     </c:legend>
+    <c:plotVisOnly val="1"/>
     <c:dispBlanksAs val="gap"/>
+    <c:showDLblsOverMax val="1"/>
   </c:chart>
   <c:txPr>
     <a:bodyPr/>
@@ -386,7 +447,7 @@
       <a:pPr>
         <a:defRPr sz="1800"/>
       </a:pPr>
-      <a:endParaRPr lang="en-US"/>
+      <a:endParaRPr lang="zh-CN"/>
     </a:p>
   </c:txPr>
   <c:externalData r:id="rId1">
@@ -396,11 +457,15 @@
 </file>
 
 <file path=ppt/charts/chart2.xml><?xml version="1.0" encoding="utf-8"?>
-<c:chartSpace xmlns:c="http://schemas.openxmlformats.org/drawingml/2006/chart" xmlns:a="http://schemas.openxmlformats.org/drawingml/2006/main" xmlns:r="http://schemas.openxmlformats.org/officeDocument/2006/relationships">
+<c:chartSpace xmlns:c="http://schemas.openxmlformats.org/drawingml/2006/chart" xmlns:a="http://schemas.openxmlformats.org/drawingml/2006/main" xmlns:r="http://schemas.openxmlformats.org/officeDocument/2006/relationships" xmlns:c16r2="http://schemas.microsoft.com/office/drawing/2015/06/chart">
   <c:date1904 val="0"/>
+  <c:lang val="zh-CN"/>
+  <c:roundedCorners val="1"/>
+  <c:style val="2"/>
   <c:chart>
-    <c:autoTitleDeleted val="true"/>
+    <c:autoTitleDeleted val="1"/>
     <c:plotArea>
+      <c:layout/>
       <c:lineChart>
         <c:grouping val="standard"/>
         <c:varyColors val="0"/>
@@ -418,6 +483,16 @@
               </c:strCache>
             </c:strRef>
           </c:tx>
+          <c:spPr>
+            <a:ln w="12700" cap="flat" cmpd="sng">
+              <a:solidFill>
+                <a:srgbClr val="4472C4"/>
+              </a:solidFill>
+            </a:ln>
+          </c:spPr>
+          <c:marker>
+            <c:symbol val="none"/>
+          </c:marker>
           <c:cat>
             <c:strRef>
               <c:f>Sheet1!$A$2:$A$262</c:f>
@@ -1216,7 +1291,7 @@
                 <c:formatCode>0.00"%"</c:formatCode>
                 <c:ptCount val="261"/>
                 <c:pt idx="0">
-                  <c:v>0.0</c:v>
+                  <c:v>0</c:v>
                 </c:pt>
                 <c:pt idx="1">
                   <c:v>0.27</c:v>
@@ -1249,7 +1324,7 @@
                   <c:v>2.12</c:v>
                 </c:pt>
                 <c:pt idx="11">
-                  <c:v>2.45</c:v>
+                  <c:v>2.4500000000000002</c:v>
                 </c:pt>
                 <c:pt idx="12">
                   <c:v>2.63</c:v>
@@ -1276,16 +1351,16 @@
                   <c:v>3.91</c:v>
                 </c:pt>
                 <c:pt idx="20">
-                  <c:v>4.14</c:v>
+                  <c:v>4.1399999999999997</c:v>
                 </c:pt>
                 <c:pt idx="21">
                   <c:v>4.42</c:v>
                 </c:pt>
                 <c:pt idx="22">
-                  <c:v>4.64</c:v>
+                  <c:v>4.6399999999999997</c:v>
                 </c:pt>
                 <c:pt idx="23">
-                  <c:v>4.86</c:v>
+                  <c:v>4.8600000000000003</c:v>
                 </c:pt>
                 <c:pt idx="24">
                   <c:v>5.14</c:v>
@@ -2001,17 +2076,12 @@
               </c:numCache>
             </c:numRef>
           </c:val>
-          <c:spPr>
-            <a:ln w="12700" cap="flat" cmpd="sng">
-              <a:solidFill>
-                <a:srgbClr val="4472C4"/>
-              </a:solidFill>
-            </a:ln>
-          </c:spPr>
-          <c:marker>
-            <c:symbol val="none"/>
-          </c:marker>
           <c:smooth val="0"/>
+          <c:extLst>
+            <c:ext xmlns:c16="http://schemas.microsoft.com/office/drawing/2014/chart" uri="{C3380CC4-5D6E-409C-BE32-E72D297353CC}">
+              <c16:uniqueId val="{00000000-6FCA-4C0E-965C-5F2B72F6A8CA}"/>
+            </c:ext>
+          </c:extLst>
         </c:ser>
         <c:ser>
           <c:idx val="1"/>
@@ -2027,6 +2097,16 @@
               </c:strCache>
             </c:strRef>
           </c:tx>
+          <c:spPr>
+            <a:ln w="12700" cap="flat" cmpd="sng">
+              <a:solidFill>
+                <a:srgbClr val="C0504D"/>
+              </a:solidFill>
+            </a:ln>
+          </c:spPr>
+          <c:marker>
+            <c:symbol val="none"/>
+          </c:marker>
           <c:cat>
             <c:strRef>
               <c:f>Sheet1!$A$2:$A$262</c:f>
@@ -2825,7 +2905,7 @@
                 <c:formatCode>0.00"%"</c:formatCode>
                 <c:ptCount val="261"/>
                 <c:pt idx="0">
-                  <c:v>0.0</c:v>
+                  <c:v>0</c:v>
                 </c:pt>
                 <c:pt idx="1">
                   <c:v>0.27</c:v>
@@ -2858,10 +2938,10 @@
                   <c:v>1.97</c:v>
                 </c:pt>
                 <c:pt idx="11">
-                  <c:v>2.24</c:v>
+                  <c:v>2.2400000000000002</c:v>
                 </c:pt>
                 <c:pt idx="12">
-                  <c:v>2.49</c:v>
+                  <c:v>2.4900000000000002</c:v>
                 </c:pt>
                 <c:pt idx="13">
                   <c:v>2.81</c:v>
@@ -2888,7 +2968,7 @@
                   <c:v>3.99</c:v>
                 </c:pt>
                 <c:pt idx="21">
-                  <c:v>4.27</c:v>
+                  <c:v>4.2699999999999996</c:v>
                 </c:pt>
                 <c:pt idx="22">
                   <c:v>4.49</c:v>
@@ -3610,19 +3690,21 @@
               </c:numCache>
             </c:numRef>
           </c:val>
-          <c:spPr>
-            <a:ln w="12700" cap="flat" cmpd="sng">
-              <a:solidFill>
-                <a:srgbClr val="C0504D"/>
-              </a:solidFill>
-            </a:ln>
-          </c:spPr>
-          <c:marker>
-            <c:symbol val="none"/>
-          </c:marker>
           <c:smooth val="0"/>
+          <c:extLst>
+            <c:ext xmlns:c16="http://schemas.microsoft.com/office/drawing/2014/chart" uri="{C3380CC4-5D6E-409C-BE32-E72D297353CC}">
+              <c16:uniqueId val="{00000001-6FCA-4C0E-965C-5F2B72F6A8CA}"/>
+            </c:ext>
+          </c:extLst>
         </c:ser>
-        <c:marker val="0"/>
+        <c:dLbls>
+          <c:showLegendKey val="0"/>
+          <c:showVal val="0"/>
+          <c:showCatName val="0"/>
+          <c:showSerName val="0"/>
+          <c:showPercent val="0"/>
+          <c:showBubbleSize val="0"/>
+        </c:dLbls>
         <c:smooth val="0"/>
         <c:axId val="2118791784"/>
         <c:axId val="2140495176"/>
@@ -3634,6 +3716,7 @@
         </c:scaling>
         <c:delete val="0"/>
         <c:axPos val="b"/>
+        <c:numFmt formatCode="General" sourceLinked="0"/>
         <c:majorTickMark val="out"/>
         <c:minorTickMark val="none"/>
         <c:tickLblPos val="nextTo"/>
@@ -3644,20 +3727,22 @@
             <a:pPr>
               <a:defRPr sz="800"/>
             </a:pPr>
-            <a:endParaRPr/>
+            <a:endParaRPr lang="zh-CN"/>
           </a:p>
         </c:txPr>
         <c:crossAx val="2140495176"/>
         <c:crosses val="autoZero"/>
-        <c:auto val="false"/>
+        <c:auto val="0"/>
         <c:lblAlgn val="ctr"/>
         <c:lblOffset val="100"/>
-        <c:noMultiLvlLbl val="true"/>
         <c:tickLblSkip val="22"/>
+        <c:noMultiLvlLbl val="1"/>
       </c:catAx>
       <c:valAx>
         <c:axId val="2140495176"/>
-        <c:scaling/>
+        <c:scaling>
+          <c:orientation val="minMax"/>
+        </c:scaling>
         <c:delete val="0"/>
         <c:axPos val="l"/>
         <c:majorGridlines>
@@ -3672,17 +3757,17 @@
             </a:ln>
           </c:spPr>
         </c:majorGridlines>
-        <c:numFmt formatCode="0.00&quot;%&quot;" sourceLinked="false"/>
+        <c:numFmt formatCode="0.00&quot;%&quot;" sourceLinked="0"/>
         <c:majorTickMark val="out"/>
         <c:minorTickMark val="none"/>
         <c:tickLblPos val="nextTo"/>
         <c:crossAx val="2118791784"/>
         <c:crosses val="autoZero"/>
+        <c:crossBetween val="between"/>
       </c:valAx>
     </c:plotArea>
     <c:legend>
       <c:legendPos val="b"/>
-      <c:layout/>
       <c:overlay val="0"/>
     </c:legend>
     <c:plotVisOnly val="1"/>
@@ -3696,7 +3781,7 @@
       <a:pPr>
         <a:defRPr sz="1800"/>
       </a:pPr>
-      <a:endParaRPr lang="en-US"/>
+      <a:endParaRPr lang="zh-CN"/>
     </a:p>
   </c:txPr>
   <c:externalData r:id="rId1">
@@ -3743,10 +3828,9 @@
           <a:lstStyle/>
           <a:p>
             <a:r>
-              <a:rPr lang="en-US" smtClean="0"/>
+              <a:rPr lang="en-US"/>
               <a:t>Click to edit Master title style</a:t>
             </a:r>
-            <a:endParaRPr lang="en-US"/>
           </a:p>
         </p:txBody>
       </p:sp>
@@ -3862,10 +3946,9 @@
           </a:lstStyle>
           <a:p>
             <a:r>
-              <a:rPr lang="en-US" smtClean="0"/>
+              <a:rPr lang="en-US"/>
               <a:t>Click to edit Master subtitle style</a:t>
             </a:r>
-            <a:endParaRPr lang="en-US"/>
           </a:p>
         </p:txBody>
       </p:sp>
@@ -3886,7 +3969,7 @@
           <a:p>
             <a:fld id="{5BCAD085-E8A6-8845-BD4E-CB4CCA059FC4}" type="datetimeFigureOut">
               <a:rPr lang="en-US" smtClean="0"/>
-              <a:t>1/27/13</a:t>
+              <a:t>5/21/2026</a:t>
             </a:fld>
             <a:endParaRPr lang="en-US"/>
           </a:p>
@@ -3980,10 +4063,9 @@
           <a:lstStyle/>
           <a:p>
             <a:r>
-              <a:rPr lang="en-US" smtClean="0"/>
+              <a:rPr lang="en-US"/>
               <a:t>Click to edit Master title style</a:t>
             </a:r>
-            <a:endParaRPr lang="en-US"/>
           </a:p>
         </p:txBody>
       </p:sp>
@@ -4004,38 +4086,37 @@
           <a:p>
             <a:pPr lvl="0"/>
             <a:r>
-              <a:rPr lang="en-US" smtClean="0"/>
+              <a:rPr lang="en-US"/>
               <a:t>Click to edit Master text styles</a:t>
             </a:r>
           </a:p>
           <a:p>
             <a:pPr lvl="1"/>
             <a:r>
-              <a:rPr lang="en-US" smtClean="0"/>
+              <a:rPr lang="en-US"/>
               <a:t>Second level</a:t>
             </a:r>
           </a:p>
           <a:p>
             <a:pPr lvl="2"/>
             <a:r>
-              <a:rPr lang="en-US" smtClean="0"/>
+              <a:rPr lang="en-US"/>
               <a:t>Third level</a:t>
             </a:r>
           </a:p>
           <a:p>
             <a:pPr lvl="3"/>
             <a:r>
-              <a:rPr lang="en-US" smtClean="0"/>
+              <a:rPr lang="en-US"/>
               <a:t>Fourth level</a:t>
             </a:r>
           </a:p>
           <a:p>
             <a:pPr lvl="4"/>
             <a:r>
-              <a:rPr lang="en-US" smtClean="0"/>
+              <a:rPr lang="en-US"/>
               <a:t>Fifth level</a:t>
             </a:r>
-            <a:endParaRPr lang="en-US"/>
           </a:p>
         </p:txBody>
       </p:sp>
@@ -4056,7 +4137,7 @@
           <a:p>
             <a:fld id="{5BCAD085-E8A6-8845-BD4E-CB4CCA059FC4}" type="datetimeFigureOut">
               <a:rPr lang="en-US" smtClean="0"/>
-              <a:t>1/27/13</a:t>
+              <a:t>5/21/2026</a:t>
             </a:fld>
             <a:endParaRPr lang="en-US"/>
           </a:p>
@@ -4155,10 +4236,9 @@
           <a:lstStyle/>
           <a:p>
             <a:r>
-              <a:rPr lang="en-US" smtClean="0"/>
+              <a:rPr lang="en-US"/>
               <a:t>Click to edit Master title style</a:t>
             </a:r>
-            <a:endParaRPr lang="en-US"/>
           </a:p>
         </p:txBody>
       </p:sp>
@@ -4184,38 +4264,37 @@
           <a:p>
             <a:pPr lvl="0"/>
             <a:r>
-              <a:rPr lang="en-US" smtClean="0"/>
+              <a:rPr lang="en-US"/>
               <a:t>Click to edit Master text styles</a:t>
             </a:r>
           </a:p>
           <a:p>
             <a:pPr lvl="1"/>
             <a:r>
-              <a:rPr lang="en-US" smtClean="0"/>
+              <a:rPr lang="en-US"/>
               <a:t>Second level</a:t>
             </a:r>
           </a:p>
           <a:p>
             <a:pPr lvl="2"/>
             <a:r>
-              <a:rPr lang="en-US" smtClean="0"/>
+              <a:rPr lang="en-US"/>
               <a:t>Third level</a:t>
             </a:r>
           </a:p>
           <a:p>
             <a:pPr lvl="3"/>
             <a:r>
-              <a:rPr lang="en-US" smtClean="0"/>
+              <a:rPr lang="en-US"/>
               <a:t>Fourth level</a:t>
             </a:r>
           </a:p>
           <a:p>
             <a:pPr lvl="4"/>
             <a:r>
-              <a:rPr lang="en-US" smtClean="0"/>
+              <a:rPr lang="en-US"/>
               <a:t>Fifth level</a:t>
             </a:r>
-            <a:endParaRPr lang="en-US"/>
           </a:p>
         </p:txBody>
       </p:sp>
@@ -4236,7 +4315,7 @@
           <a:p>
             <a:fld id="{5BCAD085-E8A6-8845-BD4E-CB4CCA059FC4}" type="datetimeFigureOut">
               <a:rPr lang="en-US" smtClean="0"/>
-              <a:t>1/27/13</a:t>
+              <a:t>5/21/2026</a:t>
             </a:fld>
             <a:endParaRPr lang="en-US"/>
           </a:p>
@@ -4330,10 +4409,9 @@
           <a:lstStyle/>
           <a:p>
             <a:r>
-              <a:rPr lang="en-US" smtClean="0"/>
+              <a:rPr lang="en-US"/>
               <a:t>Click to edit Master title style</a:t>
             </a:r>
-            <a:endParaRPr lang="en-US"/>
           </a:p>
         </p:txBody>
       </p:sp>
@@ -4354,38 +4432,37 @@
           <a:p>
             <a:pPr lvl="0"/>
             <a:r>
-              <a:rPr lang="en-US" smtClean="0"/>
+              <a:rPr lang="en-US"/>
               <a:t>Click to edit Master text styles</a:t>
             </a:r>
           </a:p>
           <a:p>
             <a:pPr lvl="1"/>
             <a:r>
-              <a:rPr lang="en-US" smtClean="0"/>
+              <a:rPr lang="en-US"/>
               <a:t>Second level</a:t>
             </a:r>
           </a:p>
           <a:p>
             <a:pPr lvl="2"/>
             <a:r>
-              <a:rPr lang="en-US" smtClean="0"/>
+              <a:rPr lang="en-US"/>
               <a:t>Third level</a:t>
             </a:r>
           </a:p>
           <a:p>
             <a:pPr lvl="3"/>
             <a:r>
-              <a:rPr lang="en-US" smtClean="0"/>
+              <a:rPr lang="en-US"/>
               <a:t>Fourth level</a:t>
             </a:r>
           </a:p>
           <a:p>
             <a:pPr lvl="4"/>
             <a:r>
-              <a:rPr lang="en-US" smtClean="0"/>
+              <a:rPr lang="en-US"/>
               <a:t>Fifth level</a:t>
             </a:r>
-            <a:endParaRPr lang="en-US"/>
           </a:p>
         </p:txBody>
       </p:sp>
@@ -4406,7 +4483,7 @@
           <a:p>
             <a:fld id="{5BCAD085-E8A6-8845-BD4E-CB4CCA059FC4}" type="datetimeFigureOut">
               <a:rPr lang="en-US" smtClean="0"/>
-              <a:t>1/27/13</a:t>
+              <a:t>5/21/2026</a:t>
             </a:fld>
             <a:endParaRPr lang="en-US"/>
           </a:p>
@@ -4509,10 +4586,9 @@
           </a:lstStyle>
           <a:p>
             <a:r>
-              <a:rPr lang="en-US" smtClean="0"/>
+              <a:rPr lang="en-US"/>
               <a:t>Click to edit Master title style</a:t>
             </a:r>
-            <a:endParaRPr lang="en-US"/>
           </a:p>
         </p:txBody>
       </p:sp>
@@ -4629,7 +4705,7 @@
           <a:p>
             <a:pPr lvl="0"/>
             <a:r>
-              <a:rPr lang="en-US" smtClean="0"/>
+              <a:rPr lang="en-US"/>
               <a:t>Click to edit Master text styles</a:t>
             </a:r>
           </a:p>
@@ -4652,7 +4728,7 @@
           <a:p>
             <a:fld id="{5BCAD085-E8A6-8845-BD4E-CB4CCA059FC4}" type="datetimeFigureOut">
               <a:rPr lang="en-US" smtClean="0"/>
-              <a:t>1/27/13</a:t>
+              <a:t>5/21/2026</a:t>
             </a:fld>
             <a:endParaRPr lang="en-US"/>
           </a:p>
@@ -4746,10 +4822,9 @@
           <a:lstStyle/>
           <a:p>
             <a:r>
-              <a:rPr lang="en-US" smtClean="0"/>
+              <a:rPr lang="en-US"/>
               <a:t>Click to edit Master title style</a:t>
             </a:r>
-            <a:endParaRPr lang="en-US"/>
           </a:p>
         </p:txBody>
       </p:sp>
@@ -4803,38 +4878,37 @@
           <a:p>
             <a:pPr lvl="0"/>
             <a:r>
-              <a:rPr lang="en-US" smtClean="0"/>
+              <a:rPr lang="en-US"/>
               <a:t>Click to edit Master text styles</a:t>
             </a:r>
           </a:p>
           <a:p>
             <a:pPr lvl="1"/>
             <a:r>
-              <a:rPr lang="en-US" smtClean="0"/>
+              <a:rPr lang="en-US"/>
               <a:t>Second level</a:t>
             </a:r>
           </a:p>
           <a:p>
             <a:pPr lvl="2"/>
             <a:r>
-              <a:rPr lang="en-US" smtClean="0"/>
+              <a:rPr lang="en-US"/>
               <a:t>Third level</a:t>
             </a:r>
           </a:p>
           <a:p>
             <a:pPr lvl="3"/>
             <a:r>
-              <a:rPr lang="en-US" smtClean="0"/>
+              <a:rPr lang="en-US"/>
               <a:t>Fourth level</a:t>
             </a:r>
           </a:p>
           <a:p>
             <a:pPr lvl="4"/>
             <a:r>
-              <a:rPr lang="en-US" smtClean="0"/>
+              <a:rPr lang="en-US"/>
               <a:t>Fifth level</a:t>
             </a:r>
-            <a:endParaRPr lang="en-US"/>
           </a:p>
         </p:txBody>
       </p:sp>
@@ -4888,38 +4962,37 @@
           <a:p>
             <a:pPr lvl="0"/>
             <a:r>
-              <a:rPr lang="en-US" smtClean="0"/>
+              <a:rPr lang="en-US"/>
               <a:t>Click to edit Master text styles</a:t>
             </a:r>
           </a:p>
           <a:p>
             <a:pPr lvl="1"/>
             <a:r>
-              <a:rPr lang="en-US" smtClean="0"/>
+              <a:rPr lang="en-US"/>
               <a:t>Second level</a:t>
             </a:r>
           </a:p>
           <a:p>
             <a:pPr lvl="2"/>
             <a:r>
-              <a:rPr lang="en-US" smtClean="0"/>
+              <a:rPr lang="en-US"/>
               <a:t>Third level</a:t>
             </a:r>
           </a:p>
           <a:p>
             <a:pPr lvl="3"/>
             <a:r>
-              <a:rPr lang="en-US" smtClean="0"/>
+              <a:rPr lang="en-US"/>
               <a:t>Fourth level</a:t>
             </a:r>
           </a:p>
           <a:p>
             <a:pPr lvl="4"/>
             <a:r>
-              <a:rPr lang="en-US" smtClean="0"/>
+              <a:rPr lang="en-US"/>
               <a:t>Fifth level</a:t>
             </a:r>
-            <a:endParaRPr lang="en-US"/>
           </a:p>
         </p:txBody>
       </p:sp>
@@ -4940,7 +5013,7 @@
           <a:p>
             <a:fld id="{5BCAD085-E8A6-8845-BD4E-CB4CCA059FC4}" type="datetimeFigureOut">
               <a:rPr lang="en-US" smtClean="0"/>
-              <a:t>1/27/13</a:t>
+              <a:t>5/21/2026</a:t>
             </a:fld>
             <a:endParaRPr lang="en-US"/>
           </a:p>
@@ -5038,10 +5111,9 @@
           </a:lstStyle>
           <a:p>
             <a:r>
-              <a:rPr lang="en-US" smtClean="0"/>
+              <a:rPr lang="en-US"/>
               <a:t>Click to edit Master title style</a:t>
             </a:r>
-            <a:endParaRPr lang="en-US"/>
           </a:p>
         </p:txBody>
       </p:sp>
@@ -5104,7 +5176,7 @@
           <a:p>
             <a:pPr lvl="0"/>
             <a:r>
-              <a:rPr lang="en-US" smtClean="0"/>
+              <a:rPr lang="en-US"/>
               <a:t>Click to edit Master text styles</a:t>
             </a:r>
           </a:p>
@@ -5160,38 +5232,37 @@
           <a:p>
             <a:pPr lvl="0"/>
             <a:r>
-              <a:rPr lang="en-US" smtClean="0"/>
+              <a:rPr lang="en-US"/>
               <a:t>Click to edit Master text styles</a:t>
             </a:r>
           </a:p>
           <a:p>
             <a:pPr lvl="1"/>
             <a:r>
-              <a:rPr lang="en-US" smtClean="0"/>
+              <a:rPr lang="en-US"/>
               <a:t>Second level</a:t>
             </a:r>
           </a:p>
           <a:p>
             <a:pPr lvl="2"/>
             <a:r>
-              <a:rPr lang="en-US" smtClean="0"/>
+              <a:rPr lang="en-US"/>
               <a:t>Third level</a:t>
             </a:r>
           </a:p>
           <a:p>
             <a:pPr lvl="3"/>
             <a:r>
-              <a:rPr lang="en-US" smtClean="0"/>
+              <a:rPr lang="en-US"/>
               <a:t>Fourth level</a:t>
             </a:r>
           </a:p>
           <a:p>
             <a:pPr lvl="4"/>
             <a:r>
-              <a:rPr lang="en-US" smtClean="0"/>
+              <a:rPr lang="en-US"/>
               <a:t>Fifth level</a:t>
             </a:r>
-            <a:endParaRPr lang="en-US"/>
           </a:p>
         </p:txBody>
       </p:sp>
@@ -5254,7 +5325,7 @@
           <a:p>
             <a:pPr lvl="0"/>
             <a:r>
-              <a:rPr lang="en-US" smtClean="0"/>
+              <a:rPr lang="en-US"/>
               <a:t>Click to edit Master text styles</a:t>
             </a:r>
           </a:p>
@@ -5310,38 +5381,37 @@
           <a:p>
             <a:pPr lvl="0"/>
             <a:r>
-              <a:rPr lang="en-US" smtClean="0"/>
+              <a:rPr lang="en-US"/>
               <a:t>Click to edit Master text styles</a:t>
             </a:r>
           </a:p>
           <a:p>
             <a:pPr lvl="1"/>
             <a:r>
-              <a:rPr lang="en-US" smtClean="0"/>
+              <a:rPr lang="en-US"/>
               <a:t>Second level</a:t>
             </a:r>
           </a:p>
           <a:p>
             <a:pPr lvl="2"/>
             <a:r>
-              <a:rPr lang="en-US" smtClean="0"/>
+              <a:rPr lang="en-US"/>
               <a:t>Third level</a:t>
             </a:r>
           </a:p>
           <a:p>
             <a:pPr lvl="3"/>
             <a:r>
-              <a:rPr lang="en-US" smtClean="0"/>
+              <a:rPr lang="en-US"/>
               <a:t>Fourth level</a:t>
             </a:r>
           </a:p>
           <a:p>
             <a:pPr lvl="4"/>
             <a:r>
-              <a:rPr lang="en-US" smtClean="0"/>
+              <a:rPr lang="en-US"/>
               <a:t>Fifth level</a:t>
             </a:r>
-            <a:endParaRPr lang="en-US"/>
           </a:p>
         </p:txBody>
       </p:sp>
@@ -5362,7 +5432,7 @@
           <a:p>
             <a:fld id="{5BCAD085-E8A6-8845-BD4E-CB4CCA059FC4}" type="datetimeFigureOut">
               <a:rPr lang="en-US" smtClean="0"/>
-              <a:t>1/27/13</a:t>
+              <a:t>5/21/2026</a:t>
             </a:fld>
             <a:endParaRPr lang="en-US"/>
           </a:p>
@@ -5456,10 +5526,9 @@
           <a:lstStyle/>
           <a:p>
             <a:r>
-              <a:rPr lang="en-US" smtClean="0"/>
+              <a:rPr lang="en-US"/>
               <a:t>Click to edit Master title style</a:t>
             </a:r>
-            <a:endParaRPr lang="en-US"/>
           </a:p>
         </p:txBody>
       </p:sp>
@@ -5480,7 +5549,7 @@
           <a:p>
             <a:fld id="{5BCAD085-E8A6-8845-BD4E-CB4CCA059FC4}" type="datetimeFigureOut">
               <a:rPr lang="en-US" smtClean="0"/>
-              <a:t>1/27/13</a:t>
+              <a:t>5/21/2026</a:t>
             </a:fld>
             <a:endParaRPr lang="en-US"/>
           </a:p>
@@ -5575,7 +5644,7 @@
           <a:p>
             <a:fld id="{5BCAD085-E8A6-8845-BD4E-CB4CCA059FC4}" type="datetimeFigureOut">
               <a:rPr lang="en-US" smtClean="0"/>
-              <a:t>1/27/13</a:t>
+              <a:t>5/21/2026</a:t>
             </a:fld>
             <a:endParaRPr lang="en-US"/>
           </a:p>
@@ -5678,10 +5747,9 @@
           </a:lstStyle>
           <a:p>
             <a:r>
-              <a:rPr lang="en-US" smtClean="0"/>
+              <a:rPr lang="en-US"/>
               <a:t>Click to edit Master title style</a:t>
             </a:r>
-            <a:endParaRPr lang="en-US"/>
           </a:p>
         </p:txBody>
       </p:sp>
@@ -5735,38 +5803,37 @@
           <a:p>
             <a:pPr lvl="0"/>
             <a:r>
-              <a:rPr lang="en-US" smtClean="0"/>
+              <a:rPr lang="en-US"/>
               <a:t>Click to edit Master text styles</a:t>
             </a:r>
           </a:p>
           <a:p>
             <a:pPr lvl="1"/>
             <a:r>
-              <a:rPr lang="en-US" smtClean="0"/>
+              <a:rPr lang="en-US"/>
               <a:t>Second level</a:t>
             </a:r>
           </a:p>
           <a:p>
             <a:pPr lvl="2"/>
             <a:r>
-              <a:rPr lang="en-US" smtClean="0"/>
+              <a:rPr lang="en-US"/>
               <a:t>Third level</a:t>
             </a:r>
           </a:p>
           <a:p>
             <a:pPr lvl="3"/>
             <a:r>
-              <a:rPr lang="en-US" smtClean="0"/>
+              <a:rPr lang="en-US"/>
               <a:t>Fourth level</a:t>
             </a:r>
           </a:p>
           <a:p>
             <a:pPr lvl="4"/>
             <a:r>
-              <a:rPr lang="en-US" smtClean="0"/>
+              <a:rPr lang="en-US"/>
               <a:t>Fifth level</a:t>
             </a:r>
-            <a:endParaRPr lang="en-US"/>
           </a:p>
         </p:txBody>
       </p:sp>
@@ -5829,7 +5896,7 @@
           <a:p>
             <a:pPr lvl="0"/>
             <a:r>
-              <a:rPr lang="en-US" smtClean="0"/>
+              <a:rPr lang="en-US"/>
               <a:t>Click to edit Master text styles</a:t>
             </a:r>
           </a:p>
@@ -5852,7 +5919,7 @@
           <a:p>
             <a:fld id="{5BCAD085-E8A6-8845-BD4E-CB4CCA059FC4}" type="datetimeFigureOut">
               <a:rPr lang="en-US" smtClean="0"/>
-              <a:t>1/27/13</a:t>
+              <a:t>5/21/2026</a:t>
             </a:fld>
             <a:endParaRPr lang="en-US"/>
           </a:p>
@@ -5955,10 +6022,9 @@
           </a:lstStyle>
           <a:p>
             <a:r>
-              <a:rPr lang="en-US" smtClean="0"/>
+              <a:rPr lang="en-US"/>
               <a:t>Click to edit Master title style</a:t>
             </a:r>
-            <a:endParaRPr lang="en-US"/>
           </a:p>
         </p:txBody>
       </p:sp>
@@ -6082,7 +6148,7 @@
           <a:p>
             <a:pPr lvl="0"/>
             <a:r>
-              <a:rPr lang="en-US" smtClean="0"/>
+              <a:rPr lang="en-US"/>
               <a:t>Click to edit Master text styles</a:t>
             </a:r>
           </a:p>
@@ -6105,7 +6171,7 @@
           <a:p>
             <a:fld id="{5BCAD085-E8A6-8845-BD4E-CB4CCA059FC4}" type="datetimeFigureOut">
               <a:rPr lang="en-US" smtClean="0"/>
-              <a:t>1/27/13</a:t>
+              <a:t>5/21/2026</a:t>
             </a:fld>
             <a:endParaRPr lang="en-US"/>
           </a:p>
@@ -6214,10 +6280,9 @@
           <a:lstStyle/>
           <a:p>
             <a:r>
-              <a:rPr lang="en-US" smtClean="0"/>
+              <a:rPr lang="en-US"/>
               <a:t>Click to edit Master title style</a:t>
             </a:r>
-            <a:endParaRPr lang="en-US"/>
           </a:p>
         </p:txBody>
       </p:sp>
@@ -6248,38 +6313,37 @@
           <a:p>
             <a:pPr lvl="0"/>
             <a:r>
-              <a:rPr lang="en-US" smtClean="0"/>
+              <a:rPr lang="en-US"/>
               <a:t>Click to edit Master text styles</a:t>
             </a:r>
           </a:p>
           <a:p>
             <a:pPr lvl="1"/>
             <a:r>
-              <a:rPr lang="en-US" smtClean="0"/>
+              <a:rPr lang="en-US"/>
               <a:t>Second level</a:t>
             </a:r>
           </a:p>
           <a:p>
             <a:pPr lvl="2"/>
             <a:r>
-              <a:rPr lang="en-US" smtClean="0"/>
+              <a:rPr lang="en-US"/>
               <a:t>Third level</a:t>
             </a:r>
           </a:p>
           <a:p>
             <a:pPr lvl="3"/>
             <a:r>
-              <a:rPr lang="en-US" smtClean="0"/>
+              <a:rPr lang="en-US"/>
               <a:t>Fourth level</a:t>
             </a:r>
           </a:p>
           <a:p>
             <a:pPr lvl="4"/>
             <a:r>
-              <a:rPr lang="en-US" smtClean="0"/>
+              <a:rPr lang="en-US"/>
               <a:t>Fifth level</a:t>
             </a:r>
-            <a:endParaRPr lang="en-US"/>
           </a:p>
         </p:txBody>
       </p:sp>
@@ -6318,7 +6382,7 @@
           <a:p>
             <a:fld id="{5BCAD085-E8A6-8845-BD4E-CB4CCA059FC4}" type="datetimeFigureOut">
               <a:rPr lang="en-US" smtClean="0"/>
-              <a:t>1/27/13</a:t>
+              <a:t>5/21/2026</a:t>
             </a:fld>
             <a:endParaRPr lang="en-US"/>
           </a:p>
@@ -6677,7 +6741,7 @@
 </file>
 
 <file path=ppt/slides/slide1.xml><?xml version="1.0" encoding="utf-8"?>
-<p:sld xmlns:a="http://schemas.openxmlformats.org/drawingml/2006/main" xmlns:p="http://schemas.openxmlformats.org/presentationml/2006/main" xmlns:r="http://schemas.openxmlformats.org/officeDocument/2006/relationships">
+<p:sld xmlns:a="http://schemas.openxmlformats.org/drawingml/2006/main" xmlns:r="http://schemas.openxmlformats.org/officeDocument/2006/relationships" xmlns:p="http://schemas.openxmlformats.org/presentationml/2006/main">
   <p:cSld>
     <p:spTree>
       <p:nvGrpSpPr>
@@ -6685,7 +6749,14 @@
         <p:cNvGrpSpPr/>
         <p:nvPr/>
       </p:nvGrpSpPr>
-      <p:grpSpPr/>
+      <p:grpSpPr>
+        <a:xfrm>
+          <a:off x="0" y="0"/>
+          <a:ext cx="0" cy="0"/>
+          <a:chOff x="0" y="0"/>
+          <a:chExt cx="0" cy="0"/>
+        </a:xfrm>
+      </p:grpSpPr>
       <p:sp>
         <p:nvSpPr>
           <p:cNvPr id="2" name="TextBox 1"/>
@@ -6709,7 +6780,7 @@
           <a:lstStyle/>
           <a:p>
             <a:pPr algn="ctr">
-              <a:defRPr b="1" sz="2400">
+              <a:defRPr sz="2400" b="1">
                 <a:solidFill>
                   <a:srgbClr val="1C2833"/>
                 </a:solidFill>
@@ -6745,7 +6816,7 @@
           <a:lstStyle/>
           <a:p>
             <a:pPr>
-              <a:defRPr b="1" sz="1100">
+              <a:defRPr sz="1100" b="1">
                 <a:solidFill>
                   <a:srgbClr val="2E4053"/>
                 </a:solidFill>
@@ -6784,7 +6855,7 @@
               <a:spcAft>
                 <a:spcPts val="400"/>
               </a:spcAft>
-              <a:defRPr b="1" sz="1050">
+              <a:defRPr sz="1050" b="1">
                 <a:solidFill>
                   <a:srgbClr val="292929"/>
                 </a:solidFill>
@@ -6800,7 +6871,7 @@
               <a:spcAft>
                 <a:spcPts val="400"/>
               </a:spcAft>
-              <a:defRPr b="0" sz="1050">
+              <a:defRPr sz="1050" b="0">
                 <a:solidFill>
                   <a:srgbClr val="292929"/>
                 </a:solidFill>
@@ -6816,7 +6887,7 @@
               <a:spcAft>
                 <a:spcPts val="400"/>
               </a:spcAft>
-              <a:defRPr b="0" sz="1050">
+              <a:defRPr sz="1050" b="0">
                 <a:solidFill>
                   <a:srgbClr val="292929"/>
                 </a:solidFill>
@@ -6832,7 +6903,7 @@
               <a:spcAft>
                 <a:spcPts val="400"/>
               </a:spcAft>
-              <a:defRPr b="0" sz="1050">
+              <a:defRPr sz="1050" b="0">
                 <a:solidFill>
                   <a:srgbClr val="292929"/>
                 </a:solidFill>
@@ -6848,7 +6919,7 @@
               <a:spcAft>
                 <a:spcPts val="400"/>
               </a:spcAft>
-              <a:defRPr b="0" sz="1050">
+              <a:defRPr sz="1050" b="0">
                 <a:solidFill>
                   <a:srgbClr val="292929"/>
                 </a:solidFill>
@@ -6864,7 +6935,7 @@
               <a:spcAft>
                 <a:spcPts val="400"/>
               </a:spcAft>
-              <a:defRPr b="0" sz="1050">
+              <a:defRPr sz="1050" b="0">
                 <a:solidFill>
                   <a:srgbClr val="292929"/>
                 </a:solidFill>
@@ -6879,14 +6950,14 @@
       </p:sp>
       <p:sp>
         <p:nvSpPr>
-          <p:cNvPr id="5" name="TextBox 4"/>
+          <p:cNvPr id="7" name="TextBox 6"/>
           <p:cNvSpPr txBox="1"/>
           <p:nvPr/>
         </p:nvSpPr>
         <p:spPr>
           <a:xfrm>
-            <a:off x="411480" y="3383280"/>
-            <a:ext cx="4114800" cy="256032"/>
+            <a:off x="8395178" y="763390"/>
+            <a:ext cx="1720343" cy="261610"/>
           </a:xfrm>
           <a:prstGeom prst="rect">
             <a:avLst/>
@@ -6900,7 +6971,7 @@
           <a:lstStyle/>
           <a:p>
             <a:pPr>
-              <a:defRPr b="1" sz="1100">
+              <a:defRPr sz="1100" b="1">
                 <a:solidFill>
                   <a:srgbClr val="2E4053"/>
                 </a:solidFill>
@@ -6908,415 +6979,12 @@
               </a:defRPr>
             </a:pPr>
             <a:r>
-              <a:t>收益率排名（同类偏股混合）</a:t>
+              <a:rPr lang="zh-CN" altLang="en-US" dirty="0"/>
+              <a:t>大类资产配置情况</a:t>
             </a:r>
-          </a:p>
-        </p:txBody>
-      </p:sp>
-      <p:graphicFrame>
-        <p:nvGraphicFramePr>
-          <p:cNvPr id="6" name="Table 5"/>
-          <p:cNvGraphicFramePr>
-            <a:graphicFrameLocks noGrp="1"/>
-          </p:cNvGraphicFramePr>
-          <p:nvPr/>
-        </p:nvGraphicFramePr>
-        <p:xfrm>
-          <a:off x="411480" y="3630168"/>
-          <a:ext cx="5349240" cy="1234440"/>
-        </p:xfrm>
-        <a:graphic>
-          <a:graphicData uri="http://schemas.openxmlformats.org/drawingml/2006/table">
-            <a:tbl>
-              <a:tblPr bandRow="1" firstRow="1">
-                <a:tableStyleId>{5C22544A-7EE6-4342-B048-85BDC9FD1C3A}</a:tableStyleId>
-              </a:tblPr>
-              <a:tblGrid>
-                <a:gridCol w="1337310"/>
-                <a:gridCol w="1337310"/>
-                <a:gridCol w="1337310"/>
-                <a:gridCol w="1337310"/>
-              </a:tblGrid>
-              <a:tr h="308610">
-                <a:tc>
-                  <a:txBody>
-                    <a:bodyPr/>
-                    <a:lstStyle/>
-                    <a:p>
-                      <a:pPr>
-                        <a:defRPr b="1" sz="950">
-                          <a:solidFill>
-                            <a:srgbClr val="FFFFFF"/>
-                          </a:solidFill>
-                          <a:latin typeface="Arial"/>
-                        </a:defRPr>
-                      </a:pPr>
-                      <a:r>
-                        <a:t>区间</a:t>
-                      </a:r>
-                    </a:p>
-                  </a:txBody>
-                  <a:tcPr>
-                    <a:solidFill>
-                      <a:srgbClr val="2E4053"/>
-                    </a:solidFill>
-                  </a:tcPr>
-                </a:tc>
-                <a:tc>
-                  <a:txBody>
-                    <a:bodyPr/>
-                    <a:lstStyle/>
-                    <a:p>
-                      <a:pPr>
-                        <a:defRPr b="1" sz="950">
-                          <a:solidFill>
-                            <a:srgbClr val="FFFFFF"/>
-                          </a:solidFill>
-                          <a:latin typeface="Arial"/>
-                        </a:defRPr>
-                      </a:pPr>
-                      <a:r>
-                        <a:t>收益率</a:t>
-                      </a:r>
-                    </a:p>
-                  </a:txBody>
-                  <a:tcPr>
-                    <a:solidFill>
-                      <a:srgbClr val="2E4053"/>
-                    </a:solidFill>
-                  </a:tcPr>
-                </a:tc>
-                <a:tc>
-                  <a:txBody>
-                    <a:bodyPr/>
-                    <a:lstStyle/>
-                    <a:p>
-                      <a:pPr>
-                        <a:defRPr b="1" sz="950">
-                          <a:solidFill>
-                            <a:srgbClr val="FFFFFF"/>
-                          </a:solidFill>
-                          <a:latin typeface="Arial"/>
-                        </a:defRPr>
-                      </a:pPr>
-                      <a:r>
-                        <a:t>同类排名</a:t>
-                      </a:r>
-                    </a:p>
-                  </a:txBody>
-                  <a:tcPr>
-                    <a:solidFill>
-                      <a:srgbClr val="2E4053"/>
-                    </a:solidFill>
-                  </a:tcPr>
-                </a:tc>
-                <a:tc>
-                  <a:txBody>
-                    <a:bodyPr/>
-                    <a:lstStyle/>
-                    <a:p>
-                      <a:pPr>
-                        <a:defRPr b="1" sz="950">
-                          <a:solidFill>
-                            <a:srgbClr val="FFFFFF"/>
-                          </a:solidFill>
-                          <a:latin typeface="Arial"/>
-                        </a:defRPr>
-                      </a:pPr>
-                      <a:r>
-                        <a:t>分位数</a:t>
-                      </a:r>
-                    </a:p>
-                  </a:txBody>
-                  <a:tcPr>
-                    <a:solidFill>
-                      <a:srgbClr val="2E4053"/>
-                    </a:solidFill>
-                  </a:tcPr>
-                </a:tc>
-              </a:tr>
-              <a:tr h="308610">
-                <a:tc>
-                  <a:txBody>
-                    <a:bodyPr/>
-                    <a:lstStyle/>
-                    <a:p>
-                      <a:pPr>
-                        <a:defRPr sz="950">
-                          <a:solidFill>
-                            <a:srgbClr val="292929"/>
-                          </a:solidFill>
-                          <a:latin typeface="Arial"/>
-                        </a:defRPr>
-                      </a:pPr>
-                      <a:r>
-                        <a:t>近一年</a:t>
-                      </a:r>
-                    </a:p>
-                  </a:txBody>
-                  <a:tcPr/>
-                </a:tc>
-                <a:tc>
-                  <a:txBody>
-                    <a:bodyPr/>
-                    <a:lstStyle/>
-                    <a:p>
-                      <a:pPr>
-                        <a:defRPr sz="950">
-                          <a:solidFill>
-                            <a:srgbClr val="292929"/>
-                          </a:solidFill>
-                          <a:latin typeface="Arial"/>
-                        </a:defRPr>
-                      </a:pPr>
-                      <a:r>
-                        <a:t>+12.8%</a:t>
-                      </a:r>
-                    </a:p>
-                  </a:txBody>
-                  <a:tcPr/>
-                </a:tc>
-                <a:tc>
-                  <a:txBody>
-                    <a:bodyPr/>
-                    <a:lstStyle/>
-                    <a:p>
-                      <a:pPr>
-                        <a:defRPr sz="950">
-                          <a:solidFill>
-                            <a:srgbClr val="292929"/>
-                          </a:solidFill>
-                          <a:latin typeface="Arial"/>
-                        </a:defRPr>
-                      </a:pPr>
-                      <a:r>
-                        <a:t>128 / 856</a:t>
-                      </a:r>
-                    </a:p>
-                  </a:txBody>
-                  <a:tcPr/>
-                </a:tc>
-                <a:tc>
-                  <a:txBody>
-                    <a:bodyPr/>
-                    <a:lstStyle/>
-                    <a:p>
-                      <a:pPr>
-                        <a:defRPr sz="950">
-                          <a:solidFill>
-                            <a:srgbClr val="292929"/>
-                          </a:solidFill>
-                          <a:latin typeface="Arial"/>
-                        </a:defRPr>
-                      </a:pPr>
-                      <a:r>
-                        <a:t>前 15%</a:t>
-                      </a:r>
-                    </a:p>
-                  </a:txBody>
-                  <a:tcPr/>
-                </a:tc>
-              </a:tr>
-              <a:tr h="308610">
-                <a:tc>
-                  <a:txBody>
-                    <a:bodyPr/>
-                    <a:lstStyle/>
-                    <a:p>
-                      <a:pPr>
-                        <a:defRPr sz="950">
-                          <a:solidFill>
-                            <a:srgbClr val="292929"/>
-                          </a:solidFill>
-                          <a:latin typeface="Arial"/>
-                        </a:defRPr>
-                      </a:pPr>
-                      <a:r>
-                        <a:t>近两年</a:t>
-                      </a:r>
-                    </a:p>
-                  </a:txBody>
-                  <a:tcPr/>
-                </a:tc>
-                <a:tc>
-                  <a:txBody>
-                    <a:bodyPr/>
-                    <a:lstStyle/>
-                    <a:p>
-                      <a:pPr>
-                        <a:defRPr sz="950">
-                          <a:solidFill>
-                            <a:srgbClr val="292929"/>
-                          </a:solidFill>
-                          <a:latin typeface="Arial"/>
-                        </a:defRPr>
-                      </a:pPr>
-                      <a:r>
-                        <a:t>+18.6%</a:t>
-                      </a:r>
-                    </a:p>
-                  </a:txBody>
-                  <a:tcPr/>
-                </a:tc>
-                <a:tc>
-                  <a:txBody>
-                    <a:bodyPr/>
-                    <a:lstStyle/>
-                    <a:p>
-                      <a:pPr>
-                        <a:defRPr sz="950">
-                          <a:solidFill>
-                            <a:srgbClr val="292929"/>
-                          </a:solidFill>
-                          <a:latin typeface="Arial"/>
-                        </a:defRPr>
-                      </a:pPr>
-                      <a:r>
-                        <a:t>95 / 812</a:t>
-                      </a:r>
-                    </a:p>
-                  </a:txBody>
-                  <a:tcPr/>
-                </a:tc>
-                <a:tc>
-                  <a:txBody>
-                    <a:bodyPr/>
-                    <a:lstStyle/>
-                    <a:p>
-                      <a:pPr>
-                        <a:defRPr sz="950">
-                          <a:solidFill>
-                            <a:srgbClr val="292929"/>
-                          </a:solidFill>
-                          <a:latin typeface="Arial"/>
-                        </a:defRPr>
-                      </a:pPr>
-                      <a:r>
-                        <a:t>前 12%</a:t>
-                      </a:r>
-                    </a:p>
-                  </a:txBody>
-                  <a:tcPr/>
-                </a:tc>
-              </a:tr>
-              <a:tr h="308610">
-                <a:tc>
-                  <a:txBody>
-                    <a:bodyPr/>
-                    <a:lstStyle/>
-                    <a:p>
-                      <a:pPr>
-                        <a:defRPr sz="950">
-                          <a:solidFill>
-                            <a:srgbClr val="292929"/>
-                          </a:solidFill>
-                          <a:latin typeface="Arial"/>
-                        </a:defRPr>
-                      </a:pPr>
-                      <a:r>
-                        <a:t>近三年</a:t>
-                      </a:r>
-                    </a:p>
-                  </a:txBody>
-                  <a:tcPr/>
-                </a:tc>
-                <a:tc>
-                  <a:txBody>
-                    <a:bodyPr/>
-                    <a:lstStyle/>
-                    <a:p>
-                      <a:pPr>
-                        <a:defRPr sz="950">
-                          <a:solidFill>
-                            <a:srgbClr val="292929"/>
-                          </a:solidFill>
-                          <a:latin typeface="Arial"/>
-                        </a:defRPr>
-                      </a:pPr>
-                      <a:r>
-                        <a:t>+22.4%</a:t>
-                      </a:r>
-                    </a:p>
-                  </a:txBody>
-                  <a:tcPr/>
-                </a:tc>
-                <a:tc>
-                  <a:txBody>
-                    <a:bodyPr/>
-                    <a:lstStyle/>
-                    <a:p>
-                      <a:pPr>
-                        <a:defRPr sz="950">
-                          <a:solidFill>
-                            <a:srgbClr val="292929"/>
-                          </a:solidFill>
-                          <a:latin typeface="Arial"/>
-                        </a:defRPr>
-                      </a:pPr>
-                      <a:r>
-                        <a:t>76 / 698</a:t>
-                      </a:r>
-                    </a:p>
-                  </a:txBody>
-                  <a:tcPr/>
-                </a:tc>
-                <a:tc>
-                  <a:txBody>
-                    <a:bodyPr/>
-                    <a:lstStyle/>
-                    <a:p>
-                      <a:pPr>
-                        <a:defRPr sz="950">
-                          <a:solidFill>
-                            <a:srgbClr val="292929"/>
-                          </a:solidFill>
-                          <a:latin typeface="Arial"/>
-                        </a:defRPr>
-                      </a:pPr>
-                      <a:r>
-                        <a:t>前 11%</a:t>
-                      </a:r>
-                    </a:p>
-                  </a:txBody>
-                  <a:tcPr/>
-                </a:tc>
-              </a:tr>
-            </a:tbl>
-          </a:graphicData>
-        </a:graphic>
-      </p:graphicFrame>
-      <p:sp>
-        <p:nvSpPr>
-          <p:cNvPr id="7" name="TextBox 6"/>
-          <p:cNvSpPr txBox="1"/>
-          <p:nvPr/>
-        </p:nvSpPr>
-        <p:spPr>
-          <a:xfrm>
-            <a:off x="5989320" y="685800"/>
-            <a:ext cx="4114800" cy="256032"/>
-          </a:xfrm>
-          <a:prstGeom prst="rect">
-            <a:avLst/>
-          </a:prstGeom>
-          <a:noFill/>
-        </p:spPr>
-        <p:txBody>
-          <a:bodyPr wrap="none">
-            <a:spAutoFit/>
-          </a:bodyPr>
-          <a:lstStyle/>
-          <a:p>
-            <a:pPr>
-              <a:defRPr b="1" sz="1100">
-                <a:solidFill>
-                  <a:srgbClr val="2E4053"/>
-                </a:solidFill>
-                <a:latin typeface="Arial"/>
-              </a:defRPr>
-            </a:pPr>
             <a:r>
-              <a:t>过去4个季度资产类别配置（%）</a:t>
+              <a:rPr dirty="0"/>
+              <a:t>（%）</a:t>
             </a:r>
           </a:p>
         </p:txBody>
@@ -7335,7 +7003,7 @@
         </p:xfrm>
         <a:graphic>
           <a:graphicData uri="http://schemas.openxmlformats.org/drawingml/2006/chart">
-            <c:chart xmlns:c="http://schemas.openxmlformats.org/drawingml/2006/chart" r:id="rId2"/>
+            <c:chart xmlns:c="http://schemas.openxmlformats.org/drawingml/2006/chart" xmlns:r="http://schemas.openxmlformats.org/officeDocument/2006/relationships" r:id="rId2"/>
           </a:graphicData>
         </a:graphic>
       </p:graphicFrame>
@@ -7353,7 +7021,7 @@
         </p:xfrm>
         <a:graphic>
           <a:graphicData uri="http://schemas.openxmlformats.org/drawingml/2006/chart">
-            <c:chart xmlns:c="http://schemas.openxmlformats.org/drawingml/2006/chart" r:id="rId3"/>
+            <c:chart xmlns:c="http://schemas.openxmlformats.org/drawingml/2006/chart" xmlns:r="http://schemas.openxmlformats.org/officeDocument/2006/relationships" r:id="rId3"/>
           </a:graphicData>
         </a:graphic>
       </p:graphicFrame>
@@ -7393,10 +7061,11 @@
           </a:fontRef>
         </p:style>
         <p:txBody>
-          <a:bodyPr anchor="ctr" rtlCol="0"/>
+          <a:bodyPr rtlCol="0" anchor="ctr"/>
           <a:lstStyle/>
           <a:p>
             <a:pPr algn="ctr"/>
+            <a:endParaRPr/>
           </a:p>
         </p:txBody>
       </p:sp>
@@ -7436,13 +7105,768 @@
           </a:fontRef>
         </p:style>
         <p:txBody>
-          <a:bodyPr anchor="ctr" rtlCol="0"/>
+          <a:bodyPr rtlCol="0" anchor="ctr"/>
           <a:lstStyle/>
           <a:p>
             <a:pPr algn="ctr"/>
+            <a:endParaRPr/>
           </a:p>
         </p:txBody>
       </p:sp>
+      <p:graphicFrame>
+        <p:nvGraphicFramePr>
+          <p:cNvPr id="13" name="Table 12"/>
+          <p:cNvGraphicFramePr>
+            <a:graphicFrameLocks noGrp="1"/>
+          </p:cNvGraphicFramePr>
+          <p:nvPr/>
+        </p:nvGraphicFramePr>
+        <p:xfrm>
+          <a:off x="411480" y="3630168"/>
+          <a:ext cx="5349240" cy="1981200"/>
+        </p:xfrm>
+        <a:graphic>
+          <a:graphicData uri="http://schemas.openxmlformats.org/drawingml/2006/table">
+            <a:tbl>
+              <a:tblPr firstRow="1" bandRow="1">
+                <a:tableStyleId>{5C22544A-7EE6-4342-B048-85BDC9FD1C3A}</a:tableStyleId>
+              </a:tblPr>
+              <a:tblGrid>
+                <a:gridCol w="891540">
+                  <a:extLst>
+                    <a:ext uri="{9D8B030D-6E8A-4147-A177-3AD203B41FA5}">
+                      <a16:colId xmlns:a16="http://schemas.microsoft.com/office/drawing/2014/main" val="20000"/>
+                    </a:ext>
+                  </a:extLst>
+                </a:gridCol>
+                <a:gridCol w="891540">
+                  <a:extLst>
+                    <a:ext uri="{9D8B030D-6E8A-4147-A177-3AD203B41FA5}">
+                      <a16:colId xmlns:a16="http://schemas.microsoft.com/office/drawing/2014/main" val="20001"/>
+                    </a:ext>
+                  </a:extLst>
+                </a:gridCol>
+                <a:gridCol w="891540">
+                  <a:extLst>
+                    <a:ext uri="{9D8B030D-6E8A-4147-A177-3AD203B41FA5}">
+                      <a16:colId xmlns:a16="http://schemas.microsoft.com/office/drawing/2014/main" val="20002"/>
+                    </a:ext>
+                  </a:extLst>
+                </a:gridCol>
+                <a:gridCol w="891540">
+                  <a:extLst>
+                    <a:ext uri="{9D8B030D-6E8A-4147-A177-3AD203B41FA5}">
+                      <a16:colId xmlns:a16="http://schemas.microsoft.com/office/drawing/2014/main" val="20003"/>
+                    </a:ext>
+                  </a:extLst>
+                </a:gridCol>
+                <a:gridCol w="891540">
+                  <a:extLst>
+                    <a:ext uri="{9D8B030D-6E8A-4147-A177-3AD203B41FA5}">
+                      <a16:colId xmlns:a16="http://schemas.microsoft.com/office/drawing/2014/main" val="20004"/>
+                    </a:ext>
+                  </a:extLst>
+                </a:gridCol>
+                <a:gridCol w="891540">
+                  <a:extLst>
+                    <a:ext uri="{9D8B030D-6E8A-4147-A177-3AD203B41FA5}">
+                      <a16:colId xmlns:a16="http://schemas.microsoft.com/office/drawing/2014/main" val="20005"/>
+                    </a:ext>
+                  </a:extLst>
+                </a:gridCol>
+              </a:tblGrid>
+              <a:tr h="176348">
+                <a:tc>
+                  <a:txBody>
+                    <a:bodyPr/>
+                    <a:lstStyle/>
+                    <a:p>
+                      <a:pPr>
+                        <a:defRPr sz="1100" b="1"/>
+                      </a:pPr>
+                      <a:endParaRPr/>
+                    </a:p>
+                  </a:txBody>
+                  <a:tcPr/>
+                </a:tc>
+                <a:tc>
+                  <a:txBody>
+                    <a:bodyPr/>
+                    <a:lstStyle/>
+                    <a:p>
+                      <a:pPr>
+                        <a:defRPr sz="1100" b="1"/>
+                      </a:pPr>
+                      <a:r>
+                        <a:t>2025年</a:t>
+                      </a:r>
+                    </a:p>
+                  </a:txBody>
+                  <a:tcPr/>
+                </a:tc>
+                <a:tc>
+                  <a:txBody>
+                    <a:bodyPr/>
+                    <a:lstStyle/>
+                    <a:p>
+                      <a:pPr>
+                        <a:defRPr sz="1100" b="1"/>
+                      </a:pPr>
+                      <a:r>
+                        <a:t>YTD</a:t>
+                      </a:r>
+                    </a:p>
+                  </a:txBody>
+                  <a:tcPr/>
+                </a:tc>
+                <a:tc>
+                  <a:txBody>
+                    <a:bodyPr/>
+                    <a:lstStyle/>
+                    <a:p>
+                      <a:pPr>
+                        <a:defRPr sz="1100" b="1"/>
+                      </a:pPr>
+                      <a:r>
+                        <a:t>任职以来</a:t>
+                      </a:r>
+                    </a:p>
+                  </a:txBody>
+                  <a:tcPr/>
+                </a:tc>
+                <a:tc>
+                  <a:txBody>
+                    <a:bodyPr/>
+                    <a:lstStyle/>
+                    <a:p>
+                      <a:pPr>
+                        <a:defRPr sz="1100" b="1"/>
+                      </a:pPr>
+                      <a:r>
+                        <a:t>近一年</a:t>
+                      </a:r>
+                    </a:p>
+                  </a:txBody>
+                  <a:tcPr/>
+                </a:tc>
+                <a:tc>
+                  <a:txBody>
+                    <a:bodyPr/>
+                    <a:lstStyle/>
+                    <a:p>
+                      <a:pPr>
+                        <a:defRPr sz="1100" b="1"/>
+                      </a:pPr>
+                      <a:r>
+                        <a:t>近六个月</a:t>
+                      </a:r>
+                    </a:p>
+                  </a:txBody>
+                  <a:tcPr/>
+                </a:tc>
+                <a:extLst>
+                  <a:ext uri="{0D108BD9-81ED-4DB2-BD59-A6C34878D82A}">
+                    <a16:rowId xmlns:a16="http://schemas.microsoft.com/office/drawing/2014/main" val="10000"/>
+                  </a:ext>
+                </a:extLst>
+              </a:tr>
+              <a:tr h="176348">
+                <a:tc>
+                  <a:txBody>
+                    <a:bodyPr/>
+                    <a:lstStyle/>
+                    <a:p>
+                      <a:pPr>
+                        <a:defRPr sz="1100" b="1"/>
+                      </a:pPr>
+                      <a:r>
+                        <a:t>累计收益</a:t>
+                      </a:r>
+                    </a:p>
+                  </a:txBody>
+                  <a:tcPr/>
+                </a:tc>
+                <a:tc>
+                  <a:txBody>
+                    <a:bodyPr/>
+                    <a:lstStyle/>
+                    <a:p>
+                      <a:pPr>
+                        <a:defRPr sz="1100"/>
+                      </a:pPr>
+                      <a:r>
+                        <a:t>15.2%</a:t>
+                      </a:r>
+                    </a:p>
+                  </a:txBody>
+                  <a:tcPr/>
+                </a:tc>
+                <a:tc>
+                  <a:txBody>
+                    <a:bodyPr/>
+                    <a:lstStyle/>
+                    <a:p>
+                      <a:pPr>
+                        <a:defRPr sz="1100"/>
+                      </a:pPr>
+                      <a:r>
+                        <a:t>8.5%</a:t>
+                      </a:r>
+                    </a:p>
+                  </a:txBody>
+                  <a:tcPr/>
+                </a:tc>
+                <a:tc>
+                  <a:txBody>
+                    <a:bodyPr/>
+                    <a:lstStyle/>
+                    <a:p>
+                      <a:pPr>
+                        <a:defRPr sz="1100"/>
+                      </a:pPr>
+                      <a:r>
+                        <a:t>45.8%</a:t>
+                      </a:r>
+                    </a:p>
+                  </a:txBody>
+                  <a:tcPr/>
+                </a:tc>
+                <a:tc>
+                  <a:txBody>
+                    <a:bodyPr/>
+                    <a:lstStyle/>
+                    <a:p>
+                      <a:pPr>
+                        <a:defRPr sz="1100"/>
+                      </a:pPr>
+                      <a:r>
+                        <a:t>12.8%</a:t>
+                      </a:r>
+                    </a:p>
+                  </a:txBody>
+                  <a:tcPr/>
+                </a:tc>
+                <a:tc>
+                  <a:txBody>
+                    <a:bodyPr/>
+                    <a:lstStyle/>
+                    <a:p>
+                      <a:pPr>
+                        <a:defRPr sz="1100"/>
+                      </a:pPr>
+                      <a:r>
+                        <a:t>6.2%</a:t>
+                      </a:r>
+                    </a:p>
+                  </a:txBody>
+                  <a:tcPr/>
+                </a:tc>
+                <a:extLst>
+                  <a:ext uri="{0D108BD9-81ED-4DB2-BD59-A6C34878D82A}">
+                    <a16:rowId xmlns:a16="http://schemas.microsoft.com/office/drawing/2014/main" val="10001"/>
+                  </a:ext>
+                </a:extLst>
+              </a:tr>
+              <a:tr h="176348">
+                <a:tc>
+                  <a:txBody>
+                    <a:bodyPr/>
+                    <a:lstStyle/>
+                    <a:p>
+                      <a:pPr>
+                        <a:defRPr sz="1100" b="1"/>
+                      </a:pPr>
+                      <a:r>
+                        <a:t>年化收益</a:t>
+                      </a:r>
+                    </a:p>
+                  </a:txBody>
+                  <a:tcPr/>
+                </a:tc>
+                <a:tc>
+                  <a:txBody>
+                    <a:bodyPr/>
+                    <a:lstStyle/>
+                    <a:p>
+                      <a:pPr>
+                        <a:defRPr sz="1100"/>
+                      </a:pPr>
+                      <a:r>
+                        <a:t>8.2%</a:t>
+                      </a:r>
+                    </a:p>
+                  </a:txBody>
+                  <a:tcPr/>
+                </a:tc>
+                <a:tc>
+                  <a:txBody>
+                    <a:bodyPr/>
+                    <a:lstStyle/>
+                    <a:p>
+                      <a:pPr>
+                        <a:defRPr sz="1100"/>
+                      </a:pPr>
+                      <a:r>
+                        <a:t>9.1%</a:t>
+                      </a:r>
+                    </a:p>
+                  </a:txBody>
+                  <a:tcPr/>
+                </a:tc>
+                <a:tc>
+                  <a:txBody>
+                    <a:bodyPr/>
+                    <a:lstStyle/>
+                    <a:p>
+                      <a:pPr>
+                        <a:defRPr sz="1100"/>
+                      </a:pPr>
+                      <a:r>
+                        <a:t>12.5%</a:t>
+                      </a:r>
+                    </a:p>
+                  </a:txBody>
+                  <a:tcPr/>
+                </a:tc>
+                <a:tc>
+                  <a:txBody>
+                    <a:bodyPr/>
+                    <a:lstStyle/>
+                    <a:p>
+                      <a:pPr>
+                        <a:defRPr sz="1100"/>
+                      </a:pPr>
+                      <a:r>
+                        <a:t>10.5%</a:t>
+                      </a:r>
+                    </a:p>
+                  </a:txBody>
+                  <a:tcPr/>
+                </a:tc>
+                <a:tc>
+                  <a:txBody>
+                    <a:bodyPr/>
+                    <a:lstStyle/>
+                    <a:p>
+                      <a:pPr>
+                        <a:defRPr sz="1100"/>
+                      </a:pPr>
+                      <a:r>
+                        <a:t>8.8%</a:t>
+                      </a:r>
+                    </a:p>
+                  </a:txBody>
+                  <a:tcPr/>
+                </a:tc>
+                <a:extLst>
+                  <a:ext uri="{0D108BD9-81ED-4DB2-BD59-A6C34878D82A}">
+                    <a16:rowId xmlns:a16="http://schemas.microsoft.com/office/drawing/2014/main" val="10002"/>
+                  </a:ext>
+                </a:extLst>
+              </a:tr>
+              <a:tr h="176348">
+                <a:tc>
+                  <a:txBody>
+                    <a:bodyPr/>
+                    <a:lstStyle/>
+                    <a:p>
+                      <a:pPr>
+                        <a:defRPr sz="1100" b="1"/>
+                      </a:pPr>
+                      <a:r>
+                        <a:rPr dirty="0" err="1">
+                          <a:solidFill>
+                            <a:srgbClr val="FF0000"/>
+                          </a:solidFill>
+                        </a:rPr>
+                        <a:t>收益排名</a:t>
+                      </a:r>
+                      <a:endParaRPr dirty="0">
+                        <a:solidFill>
+                          <a:srgbClr val="FF0000"/>
+                        </a:solidFill>
+                      </a:endParaRPr>
+                    </a:p>
+                  </a:txBody>
+                  <a:tcPr/>
+                </a:tc>
+                <a:tc>
+                  <a:txBody>
+                    <a:bodyPr/>
+                    <a:lstStyle/>
+                    <a:p>
+                      <a:pPr>
+                        <a:defRPr sz="1100"/>
+                      </a:pPr>
+                      <a:r>
+                        <a:t>15/200</a:t>
+                      </a:r>
+                    </a:p>
+                  </a:txBody>
+                  <a:tcPr/>
+                </a:tc>
+                <a:tc>
+                  <a:txBody>
+                    <a:bodyPr/>
+                    <a:lstStyle/>
+                    <a:p>
+                      <a:pPr>
+                        <a:defRPr sz="1100"/>
+                      </a:pPr>
+                      <a:r>
+                        <a:t>32/250</a:t>
+                      </a:r>
+                    </a:p>
+                  </a:txBody>
+                  <a:tcPr/>
+                </a:tc>
+                <a:tc>
+                  <a:txBody>
+                    <a:bodyPr/>
+                    <a:lstStyle/>
+                    <a:p>
+                      <a:pPr>
+                        <a:defRPr sz="1100"/>
+                      </a:pPr>
+                      <a:r>
+                        <a:t>10/200</a:t>
+                      </a:r>
+                    </a:p>
+                  </a:txBody>
+                  <a:tcPr/>
+                </a:tc>
+                <a:tc>
+                  <a:txBody>
+                    <a:bodyPr/>
+                    <a:lstStyle/>
+                    <a:p>
+                      <a:pPr>
+                        <a:defRPr sz="1100"/>
+                      </a:pPr>
+                      <a:r>
+                        <a:t>128/856</a:t>
+                      </a:r>
+                    </a:p>
+                  </a:txBody>
+                  <a:tcPr/>
+                </a:tc>
+                <a:tc>
+                  <a:txBody>
+                    <a:bodyPr/>
+                    <a:lstStyle/>
+                    <a:p>
+                      <a:pPr>
+                        <a:defRPr sz="1100"/>
+                      </a:pPr>
+                      <a:r>
+                        <a:t>45/400</a:t>
+                      </a:r>
+                    </a:p>
+                  </a:txBody>
+                  <a:tcPr/>
+                </a:tc>
+                <a:extLst>
+                  <a:ext uri="{0D108BD9-81ED-4DB2-BD59-A6C34878D82A}">
+                    <a16:rowId xmlns:a16="http://schemas.microsoft.com/office/drawing/2014/main" val="10003"/>
+                  </a:ext>
+                </a:extLst>
+              </a:tr>
+              <a:tr h="176348">
+                <a:tc>
+                  <a:txBody>
+                    <a:bodyPr/>
+                    <a:lstStyle/>
+                    <a:p>
+                      <a:pPr>
+                        <a:defRPr sz="1100" b="1"/>
+                      </a:pPr>
+                      <a:r>
+                        <a:t>二级债基指数（年化）</a:t>
+                      </a:r>
+                    </a:p>
+                  </a:txBody>
+                  <a:tcPr/>
+                </a:tc>
+                <a:tc>
+                  <a:txBody>
+                    <a:bodyPr/>
+                    <a:lstStyle/>
+                    <a:p>
+                      <a:pPr>
+                        <a:defRPr sz="1100"/>
+                      </a:pPr>
+                      <a:r>
+                        <a:t>6.5%</a:t>
+                      </a:r>
+                    </a:p>
+                  </a:txBody>
+                  <a:tcPr/>
+                </a:tc>
+                <a:tc>
+                  <a:txBody>
+                    <a:bodyPr/>
+                    <a:lstStyle/>
+                    <a:p>
+                      <a:pPr>
+                        <a:defRPr sz="1100"/>
+                      </a:pPr>
+                      <a:r>
+                        <a:t>4.2%</a:t>
+                      </a:r>
+                    </a:p>
+                  </a:txBody>
+                  <a:tcPr/>
+                </a:tc>
+                <a:tc>
+                  <a:txBody>
+                    <a:bodyPr/>
+                    <a:lstStyle/>
+                    <a:p>
+                      <a:pPr>
+                        <a:defRPr sz="1100"/>
+                      </a:pPr>
+                      <a:r>
+                        <a:t>22.1%</a:t>
+                      </a:r>
+                    </a:p>
+                  </a:txBody>
+                  <a:tcPr/>
+                </a:tc>
+                <a:tc>
+                  <a:txBody>
+                    <a:bodyPr/>
+                    <a:lstStyle/>
+                    <a:p>
+                      <a:pPr>
+                        <a:defRPr sz="1100"/>
+                      </a:pPr>
+                      <a:r>
+                        <a:t>5.8%</a:t>
+                      </a:r>
+                    </a:p>
+                  </a:txBody>
+                  <a:tcPr/>
+                </a:tc>
+                <a:tc>
+                  <a:txBody>
+                    <a:bodyPr/>
+                    <a:lstStyle/>
+                    <a:p>
+                      <a:pPr>
+                        <a:defRPr sz="1100"/>
+                      </a:pPr>
+                      <a:r>
+                        <a:t>3.5%</a:t>
+                      </a:r>
+                    </a:p>
+                  </a:txBody>
+                  <a:tcPr/>
+                </a:tc>
+                <a:extLst>
+                  <a:ext uri="{0D108BD9-81ED-4DB2-BD59-A6C34878D82A}">
+                    <a16:rowId xmlns:a16="http://schemas.microsoft.com/office/drawing/2014/main" val="10004"/>
+                  </a:ext>
+                </a:extLst>
+              </a:tr>
+              <a:tr h="176348">
+                <a:tc>
+                  <a:txBody>
+                    <a:bodyPr/>
+                    <a:lstStyle/>
+                    <a:p>
+                      <a:pPr>
+                        <a:defRPr sz="1100" b="1"/>
+                      </a:pPr>
+                      <a:r>
+                        <a:t>夏普比率</a:t>
+                      </a:r>
+                    </a:p>
+                  </a:txBody>
+                  <a:tcPr/>
+                </a:tc>
+                <a:tc>
+                  <a:txBody>
+                    <a:bodyPr/>
+                    <a:lstStyle/>
+                    <a:p>
+                      <a:pPr>
+                        <a:defRPr sz="1100"/>
+                      </a:pPr>
+                      <a:r>
+                        <a:t>1.25</a:t>
+                      </a:r>
+                    </a:p>
+                  </a:txBody>
+                  <a:tcPr/>
+                </a:tc>
+                <a:tc>
+                  <a:txBody>
+                    <a:bodyPr/>
+                    <a:lstStyle/>
+                    <a:p>
+                      <a:pPr>
+                        <a:defRPr sz="1100"/>
+                      </a:pPr>
+                      <a:r>
+                        <a:t>1.10</a:t>
+                      </a:r>
+                    </a:p>
+                  </a:txBody>
+                  <a:tcPr/>
+                </a:tc>
+                <a:tc>
+                  <a:txBody>
+                    <a:bodyPr/>
+                    <a:lstStyle/>
+                    <a:p>
+                      <a:pPr>
+                        <a:defRPr sz="1100"/>
+                      </a:pPr>
+                      <a:r>
+                        <a:t>1.45</a:t>
+                      </a:r>
+                    </a:p>
+                  </a:txBody>
+                  <a:tcPr/>
+                </a:tc>
+                <a:tc>
+                  <a:txBody>
+                    <a:bodyPr/>
+                    <a:lstStyle/>
+                    <a:p>
+                      <a:pPr>
+                        <a:defRPr sz="1100"/>
+                      </a:pPr>
+                      <a:r>
+                        <a:t>1.05</a:t>
+                      </a:r>
+                    </a:p>
+                  </a:txBody>
+                  <a:tcPr/>
+                </a:tc>
+                <a:tc>
+                  <a:txBody>
+                    <a:bodyPr/>
+                    <a:lstStyle/>
+                    <a:p>
+                      <a:pPr>
+                        <a:defRPr sz="1100"/>
+                      </a:pPr>
+                      <a:r>
+                        <a:t>1.15</a:t>
+                      </a:r>
+                    </a:p>
+                  </a:txBody>
+                  <a:tcPr/>
+                </a:tc>
+                <a:extLst>
+                  <a:ext uri="{0D108BD9-81ED-4DB2-BD59-A6C34878D82A}">
+                    <a16:rowId xmlns:a16="http://schemas.microsoft.com/office/drawing/2014/main" val="10005"/>
+                  </a:ext>
+                </a:extLst>
+              </a:tr>
+              <a:tr h="176352">
+                <a:tc>
+                  <a:txBody>
+                    <a:bodyPr/>
+                    <a:lstStyle/>
+                    <a:p>
+                      <a:pPr>
+                        <a:defRPr sz="1100" b="1"/>
+                      </a:pPr>
+                      <a:r>
+                        <a:t>最大回撤</a:t>
+                      </a:r>
+                    </a:p>
+                  </a:txBody>
+                  <a:tcPr/>
+                </a:tc>
+                <a:tc>
+                  <a:txBody>
+                    <a:bodyPr/>
+                    <a:lstStyle/>
+                    <a:p>
+                      <a:pPr>
+                        <a:defRPr sz="1100"/>
+                      </a:pPr>
+                      <a:r>
+                        <a:t>-3.2%</a:t>
+                      </a:r>
+                    </a:p>
+                  </a:txBody>
+                  <a:tcPr/>
+                </a:tc>
+                <a:tc>
+                  <a:txBody>
+                    <a:bodyPr/>
+                    <a:lstStyle/>
+                    <a:p>
+                      <a:pPr>
+                        <a:defRPr sz="1100"/>
+                      </a:pPr>
+                      <a:r>
+                        <a:t>-1.5%</a:t>
+                      </a:r>
+                    </a:p>
+                  </a:txBody>
+                  <a:tcPr/>
+                </a:tc>
+                <a:tc>
+                  <a:txBody>
+                    <a:bodyPr/>
+                    <a:lstStyle/>
+                    <a:p>
+                      <a:pPr>
+                        <a:defRPr sz="1100"/>
+                      </a:pPr>
+                      <a:r>
+                        <a:t>-8.5%</a:t>
+                      </a:r>
+                    </a:p>
+                  </a:txBody>
+                  <a:tcPr/>
+                </a:tc>
+                <a:tc>
+                  <a:txBody>
+                    <a:bodyPr/>
+                    <a:lstStyle/>
+                    <a:p>
+                      <a:pPr>
+                        <a:defRPr sz="1100"/>
+                      </a:pPr>
+                      <a:r>
+                        <a:t>-4.2%</a:t>
+                      </a:r>
+                    </a:p>
+                  </a:txBody>
+                  <a:tcPr/>
+                </a:tc>
+                <a:tc>
+                  <a:txBody>
+                    <a:bodyPr/>
+                    <a:lstStyle/>
+                    <a:p>
+                      <a:pPr>
+                        <a:defRPr sz="1100"/>
+                      </a:pPr>
+                      <a:r>
+                        <a:rPr dirty="0"/>
+                        <a:t>-2.1%</a:t>
+                      </a:r>
+                    </a:p>
+                  </a:txBody>
+                  <a:tcPr/>
+                </a:tc>
+                <a:extLst>
+                  <a:ext uri="{0D108BD9-81ED-4DB2-BD59-A6C34878D82A}">
+                    <a16:rowId xmlns:a16="http://schemas.microsoft.com/office/drawing/2014/main" val="10006"/>
+                  </a:ext>
+                </a:extLst>
+              </a:tr>
+            </a:tbl>
+          </a:graphicData>
+        </a:graphic>
+      </p:graphicFrame>
     </p:spTree>
   </p:cSld>
   <p:clrMapOvr>
